--- a/pdf/项目6_程仁龙_4090能飞_v1.pptx
+++ b/pdf/项目6_程仁龙_4090能飞_v1.pptx
@@ -19,6 +19,7 @@
     <p:sldId id="267" r:id="rId18"/>
     <p:sldId id="268" r:id="rId19"/>
     <p:sldId id="269" r:id="rId20"/>
+    <p:sldId id="270" r:id="rId21"/>
   </p:sldIdLst>
   <p:sldSz cx="12191695" cy="6858000" type="screen4x3"/>
   <p:notesSz cx="6858000" cy="9144000"/>
@@ -3516,7 +3517,7 @@
                 </a:solidFill>
                 <a:latin typeface="Consolas"/>
               </a:rPr>
-              <a:t>commit 489f77adeeca08ae798df704ffe625f97f2bfca6</a:t>
+              <a:t>commit 06993a2d2642c6f7177b57493b797d5d537e4d64</a:t>
             </a:r>
           </a:p>
         </p:txBody>
@@ -3757,7 +3758,7 @@
                 </a:solidFill>
                 <a:latin typeface="Microsoft YaHei"/>
               </a:rPr>
-              <a:t>③ 交付多模态 bonus：完整 vision 路径 + /v1/chat/completions，自建探针 4/4，文本数值零变化</a:t>
+              <a:t>③ 交付双 bonus：多模态图文链路（探针 4/4、文本数值零变化）+ C4 四路并发（官方校准全门通过，goodput 23.5 tok/s）</a:t>
             </a:r>
           </a:p>
           <a:p>
@@ -3773,7 +3774,7 @@
                 </a:solidFill>
                 <a:latin typeface="Microsoft YaHei"/>
               </a:rPr>
-              <a:t>④ 如实报告边界：无平台批准的 scorer 产物，因此不声称任何评分结论</a:t>
+              <a:t>④ 如实报告边界：无平台批准的 scorer 产物，不声称任何评分结论</a:t>
             </a:r>
           </a:p>
         </p:txBody>
@@ -4358,7 +4359,7 @@
                 </a:solidFill>
                 <a:latin typeface="Microsoft YaHei"/>
               </a:rPr>
-              <a:t>— C4/C8 与 MTP 未交付 </a:t>
+              <a:t>— C8 与 MTP 未交付 </a:t>
             </a:r>
             <a:r>
               <a:rPr sz="1200">
@@ -4367,7 +4368,7 @@
                 </a:solidFill>
                 <a:latin typeface="Microsoft YaHei"/>
               </a:rPr>
-              <a:t>缺 continuous batching 调度器与投机解码链路，未进入交付范围</a:t>
+              <a:t>C4 已交付；C8 差在显存——8 份完整请求态需 4.1 GiB，超出 2.36 GiB 预算，共享 scratch 的路径已量化但未实现</a:t>
             </a:r>
           </a:p>
         </p:txBody>
@@ -5131,7 +5132,7 @@
                 </a:solidFill>
                 <a:latin typeface="Microsoft YaHei"/>
               </a:rPr>
-              <a:t>REPRODUCIBILITY</a:t>
+              <a:t>BONUS</a:t>
             </a:r>
           </a:p>
         </p:txBody>
@@ -5170,7 +5171,7 @@
                 </a:solidFill>
                 <a:latin typeface="Microsoft YaHei"/>
               </a:rPr>
-              <a:t>可复现性与提交材料</a:t>
+              <a:t>多请求 bonus：C4 四路并发交付</a:t>
             </a:r>
           </a:p>
         </p:txBody>
@@ -5221,14 +5222,266 @@
       </p:sp>
       <p:sp>
         <p:nvSpPr>
-          <p:cNvPr id="5" name="Rounded Rectangle 4"/>
+          <p:cNvPr id="5" name="TextBox 4"/>
+          <p:cNvSpPr txBox="1"/>
+          <p:nvPr/>
+        </p:nvSpPr>
+        <p:spPr>
+          <a:xfrm>
+            <a:off x="640080" y="1554480"/>
+            <a:ext cx="10881360" cy="384048"/>
+          </a:xfrm>
+          <a:prstGeom prst="rect">
+            <a:avLst/>
+          </a:prstGeom>
+          <a:noFill/>
+        </p:spPr>
+        <p:txBody>
+          <a:bodyPr wrap="square" anchor="t" lIns="0" rIns="0" tIns="0" bIns="0">
+            <a:spAutoFit/>
+          </a:bodyPr>
+          <a:lstStyle/>
+          <a:p>
+            <a:pPr algn="l">
+              <a:spcAft>
+                <a:spcPts val="400"/>
+              </a:spcAft>
+            </a:pPr>
+            <a:r>
+              <a:rPr sz="1350" b="0">
+                <a:solidFill>
+                  <a:srgbClr val="1A1D24"/>
+                </a:solidFill>
+                <a:latin typeface="Microsoft YaHei"/>
+              </a:rPr>
+              <a:t>批式 protocol runtime 仅在 APXINF_Q35_MAX_CONCURRENCY&gt;1 时启用，默认单请求路径零改动；官方 evaluator 校准 run 全部效度门通过。</a:t>
+            </a:r>
+          </a:p>
+        </p:txBody>
+      </p:sp>
+      <p:sp>
+        <p:nvSpPr>
+          <p:cNvPr id="6" name="TextBox 5"/>
+          <p:cNvSpPr txBox="1"/>
+          <p:nvPr/>
+        </p:nvSpPr>
+        <p:spPr>
+          <a:xfrm>
+            <a:off x="640080" y="2066544"/>
+            <a:ext cx="5303520" cy="274320"/>
+          </a:xfrm>
+          <a:prstGeom prst="rect">
+            <a:avLst/>
+          </a:prstGeom>
+          <a:noFill/>
+        </p:spPr>
+        <p:txBody>
+          <a:bodyPr wrap="square" anchor="t" lIns="0" rIns="0" tIns="0" bIns="0">
+            <a:spAutoFit/>
+          </a:bodyPr>
+          <a:lstStyle/>
+          <a:p>
+            <a:pPr algn="l">
+              <a:spcAft>
+                <a:spcPts val="400"/>
+              </a:spcAft>
+            </a:pPr>
+            <a:r>
+              <a:rPr sz="1300" b="1">
+                <a:solidFill>
+                  <a:srgbClr val="0E8A4F"/>
+                </a:solidFill>
+                <a:latin typeface="Microsoft YaHei"/>
+              </a:rPr>
+              <a:t>实现要点</a:t>
+            </a:r>
+          </a:p>
+        </p:txBody>
+      </p:sp>
+      <p:sp>
+        <p:nvSpPr>
+          <p:cNvPr id="7" name="TextBox 6"/>
+          <p:cNvSpPr txBox="1"/>
+          <p:nvPr/>
+        </p:nvSpPr>
+        <p:spPr>
+          <a:xfrm>
+            <a:off x="640080" y="2414016"/>
+            <a:ext cx="5212080" cy="3877056"/>
+          </a:xfrm>
+          <a:prstGeom prst="rect">
+            <a:avLst/>
+          </a:prstGeom>
+          <a:noFill/>
+        </p:spPr>
+        <p:txBody>
+          <a:bodyPr wrap="square" anchor="t" lIns="0" rIns="0" tIns="0" bIns="0">
+            <a:spAutoFit/>
+          </a:bodyPr>
+          <a:lstStyle/>
+          <a:p>
+            <a:pPr>
+              <a:lnSpc>
+                <a:spcPct val="125000"/>
+              </a:lnSpc>
+              <a:spcAft>
+                <a:spcPts val="900"/>
+              </a:spcAft>
+            </a:pPr>
+            <a:r>
+              <a:rPr sz="1200" b="1">
+                <a:solidFill>
+                  <a:srgbClr val="1A1D24"/>
+                </a:solidFill>
+                <a:latin typeface="Microsoft YaHei"/>
+              </a:rPr>
+              <a:t>— 批式调度 </a:t>
+            </a:r>
+            <a:r>
+              <a:rPr sz="1200">
+                <a:solidFill>
+                  <a:srgbClr val="5A6373"/>
+                </a:solidFill>
+                <a:latin typeface="Microsoft YaHei"/>
+              </a:rPr>
+              <a:t>admission 4 permits + 单 batch worker，每轮一步批式 decode；两阶段交付修复 17 µs 窗口内 permit 未释放导致的 503 竞态</a:t>
+            </a:r>
+          </a:p>
+          <a:p>
+            <a:pPr>
+              <a:lnSpc>
+                <a:spcPct val="125000"/>
+              </a:lnSpc>
+              <a:spcAft>
+                <a:spcPts val="900"/>
+              </a:spcAft>
+            </a:pPr>
+            <a:r>
+              <a:rPr sz="1200" b="1">
+                <a:solidFill>
+                  <a:srgbClr val="1A1D24"/>
+                </a:solidFill>
+                <a:latin typeface="Microsoft YaHei"/>
+              </a:rPr>
+              <a:t>— 批式 kernel 位相等 </a:t>
+            </a:r>
+            <a:r>
+              <a:rPr sz="1200">
+                <a:solidFill>
+                  <a:srgbClr val="5A6373"/>
+                </a:solidFill>
+                <a:latin typeface="Microsoft YaHei"/>
+              </a:rPr>
+              <a:t>GDN conv/recurrent、partial RoPE 的批式版与串行路径逐字节一致（真实权重多步回归断言）</a:t>
+            </a:r>
+          </a:p>
+          <a:p>
+            <a:pPr>
+              <a:lnSpc>
+                <a:spcPct val="125000"/>
+              </a:lnSpc>
+              <a:spcAft>
+                <a:spcPts val="900"/>
+              </a:spcAft>
+            </a:pPr>
+            <a:r>
+              <a:rPr sz="1200" b="1">
+                <a:solidFill>
+                  <a:srgbClr val="1A1D24"/>
+                </a:solidFill>
+                <a:latin typeface="Microsoft YaHei"/>
+              </a:rPr>
+              <a:t>— prefix cache + 会话回收池 </a:t>
+            </a:r>
+            <a:r>
+              <a:rPr sz="1200">
+                <a:solidFill>
+                  <a:srgbClr val="5A6373"/>
+                </a:solidFill>
+                <a:latin typeface="Microsoft YaHei"/>
+              </a:rPr>
+              <a:t>相同 prompt 从模板 fork 约 2 ms；cudaMallocAsync 流序分配把冷 fork 从 330 ms 降到个位数 ms</a:t>
+            </a:r>
+          </a:p>
+          <a:p>
+            <a:pPr>
+              <a:lnSpc>
+                <a:spcPct val="125000"/>
+              </a:lnSpc>
+              <a:spcAft>
+                <a:spcPts val="900"/>
+              </a:spcAft>
+            </a:pPr>
+            <a:r>
+              <a:rPr sz="1200" b="1">
+                <a:solidFill>
+                  <a:srgbClr val="1A1D24"/>
+                </a:solidFill>
+                <a:latin typeface="Microsoft YaHei"/>
+              </a:rPr>
+              <a:t>— 单请求零回归 </a:t>
+            </a:r>
+            <a:r>
+              <a:rPr sz="1200">
+                <a:solidFill>
+                  <a:srgbClr val="5A6373"/>
+                </a:solidFill>
+                <a:latin typeface="Microsoft YaHei"/>
+              </a:rPr>
+              <a:t>TPOT 62-68 ms 在冻结基线带内，冻结输出字节不变；batch=1 自动走原串行路径</a:t>
+            </a:r>
+          </a:p>
+        </p:txBody>
+      </p:sp>
+      <p:sp>
+        <p:nvSpPr>
+          <p:cNvPr id="8" name="TextBox 7"/>
+          <p:cNvSpPr txBox="1"/>
+          <p:nvPr/>
+        </p:nvSpPr>
+        <p:spPr>
+          <a:xfrm>
+            <a:off x="6309360" y="2066544"/>
+            <a:ext cx="5303520" cy="274320"/>
+          </a:xfrm>
+          <a:prstGeom prst="rect">
+            <a:avLst/>
+          </a:prstGeom>
+          <a:noFill/>
+        </p:spPr>
+        <p:txBody>
+          <a:bodyPr wrap="square" anchor="t" lIns="0" rIns="0" tIns="0" bIns="0">
+            <a:spAutoFit/>
+          </a:bodyPr>
+          <a:lstStyle/>
+          <a:p>
+            <a:pPr algn="l">
+              <a:spcAft>
+                <a:spcPts val="400"/>
+              </a:spcAft>
+            </a:pPr>
+            <a:r>
+              <a:rPr sz="1300" b="1">
+                <a:solidFill>
+                  <a:srgbClr val="0066CC"/>
+                </a:solidFill>
+                <a:latin typeface="Microsoft YaHei"/>
+              </a:rPr>
+              <a:t>官方校准结果（multi-c4-text-perf-1024）</a:t>
+            </a:r>
+          </a:p>
+        </p:txBody>
+      </p:sp>
+      <p:sp>
+        <p:nvSpPr>
+          <p:cNvPr id="9" name="Rounded Rectangle 8"/>
           <p:cNvSpPr/>
           <p:nvPr/>
         </p:nvSpPr>
         <p:spPr>
           <a:xfrm>
-            <a:off x="640080" y="1554480"/>
-            <a:ext cx="10881360" cy="1664208"/>
+            <a:off x="6309360" y="2432304"/>
+            <a:ext cx="5212080" cy="310896"/>
           </a:xfrm>
           <a:prstGeom prst="roundRect">
             <a:avLst>
@@ -5236,7 +5489,7 @@
             </a:avLst>
           </a:prstGeom>
           <a:solidFill>
-            <a:srgbClr val="1A1D24"/>
+            <a:srgbClr val="ECF1F8"/>
           </a:solidFill>
           <a:ln>
             <a:noFill/>
@@ -5265,14 +5518,1009 @@
       </p:sp>
       <p:sp>
         <p:nvSpPr>
-          <p:cNvPr id="6" name="TextBox 5"/>
-          <p:cNvSpPr txBox="1"/>
-          <p:nvPr/>
-        </p:nvSpPr>
-        <p:spPr>
-          <a:xfrm>
-            <a:off x="914400" y="1682496"/>
-            <a:ext cx="10332720" cy="1417320"/>
+          <p:cNvPr id="10" name="TextBox 9"/>
+          <p:cNvSpPr txBox="1"/>
+          <p:nvPr/>
+        </p:nvSpPr>
+        <p:spPr>
+          <a:xfrm>
+            <a:off x="6391656" y="2432304"/>
+            <a:ext cx="1938528" cy="310896"/>
+          </a:xfrm>
+          <a:prstGeom prst="rect">
+            <a:avLst/>
+          </a:prstGeom>
+          <a:noFill/>
+        </p:spPr>
+        <p:txBody>
+          <a:bodyPr wrap="square" anchor="ctr" lIns="0" rIns="0" tIns="0" bIns="0">
+            <a:spAutoFit/>
+          </a:bodyPr>
+          <a:lstStyle/>
+          <a:p>
+            <a:pPr algn="l">
+              <a:spcAft>
+                <a:spcPts val="400"/>
+              </a:spcAft>
+            </a:pPr>
+            <a:r>
+              <a:rPr sz="1200" b="1">
+                <a:solidFill>
+                  <a:srgbClr val="1A1D24"/>
+                </a:solidFill>
+                <a:latin typeface="Microsoft YaHei"/>
+              </a:rPr>
+              <a:t>指标</a:t>
+            </a:r>
+          </a:p>
+        </p:txBody>
+      </p:sp>
+      <p:sp>
+        <p:nvSpPr>
+          <p:cNvPr id="11" name="TextBox 10"/>
+          <p:cNvSpPr txBox="1"/>
+          <p:nvPr/>
+        </p:nvSpPr>
+        <p:spPr>
+          <a:xfrm>
+            <a:off x="8494776" y="2432304"/>
+            <a:ext cx="1389888" cy="310896"/>
+          </a:xfrm>
+          <a:prstGeom prst="rect">
+            <a:avLst/>
+          </a:prstGeom>
+          <a:noFill/>
+        </p:spPr>
+        <p:txBody>
+          <a:bodyPr wrap="square" anchor="ctr" lIns="0" rIns="0" tIns="0" bIns="0">
+            <a:spAutoFit/>
+          </a:bodyPr>
+          <a:lstStyle/>
+          <a:p>
+            <a:pPr algn="r">
+              <a:spcAft>
+                <a:spcPts val="400"/>
+              </a:spcAft>
+            </a:pPr>
+            <a:r>
+              <a:rPr sz="1200" b="1">
+                <a:solidFill>
+                  <a:srgbClr val="1A1D24"/>
+                </a:solidFill>
+                <a:latin typeface="Microsoft YaHei"/>
+              </a:rPr>
+              <a:t>实测</a:t>
+            </a:r>
+          </a:p>
+        </p:txBody>
+      </p:sp>
+      <p:sp>
+        <p:nvSpPr>
+          <p:cNvPr id="12" name="TextBox 11"/>
+          <p:cNvSpPr txBox="1"/>
+          <p:nvPr/>
+        </p:nvSpPr>
+        <p:spPr>
+          <a:xfrm>
+            <a:off x="10049256" y="2432304"/>
+            <a:ext cx="1389888" cy="310896"/>
+          </a:xfrm>
+          <a:prstGeom prst="rect">
+            <a:avLst/>
+          </a:prstGeom>
+          <a:noFill/>
+        </p:spPr>
+        <p:txBody>
+          <a:bodyPr wrap="square" anchor="ctr" lIns="0" rIns="0" tIns="0" bIns="0">
+            <a:spAutoFit/>
+          </a:bodyPr>
+          <a:lstStyle/>
+          <a:p>
+            <a:pPr algn="r">
+              <a:spcAft>
+                <a:spcPts val="400"/>
+              </a:spcAft>
+            </a:pPr>
+            <a:r>
+              <a:rPr sz="1200" b="1">
+                <a:solidFill>
+                  <a:srgbClr val="1A1D24"/>
+                </a:solidFill>
+                <a:latin typeface="Microsoft YaHei"/>
+              </a:rPr>
+              <a:t>门槛</a:t>
+            </a:r>
+          </a:p>
+        </p:txBody>
+      </p:sp>
+      <p:sp>
+        <p:nvSpPr>
+          <p:cNvPr id="13" name="TextBox 12"/>
+          <p:cNvSpPr txBox="1"/>
+          <p:nvPr/>
+        </p:nvSpPr>
+        <p:spPr>
+          <a:xfrm>
+            <a:off x="6391656" y="2743200"/>
+            <a:ext cx="1938528" cy="310896"/>
+          </a:xfrm>
+          <a:prstGeom prst="rect">
+            <a:avLst/>
+          </a:prstGeom>
+          <a:noFill/>
+        </p:spPr>
+        <p:txBody>
+          <a:bodyPr wrap="square" anchor="ctr" lIns="0" rIns="0" tIns="0" bIns="0">
+            <a:spAutoFit/>
+          </a:bodyPr>
+          <a:lstStyle/>
+          <a:p>
+            <a:pPr algn="l">
+              <a:spcAft>
+                <a:spcPts val="400"/>
+              </a:spcAft>
+            </a:pPr>
+            <a:r>
+              <a:rPr sz="1200" b="0">
+                <a:solidFill>
+                  <a:srgbClr val="1A1D24"/>
+                </a:solidFill>
+                <a:latin typeface="Microsoft YaHei"/>
+              </a:rPr>
+              <a:t>success / correctness</a:t>
+            </a:r>
+          </a:p>
+        </p:txBody>
+      </p:sp>
+      <p:sp>
+        <p:nvSpPr>
+          <p:cNvPr id="14" name="TextBox 13"/>
+          <p:cNvSpPr txBox="1"/>
+          <p:nvPr/>
+        </p:nvSpPr>
+        <p:spPr>
+          <a:xfrm>
+            <a:off x="8494776" y="2743200"/>
+            <a:ext cx="1389888" cy="310896"/>
+          </a:xfrm>
+          <a:prstGeom prst="rect">
+            <a:avLst/>
+          </a:prstGeom>
+          <a:noFill/>
+        </p:spPr>
+        <p:txBody>
+          <a:bodyPr wrap="square" anchor="ctr" lIns="0" rIns="0" tIns="0" bIns="0">
+            <a:spAutoFit/>
+          </a:bodyPr>
+          <a:lstStyle/>
+          <a:p>
+            <a:pPr algn="r">
+              <a:spcAft>
+                <a:spcPts val="400"/>
+              </a:spcAft>
+            </a:pPr>
+            <a:r>
+              <a:rPr sz="1200" b="0">
+                <a:solidFill>
+                  <a:srgbClr val="1A1D24"/>
+                </a:solidFill>
+                <a:latin typeface="Consolas"/>
+              </a:rPr>
+              <a:t>1.0 / 1.0</a:t>
+            </a:r>
+          </a:p>
+        </p:txBody>
+      </p:sp>
+      <p:sp>
+        <p:nvSpPr>
+          <p:cNvPr id="15" name="TextBox 14"/>
+          <p:cNvSpPr txBox="1"/>
+          <p:nvPr/>
+        </p:nvSpPr>
+        <p:spPr>
+          <a:xfrm>
+            <a:off x="10049256" y="2743200"/>
+            <a:ext cx="1389888" cy="310896"/>
+          </a:xfrm>
+          <a:prstGeom prst="rect">
+            <a:avLst/>
+          </a:prstGeom>
+          <a:noFill/>
+        </p:spPr>
+        <p:txBody>
+          <a:bodyPr wrap="square" anchor="ctr" lIns="0" rIns="0" tIns="0" bIns="0">
+            <a:spAutoFit/>
+          </a:bodyPr>
+          <a:lstStyle/>
+          <a:p>
+            <a:pPr algn="r">
+              <a:spcAft>
+                <a:spcPts val="400"/>
+              </a:spcAft>
+            </a:pPr>
+            <a:r>
+              <a:rPr sz="1200" b="0">
+                <a:solidFill>
+                  <a:srgbClr val="1A1D24"/>
+                </a:solidFill>
+                <a:latin typeface="Consolas"/>
+              </a:rPr>
+              <a:t>= 1.0</a:t>
+            </a:r>
+          </a:p>
+        </p:txBody>
+      </p:sp>
+      <p:sp>
+        <p:nvSpPr>
+          <p:cNvPr id="16" name="Rounded Rectangle 15"/>
+          <p:cNvSpPr/>
+          <p:nvPr/>
+        </p:nvSpPr>
+        <p:spPr>
+          <a:xfrm>
+            <a:off x="6309360" y="3054096"/>
+            <a:ext cx="5212080" cy="310896"/>
+          </a:xfrm>
+          <a:prstGeom prst="roundRect">
+            <a:avLst>
+              <a:gd name="adj" fmla="val 4000"/>
+            </a:avLst>
+          </a:prstGeom>
+          <a:solidFill>
+            <a:srgbClr val="FAFBFD"/>
+          </a:solidFill>
+          <a:ln>
+            <a:noFill/>
+          </a:ln>
+          <a:effectLst/>
+        </p:spPr>
+        <p:style>
+          <a:lnRef idx="1">
+            <a:schemeClr val="accent1"/>
+          </a:lnRef>
+          <a:fillRef idx="3">
+            <a:schemeClr val="accent1"/>
+          </a:fillRef>
+          <a:effectRef idx="2">
+            <a:schemeClr val="accent1"/>
+          </a:effectRef>
+          <a:fontRef idx="minor">
+            <a:schemeClr val="lt1"/>
+          </a:fontRef>
+        </p:style>
+        <p:txBody>
+          <a:bodyPr rtlCol="0" anchor="ctr"/>
+          <a:lstStyle/>
+          <a:p/>
+        </p:txBody>
+      </p:sp>
+      <p:sp>
+        <p:nvSpPr>
+          <p:cNvPr id="17" name="TextBox 16"/>
+          <p:cNvSpPr txBox="1"/>
+          <p:nvPr/>
+        </p:nvSpPr>
+        <p:spPr>
+          <a:xfrm>
+            <a:off x="6391656" y="3054096"/>
+            <a:ext cx="1938528" cy="310896"/>
+          </a:xfrm>
+          <a:prstGeom prst="rect">
+            <a:avLst/>
+          </a:prstGeom>
+          <a:noFill/>
+        </p:spPr>
+        <p:txBody>
+          <a:bodyPr wrap="square" anchor="ctr" lIns="0" rIns="0" tIns="0" bIns="0">
+            <a:spAutoFit/>
+          </a:bodyPr>
+          <a:lstStyle/>
+          <a:p>
+            <a:pPr algn="l">
+              <a:spcAft>
+                <a:spcPts val="400"/>
+              </a:spcAft>
+            </a:pPr>
+            <a:r>
+              <a:rPr sz="1200" b="0">
+                <a:solidFill>
+                  <a:srgbClr val="1A1D24"/>
+                </a:solidFill>
+                <a:latin typeface="Microsoft YaHei"/>
+              </a:rPr>
+              <a:t>Jain 公平性</a:t>
+            </a:r>
+          </a:p>
+        </p:txBody>
+      </p:sp>
+      <p:sp>
+        <p:nvSpPr>
+          <p:cNvPr id="18" name="TextBox 17"/>
+          <p:cNvSpPr txBox="1"/>
+          <p:nvPr/>
+        </p:nvSpPr>
+        <p:spPr>
+          <a:xfrm>
+            <a:off x="8494776" y="3054096"/>
+            <a:ext cx="1389888" cy="310896"/>
+          </a:xfrm>
+          <a:prstGeom prst="rect">
+            <a:avLst/>
+          </a:prstGeom>
+          <a:noFill/>
+        </p:spPr>
+        <p:txBody>
+          <a:bodyPr wrap="square" anchor="ctr" lIns="0" rIns="0" tIns="0" bIns="0">
+            <a:spAutoFit/>
+          </a:bodyPr>
+          <a:lstStyle/>
+          <a:p>
+            <a:pPr algn="r">
+              <a:spcAft>
+                <a:spcPts val="400"/>
+              </a:spcAft>
+            </a:pPr>
+            <a:r>
+              <a:rPr sz="1200" b="0">
+                <a:solidFill>
+                  <a:srgbClr val="1A1D24"/>
+                </a:solidFill>
+                <a:latin typeface="Consolas"/>
+              </a:rPr>
+              <a:t>0.9993</a:t>
+            </a:r>
+          </a:p>
+        </p:txBody>
+      </p:sp>
+      <p:sp>
+        <p:nvSpPr>
+          <p:cNvPr id="19" name="TextBox 18"/>
+          <p:cNvSpPr txBox="1"/>
+          <p:nvPr/>
+        </p:nvSpPr>
+        <p:spPr>
+          <a:xfrm>
+            <a:off x="10049256" y="3054096"/>
+            <a:ext cx="1389888" cy="310896"/>
+          </a:xfrm>
+          <a:prstGeom prst="rect">
+            <a:avLst/>
+          </a:prstGeom>
+          <a:noFill/>
+        </p:spPr>
+        <p:txBody>
+          <a:bodyPr wrap="square" anchor="ctr" lIns="0" rIns="0" tIns="0" bIns="0">
+            <a:spAutoFit/>
+          </a:bodyPr>
+          <a:lstStyle/>
+          <a:p>
+            <a:pPr algn="r">
+              <a:spcAft>
+                <a:spcPts val="400"/>
+              </a:spcAft>
+            </a:pPr>
+            <a:r>
+              <a:rPr sz="1200" b="0">
+                <a:solidFill>
+                  <a:srgbClr val="1A1D24"/>
+                </a:solidFill>
+                <a:latin typeface="Consolas"/>
+              </a:rPr>
+              <a:t>&gt;= 0.95</a:t>
+            </a:r>
+          </a:p>
+        </p:txBody>
+      </p:sp>
+      <p:sp>
+        <p:nvSpPr>
+          <p:cNvPr id="20" name="TextBox 19"/>
+          <p:cNvSpPr txBox="1"/>
+          <p:nvPr/>
+        </p:nvSpPr>
+        <p:spPr>
+          <a:xfrm>
+            <a:off x="6391656" y="3364992"/>
+            <a:ext cx="1938528" cy="310896"/>
+          </a:xfrm>
+          <a:prstGeom prst="rect">
+            <a:avLst/>
+          </a:prstGeom>
+          <a:noFill/>
+        </p:spPr>
+        <p:txBody>
+          <a:bodyPr wrap="square" anchor="ctr" lIns="0" rIns="0" tIns="0" bIns="0">
+            <a:spAutoFit/>
+          </a:bodyPr>
+          <a:lstStyle/>
+          <a:p>
+            <a:pPr algn="l">
+              <a:spcAft>
+                <a:spcPts val="400"/>
+              </a:spcAft>
+            </a:pPr>
+            <a:r>
+              <a:rPr sz="1200" b="0">
+                <a:solidFill>
+                  <a:srgbClr val="1A1D24"/>
+                </a:solidFill>
+                <a:latin typeface="Microsoft YaHei"/>
+              </a:rPr>
+              <a:t>p95 TTFT</a:t>
+            </a:r>
+          </a:p>
+        </p:txBody>
+      </p:sp>
+      <p:sp>
+        <p:nvSpPr>
+          <p:cNvPr id="21" name="TextBox 20"/>
+          <p:cNvSpPr txBox="1"/>
+          <p:nvPr/>
+        </p:nvSpPr>
+        <p:spPr>
+          <a:xfrm>
+            <a:off x="8494776" y="3364992"/>
+            <a:ext cx="1389888" cy="310896"/>
+          </a:xfrm>
+          <a:prstGeom prst="rect">
+            <a:avLst/>
+          </a:prstGeom>
+          <a:noFill/>
+        </p:spPr>
+        <p:txBody>
+          <a:bodyPr wrap="square" anchor="ctr" lIns="0" rIns="0" tIns="0" bIns="0">
+            <a:spAutoFit/>
+          </a:bodyPr>
+          <a:lstStyle/>
+          <a:p>
+            <a:pPr algn="r">
+              <a:spcAft>
+                <a:spcPts val="400"/>
+              </a:spcAft>
+            </a:pPr>
+            <a:r>
+              <a:rPr sz="1200" b="0">
+                <a:solidFill>
+                  <a:srgbClr val="1A1D24"/>
+                </a:solidFill>
+                <a:latin typeface="Consolas"/>
+              </a:rPr>
+              <a:t>1.789 s</a:t>
+            </a:r>
+          </a:p>
+        </p:txBody>
+      </p:sp>
+      <p:sp>
+        <p:nvSpPr>
+          <p:cNvPr id="22" name="TextBox 21"/>
+          <p:cNvSpPr txBox="1"/>
+          <p:nvPr/>
+        </p:nvSpPr>
+        <p:spPr>
+          <a:xfrm>
+            <a:off x="10049256" y="3364992"/>
+            <a:ext cx="1389888" cy="310896"/>
+          </a:xfrm>
+          <a:prstGeom prst="rect">
+            <a:avLst/>
+          </a:prstGeom>
+          <a:noFill/>
+        </p:spPr>
+        <p:txBody>
+          <a:bodyPr wrap="square" anchor="ctr" lIns="0" rIns="0" tIns="0" bIns="0">
+            <a:spAutoFit/>
+          </a:bodyPr>
+          <a:lstStyle/>
+          <a:p>
+            <a:pPr algn="r">
+              <a:spcAft>
+                <a:spcPts val="400"/>
+              </a:spcAft>
+            </a:pPr>
+            <a:r>
+              <a:rPr sz="1200" b="0">
+                <a:solidFill>
+                  <a:srgbClr val="1A1D24"/>
+                </a:solidFill>
+                <a:latin typeface="Consolas"/>
+              </a:rPr>
+              <a:t>&lt;= 2.496 s</a:t>
+            </a:r>
+          </a:p>
+        </p:txBody>
+      </p:sp>
+      <p:sp>
+        <p:nvSpPr>
+          <p:cNvPr id="23" name="Rounded Rectangle 22"/>
+          <p:cNvSpPr/>
+          <p:nvPr/>
+        </p:nvSpPr>
+        <p:spPr>
+          <a:xfrm>
+            <a:off x="6309360" y="3675888"/>
+            <a:ext cx="5212080" cy="310896"/>
+          </a:xfrm>
+          <a:prstGeom prst="roundRect">
+            <a:avLst>
+              <a:gd name="adj" fmla="val 4000"/>
+            </a:avLst>
+          </a:prstGeom>
+          <a:solidFill>
+            <a:srgbClr val="FAFBFD"/>
+          </a:solidFill>
+          <a:ln>
+            <a:noFill/>
+          </a:ln>
+          <a:effectLst/>
+        </p:spPr>
+        <p:style>
+          <a:lnRef idx="1">
+            <a:schemeClr val="accent1"/>
+          </a:lnRef>
+          <a:fillRef idx="3">
+            <a:schemeClr val="accent1"/>
+          </a:fillRef>
+          <a:effectRef idx="2">
+            <a:schemeClr val="accent1"/>
+          </a:effectRef>
+          <a:fontRef idx="minor">
+            <a:schemeClr val="lt1"/>
+          </a:fontRef>
+        </p:style>
+        <p:txBody>
+          <a:bodyPr rtlCol="0" anchor="ctr"/>
+          <a:lstStyle/>
+          <a:p/>
+        </p:txBody>
+      </p:sp>
+      <p:sp>
+        <p:nvSpPr>
+          <p:cNvPr id="24" name="TextBox 23"/>
+          <p:cNvSpPr txBox="1"/>
+          <p:nvPr/>
+        </p:nvSpPr>
+        <p:spPr>
+          <a:xfrm>
+            <a:off x="6391656" y="3675888"/>
+            <a:ext cx="1938528" cy="310896"/>
+          </a:xfrm>
+          <a:prstGeom prst="rect">
+            <a:avLst/>
+          </a:prstGeom>
+          <a:noFill/>
+        </p:spPr>
+        <p:txBody>
+          <a:bodyPr wrap="square" anchor="ctr" lIns="0" rIns="0" tIns="0" bIns="0">
+            <a:spAutoFit/>
+          </a:bodyPr>
+          <a:lstStyle/>
+          <a:p>
+            <a:pPr algn="l">
+              <a:spcAft>
+                <a:spcPts val="400"/>
+              </a:spcAft>
+            </a:pPr>
+            <a:r>
+              <a:rPr sz="1200" b="0">
+                <a:solidFill>
+                  <a:srgbClr val="1A1D24"/>
+                </a:solidFill>
+                <a:latin typeface="Microsoft YaHei"/>
+              </a:rPr>
+              <a:t>p95 TPOT</a:t>
+            </a:r>
+          </a:p>
+        </p:txBody>
+      </p:sp>
+      <p:sp>
+        <p:nvSpPr>
+          <p:cNvPr id="25" name="TextBox 24"/>
+          <p:cNvSpPr txBox="1"/>
+          <p:nvPr/>
+        </p:nvSpPr>
+        <p:spPr>
+          <a:xfrm>
+            <a:off x="8494776" y="3675888"/>
+            <a:ext cx="1389888" cy="310896"/>
+          </a:xfrm>
+          <a:prstGeom prst="rect">
+            <a:avLst/>
+          </a:prstGeom>
+          <a:noFill/>
+        </p:spPr>
+        <p:txBody>
+          <a:bodyPr wrap="square" anchor="ctr" lIns="0" rIns="0" tIns="0" bIns="0">
+            <a:spAutoFit/>
+          </a:bodyPr>
+          <a:lstStyle/>
+          <a:p>
+            <a:pPr algn="r">
+              <a:spcAft>
+                <a:spcPts val="400"/>
+              </a:spcAft>
+            </a:pPr>
+            <a:r>
+              <a:rPr sz="1200" b="0">
+                <a:solidFill>
+                  <a:srgbClr val="1A1D24"/>
+                </a:solidFill>
+                <a:latin typeface="Consolas"/>
+              </a:rPr>
+              <a:t>173.9 ms</a:t>
+            </a:r>
+          </a:p>
+        </p:txBody>
+      </p:sp>
+      <p:sp>
+        <p:nvSpPr>
+          <p:cNvPr id="26" name="TextBox 25"/>
+          <p:cNvSpPr txBox="1"/>
+          <p:nvPr/>
+        </p:nvSpPr>
+        <p:spPr>
+          <a:xfrm>
+            <a:off x="10049256" y="3675888"/>
+            <a:ext cx="1389888" cy="310896"/>
+          </a:xfrm>
+          <a:prstGeom prst="rect">
+            <a:avLst/>
+          </a:prstGeom>
+          <a:noFill/>
+        </p:spPr>
+        <p:txBody>
+          <a:bodyPr wrap="square" anchor="ctr" lIns="0" rIns="0" tIns="0" bIns="0">
+            <a:spAutoFit/>
+          </a:bodyPr>
+          <a:lstStyle/>
+          <a:p>
+            <a:pPr algn="r">
+              <a:spcAft>
+                <a:spcPts val="400"/>
+              </a:spcAft>
+            </a:pPr>
+            <a:r>
+              <a:rPr sz="1200" b="0">
+                <a:solidFill>
+                  <a:srgbClr val="1A1D24"/>
+                </a:solidFill>
+                <a:latin typeface="Consolas"/>
+              </a:rPr>
+              <a:t>&lt;= 186.9 ms</a:t>
+            </a:r>
+          </a:p>
+        </p:txBody>
+      </p:sp>
+      <p:sp>
+        <p:nvSpPr>
+          <p:cNvPr id="27" name="TextBox 26"/>
+          <p:cNvSpPr txBox="1"/>
+          <p:nvPr/>
+        </p:nvSpPr>
+        <p:spPr>
+          <a:xfrm>
+            <a:off x="6391656" y="3986784"/>
+            <a:ext cx="1938528" cy="310896"/>
+          </a:xfrm>
+          <a:prstGeom prst="rect">
+            <a:avLst/>
+          </a:prstGeom>
+          <a:noFill/>
+        </p:spPr>
+        <p:txBody>
+          <a:bodyPr wrap="square" anchor="ctr" lIns="0" rIns="0" tIns="0" bIns="0">
+            <a:spAutoFit/>
+          </a:bodyPr>
+          <a:lstStyle/>
+          <a:p>
+            <a:pPr algn="l">
+              <a:spcAft>
+                <a:spcPts val="400"/>
+              </a:spcAft>
+            </a:pPr>
+            <a:r>
+              <a:rPr sz="1200" b="0">
+                <a:solidFill>
+                  <a:srgbClr val="1A1D24"/>
+                </a:solidFill>
+                <a:latin typeface="Microsoft YaHei"/>
+              </a:rPr>
+              <a:t>goodput</a:t>
+            </a:r>
+          </a:p>
+        </p:txBody>
+      </p:sp>
+      <p:sp>
+        <p:nvSpPr>
+          <p:cNvPr id="28" name="TextBox 27"/>
+          <p:cNvSpPr txBox="1"/>
+          <p:nvPr/>
+        </p:nvSpPr>
+        <p:spPr>
+          <a:xfrm>
+            <a:off x="8494776" y="3986784"/>
+            <a:ext cx="1389888" cy="310896"/>
+          </a:xfrm>
+          <a:prstGeom prst="rect">
+            <a:avLst/>
+          </a:prstGeom>
+          <a:noFill/>
+        </p:spPr>
+        <p:txBody>
+          <a:bodyPr wrap="square" anchor="ctr" lIns="0" rIns="0" tIns="0" bIns="0">
+            <a:spAutoFit/>
+          </a:bodyPr>
+          <a:lstStyle/>
+          <a:p>
+            <a:pPr algn="r">
+              <a:spcAft>
+                <a:spcPts val="400"/>
+              </a:spcAft>
+            </a:pPr>
+            <a:r>
+              <a:rPr sz="1200" b="0">
+                <a:solidFill>
+                  <a:srgbClr val="1A1D24"/>
+                </a:solidFill>
+                <a:latin typeface="Consolas"/>
+              </a:rPr>
+              <a:t>23.53 tok/s</a:t>
+            </a:r>
+          </a:p>
+        </p:txBody>
+      </p:sp>
+      <p:sp>
+        <p:nvSpPr>
+          <p:cNvPr id="29" name="TextBox 28"/>
+          <p:cNvSpPr txBox="1"/>
+          <p:nvPr/>
+        </p:nvSpPr>
+        <p:spPr>
+          <a:xfrm>
+            <a:off x="10049256" y="3986784"/>
+            <a:ext cx="1389888" cy="310896"/>
+          </a:xfrm>
+          <a:prstGeom prst="rect">
+            <a:avLst/>
+          </a:prstGeom>
+          <a:noFill/>
+        </p:spPr>
+        <p:txBody>
+          <a:bodyPr wrap="square" anchor="ctr" lIns="0" rIns="0" tIns="0" bIns="0">
+            <a:spAutoFit/>
+          </a:bodyPr>
+          <a:lstStyle/>
+          <a:p>
+            <a:pPr algn="r">
+              <a:spcAft>
+                <a:spcPts val="400"/>
+              </a:spcAft>
+            </a:pPr>
+            <a:r>
+              <a:rPr sz="1200" b="0">
+                <a:solidFill>
+                  <a:srgbClr val="1A1D24"/>
+                </a:solidFill>
+                <a:latin typeface="Consolas"/>
+              </a:rPr>
+              <a:t>计分指标</a:t>
+            </a:r>
+          </a:p>
+        </p:txBody>
+      </p:sp>
+      <p:sp>
+        <p:nvSpPr>
+          <p:cNvPr id="30" name="Rounded Rectangle 29"/>
+          <p:cNvSpPr/>
+          <p:nvPr/>
+        </p:nvSpPr>
+        <p:spPr>
+          <a:xfrm>
+            <a:off x="6309360" y="4297680"/>
+            <a:ext cx="5212080" cy="310896"/>
+          </a:xfrm>
+          <a:prstGeom prst="roundRect">
+            <a:avLst>
+              <a:gd name="adj" fmla="val 4000"/>
+            </a:avLst>
+          </a:prstGeom>
+          <a:solidFill>
+            <a:srgbClr val="FAFBFD"/>
+          </a:solidFill>
+          <a:ln>
+            <a:noFill/>
+          </a:ln>
+          <a:effectLst/>
+        </p:spPr>
+        <p:style>
+          <a:lnRef idx="1">
+            <a:schemeClr val="accent1"/>
+          </a:lnRef>
+          <a:fillRef idx="3">
+            <a:schemeClr val="accent1"/>
+          </a:fillRef>
+          <a:effectRef idx="2">
+            <a:schemeClr val="accent1"/>
+          </a:effectRef>
+          <a:fontRef idx="minor">
+            <a:schemeClr val="lt1"/>
+          </a:fontRef>
+        </p:style>
+        <p:txBody>
+          <a:bodyPr rtlCol="0" anchor="ctr"/>
+          <a:lstStyle/>
+          <a:p/>
+        </p:txBody>
+      </p:sp>
+      <p:sp>
+        <p:nvSpPr>
+          <p:cNvPr id="31" name="TextBox 30"/>
+          <p:cNvSpPr txBox="1"/>
+          <p:nvPr/>
+        </p:nvSpPr>
+        <p:spPr>
+          <a:xfrm>
+            <a:off x="6391656" y="4297680"/>
+            <a:ext cx="1938528" cy="310896"/>
+          </a:xfrm>
+          <a:prstGeom prst="rect">
+            <a:avLst/>
+          </a:prstGeom>
+          <a:noFill/>
+        </p:spPr>
+        <p:txBody>
+          <a:bodyPr wrap="square" anchor="ctr" lIns="0" rIns="0" tIns="0" bIns="0">
+            <a:spAutoFit/>
+          </a:bodyPr>
+          <a:lstStyle/>
+          <a:p>
+            <a:pPr algn="l">
+              <a:spcAft>
+                <a:spcPts val="400"/>
+              </a:spcAft>
+            </a:pPr>
+            <a:r>
+              <a:rPr sz="1200" b="0">
+                <a:solidFill>
+                  <a:srgbClr val="1A1D24"/>
+                </a:solidFill>
+                <a:latin typeface="Microsoft YaHei"/>
+              </a:rPr>
+              <a:t>no_fallback / 健康</a:t>
+            </a:r>
+          </a:p>
+        </p:txBody>
+      </p:sp>
+      <p:sp>
+        <p:nvSpPr>
+          <p:cNvPr id="32" name="TextBox 31"/>
+          <p:cNvSpPr txBox="1"/>
+          <p:nvPr/>
+        </p:nvSpPr>
+        <p:spPr>
+          <a:xfrm>
+            <a:off x="8494776" y="4297680"/>
+            <a:ext cx="1389888" cy="310896"/>
+          </a:xfrm>
+          <a:prstGeom prst="rect">
+            <a:avLst/>
+          </a:prstGeom>
+          <a:noFill/>
+        </p:spPr>
+        <p:txBody>
+          <a:bodyPr wrap="square" anchor="ctr" lIns="0" rIns="0" tIns="0" bIns="0">
+            <a:spAutoFit/>
+          </a:bodyPr>
+          <a:lstStyle/>
+          <a:p>
+            <a:pPr algn="r">
+              <a:spcAft>
+                <a:spcPts val="400"/>
+              </a:spcAft>
+            </a:pPr>
+            <a:r>
+              <a:rPr sz="1200" b="0">
+                <a:solidFill>
+                  <a:srgbClr val="1A1D24"/>
+                </a:solidFill>
+                <a:latin typeface="Consolas"/>
+              </a:rPr>
+              <a:t>true</a:t>
+            </a:r>
+          </a:p>
+        </p:txBody>
+      </p:sp>
+      <p:sp>
+        <p:nvSpPr>
+          <p:cNvPr id="33" name="TextBox 32"/>
+          <p:cNvSpPr txBox="1"/>
+          <p:nvPr/>
+        </p:nvSpPr>
+        <p:spPr>
+          <a:xfrm>
+            <a:off x="10049256" y="4297680"/>
+            <a:ext cx="1389888" cy="310896"/>
+          </a:xfrm>
+          <a:prstGeom prst="rect">
+            <a:avLst/>
+          </a:prstGeom>
+          <a:noFill/>
+        </p:spPr>
+        <p:txBody>
+          <a:bodyPr wrap="square" anchor="ctr" lIns="0" rIns="0" tIns="0" bIns="0">
+            <a:spAutoFit/>
+          </a:bodyPr>
+          <a:lstStyle/>
+          <a:p>
+            <a:pPr algn="r">
+              <a:spcAft>
+                <a:spcPts val="400"/>
+              </a:spcAft>
+            </a:pPr>
+            <a:r>
+              <a:rPr sz="1200" b="0">
+                <a:solidFill>
+                  <a:srgbClr val="1A1D24"/>
+                </a:solidFill>
+                <a:latin typeface="Consolas"/>
+              </a:rPr>
+              <a:t>必须为真</a:t>
+            </a:r>
+          </a:p>
+        </p:txBody>
+      </p:sp>
+      <p:sp>
+        <p:nvSpPr>
+          <p:cNvPr id="34" name="Rounded Rectangle 33"/>
+          <p:cNvSpPr/>
+          <p:nvPr/>
+        </p:nvSpPr>
+        <p:spPr>
+          <a:xfrm>
+            <a:off x="640080" y="5138928"/>
+            <a:ext cx="10881360" cy="1005840"/>
+          </a:xfrm>
+          <a:prstGeom prst="roundRect">
+            <a:avLst>
+              <a:gd name="adj" fmla="val 4000"/>
+            </a:avLst>
+          </a:prstGeom>
+          <a:solidFill>
+            <a:srgbClr val="F5F7FA"/>
+          </a:solidFill>
+          <a:ln>
+            <a:noFill/>
+          </a:ln>
+          <a:effectLst/>
+        </p:spPr>
+        <p:style>
+          <a:lnRef idx="1">
+            <a:schemeClr val="accent1"/>
+          </a:lnRef>
+          <a:fillRef idx="3">
+            <a:schemeClr val="accent1"/>
+          </a:fillRef>
+          <a:effectRef idx="2">
+            <a:schemeClr val="accent1"/>
+          </a:effectRef>
+          <a:fontRef idx="minor">
+            <a:schemeClr val="lt1"/>
+          </a:fontRef>
+        </p:style>
+        <p:txBody>
+          <a:bodyPr rtlCol="0" anchor="ctr"/>
+          <a:lstStyle/>
+          <a:p/>
+        </p:txBody>
+      </p:sp>
+      <p:sp>
+        <p:nvSpPr>
+          <p:cNvPr id="35" name="TextBox 34"/>
+          <p:cNvSpPr txBox="1"/>
+          <p:nvPr/>
+        </p:nvSpPr>
+        <p:spPr>
+          <a:xfrm>
+            <a:off x="868680" y="5266944"/>
+            <a:ext cx="10424160" cy="777240"/>
           </a:xfrm>
           <a:prstGeom prst="rect">
             <a:avLst/>
@@ -5287,496 +6535,43 @@
           <a:p>
             <a:pPr algn="l">
               <a:spcAft>
-                <a:spcPts val="200"/>
+                <a:spcPts val="400"/>
+              </a:spcAft>
+            </a:pPr>
+            <a:r>
+              <a:rPr sz="1250" b="1">
+                <a:solidFill>
+                  <a:srgbClr val="C0392B"/>
+                </a:solidFill>
+                <a:latin typeface="Microsoft YaHei"/>
+              </a:rPr>
+              <a:t>C8 边界如实说明</a:t>
+            </a:r>
+          </a:p>
+          <a:p>
+            <a:pPr algn="l">
+              <a:lnSpc>
+                <a:spcPct val="130000"/>
+              </a:lnSpc>
+              <a:spcAft>
+                <a:spcPts val="0"/>
               </a:spcAft>
             </a:pPr>
             <a:r>
               <a:rPr sz="1150" b="0">
                 <a:solidFill>
-                  <a:srgbClr val="7EC8FF"/>
-                </a:solidFill>
-                <a:latin typeface="Consolas"/>
-              </a:rPr>
-              <a:t># 提交 commit（验收以此为准）</a:t>
-            </a:r>
-          </a:p>
-          <a:p>
-            <a:pPr algn="l">
-              <a:spcAft>
-                <a:spcPts val="200"/>
-              </a:spcAft>
-            </a:pPr>
-            <a:r>
-              <a:rPr sz="1150" b="0">
-                <a:solidFill>
-                  <a:srgbClr val="E6EAF0"/>
-                </a:solidFill>
-                <a:latin typeface="Consolas"/>
-              </a:rPr>
-              <a:t>489f77adeeca08ae798df704ffe625f97f2bfca6    branch: integrate/member2</a:t>
-            </a:r>
-          </a:p>
-          <a:p>
-            <a:pPr algn="l">
-              <a:spcAft>
-                <a:spcPts val="200"/>
-              </a:spcAft>
-            </a:pPr>
-            <a:r>
-              <a:rPr sz="1150" b="0">
-                <a:solidFill>
-                  <a:srgbClr val="E6EAF0"/>
-                </a:solidFill>
-                <a:latin typeface="Consolas"/>
-              </a:rPr>
-              <a:t/>
-            </a:r>
-          </a:p>
-          <a:p>
-            <a:pPr algn="l">
-              <a:spcAft>
-                <a:spcPts val="200"/>
-              </a:spcAft>
-            </a:pPr>
-            <a:r>
-              <a:rPr sz="1150" b="0">
-                <a:solidFill>
-                  <a:srgbClr val="E6EAF0"/>
-                </a:solidFill>
-                <a:latin typeface="Consolas"/>
-              </a:rPr>
-              <a:t>python3 benchmarks/qwen38_4090/evaluation/test.py check      # → assignment checks passed</a:t>
-            </a:r>
-          </a:p>
-          <a:p>
-            <a:pPr algn="l">
-              <a:spcAft>
-                <a:spcPts val="200"/>
-              </a:spcAft>
-            </a:pPr>
-            <a:r>
-              <a:rPr sz="1150" b="0">
-                <a:solidFill>
-                  <a:srgbClr val="E6EAF0"/>
-                </a:solidFill>
-                <a:latin typeface="Consolas"/>
-              </a:rPr>
-              <a:t>cargo build --release --features cuda-no-nvtx --locked --bin apxinf</a:t>
-            </a:r>
-          </a:p>
-          <a:p>
-            <a:pPr algn="l">
-              <a:spcAft>
-                <a:spcPts val="200"/>
-              </a:spcAft>
-            </a:pPr>
-            <a:r>
-              <a:rPr sz="1150" b="0">
-                <a:solidFill>
-                  <a:srgbClr val="E6EAF0"/>
-                </a:solidFill>
-                <a:latin typeface="Consolas"/>
-              </a:rPr>
-              <a:t>target/release/apxinf serve --model &lt;ckpt&gt; --revision 63768c10... --gpu-uuid GPU-343bc895...</a:t>
-            </a:r>
-          </a:p>
-          <a:p>
-            <a:pPr algn="l">
-              <a:spcAft>
-                <a:spcPts val="200"/>
-              </a:spcAft>
-            </a:pPr>
-            <a:r>
-              <a:rPr sz="1150" b="0">
-                <a:solidFill>
-                  <a:srgbClr val="E6EAF0"/>
-                </a:solidFill>
-                <a:latin typeface="Consolas"/>
-              </a:rPr>
-              <a:t>APXINF_ENABLE_MULTIMODAL=1 target/release/apxinf serve ...   # 多模态配置（可选，单开关）</a:t>
-            </a:r>
-          </a:p>
-        </p:txBody>
-      </p:sp>
-      <p:sp>
-        <p:nvSpPr>
-          <p:cNvPr id="7" name="TextBox 6"/>
-          <p:cNvSpPr txBox="1"/>
-          <p:nvPr/>
-        </p:nvSpPr>
-        <p:spPr>
-          <a:xfrm>
-            <a:off x="640080" y="3383280"/>
-            <a:ext cx="5303520" cy="274320"/>
-          </a:xfrm>
-          <a:prstGeom prst="rect">
-            <a:avLst/>
-          </a:prstGeom>
-          <a:noFill/>
-        </p:spPr>
-        <p:txBody>
-          <a:bodyPr wrap="square" anchor="t" lIns="0" rIns="0" tIns="0" bIns="0">
-            <a:spAutoFit/>
-          </a:bodyPr>
-          <a:lstStyle/>
-          <a:p>
-            <a:pPr algn="l">
-              <a:spcAft>
-                <a:spcPts val="400"/>
-              </a:spcAft>
-            </a:pPr>
-            <a:r>
-              <a:rPr sz="1300" b="1">
-                <a:solidFill>
-                  <a:srgbClr val="0066CC"/>
-                </a:solidFill>
-                <a:latin typeface="Microsoft YaHei"/>
-              </a:rPr>
-              <a:t>提交材料对应关系</a:t>
-            </a:r>
-          </a:p>
-        </p:txBody>
-      </p:sp>
-      <p:sp>
-        <p:nvSpPr>
-          <p:cNvPr id="8" name="TextBox 7"/>
-          <p:cNvSpPr txBox="1"/>
-          <p:nvPr/>
-        </p:nvSpPr>
-        <p:spPr>
-          <a:xfrm>
-            <a:off x="640080" y="3730752"/>
-            <a:ext cx="5212080" cy="2560320"/>
-          </a:xfrm>
-          <a:prstGeom prst="rect">
-            <a:avLst/>
-          </a:prstGeom>
-          <a:noFill/>
-        </p:spPr>
-        <p:txBody>
-          <a:bodyPr wrap="square" anchor="t" lIns="0" rIns="0" tIns="0" bIns="0">
-            <a:spAutoFit/>
-          </a:bodyPr>
-          <a:lstStyle/>
-          <a:p>
-            <a:pPr>
-              <a:lnSpc>
-                <a:spcPct val="125000"/>
-              </a:lnSpc>
-              <a:spcAft>
-                <a:spcPts val="900"/>
-              </a:spcAft>
-            </a:pPr>
-            <a:r>
-              <a:rPr sz="1200" b="1">
-                <a:solidFill>
-                  <a:srgbClr val="1A1D24"/>
-                </a:solidFill>
-                <a:latin typeface="Microsoft YaHei"/>
-              </a:rPr>
-              <a:t>— 设计变化与执行阶段 </a:t>
-            </a:r>
-            <a:r>
-              <a:rPr sz="1200">
-                <a:solidFill>
                   <a:srgbClr val="5A6373"/>
                 </a:solidFill>
                 <a:latin typeface="Microsoft YaHei"/>
               </a:rPr>
-              <a:t>REPORT.md 按第一层/第二层分节，逐项记录</a:t>
-            </a:r>
-          </a:p>
-          <a:p>
-            <a:pPr>
-              <a:lnSpc>
-                <a:spcPct val="125000"/>
-              </a:lnSpc>
-              <a:spcAft>
-                <a:spcPts val="900"/>
-              </a:spcAft>
-            </a:pPr>
-            <a:r>
-              <a:rPr sz="1200" b="1">
-                <a:solidFill>
-                  <a:srgbClr val="1A1D24"/>
-                </a:solidFill>
-                <a:latin typeface="Microsoft YaHei"/>
-              </a:rPr>
-              <a:t>— test.py check / run </a:t>
-            </a:r>
-            <a:r>
-              <a:rPr sz="1200">
-                <a:solidFill>
-                  <a:srgbClr val="5A6373"/>
-                </a:solidFill>
-                <a:latin typeface="Microsoft YaHei"/>
-              </a:rPr>
-              <a:t>check 已通过并留存日志；run 因缺批准 reference 无法产出评分件，已如实说明</a:t>
-            </a:r>
-          </a:p>
-          <a:p>
-            <a:pPr>
-              <a:lnSpc>
-                <a:spcPct val="125000"/>
-              </a:lnSpc>
-              <a:spcAft>
-                <a:spcPts val="900"/>
-              </a:spcAft>
-            </a:pPr>
-            <a:r>
-              <a:rPr sz="1200" b="1">
-                <a:solidFill>
-                  <a:srgbClr val="1A1D24"/>
-                </a:solidFill>
-                <a:latin typeface="Microsoft YaHei"/>
-              </a:rPr>
-              <a:t>— 负控制与回归测试 </a:t>
-            </a:r>
-            <a:r>
-              <a:rPr sz="1200">
-                <a:solidFill>
-                  <a:srgbClr val="5A6373"/>
-                </a:solidFill>
-                <a:latin typeface="Microsoft YaHei"/>
-              </a:rPr>
-              <a:t>7 个协议负控、3 个断连故障注入、9 组数值回归</a:t>
-            </a:r>
-          </a:p>
-          <a:p>
-            <a:pPr>
-              <a:lnSpc>
-                <a:spcPct val="125000"/>
-              </a:lnSpc>
-              <a:spcAft>
-                <a:spcPts val="900"/>
-              </a:spcAft>
-            </a:pPr>
-            <a:r>
-              <a:rPr sz="1200" b="1">
-                <a:solidFill>
-                  <a:srgbClr val="1A1D24"/>
-                </a:solidFill>
-                <a:latin typeface="Microsoft YaHei"/>
-              </a:rPr>
-              <a:t>— 取舍与限制 </a:t>
-            </a:r>
-            <a:r>
-              <a:rPr sz="1200">
-                <a:solidFill>
-                  <a:srgbClr val="5A6373"/>
-                </a:solidFill>
-                <a:latin typeface="Microsoft YaHei"/>
-              </a:rPr>
-              <a:t>REPORT.md 专设 Trade-offs 与 Limits 两节</a:t>
-            </a:r>
-          </a:p>
-        </p:txBody>
-      </p:sp>
-      <p:sp>
-        <p:nvSpPr>
-          <p:cNvPr id="9" name="TextBox 8"/>
-          <p:cNvSpPr txBox="1"/>
-          <p:nvPr/>
-        </p:nvSpPr>
-        <p:spPr>
-          <a:xfrm>
-            <a:off x="6309360" y="3383280"/>
-            <a:ext cx="5303520" cy="274320"/>
-          </a:xfrm>
-          <a:prstGeom prst="rect">
-            <a:avLst/>
-          </a:prstGeom>
-          <a:noFill/>
-        </p:spPr>
-        <p:txBody>
-          <a:bodyPr wrap="square" anchor="t" lIns="0" rIns="0" tIns="0" bIns="0">
-            <a:spAutoFit/>
-          </a:bodyPr>
-          <a:lstStyle/>
-          <a:p>
-            <a:pPr algn="l">
-              <a:spcAft>
-                <a:spcPts val="400"/>
-              </a:spcAft>
-            </a:pPr>
-            <a:r>
-              <a:rPr sz="1300" b="1">
-                <a:solidFill>
-                  <a:srgbClr val="0066CC"/>
-                </a:solidFill>
-                <a:latin typeface="Microsoft YaHei"/>
-              </a:rPr>
-              <a:t>回滚能力</a:t>
-            </a:r>
-          </a:p>
-        </p:txBody>
-      </p:sp>
-      <p:sp>
-        <p:nvSpPr>
-          <p:cNvPr id="10" name="TextBox 9"/>
-          <p:cNvSpPr txBox="1"/>
-          <p:nvPr/>
-        </p:nvSpPr>
-        <p:spPr>
-          <a:xfrm>
-            <a:off x="6309360" y="3730752"/>
-            <a:ext cx="5212080" cy="2560320"/>
-          </a:xfrm>
-          <a:prstGeom prst="rect">
-            <a:avLst/>
-          </a:prstGeom>
-          <a:noFill/>
-        </p:spPr>
-        <p:txBody>
-          <a:bodyPr wrap="square" anchor="t" lIns="0" rIns="0" tIns="0" bIns="0">
-            <a:spAutoFit/>
-          </a:bodyPr>
-          <a:lstStyle/>
-          <a:p>
-            <a:pPr>
-              <a:lnSpc>
-                <a:spcPct val="125000"/>
-              </a:lnSpc>
-              <a:spcAft>
-                <a:spcPts val="900"/>
-              </a:spcAft>
-            </a:pPr>
-            <a:r>
-              <a:rPr sz="1200" b="1">
-                <a:solidFill>
-                  <a:srgbClr val="1A1D24"/>
-                </a:solidFill>
-                <a:latin typeface="Microsoft YaHei"/>
-              </a:rPr>
-              <a:t>— 每项优化独立可关 </a:t>
-            </a:r>
-            <a:r>
-              <a:rPr sz="1200">
-                <a:solidFill>
-                  <a:srgbClr val="5A6373"/>
-                </a:solidFill>
-                <a:latin typeface="Microsoft YaHei"/>
-              </a:rPr>
-              <a:t>APXINF_Q35_W4_PREFILL_GEMM / W4_PACKED_GEMV / BATCHED_SDPA / SCRATCH_POOL / PREFILL_CHUNK / ROWWISE_SOFTMAX</a:t>
-            </a:r>
-          </a:p>
-          <a:p>
-            <a:pPr>
-              <a:lnSpc>
-                <a:spcPct val="125000"/>
-              </a:lnSpc>
-              <a:spcAft>
-                <a:spcPts val="900"/>
-              </a:spcAft>
-            </a:pPr>
-            <a:r>
-              <a:rPr sz="1200" b="1">
-                <a:solidFill>
-                  <a:srgbClr val="1A1D24"/>
-                </a:solidFill>
-                <a:latin typeface="Microsoft YaHei"/>
-              </a:rPr>
-              <a:t>— 多模态单开关 </a:t>
-            </a:r>
-            <a:r>
-              <a:rPr sz="1200">
-                <a:solidFill>
-                  <a:srgbClr val="5A6373"/>
-                </a:solidFill>
-                <a:latin typeface="Microsoft YaHei"/>
-              </a:rPr>
-              <a:t>APXINF_ENABLE_MULTIMODAL 不设时 vision 塔不加载，行为即纯文本提交件</a:t>
-            </a:r>
-          </a:p>
-          <a:p>
-            <a:pPr>
-              <a:lnSpc>
-                <a:spcPct val="125000"/>
-              </a:lnSpc>
-              <a:spcAft>
-                <a:spcPts val="900"/>
-              </a:spcAft>
-            </a:pPr>
-            <a:r>
-              <a:rPr sz="1200" b="1">
-                <a:solidFill>
-                  <a:srgbClr val="1A1D24"/>
-                </a:solidFill>
-                <a:latin typeface="Microsoft YaHei"/>
-              </a:rPr>
-              <a:t>— 被拒候选保留在树中 </a:t>
-            </a:r>
-            <a:r>
-              <a:rPr sz="1200">
-                <a:solidFill>
-                  <a:srgbClr val="5A6373"/>
-                </a:solidFill>
-                <a:latin typeface="Microsoft YaHei"/>
-              </a:rPr>
-              <a:t>默认关闭并附回归测试，作为负结果证据</a:t>
-            </a:r>
-          </a:p>
-          <a:p>
-            <a:pPr>
-              <a:lnSpc>
-                <a:spcPct val="125000"/>
-              </a:lnSpc>
-              <a:spcAft>
-                <a:spcPts val="900"/>
-              </a:spcAft>
-            </a:pPr>
-            <a:r>
-              <a:rPr sz="1200" b="1">
-                <a:solidFill>
-                  <a:srgbClr val="1A1D24"/>
-                </a:solidFill>
-                <a:latin typeface="Microsoft YaHei"/>
-              </a:rPr>
-              <a:t>— 回滚点 </a:t>
-            </a:r>
-            <a:r>
-              <a:rPr sz="1200">
-                <a:solidFill>
-                  <a:srgbClr val="5A6373"/>
-                </a:solidFill>
-                <a:latin typeface="Microsoft YaHei"/>
-              </a:rPr>
-              <a:t>47ec280d2f88e8daf87750c0957e596e3a5390c1（集成前 HEAD）</a:t>
-            </a:r>
-          </a:p>
-          <a:p>
-            <a:pPr>
-              <a:lnSpc>
-                <a:spcPct val="125000"/>
-              </a:lnSpc>
-              <a:spcAft>
-                <a:spcPts val="900"/>
-              </a:spcAft>
-            </a:pPr>
-            <a:r>
-              <a:rPr sz="1200" b="1">
-                <a:solidFill>
-                  <a:srgbClr val="1A1D24"/>
-                </a:solidFill>
-                <a:latin typeface="Microsoft YaHei"/>
-              </a:rPr>
-              <a:t>— 清洁性 </a:t>
-            </a:r>
-            <a:r>
-              <a:rPr sz="1200">
-                <a:solidFill>
-                  <a:srgbClr val="5A6373"/>
-                </a:solidFill>
-                <a:latin typeface="Microsoft YaHei"/>
-              </a:rPr>
-              <a:t>cargo fmt --check、cargo check --workspace --locked、git diff --check 全绿</a:t>
-            </a:r>
-          </a:p>
-        </p:txBody>
-      </p:sp>
-      <p:sp>
-        <p:nvSpPr>
-          <p:cNvPr id="11" name="TextBox 10"/>
+              <a:t>C8 卡在显存而非调度：8 份完整请求态（每份 KV 72 MiB + GDN 443 MiB）需 4.1 GiB，超出 2.36 GiB 的 admission 预算。共享 GDN scratch 后每份可降至约 295 MiB、算术上可入场，但该改造未实现，因此不声称 C8。调度器、admission 与批式 kernel 均已按并发数参数化。</a:t>
+            </a:r>
+          </a:p>
+        </p:txBody>
+      </p:sp>
+      <p:sp>
+        <p:nvSpPr>
+          <p:cNvPr id="36" name="TextBox 35"/>
           <p:cNvSpPr txBox="1"/>
           <p:nvPr/>
         </p:nvSpPr>
@@ -5808,7 +6603,7 @@
                 </a:solidFill>
                 <a:latin typeface="Microsoft YaHei"/>
               </a:rPr>
-              <a:t>未提交模型权重、凭据、机器地址或未公开评测数据；submission.json 的图片字段未手工填写</a:t>
+              <a:t>回滚 = 不设 APXINF_Q35_MAX_CONCURRENCY（或 =1）即恢复精确的冻结单请求 runtime；并发同批 32 请求全部 200，无 503</a:t>
             </a:r>
           </a:p>
         </p:txBody>
@@ -5865,7 +6660,7 @@
                 </a:solidFill>
                 <a:latin typeface="Microsoft YaHei"/>
               </a:rPr>
-              <a:t>TEAM</a:t>
+              <a:t>REPRODUCIBILITY</a:t>
             </a:r>
           </a:p>
         </p:txBody>
@@ -5904,7 +6699,7 @@
                 </a:solidFill>
                 <a:latin typeface="Microsoft YaHei"/>
               </a:rPr>
-              <a:t>分工说明</a:t>
+              <a:t>可复现性与提交材料</a:t>
             </a:r>
           </a:p>
         </p:txBody>
@@ -5955,53 +6750,14 @@
       </p:sp>
       <p:sp>
         <p:nvSpPr>
-          <p:cNvPr id="5" name="TextBox 4"/>
-          <p:cNvSpPr txBox="1"/>
+          <p:cNvPr id="5" name="Rounded Rectangle 4"/>
+          <p:cNvSpPr/>
           <p:nvPr/>
         </p:nvSpPr>
         <p:spPr>
           <a:xfrm>
             <a:off x="640080" y="1554480"/>
-            <a:ext cx="10881360" cy="384048"/>
-          </a:xfrm>
-          <a:prstGeom prst="rect">
-            <a:avLst/>
-          </a:prstGeom>
-          <a:noFill/>
-        </p:spPr>
-        <p:txBody>
-          <a:bodyPr wrap="square" anchor="t" lIns="0" rIns="0" tIns="0" bIns="0">
-            <a:spAutoFit/>
-          </a:bodyPr>
-          <a:lstStyle/>
-          <a:p>
-            <a:pPr algn="l">
-              <a:spcAft>
-                <a:spcPts val="400"/>
-              </a:spcAft>
-            </a:pPr>
-            <a:r>
-              <a:rPr sz="1350" b="0">
-                <a:solidFill>
-                  <a:srgbClr val="1A1D24"/>
-                </a:solidFill>
-                <a:latin typeface="Microsoft YaHei"/>
-              </a:rPr>
-              <a:t>两人团队。主线实现由本人完成，另一位成员交付离线 benchmark 脚手架。</a:t>
-            </a:r>
-          </a:p>
-        </p:txBody>
-      </p:sp>
-      <p:sp>
-        <p:nvSpPr>
-          <p:cNvPr id="6" name="Rounded Rectangle 5"/>
-          <p:cNvSpPr/>
-          <p:nvPr/>
-        </p:nvSpPr>
-        <p:spPr>
-          <a:xfrm>
-            <a:off x="640080" y="2121408"/>
-            <a:ext cx="3108960" cy="1371600"/>
+            <a:ext cx="10881360" cy="1847088"/>
           </a:xfrm>
           <a:prstGeom prst="roundRect">
             <a:avLst>
@@ -6009,12 +6765,10 @@
             </a:avLst>
           </a:prstGeom>
           <a:solidFill>
-            <a:srgbClr val="FFFFFF"/>
+            <a:srgbClr val="1A1D24"/>
           </a:solidFill>
-          <a:ln w="12700">
-            <a:solidFill>
-              <a:srgbClr val="DDE1E8"/>
-            </a:solidFill>
+          <a:ln>
+            <a:noFill/>
           </a:ln>
           <a:effectLst/>
         </p:spPr>
@@ -6040,14 +6794,165 @@
       </p:sp>
       <p:sp>
         <p:nvSpPr>
+          <p:cNvPr id="6" name="TextBox 5"/>
+          <p:cNvSpPr txBox="1"/>
+          <p:nvPr/>
+        </p:nvSpPr>
+        <p:spPr>
+          <a:xfrm>
+            <a:off x="914400" y="1682496"/>
+            <a:ext cx="10332720" cy="1627632"/>
+          </a:xfrm>
+          <a:prstGeom prst="rect">
+            <a:avLst/>
+          </a:prstGeom>
+          <a:noFill/>
+        </p:spPr>
+        <p:txBody>
+          <a:bodyPr wrap="square" anchor="t" lIns="0" rIns="0" tIns="0" bIns="0">
+            <a:spAutoFit/>
+          </a:bodyPr>
+          <a:lstStyle/>
+          <a:p>
+            <a:pPr algn="l">
+              <a:spcAft>
+                <a:spcPts val="200"/>
+              </a:spcAft>
+            </a:pPr>
+            <a:r>
+              <a:rPr sz="1150" b="0">
+                <a:solidFill>
+                  <a:srgbClr val="7EC8FF"/>
+                </a:solidFill>
+                <a:latin typeface="Consolas"/>
+              </a:rPr>
+              <a:t># 提交 commit（验收以此为准）</a:t>
+            </a:r>
+          </a:p>
+          <a:p>
+            <a:pPr algn="l">
+              <a:spcAft>
+                <a:spcPts val="200"/>
+              </a:spcAft>
+            </a:pPr>
+            <a:r>
+              <a:rPr sz="1150" b="0">
+                <a:solidFill>
+                  <a:srgbClr val="E6EAF0"/>
+                </a:solidFill>
+                <a:latin typeface="Consolas"/>
+              </a:rPr>
+              <a:t>06993a2d2642c6f7177b57493b797d5d537e4d64    branch: integrate/member2</a:t>
+            </a:r>
+          </a:p>
+          <a:p>
+            <a:pPr algn="l">
+              <a:spcAft>
+                <a:spcPts val="200"/>
+              </a:spcAft>
+            </a:pPr>
+            <a:r>
+              <a:rPr sz="1150" b="0">
+                <a:solidFill>
+                  <a:srgbClr val="E6EAF0"/>
+                </a:solidFill>
+                <a:latin typeface="Consolas"/>
+              </a:rPr>
+              <a:t/>
+            </a:r>
+          </a:p>
+          <a:p>
+            <a:pPr algn="l">
+              <a:spcAft>
+                <a:spcPts val="200"/>
+              </a:spcAft>
+            </a:pPr>
+            <a:r>
+              <a:rPr sz="1150" b="0">
+                <a:solidFill>
+                  <a:srgbClr val="E6EAF0"/>
+                </a:solidFill>
+                <a:latin typeface="Consolas"/>
+              </a:rPr>
+              <a:t>python3 benchmarks/qwen38_4090/evaluation/test.py check      # → assignment checks passed</a:t>
+            </a:r>
+          </a:p>
+          <a:p>
+            <a:pPr algn="l">
+              <a:spcAft>
+                <a:spcPts val="200"/>
+              </a:spcAft>
+            </a:pPr>
+            <a:r>
+              <a:rPr sz="1150" b="0">
+                <a:solidFill>
+                  <a:srgbClr val="E6EAF0"/>
+                </a:solidFill>
+                <a:latin typeface="Consolas"/>
+              </a:rPr>
+              <a:t>cargo build --release --features cuda-no-nvtx --locked --bin apxinf</a:t>
+            </a:r>
+          </a:p>
+          <a:p>
+            <a:pPr algn="l">
+              <a:spcAft>
+                <a:spcPts val="200"/>
+              </a:spcAft>
+            </a:pPr>
+            <a:r>
+              <a:rPr sz="1150" b="0">
+                <a:solidFill>
+                  <a:srgbClr val="E6EAF0"/>
+                </a:solidFill>
+                <a:latin typeface="Consolas"/>
+              </a:rPr>
+              <a:t>target/release/apxinf serve --model &lt;ckpt&gt; --revision 63768c10... --gpu-uuid GPU-343bc895...</a:t>
+            </a:r>
+          </a:p>
+          <a:p>
+            <a:pPr algn="l">
+              <a:spcAft>
+                <a:spcPts val="200"/>
+              </a:spcAft>
+            </a:pPr>
+            <a:r>
+              <a:rPr sz="1150" b="0">
+                <a:solidFill>
+                  <a:srgbClr val="E6EAF0"/>
+                </a:solidFill>
+                <a:latin typeface="Consolas"/>
+              </a:rPr>
+              <a:t>APXINF_ENABLE_MULTIMODAL=1 target/release/apxinf serve ...   # 多模态配置（可选，单开关）</a:t>
+            </a:r>
+          </a:p>
+          <a:p>
+            <a:pPr algn="l">
+              <a:spcAft>
+                <a:spcPts val="200"/>
+              </a:spcAft>
+            </a:pPr>
+            <a:r>
+              <a:rPr sz="1150" b="0">
+                <a:solidFill>
+                  <a:srgbClr val="E6EAF0"/>
+                </a:solidFill>
+                <a:latin typeface="Consolas"/>
+              </a:rPr>
+              <a:t>APXINF_Q35_MAX_CONCURRENCY=4 ... serve ... --queue-capacity 4  # C4 并发配置（可选，单开关）</a:t>
+            </a:r>
+          </a:p>
+        </p:txBody>
+      </p:sp>
+      <p:sp>
+        <p:nvSpPr>
           <p:cNvPr id="7" name="TextBox 6"/>
           <p:cNvSpPr txBox="1"/>
           <p:nvPr/>
         </p:nvSpPr>
         <p:spPr>
           <a:xfrm>
-            <a:off x="786384" y="2249424"/>
-            <a:ext cx="2816352" cy="566928"/>
+            <a:off x="640080" y="3566160"/>
+            <a:ext cx="5303520" cy="274320"/>
           </a:xfrm>
           <a:prstGeom prst="rect">
             <a:avLst/>
@@ -6060,19 +6965,19 @@
           </a:bodyPr>
           <a:lstStyle/>
           <a:p>
-            <a:pPr algn="ctr">
-              <a:spcAft>
-                <a:spcPts val="400"/>
-              </a:spcAft>
-            </a:pPr>
-            <a:r>
-              <a:rPr sz="3400" b="1">
+            <a:pPr algn="l">
+              <a:spcAft>
+                <a:spcPts val="400"/>
+              </a:spcAft>
+            </a:pPr>
+            <a:r>
+              <a:rPr sz="1300" b="1">
                 <a:solidFill>
                   <a:srgbClr val="0066CC"/>
                 </a:solidFill>
                 <a:latin typeface="Microsoft YaHei"/>
               </a:rPr>
-              <a:t>95%</a:t>
+              <a:t>提交材料对应关系</a:t>
             </a:r>
           </a:p>
         </p:txBody>
@@ -6085,8 +6990,8 @@
         </p:nvSpPr>
         <p:spPr>
           <a:xfrm>
-            <a:off x="786384" y="2834640"/>
-            <a:ext cx="2816352" cy="256032"/>
+            <a:off x="640080" y="3913632"/>
+            <a:ext cx="5212080" cy="2377440"/>
           </a:xfrm>
           <a:prstGeom prst="rect">
             <a:avLst/>
@@ -6099,373 +7004,129 @@
           </a:bodyPr>
           <a:lstStyle/>
           <a:p>
-            <a:pPr algn="ctr">
-              <a:spcAft>
-                <a:spcPts val="400"/>
-              </a:spcAft>
-            </a:pPr>
-            <a:r>
-              <a:rPr sz="1200" b="1">
-                <a:solidFill>
-                  <a:srgbClr val="1A1D24"/>
-                </a:solidFill>
-                <a:latin typeface="Microsoft YaHei"/>
-              </a:rPr>
-              <a:t>程仁龙（本人）</a:t>
-            </a:r>
-          </a:p>
-        </p:txBody>
-      </p:sp>
-      <p:sp>
-        <p:nvSpPr>
-          <p:cNvPr id="9" name="TextBox 8"/>
-          <p:cNvSpPr txBox="1"/>
-          <p:nvPr/>
-        </p:nvSpPr>
-        <p:spPr>
-          <a:xfrm>
-            <a:off x="786384" y="3090672"/>
-            <a:ext cx="2816352" cy="310896"/>
-          </a:xfrm>
-          <a:prstGeom prst="rect">
-            <a:avLst/>
-          </a:prstGeom>
-          <a:noFill/>
-        </p:spPr>
-        <p:txBody>
-          <a:bodyPr wrap="square" anchor="t" lIns="0" rIns="0" tIns="0" bIns="0">
-            <a:spAutoFit/>
-          </a:bodyPr>
-          <a:lstStyle/>
-          <a:p>
-            <a:pPr algn="ctr">
-              <a:spcAft>
-                <a:spcPts val="400"/>
-              </a:spcAft>
-            </a:pPr>
-            <a:r>
-              <a:rPr sz="1000" b="0">
-                <a:solidFill>
-                  <a:srgbClr val="5A6373"/>
-                </a:solidFill>
-                <a:latin typeface="Microsoft YaHei"/>
-              </a:rPr>
-              <a:t>模型 / kernel / 服务 / 性能 / 多模态</a:t>
-            </a:r>
-          </a:p>
-        </p:txBody>
-      </p:sp>
-      <p:sp>
-        <p:nvSpPr>
-          <p:cNvPr id="10" name="Rounded Rectangle 9"/>
-          <p:cNvSpPr/>
-          <p:nvPr/>
-        </p:nvSpPr>
-        <p:spPr>
-          <a:xfrm>
-            <a:off x="3977639" y="2121408"/>
-            <a:ext cx="3108960" cy="1371600"/>
-          </a:xfrm>
-          <a:prstGeom prst="roundRect">
-            <a:avLst>
-              <a:gd name="adj" fmla="val 4000"/>
-            </a:avLst>
-          </a:prstGeom>
-          <a:solidFill>
-            <a:srgbClr val="FFFFFF"/>
-          </a:solidFill>
-          <a:ln w="12700">
-            <a:solidFill>
-              <a:srgbClr val="DDE1E8"/>
-            </a:solidFill>
-          </a:ln>
-          <a:effectLst/>
-        </p:spPr>
-        <p:style>
-          <a:lnRef idx="1">
-            <a:schemeClr val="accent1"/>
-          </a:lnRef>
-          <a:fillRef idx="3">
-            <a:schemeClr val="accent1"/>
-          </a:fillRef>
-          <a:effectRef idx="2">
-            <a:schemeClr val="accent1"/>
-          </a:effectRef>
-          <a:fontRef idx="minor">
-            <a:schemeClr val="lt1"/>
-          </a:fontRef>
-        </p:style>
-        <p:txBody>
-          <a:bodyPr rtlCol="0" anchor="ctr"/>
-          <a:lstStyle/>
-          <a:p/>
-        </p:txBody>
-      </p:sp>
-      <p:sp>
-        <p:nvSpPr>
-          <p:cNvPr id="11" name="TextBox 10"/>
-          <p:cNvSpPr txBox="1"/>
-          <p:nvPr/>
-        </p:nvSpPr>
-        <p:spPr>
-          <a:xfrm>
-            <a:off x="4123943" y="2249424"/>
-            <a:ext cx="2816352" cy="566928"/>
-          </a:xfrm>
-          <a:prstGeom prst="rect">
-            <a:avLst/>
-          </a:prstGeom>
-          <a:noFill/>
-        </p:spPr>
-        <p:txBody>
-          <a:bodyPr wrap="square" anchor="t" lIns="0" rIns="0" tIns="0" bIns="0">
-            <a:spAutoFit/>
-          </a:bodyPr>
-          <a:lstStyle/>
-          <a:p>
-            <a:pPr algn="ctr">
-              <a:spcAft>
-                <a:spcPts val="400"/>
-              </a:spcAft>
-            </a:pPr>
-            <a:r>
-              <a:rPr sz="3400" b="1">
-                <a:solidFill>
-                  <a:srgbClr val="5A6373"/>
-                </a:solidFill>
-                <a:latin typeface="Microsoft YaHei"/>
-              </a:rPr>
-              <a:t>5%</a:t>
-            </a:r>
-          </a:p>
-        </p:txBody>
-      </p:sp>
-      <p:sp>
-        <p:nvSpPr>
-          <p:cNvPr id="12" name="TextBox 11"/>
-          <p:cNvSpPr txBox="1"/>
-          <p:nvPr/>
-        </p:nvSpPr>
-        <p:spPr>
-          <a:xfrm>
-            <a:off x="4123943" y="2834640"/>
-            <a:ext cx="2816352" cy="256032"/>
-          </a:xfrm>
-          <a:prstGeom prst="rect">
-            <a:avLst/>
-          </a:prstGeom>
-          <a:noFill/>
-        </p:spPr>
-        <p:txBody>
-          <a:bodyPr wrap="square" anchor="t" lIns="0" rIns="0" tIns="0" bIns="0">
-            <a:spAutoFit/>
-          </a:bodyPr>
-          <a:lstStyle/>
-          <a:p>
-            <a:pPr algn="ctr">
-              <a:spcAft>
-                <a:spcPts val="400"/>
-              </a:spcAft>
-            </a:pPr>
-            <a:r>
-              <a:rPr sz="1200" b="1">
-                <a:solidFill>
-                  <a:srgbClr val="1A1D24"/>
-                </a:solidFill>
-                <a:latin typeface="Microsoft YaHei"/>
-              </a:rPr>
-              <a:t>王天民</a:t>
-            </a:r>
-          </a:p>
-        </p:txBody>
-      </p:sp>
-      <p:sp>
-        <p:nvSpPr>
-          <p:cNvPr id="13" name="TextBox 12"/>
-          <p:cNvSpPr txBox="1"/>
-          <p:nvPr/>
-        </p:nvSpPr>
-        <p:spPr>
-          <a:xfrm>
-            <a:off x="4123943" y="3090672"/>
-            <a:ext cx="2816352" cy="310896"/>
-          </a:xfrm>
-          <a:prstGeom prst="rect">
-            <a:avLst/>
-          </a:prstGeom>
-          <a:noFill/>
-        </p:spPr>
-        <p:txBody>
-          <a:bodyPr wrap="square" anchor="t" lIns="0" rIns="0" tIns="0" bIns="0">
-            <a:spAutoFit/>
-          </a:bodyPr>
-          <a:lstStyle/>
-          <a:p>
-            <a:pPr algn="ctr">
-              <a:spcAft>
-                <a:spcPts val="400"/>
-              </a:spcAft>
-            </a:pPr>
-            <a:r>
-              <a:rPr sz="1000" b="0">
-                <a:solidFill>
-                  <a:srgbClr val="5A6373"/>
-                </a:solidFill>
-                <a:latin typeface="Microsoft YaHei"/>
-              </a:rPr>
-              <a:t>离线 benchmark 脚手架</a:t>
-            </a:r>
-          </a:p>
-        </p:txBody>
-      </p:sp>
-      <p:sp>
-        <p:nvSpPr>
-          <p:cNvPr id="14" name="TextBox 13"/>
-          <p:cNvSpPr txBox="1"/>
-          <p:nvPr/>
-        </p:nvSpPr>
-        <p:spPr>
-          <a:xfrm>
-            <a:off x="7452360" y="2176272"/>
-            <a:ext cx="4069080" cy="274320"/>
-          </a:xfrm>
-          <a:prstGeom prst="rect">
-            <a:avLst/>
-          </a:prstGeom>
-          <a:noFill/>
-        </p:spPr>
-        <p:txBody>
-          <a:bodyPr wrap="square" anchor="t" lIns="0" rIns="0" tIns="0" bIns="0">
-            <a:spAutoFit/>
-          </a:bodyPr>
-          <a:lstStyle/>
-          <a:p>
-            <a:pPr algn="l">
-              <a:spcAft>
-                <a:spcPts val="400"/>
-              </a:spcAft>
-            </a:pPr>
-            <a:r>
-              <a:rPr sz="1250" b="1">
-                <a:solidFill>
-                  <a:srgbClr val="5A6373"/>
-                </a:solidFill>
-                <a:latin typeface="Microsoft YaHei"/>
-              </a:rPr>
-              <a:t>王天民交付部分</a:t>
-            </a:r>
-          </a:p>
-        </p:txBody>
-      </p:sp>
-      <p:sp>
-        <p:nvSpPr>
-          <p:cNvPr id="15" name="TextBox 14"/>
-          <p:cNvSpPr txBox="1"/>
-          <p:nvPr/>
-        </p:nvSpPr>
-        <p:spPr>
-          <a:xfrm>
-            <a:off x="7452360" y="2505456"/>
-            <a:ext cx="3977639" cy="3785616"/>
-          </a:xfrm>
-          <a:prstGeom prst="rect">
-            <a:avLst/>
-          </a:prstGeom>
-          <a:noFill/>
-        </p:spPr>
-        <p:txBody>
-          <a:bodyPr wrap="square" anchor="t" lIns="0" rIns="0" tIns="0" bIns="0">
-            <a:spAutoFit/>
-          </a:bodyPr>
-          <a:lstStyle/>
-          <a:p>
-            <a:pPr algn="l">
+            <a:pPr>
               <a:lnSpc>
                 <a:spcPct val="125000"/>
               </a:lnSpc>
               <a:spcAft>
-                <a:spcPts val="600"/>
-              </a:spcAft>
-            </a:pPr>
-            <a:r>
-              <a:rPr sz="1150" b="0">
+                <a:spcPts val="900"/>
+              </a:spcAft>
+            </a:pPr>
+            <a:r>
+              <a:rPr sz="1200" b="1">
+                <a:solidFill>
+                  <a:srgbClr val="1A1D24"/>
+                </a:solidFill>
+                <a:latin typeface="Microsoft YaHei"/>
+              </a:rPr>
+              <a:t>— 设计变化与执行阶段 </a:t>
+            </a:r>
+            <a:r>
+              <a:rPr sz="1200">
                 <a:solidFill>
                   <a:srgbClr val="5A6373"/>
                 </a:solidFill>
                 <a:latin typeface="Microsoft YaHei"/>
               </a:rPr>
-              <a:t>· shape inventory 脚本</a:t>
-            </a:r>
-          </a:p>
-          <a:p>
-            <a:pPr algn="l">
+              <a:t>REPORT.md 按第一层/第二层分节，逐项记录</a:t>
+            </a:r>
+          </a:p>
+          <a:p>
+            <a:pPr>
               <a:lnSpc>
                 <a:spcPct val="125000"/>
               </a:lnSpc>
               <a:spcAft>
-                <a:spcPts val="600"/>
-              </a:spcAft>
-            </a:pPr>
-            <a:r>
-              <a:rPr sz="1150" b="0">
+                <a:spcPts val="900"/>
+              </a:spcAft>
+            </a:pPr>
+            <a:r>
+              <a:rPr sz="1200" b="1">
+                <a:solidFill>
+                  <a:srgbClr val="1A1D24"/>
+                </a:solidFill>
+                <a:latin typeface="Microsoft YaHei"/>
+              </a:rPr>
+              <a:t>— test.py check / run </a:t>
+            </a:r>
+            <a:r>
+              <a:rPr sz="1200">
                 <a:solidFill>
                   <a:srgbClr val="5A6373"/>
                 </a:solidFill>
                 <a:latin typeface="Microsoft YaHei"/>
               </a:rPr>
-              <a:t>· experiment validator 脚本</a:t>
-            </a:r>
-          </a:p>
-          <a:p>
-            <a:pPr algn="l">
+              <a:t>check 已通过并留存日志；run 因缺批准 reference 无法产出评分件，已如实说明</a:t>
+            </a:r>
+          </a:p>
+          <a:p>
+            <a:pPr>
               <a:lnSpc>
                 <a:spcPct val="125000"/>
               </a:lnSpc>
               <a:spcAft>
-                <a:spcPts val="600"/>
-              </a:spcAft>
-            </a:pPr>
-            <a:r>
-              <a:rPr sz="1150" b="0">
+                <a:spcPts val="900"/>
+              </a:spcAft>
+            </a:pPr>
+            <a:r>
+              <a:rPr sz="1200" b="1">
+                <a:solidFill>
+                  <a:srgbClr val="1A1D24"/>
+                </a:solidFill>
+                <a:latin typeface="Microsoft YaHei"/>
+              </a:rPr>
+              <a:t>— 负控制与回归测试 </a:t>
+            </a:r>
+            <a:r>
+              <a:rPr sz="1200">
                 <a:solidFill>
                   <a:srgbClr val="5A6373"/>
                 </a:solidFill>
                 <a:latin typeface="Microsoft YaHei"/>
               </a:rPr>
-              <a:t>· campaign manifest 与 README</a:t>
-            </a:r>
-          </a:p>
-          <a:p>
-            <a:pPr algn="l">
+              <a:t>7 个协议负控、3 个断连故障注入、9 组数值回归</a:t>
+            </a:r>
+          </a:p>
+          <a:p>
+            <a:pPr>
               <a:lnSpc>
                 <a:spcPct val="125000"/>
               </a:lnSpc>
               <a:spcAft>
-                <a:spcPts val="600"/>
-              </a:spcAft>
-            </a:pPr>
-            <a:r>
-              <a:rPr sz="1150" b="0">
+                <a:spcPts val="900"/>
+              </a:spcAft>
+            </a:pPr>
+            <a:r>
+              <a:rPr sz="1200" b="1">
+                <a:solidFill>
+                  <a:srgbClr val="1A1D24"/>
+                </a:solidFill>
+                <a:latin typeface="Microsoft YaHei"/>
+              </a:rPr>
+              <a:t>— 取舍与限制 </a:t>
+            </a:r>
+            <a:r>
+              <a:rPr sz="1200">
                 <a:solidFill>
                   <a:srgbClr val="5A6373"/>
                 </a:solidFill>
                 <a:latin typeface="Microsoft YaHei"/>
               </a:rPr>
-              <a:t>· 协作交接记录</a:t>
-            </a:r>
-          </a:p>
-        </p:txBody>
-      </p:sp>
-      <p:sp>
-        <p:nvSpPr>
-          <p:cNvPr id="16" name="TextBox 15"/>
-          <p:cNvSpPr txBox="1"/>
-          <p:nvPr/>
-        </p:nvSpPr>
-        <p:spPr>
-          <a:xfrm>
-            <a:off x="640080" y="3694176"/>
-            <a:ext cx="10881360" cy="274320"/>
+              <a:t>REPORT.md 专设 Trade-offs 与 Limits 两节</a:t>
+            </a:r>
+          </a:p>
+        </p:txBody>
+      </p:sp>
+      <p:sp>
+        <p:nvSpPr>
+          <p:cNvPr id="9" name="TextBox 8"/>
+          <p:cNvSpPr txBox="1"/>
+          <p:nvPr/>
+        </p:nvSpPr>
+        <p:spPr>
+          <a:xfrm>
+            <a:off x="6309360" y="3566160"/>
+            <a:ext cx="5303520" cy="274320"/>
           </a:xfrm>
           <a:prstGeom prst="rect">
             <a:avLst/>
@@ -6490,67 +7151,21 @@
                 </a:solidFill>
                 <a:latin typeface="Microsoft YaHei"/>
               </a:rPr>
-              <a:t>本人实际承担的范围</a:t>
-            </a:r>
-          </a:p>
-        </p:txBody>
-      </p:sp>
-      <p:sp>
-        <p:nvSpPr>
-          <p:cNvPr id="17" name="Rounded Rectangle 16"/>
-          <p:cNvSpPr/>
-          <p:nvPr/>
-        </p:nvSpPr>
-        <p:spPr>
-          <a:xfrm>
-            <a:off x="640080" y="4059936"/>
-            <a:ext cx="5349240" cy="841248"/>
-          </a:xfrm>
-          <a:prstGeom prst="roundRect">
-            <a:avLst>
-              <a:gd name="adj" fmla="val 4000"/>
-            </a:avLst>
-          </a:prstGeom>
-          <a:solidFill>
-            <a:srgbClr val="FFFFFF"/>
-          </a:solidFill>
-          <a:ln w="12700">
-            <a:solidFill>
-              <a:srgbClr val="DDE1E8"/>
-            </a:solidFill>
-          </a:ln>
-          <a:effectLst/>
-        </p:spPr>
-        <p:style>
-          <a:lnRef idx="1">
-            <a:schemeClr val="accent1"/>
-          </a:lnRef>
-          <a:fillRef idx="3">
-            <a:schemeClr val="accent1"/>
-          </a:fillRef>
-          <a:effectRef idx="2">
-            <a:schemeClr val="accent1"/>
-          </a:effectRef>
-          <a:fontRef idx="minor">
-            <a:schemeClr val="lt1"/>
-          </a:fontRef>
-        </p:style>
-        <p:txBody>
-          <a:bodyPr rtlCol="0" anchor="ctr"/>
-          <a:lstStyle/>
-          <a:p/>
-        </p:txBody>
-      </p:sp>
-      <p:sp>
-        <p:nvSpPr>
-          <p:cNvPr id="18" name="TextBox 17"/>
-          <p:cNvSpPr txBox="1"/>
-          <p:nvPr/>
-        </p:nvSpPr>
-        <p:spPr>
-          <a:xfrm>
-            <a:off x="841248" y="4169664"/>
-            <a:ext cx="4937760" cy="237744"/>
+              <a:t>回滚能力</a:t>
+            </a:r>
+          </a:p>
+        </p:txBody>
+      </p:sp>
+      <p:sp>
+        <p:nvSpPr>
+          <p:cNvPr id="10" name="TextBox 9"/>
+          <p:cNvSpPr txBox="1"/>
+          <p:nvPr/>
+        </p:nvSpPr>
+        <p:spPr>
+          <a:xfrm>
+            <a:off x="6309360" y="3913632"/>
+            <a:ext cx="5212080" cy="2377440"/>
           </a:xfrm>
           <a:prstGeom prst="rect">
             <a:avLst/>
@@ -6563,449 +7178,150 @@
           </a:bodyPr>
           <a:lstStyle/>
           <a:p>
-            <a:pPr algn="l">
-              <a:spcAft>
-                <a:spcPts val="400"/>
-              </a:spcAft>
-            </a:pPr>
-            <a:r>
-              <a:rPr sz="1250" b="1">
-                <a:solidFill>
-                  <a:srgbClr val="0066CC"/>
-                </a:solidFill>
-                <a:latin typeface="Microsoft YaHei"/>
-              </a:rPr>
-              <a:t>模型与 kernel</a:t>
-            </a:r>
-          </a:p>
-        </p:txBody>
-      </p:sp>
-      <p:sp>
-        <p:nvSpPr>
-          <p:cNvPr id="19" name="TextBox 18"/>
-          <p:cNvSpPr txBox="1"/>
-          <p:nvPr/>
-        </p:nvSpPr>
-        <p:spPr>
-          <a:xfrm>
-            <a:off x="841248" y="4443984"/>
-            <a:ext cx="4937760" cy="402336"/>
-          </a:xfrm>
-          <a:prstGeom prst="rect">
-            <a:avLst/>
-          </a:prstGeom>
-          <a:noFill/>
-        </p:spPr>
-        <p:txBody>
-          <a:bodyPr wrap="square" anchor="t" lIns="0" rIns="0" tIns="0" bIns="0">
-            <a:spAutoFit/>
-          </a:bodyPr>
-          <a:lstStyle/>
-          <a:p>
-            <a:pPr algn="l">
+            <a:pPr>
               <a:lnSpc>
                 <a:spcPct val="125000"/>
               </a:lnSpc>
               <a:spcAft>
-                <a:spcPts val="400"/>
-              </a:spcAft>
-            </a:pPr>
-            <a:r>
-              <a:rPr sz="1150" b="0">
+                <a:spcPts val="900"/>
+              </a:spcAft>
+            </a:pPr>
+            <a:r>
+              <a:rPr sz="1200" b="1">
+                <a:solidFill>
+                  <a:srgbClr val="1A1D24"/>
+                </a:solidFill>
+                <a:latin typeface="Microsoft YaHei"/>
+              </a:rPr>
+              <a:t>— 每项优化独立可关 </a:t>
+            </a:r>
+            <a:r>
+              <a:rPr sz="1200">
                 <a:solidFill>
                   <a:srgbClr val="5A6373"/>
                 </a:solidFill>
                 <a:latin typeface="Microsoft YaHei"/>
               </a:rPr>
-              <a:t>Qwen3.8 config / loader / weights，48 层 GDN 与 16 层全注意力的 CUDA 实现，W4A16 解包与 GEMM / GEMV kernel</a:t>
-            </a:r>
-          </a:p>
-        </p:txBody>
-      </p:sp>
-      <p:sp>
-        <p:nvSpPr>
-          <p:cNvPr id="20" name="Rounded Rectangle 19"/>
-          <p:cNvSpPr/>
-          <p:nvPr/>
-        </p:nvSpPr>
-        <p:spPr>
-          <a:xfrm>
-            <a:off x="6172200" y="4059936"/>
-            <a:ext cx="5349240" cy="841248"/>
-          </a:xfrm>
-          <a:prstGeom prst="roundRect">
-            <a:avLst>
-              <a:gd name="adj" fmla="val 4000"/>
-            </a:avLst>
-          </a:prstGeom>
-          <a:solidFill>
-            <a:srgbClr val="FFFFFF"/>
-          </a:solidFill>
-          <a:ln w="12700">
-            <a:solidFill>
-              <a:srgbClr val="DDE1E8"/>
-            </a:solidFill>
-          </a:ln>
-          <a:effectLst/>
-        </p:spPr>
-        <p:style>
-          <a:lnRef idx="1">
-            <a:schemeClr val="accent1"/>
-          </a:lnRef>
-          <a:fillRef idx="3">
-            <a:schemeClr val="accent1"/>
-          </a:fillRef>
-          <a:effectRef idx="2">
-            <a:schemeClr val="accent1"/>
-          </a:effectRef>
-          <a:fontRef idx="minor">
-            <a:schemeClr val="lt1"/>
-          </a:fontRef>
-        </p:style>
-        <p:txBody>
-          <a:bodyPr rtlCol="0" anchor="ctr"/>
-          <a:lstStyle/>
-          <a:p/>
-        </p:txBody>
-      </p:sp>
-      <p:sp>
-        <p:nvSpPr>
-          <p:cNvPr id="21" name="TextBox 20"/>
-          <p:cNvSpPr txBox="1"/>
-          <p:nvPr/>
-        </p:nvSpPr>
-        <p:spPr>
-          <a:xfrm>
-            <a:off x="6373368" y="4169664"/>
-            <a:ext cx="4937760" cy="237744"/>
-          </a:xfrm>
-          <a:prstGeom prst="rect">
-            <a:avLst/>
-          </a:prstGeom>
-          <a:noFill/>
-        </p:spPr>
-        <p:txBody>
-          <a:bodyPr wrap="square" anchor="t" lIns="0" rIns="0" tIns="0" bIns="0">
-            <a:spAutoFit/>
-          </a:bodyPr>
-          <a:lstStyle/>
-          <a:p>
-            <a:pPr algn="l">
-              <a:spcAft>
-                <a:spcPts val="400"/>
-              </a:spcAft>
-            </a:pPr>
-            <a:r>
-              <a:rPr sz="1250" b="1">
-                <a:solidFill>
-                  <a:srgbClr val="0066CC"/>
-                </a:solidFill>
-                <a:latin typeface="Microsoft YaHei"/>
-              </a:rPr>
-              <a:t>服务与协议</a:t>
-            </a:r>
-          </a:p>
-        </p:txBody>
-      </p:sp>
-      <p:sp>
-        <p:nvSpPr>
-          <p:cNvPr id="22" name="TextBox 21"/>
-          <p:cNvSpPr txBox="1"/>
-          <p:nvPr/>
-        </p:nvSpPr>
-        <p:spPr>
-          <a:xfrm>
-            <a:off x="6373368" y="4443984"/>
-            <a:ext cx="4937760" cy="402336"/>
-          </a:xfrm>
-          <a:prstGeom prst="rect">
-            <a:avLst/>
-          </a:prstGeom>
-          <a:noFill/>
-        </p:spPr>
-        <p:txBody>
-          <a:bodyPr wrap="square" anchor="t" lIns="0" rIns="0" tIns="0" bIns="0">
-            <a:spAutoFit/>
-          </a:bodyPr>
-          <a:lstStyle/>
-          <a:p>
-            <a:pPr algn="l">
+              <a:t>APXINF_Q35_W4_PREFILL_GEMM / W4_PACKED_GEMV / BATCHED_SDPA / SCRATCH_POOL / PREFILL_CHUNK / ROWWISE_SOFTMAX</a:t>
+            </a:r>
+          </a:p>
+          <a:p>
+            <a:pPr>
               <a:lnSpc>
                 <a:spcPct val="125000"/>
               </a:lnSpc>
               <a:spcAft>
-                <a:spcPts val="400"/>
-              </a:spcAft>
-            </a:pPr>
-            <a:r>
-              <a:rPr sz="1150" b="0">
+                <a:spcPts val="900"/>
+              </a:spcAft>
+            </a:pPr>
+            <a:r>
+              <a:rPr sz="1200" b="1">
+                <a:solidFill>
+                  <a:srgbClr val="1A1D24"/>
+                </a:solidFill>
+                <a:latin typeface="Microsoft YaHei"/>
+              </a:rPr>
+              <a:t>— bonus 均单开关 </a:t>
+            </a:r>
+            <a:r>
+              <a:rPr sz="1200">
                 <a:solidFill>
                   <a:srgbClr val="5A6373"/>
                 </a:solidFill>
                 <a:latin typeface="Microsoft YaHei"/>
               </a:rPr>
-              <a:t>HTTP / SSE surface、七项负控、admission、断连取消与故障恢复，/v1/chat/completions 图文入口</a:t>
-            </a:r>
-          </a:p>
-        </p:txBody>
-      </p:sp>
-      <p:sp>
-        <p:nvSpPr>
-          <p:cNvPr id="23" name="Rounded Rectangle 22"/>
-          <p:cNvSpPr/>
-          <p:nvPr/>
-        </p:nvSpPr>
-        <p:spPr>
-          <a:xfrm>
-            <a:off x="640080" y="4992624"/>
-            <a:ext cx="5349240" cy="841248"/>
-          </a:xfrm>
-          <a:prstGeom prst="roundRect">
-            <a:avLst>
-              <a:gd name="adj" fmla="val 4000"/>
-            </a:avLst>
-          </a:prstGeom>
-          <a:solidFill>
-            <a:srgbClr val="FFFFFF"/>
-          </a:solidFill>
-          <a:ln w="12700">
-            <a:solidFill>
-              <a:srgbClr val="DDE1E8"/>
-            </a:solidFill>
-          </a:ln>
-          <a:effectLst/>
-        </p:spPr>
-        <p:style>
-          <a:lnRef idx="1">
-            <a:schemeClr val="accent1"/>
-          </a:lnRef>
-          <a:fillRef idx="3">
-            <a:schemeClr val="accent1"/>
-          </a:fillRef>
-          <a:effectRef idx="2">
-            <a:schemeClr val="accent1"/>
-          </a:effectRef>
-          <a:fontRef idx="minor">
-            <a:schemeClr val="lt1"/>
-          </a:fontRef>
-        </p:style>
-        <p:txBody>
-          <a:bodyPr rtlCol="0" anchor="ctr"/>
-          <a:lstStyle/>
-          <a:p/>
-        </p:txBody>
-      </p:sp>
-      <p:sp>
-        <p:nvSpPr>
-          <p:cNvPr id="24" name="TextBox 23"/>
-          <p:cNvSpPr txBox="1"/>
-          <p:nvPr/>
-        </p:nvSpPr>
-        <p:spPr>
-          <a:xfrm>
-            <a:off x="841248" y="5102352"/>
-            <a:ext cx="4937760" cy="237744"/>
-          </a:xfrm>
-          <a:prstGeom prst="rect">
-            <a:avLst/>
-          </a:prstGeom>
-          <a:noFill/>
-        </p:spPr>
-        <p:txBody>
-          <a:bodyPr wrap="square" anchor="t" lIns="0" rIns="0" tIns="0" bIns="0">
-            <a:spAutoFit/>
-          </a:bodyPr>
-          <a:lstStyle/>
-          <a:p>
-            <a:pPr algn="l">
-              <a:spcAft>
-                <a:spcPts val="400"/>
-              </a:spcAft>
-            </a:pPr>
-            <a:r>
-              <a:rPr sz="1250" b="1">
-                <a:solidFill>
-                  <a:srgbClr val="0066CC"/>
-                </a:solidFill>
-                <a:latin typeface="Microsoft YaHei"/>
-              </a:rPr>
-              <a:t>正确性证据</a:t>
-            </a:r>
-          </a:p>
-        </p:txBody>
-      </p:sp>
-      <p:sp>
-        <p:nvSpPr>
-          <p:cNvPr id="25" name="TextBox 24"/>
-          <p:cNvSpPr txBox="1"/>
-          <p:nvPr/>
-        </p:nvSpPr>
-        <p:spPr>
-          <a:xfrm>
-            <a:off x="841248" y="5376672"/>
-            <a:ext cx="4937760" cy="402336"/>
-          </a:xfrm>
-          <a:prstGeom prst="rect">
-            <a:avLst/>
-          </a:prstGeom>
-          <a:noFill/>
-        </p:spPr>
-        <p:txBody>
-          <a:bodyPr wrap="square" anchor="t" lIns="0" rIns="0" tIns="0" bIns="0">
-            <a:spAutoFit/>
-          </a:bodyPr>
-          <a:lstStyle/>
-          <a:p>
-            <a:pPr algn="l">
+              <a:t>APXINF_ENABLE_MULTIMODAL 与 APXINF_Q35_MAX_CONCURRENCY 都不设时，行为即纯文本单请求提交件</a:t>
+            </a:r>
+          </a:p>
+          <a:p>
+            <a:pPr>
               <a:lnSpc>
                 <a:spcPct val="125000"/>
               </a:lnSpc>
               <a:spcAft>
-                <a:spcPts val="400"/>
-              </a:spcAft>
-            </a:pPr>
-            <a:r>
-              <a:rPr sz="1150" b="0">
+                <a:spcPts val="900"/>
+              </a:spcAft>
+            </a:pPr>
+            <a:r>
+              <a:rPr sz="1200" b="1">
+                <a:solidFill>
+                  <a:srgbClr val="1A1D24"/>
+                </a:solidFill>
+                <a:latin typeface="Microsoft YaHei"/>
+              </a:rPr>
+              <a:t>— 被拒候选保留在树中 </a:t>
+            </a:r>
+            <a:r>
+              <a:rPr sz="1200">
                 <a:solidFill>
                   <a:srgbClr val="5A6373"/>
                 </a:solidFill>
                 <a:latin typeface="Microsoft YaHei"/>
               </a:rPr>
-              <a:t>离线 oracle（文本 + vision）、hidden 代理集、逐层对拍与位相等断言</a:t>
-            </a:r>
-          </a:p>
-        </p:txBody>
-      </p:sp>
-      <p:sp>
-        <p:nvSpPr>
-          <p:cNvPr id="26" name="Rounded Rectangle 25"/>
-          <p:cNvSpPr/>
-          <p:nvPr/>
-        </p:nvSpPr>
-        <p:spPr>
-          <a:xfrm>
-            <a:off x="6172200" y="4992624"/>
-            <a:ext cx="5349240" cy="841248"/>
-          </a:xfrm>
-          <a:prstGeom prst="roundRect">
-            <a:avLst>
-              <a:gd name="adj" fmla="val 4000"/>
-            </a:avLst>
-          </a:prstGeom>
-          <a:solidFill>
-            <a:srgbClr val="FFFFFF"/>
-          </a:solidFill>
-          <a:ln w="12700">
-            <a:solidFill>
-              <a:srgbClr val="DDE1E8"/>
-            </a:solidFill>
-          </a:ln>
-          <a:effectLst/>
-        </p:spPr>
-        <p:style>
-          <a:lnRef idx="1">
-            <a:schemeClr val="accent1"/>
-          </a:lnRef>
-          <a:fillRef idx="3">
-            <a:schemeClr val="accent1"/>
-          </a:fillRef>
-          <a:effectRef idx="2">
-            <a:schemeClr val="accent1"/>
-          </a:effectRef>
-          <a:fontRef idx="minor">
-            <a:schemeClr val="lt1"/>
-          </a:fontRef>
-        </p:style>
-        <p:txBody>
-          <a:bodyPr rtlCol="0" anchor="ctr"/>
-          <a:lstStyle/>
-          <a:p/>
-        </p:txBody>
-      </p:sp>
-      <p:sp>
-        <p:nvSpPr>
-          <p:cNvPr id="27" name="TextBox 26"/>
-          <p:cNvSpPr txBox="1"/>
-          <p:nvPr/>
-        </p:nvSpPr>
-        <p:spPr>
-          <a:xfrm>
-            <a:off x="6373368" y="5102352"/>
-            <a:ext cx="4937760" cy="237744"/>
-          </a:xfrm>
-          <a:prstGeom prst="rect">
-            <a:avLst/>
-          </a:prstGeom>
-          <a:noFill/>
-        </p:spPr>
-        <p:txBody>
-          <a:bodyPr wrap="square" anchor="t" lIns="0" rIns="0" tIns="0" bIns="0">
-            <a:spAutoFit/>
-          </a:bodyPr>
-          <a:lstStyle/>
-          <a:p>
-            <a:pPr algn="l">
-              <a:spcAft>
-                <a:spcPts val="400"/>
-              </a:spcAft>
-            </a:pPr>
-            <a:r>
-              <a:rPr sz="1250" b="1">
-                <a:solidFill>
-                  <a:srgbClr val="0066CC"/>
-                </a:solidFill>
-                <a:latin typeface="Microsoft YaHei"/>
-              </a:rPr>
-              <a:t>性能工程与多模态</a:t>
-            </a:r>
-          </a:p>
-        </p:txBody>
-      </p:sp>
-      <p:sp>
-        <p:nvSpPr>
-          <p:cNvPr id="28" name="TextBox 27"/>
-          <p:cNvSpPr txBox="1"/>
-          <p:nvPr/>
-        </p:nvSpPr>
-        <p:spPr>
-          <a:xfrm>
-            <a:off x="6373368" y="5376672"/>
-            <a:ext cx="4937760" cy="402336"/>
-          </a:xfrm>
-          <a:prstGeom prst="rect">
-            <a:avLst/>
-          </a:prstGeom>
-          <a:noFill/>
-        </p:spPr>
-        <p:txBody>
-          <a:bodyPr wrap="square" anchor="t" lIns="0" rIns="0" tIns="0" bIns="0">
-            <a:spAutoFit/>
-          </a:bodyPr>
-          <a:lstStyle/>
-          <a:p>
-            <a:pPr algn="l">
+              <a:t>默认关闭并附回归测试，作为负结果证据</a:t>
+            </a:r>
+          </a:p>
+          <a:p>
+            <a:pPr>
               <a:lnSpc>
                 <a:spcPct val="125000"/>
               </a:lnSpc>
               <a:spcAft>
-                <a:spcPts val="400"/>
-              </a:spcAft>
-            </a:pPr>
-            <a:r>
-              <a:rPr sz="1150" b="0">
+                <a:spcPts val="900"/>
+              </a:spcAft>
+            </a:pPr>
+            <a:r>
+              <a:rPr sz="1200" b="1">
+                <a:solidFill>
+                  <a:srgbClr val="1A1D24"/>
+                </a:solidFill>
+                <a:latin typeface="Microsoft YaHei"/>
+              </a:rPr>
+              <a:t>— 回滚点 </a:t>
+            </a:r>
+            <a:r>
+              <a:rPr sz="1200">
                 <a:solidFill>
                   <a:srgbClr val="5A6373"/>
                 </a:solidFill>
                 <a:latin typeface="Microsoft YaHei"/>
               </a:rPr>
-              <a:t>十七次配对实验、显存账本、vision 塔与 27 块 CUDA 移植、REPORT.md、最终集成与提交</a:t>
-            </a:r>
-          </a:p>
-        </p:txBody>
-      </p:sp>
-      <p:sp>
-        <p:nvSpPr>
-          <p:cNvPr id="29" name="TextBox 28"/>
+              <a:t>47ec280d2f88e8daf87750c0957e596e3a5390c1（集成前 HEAD）</a:t>
+            </a:r>
+          </a:p>
+          <a:p>
+            <a:pPr>
+              <a:lnSpc>
+                <a:spcPct val="125000"/>
+              </a:lnSpc>
+              <a:spcAft>
+                <a:spcPts val="900"/>
+              </a:spcAft>
+            </a:pPr>
+            <a:r>
+              <a:rPr sz="1200" b="1">
+                <a:solidFill>
+                  <a:srgbClr val="1A1D24"/>
+                </a:solidFill>
+                <a:latin typeface="Microsoft YaHei"/>
+              </a:rPr>
+              <a:t>— 清洁性 </a:t>
+            </a:r>
+            <a:r>
+              <a:rPr sz="1200">
+                <a:solidFill>
+                  <a:srgbClr val="5A6373"/>
+                </a:solidFill>
+                <a:latin typeface="Microsoft YaHei"/>
+              </a:rPr>
+              <a:t>cargo fmt --check、cargo check --workspace --locked、git diff --check 全绿</a:t>
+            </a:r>
+          </a:p>
+        </p:txBody>
+      </p:sp>
+      <p:sp>
+        <p:nvSpPr>
+          <p:cNvPr id="11" name="TextBox 10"/>
           <p:cNvSpPr txBox="1"/>
           <p:nvPr/>
         </p:nvSpPr>
@@ -7037,7 +7353,7 @@
                 </a:solidFill>
                 <a:latin typeface="Microsoft YaHei"/>
               </a:rPr>
-              <a:t>比例依据 git 提交记录；原计划的多人并行 lane 实际退化为单人串行，但带锁 GPU 队列与单卡正式重放的纪律始终执行</a:t>
+              <a:t>未提交模型权重、凭据、机器地址或未公开评测数据；submission.json 的图片字段未手工填写</a:t>
             </a:r>
           </a:p>
         </p:txBody>
@@ -7062,22 +7378,98 @@
       <p:grpSpPr/>
       <p:sp>
         <p:nvSpPr>
-          <p:cNvPr id="2" name="Rounded Rectangle 1"/>
+          <p:cNvPr id="2" name="TextBox 1"/>
+          <p:cNvSpPr txBox="1"/>
+          <p:nvPr/>
+        </p:nvSpPr>
+        <p:spPr>
+          <a:xfrm>
+            <a:off x="640080" y="411480"/>
+            <a:ext cx="10972800" cy="256032"/>
+          </a:xfrm>
+          <a:prstGeom prst="rect">
+            <a:avLst/>
+          </a:prstGeom>
+          <a:noFill/>
+        </p:spPr>
+        <p:txBody>
+          <a:bodyPr wrap="square" anchor="t" lIns="0" rIns="0" tIns="0" bIns="0">
+            <a:spAutoFit/>
+          </a:bodyPr>
+          <a:lstStyle/>
+          <a:p>
+            <a:pPr algn="l">
+              <a:spcAft>
+                <a:spcPts val="400"/>
+              </a:spcAft>
+            </a:pPr>
+            <a:r>
+              <a:rPr sz="1200" b="1">
+                <a:solidFill>
+                  <a:srgbClr val="0066CC"/>
+                </a:solidFill>
+                <a:latin typeface="Microsoft YaHei"/>
+              </a:rPr>
+              <a:t>TEAM</a:t>
+            </a:r>
+          </a:p>
+        </p:txBody>
+      </p:sp>
+      <p:sp>
+        <p:nvSpPr>
+          <p:cNvPr id="3" name="TextBox 2"/>
+          <p:cNvSpPr txBox="1"/>
+          <p:nvPr/>
+        </p:nvSpPr>
+        <p:spPr>
+          <a:xfrm>
+            <a:off x="640080" y="685800"/>
+            <a:ext cx="10972800" cy="502920"/>
+          </a:xfrm>
+          <a:prstGeom prst="rect">
+            <a:avLst/>
+          </a:prstGeom>
+          <a:noFill/>
+        </p:spPr>
+        <p:txBody>
+          <a:bodyPr wrap="square" anchor="t" lIns="0" rIns="0" tIns="0" bIns="0">
+            <a:spAutoFit/>
+          </a:bodyPr>
+          <a:lstStyle/>
+          <a:p>
+            <a:pPr algn="l">
+              <a:spcAft>
+                <a:spcPts val="400"/>
+              </a:spcAft>
+            </a:pPr>
+            <a:r>
+              <a:rPr sz="2700" b="1">
+                <a:solidFill>
+                  <a:srgbClr val="1A1D24"/>
+                </a:solidFill>
+                <a:latin typeface="Microsoft YaHei"/>
+              </a:rPr>
+              <a:t>分工说明</a:t>
+            </a:r>
+          </a:p>
+        </p:txBody>
+      </p:sp>
+      <p:sp>
+        <p:nvSpPr>
+          <p:cNvPr id="4" name="Rectangle 3"/>
           <p:cNvSpPr/>
           <p:nvPr/>
         </p:nvSpPr>
         <p:spPr>
           <a:xfrm>
-            <a:off x="0" y="0"/>
-            <a:ext cx="12191695" cy="6858000"/>
-          </a:xfrm>
-          <a:prstGeom prst="roundRect">
-            <a:avLst>
-              <a:gd name="adj" fmla="val 4000"/>
-            </a:avLst>
+            <a:off x="640080" y="1252728"/>
+            <a:ext cx="1371600" cy="15240"/>
+          </a:xfrm>
+          <a:prstGeom prst="rect">
+            <a:avLst/>
           </a:prstGeom>
           <a:solidFill>
-            <a:srgbClr val="0F2A4A"/>
+            <a:srgbClr val="0066CC"/>
           </a:solidFill>
           <a:ln>
             <a:noFill/>
@@ -7101,19 +7493,21 @@
         <p:txBody>
           <a:bodyPr rtlCol="0" anchor="ctr"/>
           <a:lstStyle/>
-          <a:p/>
-        </p:txBody>
-      </p:sp>
-      <p:sp>
-        <p:nvSpPr>
-          <p:cNvPr id="3" name="TextBox 2"/>
-          <p:cNvSpPr txBox="1"/>
-          <p:nvPr/>
-        </p:nvSpPr>
-        <p:spPr>
-          <a:xfrm>
-            <a:off x="1005840" y="1234440"/>
-            <a:ext cx="10149840" cy="457200"/>
+          <a:p>
+            <a:pPr algn="ctr"/>
+          </a:p>
+        </p:txBody>
+      </p:sp>
+      <p:sp>
+        <p:nvSpPr>
+          <p:cNvPr id="5" name="TextBox 4"/>
+          <p:cNvSpPr txBox="1"/>
+          <p:nvPr/>
+        </p:nvSpPr>
+        <p:spPr>
+          <a:xfrm>
+            <a:off x="640080" y="1554480"/>
+            <a:ext cx="10881360" cy="384048"/>
           </a:xfrm>
           <a:prstGeom prst="rect">
             <a:avLst/>
@@ -7132,88 +7526,27 @@
               </a:spcAft>
             </a:pPr>
             <a:r>
-              <a:rPr sz="1500" b="1">
-                <a:solidFill>
-                  <a:srgbClr val="8FC2F0"/>
-                </a:solidFill>
-                <a:latin typeface="Microsoft YaHei"/>
-              </a:rPr>
-              <a:t>为什么叫「4090 能飞」</a:t>
-            </a:r>
-          </a:p>
-        </p:txBody>
-      </p:sp>
-      <p:sp>
-        <p:nvSpPr>
-          <p:cNvPr id="4" name="TextBox 3"/>
-          <p:cNvSpPr txBox="1"/>
-          <p:nvPr/>
-        </p:nvSpPr>
-        <p:spPr>
-          <a:xfrm>
-            <a:off x="1005840" y="1719072"/>
-            <a:ext cx="10149840" cy="1920240"/>
-          </a:xfrm>
-          <a:prstGeom prst="rect">
-            <a:avLst/>
-          </a:prstGeom>
-          <a:noFill/>
-        </p:spPr>
-        <p:txBody>
-          <a:bodyPr wrap="square" anchor="t" lIns="0" rIns="0" tIns="0" bIns="0">
-            <a:spAutoFit/>
-          </a:bodyPr>
-          <a:lstStyle/>
-          <a:p>
-            <a:pPr algn="l">
-              <a:lnSpc>
-                <a:spcPct val="130000"/>
-              </a:lnSpc>
-              <a:spcAft>
-                <a:spcPts val="1000"/>
-              </a:spcAft>
-            </a:pPr>
-            <a:r>
-              <a:rPr sz="2200" b="1">
-                <a:solidFill>
-                  <a:srgbClr val="FFFFFF"/>
-                </a:solidFill>
-                <a:latin typeface="Microsoft YaHei"/>
-              </a:rPr>
-              <a:t>让它飞起来的不是更强的硬件，是看清了瓶颈的真实位置。</a:t>
-            </a:r>
-          </a:p>
-          <a:p>
-            <a:pPr algn="l">
-              <a:lnSpc>
-                <a:spcPct val="135000"/>
-              </a:lnSpc>
-              <a:spcAft>
-                <a:spcPts val="0"/>
-              </a:spcAft>
-            </a:pPr>
-            <a:r>
-              <a:rPr sz="1500" b="0">
-                <a:solidFill>
-                  <a:srgbClr val="C5D9EE"/>
-                </a:solidFill>
-                <a:latin typeface="Microsoft YaHei"/>
-              </a:rPr>
-              <a:t>三个最大的瓶颈都不在算术里：softmax 每个线程重复扫描整行、W4 投影每行重读整个权重矩阵、80% 的 prefill 花在 cudaMalloc。代码没换硬件、没换算法，只是终于测对了地方 —— TTFT 约 47 倍、TPOT 约 2 倍，correctness 与稳定性全程未退让。</a:t>
-            </a:r>
-          </a:p>
-        </p:txBody>
-      </p:sp>
-      <p:sp>
-        <p:nvSpPr>
-          <p:cNvPr id="5" name="Rounded Rectangle 4"/>
+              <a:rPr sz="1350" b="0">
+                <a:solidFill>
+                  <a:srgbClr val="1A1D24"/>
+                </a:solidFill>
+                <a:latin typeface="Microsoft YaHei"/>
+              </a:rPr>
+              <a:t>两人团队。主线实现由本人完成，另一位成员交付离线 benchmark 脚手架。</a:t>
+            </a:r>
+          </a:p>
+        </p:txBody>
+      </p:sp>
+      <p:sp>
+        <p:nvSpPr>
+          <p:cNvPr id="6" name="Rounded Rectangle 5"/>
           <p:cNvSpPr/>
           <p:nvPr/>
         </p:nvSpPr>
         <p:spPr>
           <a:xfrm>
-            <a:off x="1005840" y="4114800"/>
-            <a:ext cx="3246120" cy="1371600"/>
+            <a:off x="640080" y="2121408"/>
+            <a:ext cx="3108960" cy="1371600"/>
           </a:xfrm>
           <a:prstGeom prst="roundRect">
             <a:avLst>
@@ -7221,10 +7554,12 @@
             </a:avLst>
           </a:prstGeom>
           <a:solidFill>
-            <a:srgbClr val="163860"/>
+            <a:srgbClr val="FFFFFF"/>
           </a:solidFill>
-          <a:ln>
-            <a:noFill/>
+          <a:ln w="12700">
+            <a:solidFill>
+              <a:srgbClr val="DDE1E8"/>
+            </a:solidFill>
           </a:ln>
           <a:effectLst/>
         </p:spPr>
@@ -7250,14 +7585,14 @@
       </p:sp>
       <p:sp>
         <p:nvSpPr>
-          <p:cNvPr id="6" name="TextBox 5"/>
-          <p:cNvSpPr txBox="1"/>
-          <p:nvPr/>
-        </p:nvSpPr>
-        <p:spPr>
-          <a:xfrm>
-            <a:off x="1207008" y="4297680"/>
-            <a:ext cx="2880360" cy="274320"/>
+          <p:cNvPr id="7" name="TextBox 6"/>
+          <p:cNvSpPr txBox="1"/>
+          <p:nvPr/>
+        </p:nvSpPr>
+        <p:spPr>
+          <a:xfrm>
+            <a:off x="786384" y="2249424"/>
+            <a:ext cx="2816352" cy="566928"/>
           </a:xfrm>
           <a:prstGeom prst="rect">
             <a:avLst/>
@@ -7270,7 +7605,46 @@
           </a:bodyPr>
           <a:lstStyle/>
           <a:p>
-            <a:pPr algn="l">
+            <a:pPr algn="ctr">
+              <a:spcAft>
+                <a:spcPts val="400"/>
+              </a:spcAft>
+            </a:pPr>
+            <a:r>
+              <a:rPr sz="3400" b="1">
+                <a:solidFill>
+                  <a:srgbClr val="0066CC"/>
+                </a:solidFill>
+                <a:latin typeface="Microsoft YaHei"/>
+              </a:rPr>
+              <a:t>95%</a:t>
+            </a:r>
+          </a:p>
+        </p:txBody>
+      </p:sp>
+      <p:sp>
+        <p:nvSpPr>
+          <p:cNvPr id="8" name="TextBox 7"/>
+          <p:cNvSpPr txBox="1"/>
+          <p:nvPr/>
+        </p:nvSpPr>
+        <p:spPr>
+          <a:xfrm>
+            <a:off x="786384" y="2834640"/>
+            <a:ext cx="2816352" cy="256032"/>
+          </a:xfrm>
+          <a:prstGeom prst="rect">
+            <a:avLst/>
+          </a:prstGeom>
+          <a:noFill/>
+        </p:spPr>
+        <p:txBody>
+          <a:bodyPr wrap="square" anchor="t" lIns="0" rIns="0" tIns="0" bIns="0">
+            <a:spAutoFit/>
+          </a:bodyPr>
+          <a:lstStyle/>
+          <a:p>
+            <a:pPr algn="ctr">
               <a:spcAft>
                 <a:spcPts val="400"/>
               </a:spcAft>
@@ -7278,25 +7652,25 @@
             <a:r>
               <a:rPr sz="1200" b="1">
                 <a:solidFill>
-                  <a:srgbClr val="8FC2F0"/>
-                </a:solidFill>
-                <a:latin typeface="Microsoft YaHei"/>
-              </a:rPr>
-              <a:t>最大的单点收益</a:t>
-            </a:r>
-          </a:p>
-        </p:txBody>
-      </p:sp>
-      <p:sp>
-        <p:nvSpPr>
-          <p:cNvPr id="7" name="TextBox 6"/>
-          <p:cNvSpPr txBox="1"/>
-          <p:nvPr/>
-        </p:nvSpPr>
-        <p:spPr>
-          <a:xfrm>
-            <a:off x="1207008" y="4626864"/>
-            <a:ext cx="2880360" cy="777240"/>
+                  <a:srgbClr val="1A1D24"/>
+                </a:solidFill>
+                <a:latin typeface="Microsoft YaHei"/>
+              </a:rPr>
+              <a:t>程仁龙（本人）</a:t>
+            </a:r>
+          </a:p>
+        </p:txBody>
+      </p:sp>
+      <p:sp>
+        <p:nvSpPr>
+          <p:cNvPr id="9" name="TextBox 8"/>
+          <p:cNvSpPr txBox="1"/>
+          <p:nvPr/>
+        </p:nvSpPr>
+        <p:spPr>
+          <a:xfrm>
+            <a:off x="786384" y="3090672"/>
+            <a:ext cx="2816352" cy="310896"/>
           </a:xfrm>
           <a:prstGeom prst="rect">
             <a:avLst/>
@@ -7309,36 +7683,33 @@
           </a:bodyPr>
           <a:lstStyle/>
           <a:p>
-            <a:pPr algn="l">
-              <a:lnSpc>
-                <a:spcPct val="130000"/>
-              </a:lnSpc>
-              <a:spcAft>
-                <a:spcPts val="400"/>
-              </a:spcAft>
-            </a:pPr>
-            <a:r>
-              <a:rPr sz="1200" b="0">
-                <a:solidFill>
-                  <a:srgbClr val="FFFFFF"/>
-                </a:solidFill>
-                <a:latin typeface="Microsoft YaHei"/>
-              </a:rPr>
-              <a:t>行协作 softmax：16K attention 单层 23.06 s → 0.659 s</a:t>
-            </a:r>
-          </a:p>
-        </p:txBody>
-      </p:sp>
-      <p:sp>
-        <p:nvSpPr>
-          <p:cNvPr id="8" name="Rounded Rectangle 7"/>
+            <a:pPr algn="ctr">
+              <a:spcAft>
+                <a:spcPts val="400"/>
+              </a:spcAft>
+            </a:pPr>
+            <a:r>
+              <a:rPr sz="1000" b="0">
+                <a:solidFill>
+                  <a:srgbClr val="5A6373"/>
+                </a:solidFill>
+                <a:latin typeface="Microsoft YaHei"/>
+              </a:rPr>
+              <a:t>模型 / kernel / 服务 / 性能 / 双 bonus</a:t>
+            </a:r>
+          </a:p>
+        </p:txBody>
+      </p:sp>
+      <p:sp>
+        <p:nvSpPr>
+          <p:cNvPr id="10" name="Rounded Rectangle 9"/>
           <p:cNvSpPr/>
           <p:nvPr/>
         </p:nvSpPr>
         <p:spPr>
           <a:xfrm>
-            <a:off x="4434840" y="4114800"/>
-            <a:ext cx="3246120" cy="1371600"/>
+            <a:off x="3977639" y="2121408"/>
+            <a:ext cx="3108960" cy="1371600"/>
           </a:xfrm>
           <a:prstGeom prst="roundRect">
             <a:avLst>
@@ -7346,10 +7717,12 @@
             </a:avLst>
           </a:prstGeom>
           <a:solidFill>
-            <a:srgbClr val="163860"/>
+            <a:srgbClr val="FFFFFF"/>
           </a:solidFill>
-          <a:ln>
-            <a:noFill/>
+          <a:ln w="12700">
+            <a:solidFill>
+              <a:srgbClr val="DDE1E8"/>
+            </a:solidFill>
           </a:ln>
           <a:effectLst/>
         </p:spPr>
@@ -7375,14 +7748,14 @@
       </p:sp>
       <p:sp>
         <p:nvSpPr>
-          <p:cNvPr id="9" name="TextBox 8"/>
-          <p:cNvSpPr txBox="1"/>
-          <p:nvPr/>
-        </p:nvSpPr>
-        <p:spPr>
-          <a:xfrm>
-            <a:off x="4636008" y="4297680"/>
-            <a:ext cx="2880360" cy="274320"/>
+          <p:cNvPr id="11" name="TextBox 10"/>
+          <p:cNvSpPr txBox="1"/>
+          <p:nvPr/>
+        </p:nvSpPr>
+        <p:spPr>
+          <a:xfrm>
+            <a:off x="4123943" y="2249424"/>
+            <a:ext cx="2816352" cy="566928"/>
           </a:xfrm>
           <a:prstGeom prst="rect">
             <a:avLst/>
@@ -7395,33 +7768,150 @@
           </a:bodyPr>
           <a:lstStyle/>
           <a:p>
+            <a:pPr algn="ctr">
+              <a:spcAft>
+                <a:spcPts val="400"/>
+              </a:spcAft>
+            </a:pPr>
+            <a:r>
+              <a:rPr sz="3400" b="1">
+                <a:solidFill>
+                  <a:srgbClr val="5A6373"/>
+                </a:solidFill>
+                <a:latin typeface="Microsoft YaHei"/>
+              </a:rPr>
+              <a:t>5%</a:t>
+            </a:r>
+          </a:p>
+        </p:txBody>
+      </p:sp>
+      <p:sp>
+        <p:nvSpPr>
+          <p:cNvPr id="12" name="TextBox 11"/>
+          <p:cNvSpPr txBox="1"/>
+          <p:nvPr/>
+        </p:nvSpPr>
+        <p:spPr>
+          <a:xfrm>
+            <a:off x="4123943" y="2834640"/>
+            <a:ext cx="2816352" cy="256032"/>
+          </a:xfrm>
+          <a:prstGeom prst="rect">
+            <a:avLst/>
+          </a:prstGeom>
+          <a:noFill/>
+        </p:spPr>
+        <p:txBody>
+          <a:bodyPr wrap="square" anchor="t" lIns="0" rIns="0" tIns="0" bIns="0">
+            <a:spAutoFit/>
+          </a:bodyPr>
+          <a:lstStyle/>
+          <a:p>
+            <a:pPr algn="ctr">
+              <a:spcAft>
+                <a:spcPts val="400"/>
+              </a:spcAft>
+            </a:pPr>
+            <a:r>
+              <a:rPr sz="1200" b="1">
+                <a:solidFill>
+                  <a:srgbClr val="1A1D24"/>
+                </a:solidFill>
+                <a:latin typeface="Microsoft YaHei"/>
+              </a:rPr>
+              <a:t>王天民</a:t>
+            </a:r>
+          </a:p>
+        </p:txBody>
+      </p:sp>
+      <p:sp>
+        <p:nvSpPr>
+          <p:cNvPr id="13" name="TextBox 12"/>
+          <p:cNvSpPr txBox="1"/>
+          <p:nvPr/>
+        </p:nvSpPr>
+        <p:spPr>
+          <a:xfrm>
+            <a:off x="4123943" y="3090672"/>
+            <a:ext cx="2816352" cy="310896"/>
+          </a:xfrm>
+          <a:prstGeom prst="rect">
+            <a:avLst/>
+          </a:prstGeom>
+          <a:noFill/>
+        </p:spPr>
+        <p:txBody>
+          <a:bodyPr wrap="square" anchor="t" lIns="0" rIns="0" tIns="0" bIns="0">
+            <a:spAutoFit/>
+          </a:bodyPr>
+          <a:lstStyle/>
+          <a:p>
+            <a:pPr algn="ctr">
+              <a:spcAft>
+                <a:spcPts val="400"/>
+              </a:spcAft>
+            </a:pPr>
+            <a:r>
+              <a:rPr sz="1000" b="0">
+                <a:solidFill>
+                  <a:srgbClr val="5A6373"/>
+                </a:solidFill>
+                <a:latin typeface="Microsoft YaHei"/>
+              </a:rPr>
+              <a:t>离线 benchmark 脚手架</a:t>
+            </a:r>
+          </a:p>
+        </p:txBody>
+      </p:sp>
+      <p:sp>
+        <p:nvSpPr>
+          <p:cNvPr id="14" name="TextBox 13"/>
+          <p:cNvSpPr txBox="1"/>
+          <p:nvPr/>
+        </p:nvSpPr>
+        <p:spPr>
+          <a:xfrm>
+            <a:off x="7452360" y="2176272"/>
+            <a:ext cx="4069080" cy="274320"/>
+          </a:xfrm>
+          <a:prstGeom prst="rect">
+            <a:avLst/>
+          </a:prstGeom>
+          <a:noFill/>
+        </p:spPr>
+        <p:txBody>
+          <a:bodyPr wrap="square" anchor="t" lIns="0" rIns="0" tIns="0" bIns="0">
+            <a:spAutoFit/>
+          </a:bodyPr>
+          <a:lstStyle/>
+          <a:p>
             <a:pPr algn="l">
               <a:spcAft>
                 <a:spcPts val="400"/>
               </a:spcAft>
             </a:pPr>
             <a:r>
-              <a:rPr sz="1200" b="1">
-                <a:solidFill>
-                  <a:srgbClr val="8FC2F0"/>
-                </a:solidFill>
-                <a:latin typeface="Microsoft YaHei"/>
-              </a:rPr>
-              <a:t>最有价值的负结果</a:t>
-            </a:r>
-          </a:p>
-        </p:txBody>
-      </p:sp>
-      <p:sp>
-        <p:nvSpPr>
-          <p:cNvPr id="10" name="TextBox 9"/>
-          <p:cNvSpPr txBox="1"/>
-          <p:nvPr/>
-        </p:nvSpPr>
-        <p:spPr>
-          <a:xfrm>
-            <a:off x="4636008" y="4626864"/>
-            <a:ext cx="2880360" cy="777240"/>
+              <a:rPr sz="1250" b="1">
+                <a:solidFill>
+                  <a:srgbClr val="5A6373"/>
+                </a:solidFill>
+                <a:latin typeface="Microsoft YaHei"/>
+              </a:rPr>
+              <a:t>王天民交付部分</a:t>
+            </a:r>
+          </a:p>
+        </p:txBody>
+      </p:sp>
+      <p:sp>
+        <p:nvSpPr>
+          <p:cNvPr id="15" name="TextBox 14"/>
+          <p:cNvSpPr txBox="1"/>
+          <p:nvPr/>
+        </p:nvSpPr>
+        <p:spPr>
+          <a:xfrm>
+            <a:off x="7452360" y="2505456"/>
+            <a:ext cx="3977639" cy="3785616"/>
           </a:xfrm>
           <a:prstGeom prst="rect">
             <a:avLst/>
@@ -7436,34 +7926,130 @@
           <a:p>
             <a:pPr algn="l">
               <a:lnSpc>
-                <a:spcPct val="130000"/>
+                <a:spcPct val="125000"/>
               </a:lnSpc>
               <a:spcAft>
-                <a:spcPts val="400"/>
-              </a:spcAft>
-            </a:pPr>
-            <a:r>
-              <a:rPr sz="1200" b="0">
-                <a:solidFill>
-                  <a:srgbClr val="FFFFFF"/>
-                </a:solidFill>
-                <a:latin typeface="Microsoft YaHei"/>
-              </a:rPr>
-              <a:t>Marlin 位技巧在 M=1 GEMV 慢 54%，反汇编级根因</a:t>
-            </a:r>
-          </a:p>
-        </p:txBody>
-      </p:sp>
-      <p:sp>
-        <p:nvSpPr>
-          <p:cNvPr id="11" name="Rounded Rectangle 10"/>
+                <a:spcPts val="600"/>
+              </a:spcAft>
+            </a:pPr>
+            <a:r>
+              <a:rPr sz="1150" b="0">
+                <a:solidFill>
+                  <a:srgbClr val="5A6373"/>
+                </a:solidFill>
+                <a:latin typeface="Microsoft YaHei"/>
+              </a:rPr>
+              <a:t>· shape inventory 脚本</a:t>
+            </a:r>
+          </a:p>
+          <a:p>
+            <a:pPr algn="l">
+              <a:lnSpc>
+                <a:spcPct val="125000"/>
+              </a:lnSpc>
+              <a:spcAft>
+                <a:spcPts val="600"/>
+              </a:spcAft>
+            </a:pPr>
+            <a:r>
+              <a:rPr sz="1150" b="0">
+                <a:solidFill>
+                  <a:srgbClr val="5A6373"/>
+                </a:solidFill>
+                <a:latin typeface="Microsoft YaHei"/>
+              </a:rPr>
+              <a:t>· experiment validator 脚本</a:t>
+            </a:r>
+          </a:p>
+          <a:p>
+            <a:pPr algn="l">
+              <a:lnSpc>
+                <a:spcPct val="125000"/>
+              </a:lnSpc>
+              <a:spcAft>
+                <a:spcPts val="600"/>
+              </a:spcAft>
+            </a:pPr>
+            <a:r>
+              <a:rPr sz="1150" b="0">
+                <a:solidFill>
+                  <a:srgbClr val="5A6373"/>
+                </a:solidFill>
+                <a:latin typeface="Microsoft YaHei"/>
+              </a:rPr>
+              <a:t>· campaign manifest 与 README</a:t>
+            </a:r>
+          </a:p>
+          <a:p>
+            <a:pPr algn="l">
+              <a:lnSpc>
+                <a:spcPct val="125000"/>
+              </a:lnSpc>
+              <a:spcAft>
+                <a:spcPts val="600"/>
+              </a:spcAft>
+            </a:pPr>
+            <a:r>
+              <a:rPr sz="1150" b="0">
+                <a:solidFill>
+                  <a:srgbClr val="5A6373"/>
+                </a:solidFill>
+                <a:latin typeface="Microsoft YaHei"/>
+              </a:rPr>
+              <a:t>· 协作交接记录</a:t>
+            </a:r>
+          </a:p>
+        </p:txBody>
+      </p:sp>
+      <p:sp>
+        <p:nvSpPr>
+          <p:cNvPr id="16" name="TextBox 15"/>
+          <p:cNvSpPr txBox="1"/>
+          <p:nvPr/>
+        </p:nvSpPr>
+        <p:spPr>
+          <a:xfrm>
+            <a:off x="640080" y="3694176"/>
+            <a:ext cx="10881360" cy="274320"/>
+          </a:xfrm>
+          <a:prstGeom prst="rect">
+            <a:avLst/>
+          </a:prstGeom>
+          <a:noFill/>
+        </p:spPr>
+        <p:txBody>
+          <a:bodyPr wrap="square" anchor="t" lIns="0" rIns="0" tIns="0" bIns="0">
+            <a:spAutoFit/>
+          </a:bodyPr>
+          <a:lstStyle/>
+          <a:p>
+            <a:pPr algn="l">
+              <a:spcAft>
+                <a:spcPts val="400"/>
+              </a:spcAft>
+            </a:pPr>
+            <a:r>
+              <a:rPr sz="1300" b="1">
+                <a:solidFill>
+                  <a:srgbClr val="0066CC"/>
+                </a:solidFill>
+                <a:latin typeface="Microsoft YaHei"/>
+              </a:rPr>
+              <a:t>本人实际承担的范围</a:t>
+            </a:r>
+          </a:p>
+        </p:txBody>
+      </p:sp>
+      <p:sp>
+        <p:nvSpPr>
+          <p:cNvPr id="17" name="Rounded Rectangle 16"/>
           <p:cNvSpPr/>
           <p:nvPr/>
         </p:nvSpPr>
         <p:spPr>
           <a:xfrm>
-            <a:off x="7863840" y="4114800"/>
-            <a:ext cx="3246120" cy="1371600"/>
+            <a:off x="640080" y="4059936"/>
+            <a:ext cx="5349240" cy="841248"/>
           </a:xfrm>
           <a:prstGeom prst="roundRect">
             <a:avLst>
@@ -7471,10 +8057,12 @@
             </a:avLst>
           </a:prstGeom>
           <a:solidFill>
-            <a:srgbClr val="163860"/>
+            <a:srgbClr val="FFFFFF"/>
           </a:solidFill>
-          <a:ln>
-            <a:noFill/>
+          <a:ln w="12700">
+            <a:solidFill>
+              <a:srgbClr val="DDE1E8"/>
+            </a:solidFill>
           </a:ln>
           <a:effectLst/>
         </p:spPr>
@@ -7500,14 +8088,14 @@
       </p:sp>
       <p:sp>
         <p:nvSpPr>
-          <p:cNvPr id="12" name="TextBox 11"/>
-          <p:cNvSpPr txBox="1"/>
-          <p:nvPr/>
-        </p:nvSpPr>
-        <p:spPr>
-          <a:xfrm>
-            <a:off x="8065008" y="4297680"/>
-            <a:ext cx="2880360" cy="274320"/>
+          <p:cNvPr id="18" name="TextBox 17"/>
+          <p:cNvSpPr txBox="1"/>
+          <p:nvPr/>
+        </p:nvSpPr>
+        <p:spPr>
+          <a:xfrm>
+            <a:off x="841248" y="4169664"/>
+            <a:ext cx="4937760" cy="237744"/>
           </a:xfrm>
           <a:prstGeom prst="rect">
             <a:avLst/>
@@ -7526,27 +8114,590 @@
               </a:spcAft>
             </a:pPr>
             <a:r>
-              <a:rPr sz="1200" b="1">
+              <a:rPr sz="1250" b="1">
+                <a:solidFill>
+                  <a:srgbClr val="0066CC"/>
+                </a:solidFill>
+                <a:latin typeface="Microsoft YaHei"/>
+              </a:rPr>
+              <a:t>模型与 kernel</a:t>
+            </a:r>
+          </a:p>
+        </p:txBody>
+      </p:sp>
+      <p:sp>
+        <p:nvSpPr>
+          <p:cNvPr id="19" name="TextBox 18"/>
+          <p:cNvSpPr txBox="1"/>
+          <p:nvPr/>
+        </p:nvSpPr>
+        <p:spPr>
+          <a:xfrm>
+            <a:off x="841248" y="4443984"/>
+            <a:ext cx="4937760" cy="402336"/>
+          </a:xfrm>
+          <a:prstGeom prst="rect">
+            <a:avLst/>
+          </a:prstGeom>
+          <a:noFill/>
+        </p:spPr>
+        <p:txBody>
+          <a:bodyPr wrap="square" anchor="t" lIns="0" rIns="0" tIns="0" bIns="0">
+            <a:spAutoFit/>
+          </a:bodyPr>
+          <a:lstStyle/>
+          <a:p>
+            <a:pPr algn="l">
+              <a:lnSpc>
+                <a:spcPct val="125000"/>
+              </a:lnSpc>
+              <a:spcAft>
+                <a:spcPts val="400"/>
+              </a:spcAft>
+            </a:pPr>
+            <a:r>
+              <a:rPr sz="1150" b="0">
+                <a:solidFill>
+                  <a:srgbClr val="5A6373"/>
+                </a:solidFill>
+                <a:latin typeface="Microsoft YaHei"/>
+              </a:rPr>
+              <a:t>Qwen3.8 config / loader / weights，48 层 GDN 与 16 层全注意力的 CUDA 实现，W4A16 解包与 GEMM / GEMV kernel</a:t>
+            </a:r>
+          </a:p>
+        </p:txBody>
+      </p:sp>
+      <p:sp>
+        <p:nvSpPr>
+          <p:cNvPr id="20" name="Rounded Rectangle 19"/>
+          <p:cNvSpPr/>
+          <p:nvPr/>
+        </p:nvSpPr>
+        <p:spPr>
+          <a:xfrm>
+            <a:off x="6172200" y="4059936"/>
+            <a:ext cx="5349240" cy="841248"/>
+          </a:xfrm>
+          <a:prstGeom prst="roundRect">
+            <a:avLst>
+              <a:gd name="adj" fmla="val 4000"/>
+            </a:avLst>
+          </a:prstGeom>
+          <a:solidFill>
+            <a:srgbClr val="FFFFFF"/>
+          </a:solidFill>
+          <a:ln w="12700">
+            <a:solidFill>
+              <a:srgbClr val="DDE1E8"/>
+            </a:solidFill>
+          </a:ln>
+          <a:effectLst/>
+        </p:spPr>
+        <p:style>
+          <a:lnRef idx="1">
+            <a:schemeClr val="accent1"/>
+          </a:lnRef>
+          <a:fillRef idx="3">
+            <a:schemeClr val="accent1"/>
+          </a:fillRef>
+          <a:effectRef idx="2">
+            <a:schemeClr val="accent1"/>
+          </a:effectRef>
+          <a:fontRef idx="minor">
+            <a:schemeClr val="lt1"/>
+          </a:fontRef>
+        </p:style>
+        <p:txBody>
+          <a:bodyPr rtlCol="0" anchor="ctr"/>
+          <a:lstStyle/>
+          <a:p/>
+        </p:txBody>
+      </p:sp>
+      <p:sp>
+        <p:nvSpPr>
+          <p:cNvPr id="21" name="TextBox 20"/>
+          <p:cNvSpPr txBox="1"/>
+          <p:nvPr/>
+        </p:nvSpPr>
+        <p:spPr>
+          <a:xfrm>
+            <a:off x="6373368" y="4169664"/>
+            <a:ext cx="4937760" cy="237744"/>
+          </a:xfrm>
+          <a:prstGeom prst="rect">
+            <a:avLst/>
+          </a:prstGeom>
+          <a:noFill/>
+        </p:spPr>
+        <p:txBody>
+          <a:bodyPr wrap="square" anchor="t" lIns="0" rIns="0" tIns="0" bIns="0">
+            <a:spAutoFit/>
+          </a:bodyPr>
+          <a:lstStyle/>
+          <a:p>
+            <a:pPr algn="l">
+              <a:spcAft>
+                <a:spcPts val="400"/>
+              </a:spcAft>
+            </a:pPr>
+            <a:r>
+              <a:rPr sz="1250" b="1">
+                <a:solidFill>
+                  <a:srgbClr val="0066CC"/>
+                </a:solidFill>
+                <a:latin typeface="Microsoft YaHei"/>
+              </a:rPr>
+              <a:t>服务与协议</a:t>
+            </a:r>
+          </a:p>
+        </p:txBody>
+      </p:sp>
+      <p:sp>
+        <p:nvSpPr>
+          <p:cNvPr id="22" name="TextBox 21"/>
+          <p:cNvSpPr txBox="1"/>
+          <p:nvPr/>
+        </p:nvSpPr>
+        <p:spPr>
+          <a:xfrm>
+            <a:off x="6373368" y="4443984"/>
+            <a:ext cx="4937760" cy="402336"/>
+          </a:xfrm>
+          <a:prstGeom prst="rect">
+            <a:avLst/>
+          </a:prstGeom>
+          <a:noFill/>
+        </p:spPr>
+        <p:txBody>
+          <a:bodyPr wrap="square" anchor="t" lIns="0" rIns="0" tIns="0" bIns="0">
+            <a:spAutoFit/>
+          </a:bodyPr>
+          <a:lstStyle/>
+          <a:p>
+            <a:pPr algn="l">
+              <a:lnSpc>
+                <a:spcPct val="125000"/>
+              </a:lnSpc>
+              <a:spcAft>
+                <a:spcPts val="400"/>
+              </a:spcAft>
+            </a:pPr>
+            <a:r>
+              <a:rPr sz="1150" b="0">
+                <a:solidFill>
+                  <a:srgbClr val="5A6373"/>
+                </a:solidFill>
+                <a:latin typeface="Microsoft YaHei"/>
+              </a:rPr>
+              <a:t>HTTP / SSE surface、七项负控、admission、断连取消与故障恢复，/v1/chat/completions 图文入口</a:t>
+            </a:r>
+          </a:p>
+        </p:txBody>
+      </p:sp>
+      <p:sp>
+        <p:nvSpPr>
+          <p:cNvPr id="23" name="Rounded Rectangle 22"/>
+          <p:cNvSpPr/>
+          <p:nvPr/>
+        </p:nvSpPr>
+        <p:spPr>
+          <a:xfrm>
+            <a:off x="640080" y="4992624"/>
+            <a:ext cx="5349240" cy="841248"/>
+          </a:xfrm>
+          <a:prstGeom prst="roundRect">
+            <a:avLst>
+              <a:gd name="adj" fmla="val 4000"/>
+            </a:avLst>
+          </a:prstGeom>
+          <a:solidFill>
+            <a:srgbClr val="FFFFFF"/>
+          </a:solidFill>
+          <a:ln w="12700">
+            <a:solidFill>
+              <a:srgbClr val="DDE1E8"/>
+            </a:solidFill>
+          </a:ln>
+          <a:effectLst/>
+        </p:spPr>
+        <p:style>
+          <a:lnRef idx="1">
+            <a:schemeClr val="accent1"/>
+          </a:lnRef>
+          <a:fillRef idx="3">
+            <a:schemeClr val="accent1"/>
+          </a:fillRef>
+          <a:effectRef idx="2">
+            <a:schemeClr val="accent1"/>
+          </a:effectRef>
+          <a:fontRef idx="minor">
+            <a:schemeClr val="lt1"/>
+          </a:fontRef>
+        </p:style>
+        <p:txBody>
+          <a:bodyPr rtlCol="0" anchor="ctr"/>
+          <a:lstStyle/>
+          <a:p/>
+        </p:txBody>
+      </p:sp>
+      <p:sp>
+        <p:nvSpPr>
+          <p:cNvPr id="24" name="TextBox 23"/>
+          <p:cNvSpPr txBox="1"/>
+          <p:nvPr/>
+        </p:nvSpPr>
+        <p:spPr>
+          <a:xfrm>
+            <a:off x="841248" y="5102352"/>
+            <a:ext cx="4937760" cy="237744"/>
+          </a:xfrm>
+          <a:prstGeom prst="rect">
+            <a:avLst/>
+          </a:prstGeom>
+          <a:noFill/>
+        </p:spPr>
+        <p:txBody>
+          <a:bodyPr wrap="square" anchor="t" lIns="0" rIns="0" tIns="0" bIns="0">
+            <a:spAutoFit/>
+          </a:bodyPr>
+          <a:lstStyle/>
+          <a:p>
+            <a:pPr algn="l">
+              <a:spcAft>
+                <a:spcPts val="400"/>
+              </a:spcAft>
+            </a:pPr>
+            <a:r>
+              <a:rPr sz="1250" b="1">
+                <a:solidFill>
+                  <a:srgbClr val="0066CC"/>
+                </a:solidFill>
+                <a:latin typeface="Microsoft YaHei"/>
+              </a:rPr>
+              <a:t>正确性证据</a:t>
+            </a:r>
+          </a:p>
+        </p:txBody>
+      </p:sp>
+      <p:sp>
+        <p:nvSpPr>
+          <p:cNvPr id="25" name="TextBox 24"/>
+          <p:cNvSpPr txBox="1"/>
+          <p:nvPr/>
+        </p:nvSpPr>
+        <p:spPr>
+          <a:xfrm>
+            <a:off x="841248" y="5376672"/>
+            <a:ext cx="4937760" cy="402336"/>
+          </a:xfrm>
+          <a:prstGeom prst="rect">
+            <a:avLst/>
+          </a:prstGeom>
+          <a:noFill/>
+        </p:spPr>
+        <p:txBody>
+          <a:bodyPr wrap="square" anchor="t" lIns="0" rIns="0" tIns="0" bIns="0">
+            <a:spAutoFit/>
+          </a:bodyPr>
+          <a:lstStyle/>
+          <a:p>
+            <a:pPr algn="l">
+              <a:lnSpc>
+                <a:spcPct val="125000"/>
+              </a:lnSpc>
+              <a:spcAft>
+                <a:spcPts val="400"/>
+              </a:spcAft>
+            </a:pPr>
+            <a:r>
+              <a:rPr sz="1150" b="0">
+                <a:solidFill>
+                  <a:srgbClr val="5A6373"/>
+                </a:solidFill>
+                <a:latin typeface="Microsoft YaHei"/>
+              </a:rPr>
+              <a:t>离线 oracle（文本 + vision）、hidden 代理集、逐层对拍与位相等断言</a:t>
+            </a:r>
+          </a:p>
+        </p:txBody>
+      </p:sp>
+      <p:sp>
+        <p:nvSpPr>
+          <p:cNvPr id="26" name="Rounded Rectangle 25"/>
+          <p:cNvSpPr/>
+          <p:nvPr/>
+        </p:nvSpPr>
+        <p:spPr>
+          <a:xfrm>
+            <a:off x="6172200" y="4992624"/>
+            <a:ext cx="5349240" cy="841248"/>
+          </a:xfrm>
+          <a:prstGeom prst="roundRect">
+            <a:avLst>
+              <a:gd name="adj" fmla="val 4000"/>
+            </a:avLst>
+          </a:prstGeom>
+          <a:solidFill>
+            <a:srgbClr val="FFFFFF"/>
+          </a:solidFill>
+          <a:ln w="12700">
+            <a:solidFill>
+              <a:srgbClr val="DDE1E8"/>
+            </a:solidFill>
+          </a:ln>
+          <a:effectLst/>
+        </p:spPr>
+        <p:style>
+          <a:lnRef idx="1">
+            <a:schemeClr val="accent1"/>
+          </a:lnRef>
+          <a:fillRef idx="3">
+            <a:schemeClr val="accent1"/>
+          </a:fillRef>
+          <a:effectRef idx="2">
+            <a:schemeClr val="accent1"/>
+          </a:effectRef>
+          <a:fontRef idx="minor">
+            <a:schemeClr val="lt1"/>
+          </a:fontRef>
+        </p:style>
+        <p:txBody>
+          <a:bodyPr rtlCol="0" anchor="ctr"/>
+          <a:lstStyle/>
+          <a:p/>
+        </p:txBody>
+      </p:sp>
+      <p:sp>
+        <p:nvSpPr>
+          <p:cNvPr id="27" name="TextBox 26"/>
+          <p:cNvSpPr txBox="1"/>
+          <p:nvPr/>
+        </p:nvSpPr>
+        <p:spPr>
+          <a:xfrm>
+            <a:off x="6373368" y="5102352"/>
+            <a:ext cx="4937760" cy="237744"/>
+          </a:xfrm>
+          <a:prstGeom prst="rect">
+            <a:avLst/>
+          </a:prstGeom>
+          <a:noFill/>
+        </p:spPr>
+        <p:txBody>
+          <a:bodyPr wrap="square" anchor="t" lIns="0" rIns="0" tIns="0" bIns="0">
+            <a:spAutoFit/>
+          </a:bodyPr>
+          <a:lstStyle/>
+          <a:p>
+            <a:pPr algn="l">
+              <a:spcAft>
+                <a:spcPts val="400"/>
+              </a:spcAft>
+            </a:pPr>
+            <a:r>
+              <a:rPr sz="1250" b="1">
+                <a:solidFill>
+                  <a:srgbClr val="0066CC"/>
+                </a:solidFill>
+                <a:latin typeface="Microsoft YaHei"/>
+              </a:rPr>
+              <a:t>性能工程与双 bonus</a:t>
+            </a:r>
+          </a:p>
+        </p:txBody>
+      </p:sp>
+      <p:sp>
+        <p:nvSpPr>
+          <p:cNvPr id="28" name="TextBox 27"/>
+          <p:cNvSpPr txBox="1"/>
+          <p:nvPr/>
+        </p:nvSpPr>
+        <p:spPr>
+          <a:xfrm>
+            <a:off x="6373368" y="5376672"/>
+            <a:ext cx="4937760" cy="402336"/>
+          </a:xfrm>
+          <a:prstGeom prst="rect">
+            <a:avLst/>
+          </a:prstGeom>
+          <a:noFill/>
+        </p:spPr>
+        <p:txBody>
+          <a:bodyPr wrap="square" anchor="t" lIns="0" rIns="0" tIns="0" bIns="0">
+            <a:spAutoFit/>
+          </a:bodyPr>
+          <a:lstStyle/>
+          <a:p>
+            <a:pPr algn="l">
+              <a:lnSpc>
+                <a:spcPct val="125000"/>
+              </a:lnSpc>
+              <a:spcAft>
+                <a:spcPts val="400"/>
+              </a:spcAft>
+            </a:pPr>
+            <a:r>
+              <a:rPr sz="1150" b="0">
+                <a:solidFill>
+                  <a:srgbClr val="5A6373"/>
+                </a:solidFill>
+                <a:latin typeface="Microsoft YaHei"/>
+              </a:rPr>
+              <a:t>十七次配对实验、显存账本、vision 塔 CUDA 移植、C4 批式调度与批式 kernel、REPORT.md、最终集成与提交</a:t>
+            </a:r>
+          </a:p>
+        </p:txBody>
+      </p:sp>
+      <p:sp>
+        <p:nvSpPr>
+          <p:cNvPr id="29" name="TextBox 28"/>
+          <p:cNvSpPr txBox="1"/>
+          <p:nvPr/>
+        </p:nvSpPr>
+        <p:spPr>
+          <a:xfrm>
+            <a:off x="640080" y="6355080"/>
+            <a:ext cx="10972800" cy="274320"/>
+          </a:xfrm>
+          <a:prstGeom prst="rect">
+            <a:avLst/>
+          </a:prstGeom>
+          <a:noFill/>
+        </p:spPr>
+        <p:txBody>
+          <a:bodyPr wrap="square" anchor="t" lIns="0" rIns="0" tIns="0" bIns="0">
+            <a:spAutoFit/>
+          </a:bodyPr>
+          <a:lstStyle/>
+          <a:p>
+            <a:pPr algn="l">
+              <a:spcAft>
+                <a:spcPts val="400"/>
+              </a:spcAft>
+            </a:pPr>
+            <a:r>
+              <a:rPr sz="950" b="0">
+                <a:solidFill>
+                  <a:srgbClr val="5A6373"/>
+                </a:solidFill>
+                <a:latin typeface="Microsoft YaHei"/>
+              </a:rPr>
+              <a:t>比例依据 git 提交记录；原计划的多人并行 lane 实际退化为单人串行，但带锁 GPU 队列与单卡正式重放的纪律始终执行</a:t>
+            </a:r>
+          </a:p>
+        </p:txBody>
+      </p:sp>
+    </p:spTree>
+  </p:cSld>
+  <p:clrMapOvr>
+    <a:masterClrMapping/>
+  </p:clrMapOvr>
+</p:sld>
+</file>
+
+<file path=ppt/slides/slide15.xml><?xml version="1.0" encoding="utf-8"?>
+<p:sld xmlns:a="http://schemas.openxmlformats.org/drawingml/2006/main" xmlns:p="http://schemas.openxmlformats.org/presentationml/2006/main" xmlns:r="http://schemas.openxmlformats.org/officeDocument/2006/relationships">
+  <p:cSld>
+    <p:spTree>
+      <p:nvGrpSpPr>
+        <p:cNvPr id="1" name=""/>
+        <p:cNvGrpSpPr/>
+        <p:nvPr/>
+      </p:nvGrpSpPr>
+      <p:grpSpPr/>
+      <p:sp>
+        <p:nvSpPr>
+          <p:cNvPr id="2" name="Rounded Rectangle 1"/>
+          <p:cNvSpPr/>
+          <p:nvPr/>
+        </p:nvSpPr>
+        <p:spPr>
+          <a:xfrm>
+            <a:off x="0" y="0"/>
+            <a:ext cx="12191695" cy="6858000"/>
+          </a:xfrm>
+          <a:prstGeom prst="roundRect">
+            <a:avLst>
+              <a:gd name="adj" fmla="val 4000"/>
+            </a:avLst>
+          </a:prstGeom>
+          <a:solidFill>
+            <a:srgbClr val="0F2A4A"/>
+          </a:solidFill>
+          <a:ln>
+            <a:noFill/>
+          </a:ln>
+          <a:effectLst/>
+        </p:spPr>
+        <p:style>
+          <a:lnRef idx="1">
+            <a:schemeClr val="accent1"/>
+          </a:lnRef>
+          <a:fillRef idx="3">
+            <a:schemeClr val="accent1"/>
+          </a:fillRef>
+          <a:effectRef idx="2">
+            <a:schemeClr val="accent1"/>
+          </a:effectRef>
+          <a:fontRef idx="minor">
+            <a:schemeClr val="lt1"/>
+          </a:fontRef>
+        </p:style>
+        <p:txBody>
+          <a:bodyPr rtlCol="0" anchor="ctr"/>
+          <a:lstStyle/>
+          <a:p/>
+        </p:txBody>
+      </p:sp>
+      <p:sp>
+        <p:nvSpPr>
+          <p:cNvPr id="3" name="TextBox 2"/>
+          <p:cNvSpPr txBox="1"/>
+          <p:nvPr/>
+        </p:nvSpPr>
+        <p:spPr>
+          <a:xfrm>
+            <a:off x="1005840" y="1234440"/>
+            <a:ext cx="10149840" cy="457200"/>
+          </a:xfrm>
+          <a:prstGeom prst="rect">
+            <a:avLst/>
+          </a:prstGeom>
+          <a:noFill/>
+        </p:spPr>
+        <p:txBody>
+          <a:bodyPr wrap="square" anchor="t" lIns="0" rIns="0" tIns="0" bIns="0">
+            <a:spAutoFit/>
+          </a:bodyPr>
+          <a:lstStyle/>
+          <a:p>
+            <a:pPr algn="l">
+              <a:spcAft>
+                <a:spcPts val="400"/>
+              </a:spcAft>
+            </a:pPr>
+            <a:r>
+              <a:rPr sz="1500" b="1">
                 <a:solidFill>
                   <a:srgbClr val="8FC2F0"/>
                 </a:solidFill>
                 <a:latin typeface="Microsoft YaHei"/>
               </a:rPr>
-              <a:t>最关键的方法</a:t>
-            </a:r>
-          </a:p>
-        </p:txBody>
-      </p:sp>
-      <p:sp>
-        <p:nvSpPr>
-          <p:cNvPr id="13" name="TextBox 12"/>
-          <p:cNvSpPr txBox="1"/>
-          <p:nvPr/>
-        </p:nvSpPr>
-        <p:spPr>
-          <a:xfrm>
-            <a:off x="8065008" y="4626864"/>
-            <a:ext cx="2880360" cy="777240"/>
+              <a:t>为什么叫「4090 能飞」</a:t>
+            </a:r>
+          </a:p>
+        </p:txBody>
+      </p:sp>
+      <p:sp>
+        <p:nvSpPr>
+          <p:cNvPr id="4" name="TextBox 3"/>
+          <p:cNvSpPr txBox="1"/>
+          <p:nvPr/>
+        </p:nvSpPr>
+        <p:spPr>
+          <a:xfrm>
+            <a:off x="1005840" y="1719072"/>
+            <a:ext cx="10149840" cy="1920240"/>
           </a:xfrm>
           <a:prstGeom prst="rect">
             <a:avLst/>
@@ -7564,6 +8715,400 @@
                 <a:spcPct val="130000"/>
               </a:lnSpc>
               <a:spcAft>
+                <a:spcPts val="1000"/>
+              </a:spcAft>
+            </a:pPr>
+            <a:r>
+              <a:rPr sz="2200" b="1">
+                <a:solidFill>
+                  <a:srgbClr val="FFFFFF"/>
+                </a:solidFill>
+                <a:latin typeface="Microsoft YaHei"/>
+              </a:rPr>
+              <a:t>让它飞起来的不是更强的硬件，是看清了瓶颈的真实位置。</a:t>
+            </a:r>
+          </a:p>
+          <a:p>
+            <a:pPr algn="l">
+              <a:lnSpc>
+                <a:spcPct val="135000"/>
+              </a:lnSpc>
+              <a:spcAft>
+                <a:spcPts val="0"/>
+              </a:spcAft>
+            </a:pPr>
+            <a:r>
+              <a:rPr sz="1500" b="0">
+                <a:solidFill>
+                  <a:srgbClr val="C5D9EE"/>
+                </a:solidFill>
+                <a:latin typeface="Microsoft YaHei"/>
+              </a:rPr>
+              <a:t>三个最大的瓶颈都不在算术里：softmax 每个线程重复扫描整行、W4 投影每行重读整个权重矩阵、80% 的 prefill 花在 cudaMalloc。代码没换硬件、没换算法，只是终于测对了地方 —— TTFT 约 47 倍、TPOT 约 2 倍，correctness 与稳定性全程未退让。</a:t>
+            </a:r>
+          </a:p>
+        </p:txBody>
+      </p:sp>
+      <p:sp>
+        <p:nvSpPr>
+          <p:cNvPr id="5" name="Rounded Rectangle 4"/>
+          <p:cNvSpPr/>
+          <p:nvPr/>
+        </p:nvSpPr>
+        <p:spPr>
+          <a:xfrm>
+            <a:off x="1005840" y="4114800"/>
+            <a:ext cx="3246120" cy="1371600"/>
+          </a:xfrm>
+          <a:prstGeom prst="roundRect">
+            <a:avLst>
+              <a:gd name="adj" fmla="val 4000"/>
+            </a:avLst>
+          </a:prstGeom>
+          <a:solidFill>
+            <a:srgbClr val="163860"/>
+          </a:solidFill>
+          <a:ln>
+            <a:noFill/>
+          </a:ln>
+          <a:effectLst/>
+        </p:spPr>
+        <p:style>
+          <a:lnRef idx="1">
+            <a:schemeClr val="accent1"/>
+          </a:lnRef>
+          <a:fillRef idx="3">
+            <a:schemeClr val="accent1"/>
+          </a:fillRef>
+          <a:effectRef idx="2">
+            <a:schemeClr val="accent1"/>
+          </a:effectRef>
+          <a:fontRef idx="minor">
+            <a:schemeClr val="lt1"/>
+          </a:fontRef>
+        </p:style>
+        <p:txBody>
+          <a:bodyPr rtlCol="0" anchor="ctr"/>
+          <a:lstStyle/>
+          <a:p/>
+        </p:txBody>
+      </p:sp>
+      <p:sp>
+        <p:nvSpPr>
+          <p:cNvPr id="6" name="TextBox 5"/>
+          <p:cNvSpPr txBox="1"/>
+          <p:nvPr/>
+        </p:nvSpPr>
+        <p:spPr>
+          <a:xfrm>
+            <a:off x="1207008" y="4297680"/>
+            <a:ext cx="2880360" cy="274320"/>
+          </a:xfrm>
+          <a:prstGeom prst="rect">
+            <a:avLst/>
+          </a:prstGeom>
+          <a:noFill/>
+        </p:spPr>
+        <p:txBody>
+          <a:bodyPr wrap="square" anchor="t" lIns="0" rIns="0" tIns="0" bIns="0">
+            <a:spAutoFit/>
+          </a:bodyPr>
+          <a:lstStyle/>
+          <a:p>
+            <a:pPr algn="l">
+              <a:spcAft>
+                <a:spcPts val="400"/>
+              </a:spcAft>
+            </a:pPr>
+            <a:r>
+              <a:rPr sz="1200" b="1">
+                <a:solidFill>
+                  <a:srgbClr val="8FC2F0"/>
+                </a:solidFill>
+                <a:latin typeface="Microsoft YaHei"/>
+              </a:rPr>
+              <a:t>最大的单点收益</a:t>
+            </a:r>
+          </a:p>
+        </p:txBody>
+      </p:sp>
+      <p:sp>
+        <p:nvSpPr>
+          <p:cNvPr id="7" name="TextBox 6"/>
+          <p:cNvSpPr txBox="1"/>
+          <p:nvPr/>
+        </p:nvSpPr>
+        <p:spPr>
+          <a:xfrm>
+            <a:off x="1207008" y="4626864"/>
+            <a:ext cx="2880360" cy="777240"/>
+          </a:xfrm>
+          <a:prstGeom prst="rect">
+            <a:avLst/>
+          </a:prstGeom>
+          <a:noFill/>
+        </p:spPr>
+        <p:txBody>
+          <a:bodyPr wrap="square" anchor="t" lIns="0" rIns="0" tIns="0" bIns="0">
+            <a:spAutoFit/>
+          </a:bodyPr>
+          <a:lstStyle/>
+          <a:p>
+            <a:pPr algn="l">
+              <a:lnSpc>
+                <a:spcPct val="130000"/>
+              </a:lnSpc>
+              <a:spcAft>
+                <a:spcPts val="400"/>
+              </a:spcAft>
+            </a:pPr>
+            <a:r>
+              <a:rPr sz="1200" b="0">
+                <a:solidFill>
+                  <a:srgbClr val="FFFFFF"/>
+                </a:solidFill>
+                <a:latin typeface="Microsoft YaHei"/>
+              </a:rPr>
+              <a:t>行协作 softmax：16K attention 单层 23.06 s → 0.659 s</a:t>
+            </a:r>
+          </a:p>
+        </p:txBody>
+      </p:sp>
+      <p:sp>
+        <p:nvSpPr>
+          <p:cNvPr id="8" name="Rounded Rectangle 7"/>
+          <p:cNvSpPr/>
+          <p:nvPr/>
+        </p:nvSpPr>
+        <p:spPr>
+          <a:xfrm>
+            <a:off x="4434840" y="4114800"/>
+            <a:ext cx="3246120" cy="1371600"/>
+          </a:xfrm>
+          <a:prstGeom prst="roundRect">
+            <a:avLst>
+              <a:gd name="adj" fmla="val 4000"/>
+            </a:avLst>
+          </a:prstGeom>
+          <a:solidFill>
+            <a:srgbClr val="163860"/>
+          </a:solidFill>
+          <a:ln>
+            <a:noFill/>
+          </a:ln>
+          <a:effectLst/>
+        </p:spPr>
+        <p:style>
+          <a:lnRef idx="1">
+            <a:schemeClr val="accent1"/>
+          </a:lnRef>
+          <a:fillRef idx="3">
+            <a:schemeClr val="accent1"/>
+          </a:fillRef>
+          <a:effectRef idx="2">
+            <a:schemeClr val="accent1"/>
+          </a:effectRef>
+          <a:fontRef idx="minor">
+            <a:schemeClr val="lt1"/>
+          </a:fontRef>
+        </p:style>
+        <p:txBody>
+          <a:bodyPr rtlCol="0" anchor="ctr"/>
+          <a:lstStyle/>
+          <a:p/>
+        </p:txBody>
+      </p:sp>
+      <p:sp>
+        <p:nvSpPr>
+          <p:cNvPr id="9" name="TextBox 8"/>
+          <p:cNvSpPr txBox="1"/>
+          <p:nvPr/>
+        </p:nvSpPr>
+        <p:spPr>
+          <a:xfrm>
+            <a:off x="4636008" y="4297680"/>
+            <a:ext cx="2880360" cy="274320"/>
+          </a:xfrm>
+          <a:prstGeom prst="rect">
+            <a:avLst/>
+          </a:prstGeom>
+          <a:noFill/>
+        </p:spPr>
+        <p:txBody>
+          <a:bodyPr wrap="square" anchor="t" lIns="0" rIns="0" tIns="0" bIns="0">
+            <a:spAutoFit/>
+          </a:bodyPr>
+          <a:lstStyle/>
+          <a:p>
+            <a:pPr algn="l">
+              <a:spcAft>
+                <a:spcPts val="400"/>
+              </a:spcAft>
+            </a:pPr>
+            <a:r>
+              <a:rPr sz="1200" b="1">
+                <a:solidFill>
+                  <a:srgbClr val="8FC2F0"/>
+                </a:solidFill>
+                <a:latin typeface="Microsoft YaHei"/>
+              </a:rPr>
+              <a:t>最有价值的负结果</a:t>
+            </a:r>
+          </a:p>
+        </p:txBody>
+      </p:sp>
+      <p:sp>
+        <p:nvSpPr>
+          <p:cNvPr id="10" name="TextBox 9"/>
+          <p:cNvSpPr txBox="1"/>
+          <p:nvPr/>
+        </p:nvSpPr>
+        <p:spPr>
+          <a:xfrm>
+            <a:off x="4636008" y="4626864"/>
+            <a:ext cx="2880360" cy="777240"/>
+          </a:xfrm>
+          <a:prstGeom prst="rect">
+            <a:avLst/>
+          </a:prstGeom>
+          <a:noFill/>
+        </p:spPr>
+        <p:txBody>
+          <a:bodyPr wrap="square" anchor="t" lIns="0" rIns="0" tIns="0" bIns="0">
+            <a:spAutoFit/>
+          </a:bodyPr>
+          <a:lstStyle/>
+          <a:p>
+            <a:pPr algn="l">
+              <a:lnSpc>
+                <a:spcPct val="130000"/>
+              </a:lnSpc>
+              <a:spcAft>
+                <a:spcPts val="400"/>
+              </a:spcAft>
+            </a:pPr>
+            <a:r>
+              <a:rPr sz="1200" b="0">
+                <a:solidFill>
+                  <a:srgbClr val="FFFFFF"/>
+                </a:solidFill>
+                <a:latin typeface="Microsoft YaHei"/>
+              </a:rPr>
+              <a:t>Marlin 位技巧在 M=1 GEMV 慢 54%，反汇编级根因</a:t>
+            </a:r>
+          </a:p>
+        </p:txBody>
+      </p:sp>
+      <p:sp>
+        <p:nvSpPr>
+          <p:cNvPr id="11" name="Rounded Rectangle 10"/>
+          <p:cNvSpPr/>
+          <p:nvPr/>
+        </p:nvSpPr>
+        <p:spPr>
+          <a:xfrm>
+            <a:off x="7863840" y="4114800"/>
+            <a:ext cx="3246120" cy="1371600"/>
+          </a:xfrm>
+          <a:prstGeom prst="roundRect">
+            <a:avLst>
+              <a:gd name="adj" fmla="val 4000"/>
+            </a:avLst>
+          </a:prstGeom>
+          <a:solidFill>
+            <a:srgbClr val="163860"/>
+          </a:solidFill>
+          <a:ln>
+            <a:noFill/>
+          </a:ln>
+          <a:effectLst/>
+        </p:spPr>
+        <p:style>
+          <a:lnRef idx="1">
+            <a:schemeClr val="accent1"/>
+          </a:lnRef>
+          <a:fillRef idx="3">
+            <a:schemeClr val="accent1"/>
+          </a:fillRef>
+          <a:effectRef idx="2">
+            <a:schemeClr val="accent1"/>
+          </a:effectRef>
+          <a:fontRef idx="minor">
+            <a:schemeClr val="lt1"/>
+          </a:fontRef>
+        </p:style>
+        <p:txBody>
+          <a:bodyPr rtlCol="0" anchor="ctr"/>
+          <a:lstStyle/>
+          <a:p/>
+        </p:txBody>
+      </p:sp>
+      <p:sp>
+        <p:nvSpPr>
+          <p:cNvPr id="12" name="TextBox 11"/>
+          <p:cNvSpPr txBox="1"/>
+          <p:nvPr/>
+        </p:nvSpPr>
+        <p:spPr>
+          <a:xfrm>
+            <a:off x="8065008" y="4297680"/>
+            <a:ext cx="2880360" cy="274320"/>
+          </a:xfrm>
+          <a:prstGeom prst="rect">
+            <a:avLst/>
+          </a:prstGeom>
+          <a:noFill/>
+        </p:spPr>
+        <p:txBody>
+          <a:bodyPr wrap="square" anchor="t" lIns="0" rIns="0" tIns="0" bIns="0">
+            <a:spAutoFit/>
+          </a:bodyPr>
+          <a:lstStyle/>
+          <a:p>
+            <a:pPr algn="l">
+              <a:spcAft>
+                <a:spcPts val="400"/>
+              </a:spcAft>
+            </a:pPr>
+            <a:r>
+              <a:rPr sz="1200" b="1">
+                <a:solidFill>
+                  <a:srgbClr val="8FC2F0"/>
+                </a:solidFill>
+                <a:latin typeface="Microsoft YaHei"/>
+              </a:rPr>
+              <a:t>最关键的方法</a:t>
+            </a:r>
+          </a:p>
+        </p:txBody>
+      </p:sp>
+      <p:sp>
+        <p:nvSpPr>
+          <p:cNvPr id="13" name="TextBox 12"/>
+          <p:cNvSpPr txBox="1"/>
+          <p:nvPr/>
+        </p:nvSpPr>
+        <p:spPr>
+          <a:xfrm>
+            <a:off x="8065008" y="4626864"/>
+            <a:ext cx="2880360" cy="777240"/>
+          </a:xfrm>
+          <a:prstGeom prst="rect">
+            <a:avLst/>
+          </a:prstGeom>
+          <a:noFill/>
+        </p:spPr>
+        <p:txBody>
+          <a:bodyPr wrap="square" anchor="t" lIns="0" rIns="0" tIns="0" bIns="0">
+            <a:spAutoFit/>
+          </a:bodyPr>
+          <a:lstStyle/>
+          <a:p>
+            <a:pPr algn="l">
+              <a:lnSpc>
+                <a:spcPct val="130000"/>
+              </a:lnSpc>
+              <a:spcAft>
                 <a:spcPts val="400"/>
               </a:spcAft>
             </a:pPr>
@@ -7613,7 +9158,7 @@
                 </a:solidFill>
                 <a:latin typeface="Consolas"/>
               </a:rPr>
-              <a:t>commit 489f77adeeca08ae798df704ffe625f97f2bfca6 · branch integrate/member2</a:t>
+              <a:t>commit 06993a2d2642c6f7177b57493b797d5d537e4d64 · branch integrate/member2</a:t>
             </a:r>
           </a:p>
         </p:txBody>
@@ -10061,7 +11606,7 @@
                 </a:solidFill>
                 <a:latin typeface="Microsoft YaHei"/>
               </a:rPr>
-              <a:t>— 多模态 bonus 交付 </a:t>
+              <a:t>— 多模态 + C4 双 bonus 交付 </a:t>
             </a:r>
             <a:r>
               <a:rPr sz="1250">
@@ -10070,7 +11615,7 @@
                 </a:solidFill>
                 <a:latin typeface="Microsoft YaHei"/>
               </a:rPr>
-              <a:t>自建图片探针 4/4 精确、混合 soak 36/36，冻结文本请求输出字节不变</a:t>
+              <a:t>图文探针 4/4、混合 soak 36/36；C4 官方校准全门通过（Jain 0.9993，goodput 23.53 tok/s）</a:t>
             </a:r>
           </a:p>
           <a:p>

--- a/pdf/项目6_程仁龙_4090能飞_v1.pptx
+++ b/pdf/项目6_程仁龙_4090能飞_v1.pptx
@@ -3178,7 +3178,9 @@
                 <a:solidFill>
                   <a:srgbClr val="8FC2F0"/>
                 </a:solidFill>
-                <a:latin typeface="Microsoft YaHei"/>
+                <a:latin typeface="SimHei"/>
+                <a:ea typeface="SimHei"/>
+                <a:cs typeface="SimHei"/>
               </a:rPr>
               <a:t>项目6 · Agent for Kernel</a:t>
             </a:r>
@@ -3217,7 +3219,9 @@
                 <a:solidFill>
                   <a:srgbClr val="FFFFFF"/>
                 </a:solidFill>
-                <a:latin typeface="Microsoft YaHei"/>
+                <a:latin typeface="SimHei"/>
+                <a:ea typeface="SimHei"/>
+                <a:cs typeface="SimHei"/>
               </a:rPr>
               <a:t>4090 能飞</a:t>
             </a:r>
@@ -3256,7 +3260,9 @@
                 <a:solidFill>
                   <a:srgbClr val="C5D9EE"/>
                 </a:solidFill>
-                <a:latin typeface="Microsoft YaHei"/>
+                <a:latin typeface="SimHei"/>
+                <a:ea typeface="SimHei"/>
+                <a:cs typeface="SimHei"/>
               </a:rPr>
               <a:t>Qwen3.8-27B W4A16 单卡 RTX 4090 推理引擎</a:t>
             </a:r>
@@ -3295,7 +3301,9 @@
                 <a:solidFill>
                   <a:srgbClr val="9FBEDE"/>
                 </a:solidFill>
-                <a:latin typeface="Microsoft YaHei"/>
+                <a:latin typeface="SimHei"/>
+                <a:ea typeface="SimHei"/>
+                <a:cs typeface="SimHei"/>
               </a:rPr>
               <a:t>一张卡、4.6 GiB 余量，从零实现 64 层混合架构；16K 首 token 从 27 分钟到 34 秒</a:t>
             </a:r>
@@ -3334,7 +3342,9 @@
                 <a:solidFill>
                   <a:srgbClr val="0066CC"/>
                 </a:solidFill>
-                <a:latin typeface="Microsoft YaHei"/>
+                <a:latin typeface="SimHei"/>
+                <a:ea typeface="SimHei"/>
+                <a:cs typeface="SimHei"/>
               </a:rPr>
               <a:t>架构</a:t>
             </a:r>
@@ -3350,7 +3360,9 @@
                 <a:solidFill>
                   <a:srgbClr val="5A6373"/>
                 </a:solidFill>
-                <a:latin typeface="Microsoft YaHei"/>
+                <a:latin typeface="SimHei"/>
+                <a:ea typeface="SimHei"/>
+                <a:cs typeface="SimHei"/>
               </a:rPr>
               <a:t>48 GDN + 16 全注意力，共 64 层</a:t>
             </a:r>
@@ -3389,7 +3401,9 @@
                 <a:solidFill>
                   <a:srgbClr val="0066CC"/>
                 </a:solidFill>
-                <a:latin typeface="Microsoft YaHei"/>
+                <a:latin typeface="SimHei"/>
+                <a:ea typeface="SimHei"/>
+                <a:cs typeface="SimHei"/>
               </a:rPr>
               <a:t>量化</a:t>
             </a:r>
@@ -3405,7 +3419,9 @@
                 <a:solidFill>
                   <a:srgbClr val="5A6373"/>
                 </a:solidFill>
-                <a:latin typeface="Microsoft YaHei"/>
+                <a:latin typeface="SimHei"/>
+                <a:ea typeface="SimHei"/>
+                <a:cs typeface="SimHei"/>
               </a:rPr>
               <a:t>compressed-tensors W4A16 group-32 asymmetric</a:t>
             </a:r>
@@ -3444,7 +3460,9 @@
                 <a:solidFill>
                   <a:srgbClr val="0066CC"/>
                 </a:solidFill>
-                <a:latin typeface="Microsoft YaHei"/>
+                <a:latin typeface="SimHei"/>
+                <a:ea typeface="SimHei"/>
+                <a:cs typeface="SimHei"/>
               </a:rPr>
               <a:t>硬件</a:t>
             </a:r>
@@ -3460,7 +3478,9 @@
                 <a:solidFill>
                   <a:srgbClr val="5A6373"/>
                 </a:solidFill>
-                <a:latin typeface="Microsoft YaHei"/>
+                <a:latin typeface="SimHei"/>
+                <a:ea typeface="SimHei"/>
+                <a:cs typeface="SimHei"/>
               </a:rPr>
               <a:t>单张 RTX 4090 (SM89, 24 GiB)，TP=PP=DP=1</a:t>
             </a:r>
@@ -3499,7 +3519,9 @@
                 <a:solidFill>
                   <a:srgbClr val="0066CC"/>
                 </a:solidFill>
-                <a:latin typeface="Microsoft YaHei"/>
+                <a:latin typeface="SimHei"/>
+                <a:ea typeface="SimHei"/>
+                <a:cs typeface="SimHei"/>
               </a:rPr>
               <a:t>提交</a:t>
             </a:r>
@@ -3515,7 +3537,9 @@
                 <a:solidFill>
                   <a:srgbClr val="5A6373"/>
                 </a:solidFill>
-                <a:latin typeface="Consolas"/>
+                <a:latin typeface="SimHei"/>
+                <a:ea typeface="SimHei"/>
+                <a:cs typeface="SimHei"/>
               </a:rPr>
               <a:t>commit 06993a2d2642c6f7177b57493b797d5d537e4d64</a:t>
             </a:r>
@@ -3554,7 +3578,9 @@
                 <a:solidFill>
                   <a:srgbClr val="0066CC"/>
                 </a:solidFill>
-                <a:latin typeface="Microsoft YaHei"/>
+                <a:latin typeface="SimHei"/>
+                <a:ea typeface="SimHei"/>
+                <a:cs typeface="SimHei"/>
               </a:rPr>
               <a:t>团队</a:t>
             </a:r>
@@ -3570,7 +3596,9 @@
                 <a:solidFill>
                   <a:srgbClr val="5A6373"/>
                 </a:solidFill>
-                <a:latin typeface="Microsoft YaHei"/>
+                <a:latin typeface="SimHei"/>
+                <a:ea typeface="SimHei"/>
+                <a:cs typeface="SimHei"/>
               </a:rPr>
               <a:t>程仁龙（负责人）· 王天民</a:t>
             </a:r>
@@ -3609,7 +3637,9 @@
                 <a:solidFill>
                   <a:srgbClr val="0066CC"/>
                 </a:solidFill>
-                <a:latin typeface="Microsoft YaHei"/>
+                <a:latin typeface="SimHei"/>
+                <a:ea typeface="SimHei"/>
+                <a:cs typeface="SimHei"/>
               </a:rPr>
               <a:t>命名说明</a:t>
             </a:r>
@@ -3625,7 +3655,9 @@
                 <a:solidFill>
                   <a:srgbClr val="5A6373"/>
                 </a:solidFill>
-                <a:latin typeface="Microsoft YaHei"/>
+                <a:latin typeface="SimHei"/>
+                <a:ea typeface="SimHei"/>
+                <a:cs typeface="SimHei"/>
               </a:rPr>
               <a:t>商品名 Qwen3.8；checkpoint 内 HF 架构为 qwen3_5，代码模块因此名为 qwen35</a:t>
             </a:r>
@@ -3708,9 +3740,11 @@
                 <a:solidFill>
                   <a:srgbClr val="1A1D24"/>
                 </a:solidFill>
-                <a:latin typeface="Microsoft YaHei"/>
-              </a:rPr>
-              <a:t>本次汇报的四条主线</a:t>
+                <a:latin typeface="SimHei"/>
+                <a:ea typeface="SimHei"/>
+                <a:cs typeface="SimHei"/>
+              </a:rPr>
+              <a:t>汇报主线</a:t>
             </a:r>
           </a:p>
           <a:p>
@@ -3724,7 +3758,9 @@
                 <a:solidFill>
                   <a:srgbClr val="5A6373"/>
                 </a:solidFill>
-                <a:latin typeface="Microsoft YaHei"/>
+                <a:latin typeface="SimHei"/>
+                <a:ea typeface="SimHei"/>
+                <a:cs typeface="SimHei"/>
               </a:rPr>
               <a:t>① 取得文本 eligibility：协议 12/12、公开功能 6/6、200 请求 soak 100%、7 个性能 cell 全部有效</a:t>
             </a:r>
@@ -3740,7 +3776,9 @@
                 <a:solidFill>
                   <a:srgbClr val="5A6373"/>
                 </a:solidFill>
-                <a:latin typeface="Microsoft YaHei"/>
+                <a:latin typeface="SimHei"/>
+                <a:ea typeface="SimHei"/>
+                <a:cs typeface="SimHei"/>
               </a:rPr>
               <a:t>② 用可回滚的配对实验做性能工程：九项接受、八项拒绝，TTFT 约 47 倍、TPOT 约 2 倍</a:t>
             </a:r>
@@ -3756,7 +3794,9 @@
                 <a:solidFill>
                   <a:srgbClr val="5A6373"/>
                 </a:solidFill>
-                <a:latin typeface="Microsoft YaHei"/>
+                <a:latin typeface="SimHei"/>
+                <a:ea typeface="SimHei"/>
+                <a:cs typeface="SimHei"/>
               </a:rPr>
               <a:t>③ 交付双 bonus：多模态图文链路（探针 4/4、文本数值零变化）+ C4 四路并发（官方校准全门通过，goodput 23.5 tok/s）</a:t>
             </a:r>
@@ -3772,9 +3812,11 @@
                 <a:solidFill>
                   <a:srgbClr val="C0392B"/>
                 </a:solidFill>
-                <a:latin typeface="Microsoft YaHei"/>
-              </a:rPr>
-              <a:t>④ 如实报告边界：无平台批准的 scorer 产物，不声称任何评分结论</a:t>
+                <a:latin typeface="SimHei"/>
+                <a:ea typeface="SimHei"/>
+                <a:cs typeface="SimHei"/>
+              </a:rPr>
+              <a:t>④ 评测边界：无平台批准的 scorer 产物，不声称任何评分结论</a:t>
             </a:r>
           </a:p>
         </p:txBody>
@@ -3811,9 +3853,11 @@
                 <a:solidFill>
                   <a:srgbClr val="5A6373"/>
                 </a:solidFill>
-                <a:latin typeface="Microsoft YaHei"/>
-              </a:rPr>
-              <a:t>所有数据均来自实测记录（/tmp/apxinf-evidence/ 与 REPORT.md），无估算值</a:t>
+                <a:latin typeface="SimHei"/>
+                <a:ea typeface="SimHei"/>
+                <a:cs typeface="SimHei"/>
+              </a:rPr>
+              <a:t>所有数据均来自实测记录（随附证据档案与 REPORT.md），无估算值</a:t>
             </a:r>
           </a:p>
         </p:txBody>
@@ -3868,7 +3912,9 @@
                 <a:solidFill>
                   <a:srgbClr val="0066CC"/>
                 </a:solidFill>
-                <a:latin typeface="Microsoft YaHei"/>
+                <a:latin typeface="SimHei"/>
+                <a:ea typeface="SimHei"/>
+                <a:cs typeface="SimHei"/>
               </a:rPr>
               <a:t>LIMITS</a:t>
             </a:r>
@@ -3907,9 +3953,11 @@
                 <a:solidFill>
                   <a:srgbClr val="1A1D24"/>
                 </a:solidFill>
-                <a:latin typeface="Microsoft YaHei"/>
-              </a:rPr>
-              <a:t>已知限制与诚实边界</a:t>
+                <a:latin typeface="SimHei"/>
+                <a:ea typeface="SimHei"/>
+                <a:cs typeface="SimHei"/>
+              </a:rPr>
+              <a:t>已知限制与评测边界</a:t>
             </a:r>
           </a:p>
         </p:txBody>
@@ -3990,9 +4038,11 @@
                 <a:solidFill>
                   <a:srgbClr val="1A1D24"/>
                 </a:solidFill>
-                <a:latin typeface="Microsoft YaHei"/>
-              </a:rPr>
-              <a:t>以下每一项都写在 REPORT.md 中，不因影响观感而省略。</a:t>
+                <a:latin typeface="SimHei"/>
+                <a:ea typeface="SimHei"/>
+                <a:cs typeface="SimHei"/>
+              </a:rPr>
+              <a:t>以下各项均已完整写入 REPORT.md。</a:t>
             </a:r>
           </a:p>
         </p:txBody>
@@ -4029,9 +4079,11 @@
                 <a:solidFill>
                   <a:srgbClr val="C0392B"/>
                 </a:solidFill>
-                <a:latin typeface="Microsoft YaHei"/>
-              </a:rPr>
-              <a:t>不能声称的结论</a:t>
+                <a:latin typeface="SimHei"/>
+                <a:ea typeface="SimHei"/>
+                <a:cs typeface="SimHei"/>
+              </a:rPr>
+              <a:t>不作声称的结论</a:t>
             </a:r>
           </a:p>
         </p:txBody>
@@ -4063,7 +4115,7 @@
                 <a:spcPct val="125000"/>
               </a:lnSpc>
               <a:spcAft>
-                <a:spcPts val="900"/>
+                <a:spcPts val="1000"/>
               </a:spcAft>
             </a:pPr>
             <a:r>
@@ -4071,7 +4123,9 @@
                 <a:solidFill>
                   <a:srgbClr val="1A1D24"/>
                 </a:solidFill>
-                <a:latin typeface="Microsoft YaHei"/>
+                <a:latin typeface="SimHei"/>
+                <a:ea typeface="SimHei"/>
+                <a:cs typeface="SimHei"/>
               </a:rPr>
               <a:t>— 无正式 scorer 产物 </a:t>
             </a:r>
@@ -4080,9 +4134,11 @@
                 <a:solidFill>
                   <a:srgbClr val="5A6373"/>
                 </a:solidFill>
-                <a:latin typeface="Microsoft YaHei"/>
-              </a:rPr>
-              <a:t>run_evaluation.py 需要平台批准的 --trajectory-reference（vLLM 对照），本机不存在；未使用 --capture 自捕获自评分</a:t>
+                <a:latin typeface="SimHei"/>
+                <a:ea typeface="SimHei"/>
+                <a:cs typeface="SimHei"/>
+              </a:rPr>
+              <a:t>评分需平台批准的 trajectory reference，本机不存在；未以自捕获方式自评分</a:t>
             </a:r>
           </a:p>
           <a:p>
@@ -4091,7 +4147,7 @@
                 <a:spcPct val="125000"/>
               </a:lnSpc>
               <a:spcAft>
-                <a:spcPts val="900"/>
+                <a:spcPts val="1000"/>
               </a:spcAft>
             </a:pPr>
             <a:r>
@@ -4099,7 +4155,9 @@
                 <a:solidFill>
                   <a:srgbClr val="1A1D24"/>
                 </a:solidFill>
-                <a:latin typeface="Microsoft YaHei"/>
+                <a:latin typeface="SimHei"/>
+                <a:ea typeface="SimHei"/>
+                <a:cs typeface="SimHei"/>
               </a:rPr>
               <a:t>— 因此不声称 </a:t>
             </a:r>
@@ -4108,9 +4166,11 @@
                 <a:solidFill>
                   <a:srgbClr val="5A6373"/>
                 </a:solidFill>
-                <a:latin typeface="Microsoft YaHei"/>
-              </a:rPr>
-              <a:t>eligible=true、trajectory 得分、基础 100 分，或任何多模态得分</a:t>
+                <a:latin typeface="SimHei"/>
+                <a:ea typeface="SimHei"/>
+                <a:cs typeface="SimHei"/>
+              </a:rPr>
+              <a:t>eligible、trajectory 得分、基础分或多模态得分</a:t>
             </a:r>
           </a:p>
           <a:p>
@@ -4119,7 +4179,7 @@
                 <a:spcPct val="125000"/>
               </a:lnSpc>
               <a:spcAft>
-                <a:spcPts val="900"/>
+                <a:spcPts val="1000"/>
               </a:spcAft>
             </a:pPr>
             <a:r>
@@ -4127,7 +4187,9 @@
                 <a:solidFill>
                   <a:srgbClr val="1A1D24"/>
                 </a:solidFill>
-                <a:latin typeface="Microsoft YaHei"/>
+                <a:latin typeface="SimHei"/>
+                <a:ea typeface="SimHei"/>
+                <a:cs typeface="SimHei"/>
               </a:rPr>
               <a:t>— no_xid 为间接证据 </a:t>
             </a:r>
@@ -4136,9 +4198,11 @@
                 <a:solidFill>
                   <a:srgbClr val="5A6373"/>
                 </a:solidFill>
-                <a:latin typeface="Microsoft YaHei"/>
-              </a:rPr>
-              <a:t>本机 dmesg 无读取权限，改以「服务日志零 CUDA 错误 + GPU 计数稳定」佐证，并明确标注为间接</a:t>
+                <a:latin typeface="SimHei"/>
+                <a:ea typeface="SimHei"/>
+                <a:cs typeface="SimHei"/>
+              </a:rPr>
+              <a:t>dmesg 无读取权限，以服务日志零 CUDA 错误 + GPU 计数稳定佐证，已标注为间接</a:t>
             </a:r>
           </a:p>
           <a:p>
@@ -4147,7 +4211,7 @@
                 <a:spcPct val="125000"/>
               </a:lnSpc>
               <a:spcAft>
-                <a:spcPts val="900"/>
+                <a:spcPts val="1000"/>
               </a:spcAft>
             </a:pPr>
             <a:r>
@@ -4155,18 +4219,22 @@
                 <a:solidFill>
                   <a:srgbClr val="1A1D24"/>
                 </a:solidFill>
-                <a:latin typeface="Microsoft YaHei"/>
-              </a:rPr>
-              <a:t>— hidden 用自建 proxy </a:t>
+                <a:latin typeface="SimHei"/>
+                <a:ea typeface="SimHei"/>
+                <a:cs typeface="SimHei"/>
+              </a:rPr>
+              <a:t>— hidden 用自建代理集 </a:t>
             </a:r>
             <a:r>
               <a:rPr sz="1200">
                 <a:solidFill>
                   <a:srgbClr val="5A6373"/>
                 </a:solidFill>
-                <a:latin typeface="Microsoft YaHei"/>
-              </a:rPr>
-              <a:t>官方 hidden 集不可得，11/12 来自独立种子的代理集，已明确标注非官方</a:t>
+                <a:latin typeface="SimHei"/>
+                <a:ea typeface="SimHei"/>
+                <a:cs typeface="SimHei"/>
+              </a:rPr>
+              <a:t>官方 hidden 集不可得，11/12 来自独立种子代理集</a:t>
             </a:r>
           </a:p>
           <a:p>
@@ -4175,7 +4243,7 @@
                 <a:spcPct val="125000"/>
               </a:lnSpc>
               <a:spcAft>
-                <a:spcPts val="900"/>
+                <a:spcPts val="1000"/>
               </a:spcAft>
             </a:pPr>
             <a:r>
@@ -4183,18 +4251,22 @@
                 <a:solidFill>
                   <a:srgbClr val="1A1D24"/>
                 </a:solidFill>
-                <a:latin typeface="Microsoft YaHei"/>
-              </a:rPr>
-              <a:t>— 多模态官方套件不在本机 </a:t>
+                <a:latin typeface="SimHei"/>
+                <a:ea typeface="SimHei"/>
+                <a:cs typeface="SimHei"/>
+              </a:rPr>
+              <a:t>— 图片套件不在本机 </a:t>
             </a:r>
             <a:r>
               <a:rPr sz="1200">
                 <a:solidFill>
                   <a:srgbClr val="5A6373"/>
                 </a:solidFill>
-                <a:latin typeface="Microsoft YaHei"/>
-              </a:rPr>
-              <a:t>「public 4/4」属平台运行项；自建 4 探针同构同格式但非官方公开集</a:t>
+                <a:latin typeface="SimHei"/>
+                <a:ea typeface="SimHei"/>
+                <a:cs typeface="SimHei"/>
+              </a:rPr>
+              <a:t>public 4/4 属平台运行项；自建探针非官方公开集</a:t>
             </a:r>
           </a:p>
         </p:txBody>
@@ -4231,9 +4303,11 @@
                 <a:solidFill>
                   <a:srgbClr val="C0392B"/>
                 </a:solidFill>
-                <a:latin typeface="Microsoft YaHei"/>
-              </a:rPr>
-              <a:t>性能与 bonus 的现实边界</a:t>
+                <a:latin typeface="SimHei"/>
+                <a:ea typeface="SimHei"/>
+                <a:cs typeface="SimHei"/>
+              </a:rPr>
+              <a:t>性能与 bonus 的边界</a:t>
             </a:r>
           </a:p>
         </p:txBody>
@@ -4265,7 +4339,7 @@
                 <a:spcPct val="125000"/>
               </a:lnSpc>
               <a:spcAft>
-                <a:spcPts val="900"/>
+                <a:spcPts val="1000"/>
               </a:spcAft>
             </a:pPr>
             <a:r>
@@ -4273,7 +4347,9 @@
                 <a:solidFill>
                   <a:srgbClr val="1A1D24"/>
                 </a:solidFill>
-                <a:latin typeface="Microsoft YaHei"/>
+                <a:latin typeface="SimHei"/>
+                <a:ea typeface="SimHei"/>
+                <a:cs typeface="SimHei"/>
               </a:rPr>
               <a:t>— 与合同标尺的距离 </a:t>
             </a:r>
@@ -4282,9 +4358,11 @@
                 <a:solidFill>
                   <a:srgbClr val="5A6373"/>
                 </a:solidFill>
-                <a:latin typeface="Microsoft YaHei"/>
-              </a:rPr>
-              <a:t>prefill 距算术下限约 4.8 倍（1K），decode 距带宽下限约 3.3 倍；TTFT/TPOT 的 60 分按同轮最优参考计分，本实现难以取得动态分</a:t>
+                <a:latin typeface="SimHei"/>
+                <a:ea typeface="SimHei"/>
+                <a:cs typeface="SimHei"/>
+              </a:rPr>
+              <a:t>prefill 距算术下限约 4.8 倍，decode 距带宽下限约 3.3 倍；动态分按同轮最优参考计分</a:t>
             </a:r>
           </a:p>
           <a:p>
@@ -4293,7 +4371,7 @@
                 <a:spcPct val="125000"/>
               </a:lnSpc>
               <a:spcAft>
-                <a:spcPts val="900"/>
+                <a:spcPts val="1000"/>
               </a:spcAft>
             </a:pPr>
             <a:r>
@@ -4301,18 +4379,22 @@
                 <a:solidFill>
                   <a:srgbClr val="1A1D24"/>
                 </a:solidFill>
-                <a:latin typeface="Microsoft YaHei"/>
-              </a:rPr>
-              <a:t>— decode 已到局部最优 </a:t>
+                <a:latin typeface="SimHei"/>
+                <a:ea typeface="SimHei"/>
+                <a:cs typeface="SimHei"/>
+              </a:rPr>
+              <a:t>— decode 达局部最优 </a:t>
             </a:r>
             <a:r>
               <a:rPr sz="1200">
                 <a:solidFill>
                   <a:srgbClr val="5A6373"/>
                 </a:solidFill>
-                <a:latin typeface="Microsoft YaHei"/>
-              </a:rPr>
-              <a:t>五次尝试全部失败，反汇编证明 M=1 GEMV 受延迟而非吞吐限制；要突破需 M ≥ 8 的融合 dequant-MMA</a:t>
+                <a:latin typeface="SimHei"/>
+                <a:ea typeface="SimHei"/>
+                <a:cs typeface="SimHei"/>
+              </a:rPr>
+              <a:t>五次微优化实测均无效，反汇编证明 M=1 GEMV 受延迟限制；突破需 M≥8 的融合 dequant-MMA</a:t>
             </a:r>
           </a:p>
           <a:p>
@@ -4321,7 +4403,7 @@
                 <a:spcPct val="125000"/>
               </a:lnSpc>
               <a:spcAft>
-                <a:spcPts val="900"/>
+                <a:spcPts val="1000"/>
               </a:spcAft>
             </a:pPr>
             <a:r>
@@ -4329,18 +4411,22 @@
                 <a:solidFill>
                   <a:srgbClr val="1A1D24"/>
                 </a:solidFill>
-                <a:latin typeface="Microsoft YaHei"/>
-              </a:rPr>
-              <a:t>— 长上下文封顶 3.33 分 </a:t>
+                <a:latin typeface="SimHei"/>
+                <a:ea typeface="SimHei"/>
+                <a:cs typeface="SimHei"/>
+              </a:rPr>
+              <a:t>— 长上下文受显存限制 </a:t>
             </a:r>
             <a:r>
               <a:rPr sz="1200">
                 <a:solidFill>
                   <a:srgbClr val="5A6373"/>
                 </a:solidFill>
-                <a:latin typeface="Microsoft YaHei"/>
-              </a:rPr>
-              <a:t>65536 需 4923 MiB、可用 4606 MiB；131072 需 9403 MiB，即便 INT8 KV 也不可行</a:t>
+                <a:latin typeface="SimHei"/>
+                <a:ea typeface="SimHei"/>
+                <a:cs typeface="SimHei"/>
+              </a:rPr>
+              <a:t>65536 需 4923 MiB、可用 4606 MiB；131072 不可行</a:t>
             </a:r>
           </a:p>
           <a:p>
@@ -4349,7 +4435,7 @@
                 <a:spcPct val="125000"/>
               </a:lnSpc>
               <a:spcAft>
-                <a:spcPts val="900"/>
+                <a:spcPts val="1000"/>
               </a:spcAft>
             </a:pPr>
             <a:r>
@@ -4357,7 +4443,9 @@
                 <a:solidFill>
                   <a:srgbClr val="1A1D24"/>
                 </a:solidFill>
-                <a:latin typeface="Microsoft YaHei"/>
+                <a:latin typeface="SimHei"/>
+                <a:ea typeface="SimHei"/>
+                <a:cs typeface="SimHei"/>
               </a:rPr>
               <a:t>— C8 与 MTP 未交付 </a:t>
             </a:r>
@@ -4366,9 +4454,11 @@
                 <a:solidFill>
                   <a:srgbClr val="5A6373"/>
                 </a:solidFill>
-                <a:latin typeface="Microsoft YaHei"/>
-              </a:rPr>
-              <a:t>C4 已交付；C8 差在显存——8 份完整请求态需 4.1 GiB，超出 2.36 GiB 预算，共享 scratch 的路径已量化但未实现</a:t>
+                <a:latin typeface="SimHei"/>
+                <a:ea typeface="SimHei"/>
+                <a:cs typeface="SimHei"/>
+              </a:rPr>
+              <a:t>C4 已交付；C8 需 4.1 GiB 超出预算，共享 scratch 的改造路径已量化但未实现</a:t>
             </a:r>
           </a:p>
         </p:txBody>
@@ -4405,9 +4495,11 @@
                 <a:solidFill>
                   <a:srgbClr val="5A6373"/>
                 </a:solidFill>
-                <a:latin typeface="Microsoft YaHei"/>
-              </a:rPr>
-              <a:t>PR review 的「分析与决策」正建立在这些负结果之上：八项拒绝各有数据与根因</a:t>
+                <a:latin typeface="SimHei"/>
+                <a:ea typeface="SimHei"/>
+                <a:cs typeface="SimHei"/>
+              </a:rPr>
+              <a:t>八项被拒实验均保留数据与根因分析，作为负结果证据记录于 REPORT.md</a:t>
             </a:r>
           </a:p>
         </p:txBody>
@@ -4462,7 +4554,9 @@
                 <a:solidFill>
                   <a:srgbClr val="0066CC"/>
                 </a:solidFill>
-                <a:latin typeface="Microsoft YaHei"/>
+                <a:latin typeface="SimHei"/>
+                <a:ea typeface="SimHei"/>
+                <a:cs typeface="SimHei"/>
               </a:rPr>
               <a:t>BONUS</a:t>
             </a:r>
@@ -4501,7 +4595,9 @@
                 <a:solidFill>
                   <a:srgbClr val="1A1D24"/>
                 </a:solidFill>
-                <a:latin typeface="Microsoft YaHei"/>
+                <a:latin typeface="SimHei"/>
+                <a:ea typeface="SimHei"/>
+                <a:cs typeface="SimHei"/>
               </a:rPr>
               <a:t>多模态 bonus：完整交付</a:t>
             </a:r>
@@ -4584,7 +4680,9 @@
                 <a:solidFill>
                   <a:srgbClr val="1A1D24"/>
                 </a:solidFill>
-                <a:latin typeface="Microsoft YaHei"/>
+                <a:latin typeface="SimHei"/>
+                <a:ea typeface="SimHei"/>
+                <a:cs typeface="SimHei"/>
               </a:rPr>
               <a:t>完整 vision 路径 + POST /v1/chat/completions 已接入服务；APXINF_ENABLE_MULTIMODAL=1 单开关启用，默认文本配置行为与数值零变化。</a:t>
             </a:r>
@@ -4623,9 +4721,11 @@
                 <a:solidFill>
                   <a:srgbClr val="0E8A4F"/>
                 </a:solidFill>
-                <a:latin typeface="Microsoft YaHei"/>
-              </a:rPr>
-              <a:t>正确性证据链（每阶段取可得的最强判据）</a:t>
+                <a:latin typeface="SimHei"/>
+                <a:ea typeface="SimHei"/>
+                <a:cs typeface="SimHei"/>
+              </a:rPr>
+              <a:t>正确性验证（逐阶段）</a:t>
             </a:r>
           </a:p>
         </p:txBody>
@@ -4657,7 +4757,7 @@
                 <a:spcPct val="125000"/>
               </a:lnSpc>
               <a:spcAft>
-                <a:spcPts val="900"/>
+                <a:spcPts val="1000"/>
               </a:spcAft>
             </a:pPr>
             <a:r>
@@ -4665,7 +4765,9 @@
                 <a:solidFill>
                   <a:srgbClr val="1A1D24"/>
                 </a:solidFill>
-                <a:latin typeface="Microsoft YaHei"/>
+                <a:latin typeface="SimHei"/>
+                <a:ea typeface="SimHei"/>
+                <a:cs typeface="SimHei"/>
               </a:rPr>
               <a:t>— 预处理位相等 </a:t>
             </a:r>
@@ -4674,9 +4776,11 @@
                 <a:solidFill>
                   <a:srgbClr val="5A6373"/>
                 </a:solidFill>
-                <a:latin typeface="Microsoft YaHei"/>
-              </a:rPr>
-              <a:t>PNG 解码 + patchify 与 HF processor 输出逐位一致：1,204,224 个 f32 零差异</a:t>
+                <a:latin typeface="SimHei"/>
+                <a:ea typeface="SimHei"/>
+                <a:cs typeface="SimHei"/>
+              </a:rPr>
+              <a:t>PNG 解码 + patchify 与 HF processor 逐位一致（1,204,224 个 f32 零差异）</a:t>
             </a:r>
           </a:p>
           <a:p>
@@ -4685,7 +4789,7 @@
                 <a:spcPct val="125000"/>
               </a:lnSpc>
               <a:spcAft>
-                <a:spcPts val="900"/>
+                <a:spcPts val="1000"/>
               </a:spcAft>
             </a:pPr>
             <a:r>
@@ -4693,7 +4797,9 @@
                 <a:solidFill>
                   <a:srgbClr val="1A1D24"/>
                 </a:solidFill>
-                <a:latin typeface="Microsoft YaHei"/>
+                <a:latin typeface="SimHei"/>
+                <a:ea typeface="SimHei"/>
+                <a:cs typeface="SimHei"/>
               </a:rPr>
               <a:t>— prompt token 级精确 </a:t>
             </a:r>
@@ -4702,9 +4808,11 @@
                 <a:solidFill>
                   <a:srgbClr val="5A6373"/>
                 </a:solidFill>
-                <a:latin typeface="Microsoft YaHei"/>
-              </a:rPr>
-              <a:t>模板渲染 + tokenize + image-pad 展开与 Qwen3VLProcessor 在全部 4 个探针上完全一致</a:t>
+                <a:latin typeface="SimHei"/>
+                <a:ea typeface="SimHei"/>
+                <a:cs typeface="SimHei"/>
+              </a:rPr>
+              <a:t>模板渲染 + tokenize 与 Qwen3VLProcessor 在全部探针上一致</a:t>
             </a:r>
           </a:p>
           <a:p>
@@ -4713,7 +4821,7 @@
                 <a:spcPct val="125000"/>
               </a:lnSpc>
               <a:spcAft>
-                <a:spcPts val="900"/>
+                <a:spcPts val="1000"/>
               </a:spcAft>
             </a:pPr>
             <a:r>
@@ -4721,7 +4829,9 @@
                 <a:solidFill>
                   <a:srgbClr val="1A1D24"/>
                 </a:solidFill>
-                <a:latin typeface="Microsoft YaHei"/>
+                <a:latin typeface="SimHei"/>
+                <a:ea typeface="SimHei"/>
+                <a:cs typeface="SimHei"/>
               </a:rPr>
               <a:t>— vision 塔对齐 oracle </a:t>
             </a:r>
@@ -4730,9 +4840,11 @@
                 <a:solidFill>
                   <a:srgbClr val="5A6373"/>
                 </a:solidFill>
-                <a:latin typeface="Microsoft YaHei"/>
-              </a:rPr>
-              <a:t>27 块 CUDA BF16 对 FP32 golden 漂移 1.2–8%（离群通道），merged [196,5120] 余弦 0.99972，merger LayerNorm 重归一化</a:t>
+                <a:latin typeface="SimHei"/>
+                <a:ea typeface="SimHei"/>
+                <a:cs typeface="SimHei"/>
+              </a:rPr>
+              <a:t>27 块 BF16 对 FP32 golden 漂移 1.2–8%，merged 嵌入余弦 0.99972</a:t>
             </a:r>
           </a:p>
           <a:p>
@@ -4741,7 +4853,7 @@
                 <a:spcPct val="125000"/>
               </a:lnSpc>
               <a:spcAft>
-                <a:spcPts val="900"/>
+                <a:spcPts val="1000"/>
               </a:spcAft>
             </a:pPr>
             <a:r>
@@ -4749,18 +4861,22 @@
                 <a:solidFill>
                   <a:srgbClr val="1A1D24"/>
                 </a:solidFill>
-                <a:latin typeface="Microsoft YaHei"/>
-              </a:rPr>
-              <a:t>— 新 kernel 有位相等回归 </a:t>
+                <a:latin typeface="SimHei"/>
+                <a:ea typeface="SimHei"/>
+                <a:cs typeface="SimHei"/>
+              </a:rPr>
+              <a:t>— 新 kernel 位相等回归 </a:t>
             </a:r>
             <a:r>
               <a:rPr sz="1200">
                 <a:solidFill>
                   <a:srgbClr val="5A6373"/>
                 </a:solidFill>
-                <a:latin typeface="Microsoft YaHei"/>
-              </a:rPr>
-              <a:t>宽 head_dim SDPA 在 64 处与旧 kernel 逐位一致；merger 用 erf-GELU（非 tanh），对照 HF 源码核实</a:t>
+                <a:latin typeface="SimHei"/>
+                <a:ea typeface="SimHei"/>
+                <a:cs typeface="SimHei"/>
+              </a:rPr>
+              <a:t>宽 head_dim SDPA 在 64 处与旧 kernel 逐位一致；merger 采用 erf-GELU，经 HF 源码核实</a:t>
             </a:r>
           </a:p>
         </p:txBody>
@@ -4797,9 +4913,11 @@
                 <a:solidFill>
                   <a:srgbClr val="0066CC"/>
                 </a:solidFill>
-                <a:latin typeface="Microsoft YaHei"/>
-              </a:rPr>
-              <a:t>端到端实测（指定 GPU、严格服务）</a:t>
+                <a:latin typeface="SimHei"/>
+                <a:ea typeface="SimHei"/>
+                <a:cs typeface="SimHei"/>
+              </a:rPr>
+              <a:t>端到端实测结果</a:t>
             </a:r>
           </a:p>
         </p:txBody>
@@ -4831,7 +4949,7 @@
                 <a:spcPct val="125000"/>
               </a:lnSpc>
               <a:spcAft>
-                <a:spcPts val="900"/>
+                <a:spcPts val="1000"/>
               </a:spcAft>
             </a:pPr>
             <a:r>
@@ -4839,7 +4957,9 @@
                 <a:solidFill>
                   <a:srgbClr val="1A1D24"/>
                 </a:solidFill>
-                <a:latin typeface="Microsoft YaHei"/>
+                <a:latin typeface="SimHei"/>
+                <a:ea typeface="SimHei"/>
+                <a:cs typeface="SimHei"/>
               </a:rPr>
               <a:t>— 自建图片探针 4/4 精确 </a:t>
             </a:r>
@@ -4848,9 +4968,11 @@
                 <a:solidFill>
                   <a:srgbClr val="5A6373"/>
                 </a:solidFill>
-                <a:latin typeface="Microsoft YaHei"/>
-              </a:rPr>
-              <a:t>四个合同类别各一："382" / "red" / "12" / "5"，单请求端到端 1–2 s</a:t>
+                <a:latin typeface="SimHei"/>
+                <a:ea typeface="SimHei"/>
+                <a:cs typeface="SimHei"/>
+              </a:rPr>
+              <a:t>"382" / "red" / "12" / "5"，单请求端到端 1–2 s</a:t>
             </a:r>
           </a:p>
           <a:p>
@@ -4859,7 +4981,7 @@
                 <a:spcPct val="125000"/>
               </a:lnSpc>
               <a:spcAft>
-                <a:spcPts val="900"/>
+                <a:spcPts val="1000"/>
               </a:spcAft>
             </a:pPr>
             <a:r>
@@ -4867,18 +4989,22 @@
                 <a:solidFill>
                   <a:srgbClr val="1A1D24"/>
                 </a:solidFill>
-                <a:latin typeface="Microsoft YaHei"/>
-              </a:rPr>
-              <a:t>— 文本门禁在多模态服务复验 </a:t>
+                <a:latin typeface="SimHei"/>
+                <a:ea typeface="SimHei"/>
+                <a:cs typeface="SimHei"/>
+              </a:rPr>
+              <a:t>— 文本门禁复验通过 </a:t>
             </a:r>
             <a:r>
               <a:rPr sz="1200">
                 <a:solidFill>
                   <a:srgbClr val="5A6373"/>
                 </a:solidFill>
-                <a:latin typeface="Microsoft YaHei"/>
-              </a:rPr>
-              <a:t>协议 12/12、公开功能 6/6、混合图文 soak 36/36</a:t>
+                <a:latin typeface="SimHei"/>
+                <a:ea typeface="SimHei"/>
+                <a:cs typeface="SimHei"/>
+              </a:rPr>
+              <a:t>协议 12/12、公开功能 6/6、图文混合 soak 36/36</a:t>
             </a:r>
           </a:p>
           <a:p>
@@ -4887,7 +5013,7 @@
                 <a:spcPct val="125000"/>
               </a:lnSpc>
               <a:spcAft>
-                <a:spcPts val="900"/>
+                <a:spcPts val="1000"/>
               </a:spcAft>
             </a:pPr>
             <a:r>
@@ -4895,7 +5021,9 @@
                 <a:solidFill>
                   <a:srgbClr val="1A1D24"/>
                 </a:solidFill>
-                <a:latin typeface="Microsoft YaHei"/>
+                <a:latin typeface="SimHei"/>
+                <a:ea typeface="SimHei"/>
+                <a:cs typeface="SimHei"/>
               </a:rPr>
               <a:t>— 文本数值零变化 </a:t>
             </a:r>
@@ -4904,9 +5032,11 @@
                 <a:solidFill>
                   <a:srgbClr val="5A6373"/>
                 </a:solidFill>
-                <a:latin typeface="Microsoft YaHei"/>
-              </a:rPr>
-              <a:t>冻结 128-token 请求输出与文本配置逐字节一致（三方 SHA 相同）</a:t>
+                <a:latin typeface="SimHei"/>
+                <a:ea typeface="SimHei"/>
+                <a:cs typeface="SimHei"/>
+              </a:rPr>
+              <a:t>冻结 128-token 输出与文本配置逐字节一致</a:t>
             </a:r>
           </a:p>
           <a:p>
@@ -4915,7 +5045,7 @@
                 <a:spcPct val="125000"/>
               </a:lnSpc>
               <a:spcAft>
-                <a:spcPts val="900"/>
+                <a:spcPts val="1000"/>
               </a:spcAft>
             </a:pPr>
             <a:r>
@@ -4923,7 +5053,9 @@
                 <a:solidFill>
                   <a:srgbClr val="1A1D24"/>
                 </a:solidFill>
-                <a:latin typeface="Microsoft YaHei"/>
+                <a:latin typeface="SimHei"/>
+                <a:ea typeface="SimHei"/>
+                <a:cs typeface="SimHei"/>
               </a:rPr>
               <a:t>— 显存过账 </a:t>
             </a:r>
@@ -4932,9 +5064,11 @@
                 <a:solidFill>
                   <a:srgbClr val="5A6373"/>
                 </a:solidFill>
-                <a:latin typeface="Microsoft YaHei"/>
-              </a:rPr>
-              <a:t>vision 塔 ~956 MiB 常驻，multimodal 下 prefill chunk 自动降为 256，峰值 20914 / 24564 MiB</a:t>
+                <a:latin typeface="SimHei"/>
+                <a:ea typeface="SimHei"/>
+                <a:cs typeface="SimHei"/>
+              </a:rPr>
+              <a:t>vision 塔约 956 MiB 常驻，chunk 自动降为 256，峰值 20914 / 24564 MiB</a:t>
             </a:r>
           </a:p>
         </p:txBody>
@@ -5015,9 +5149,11 @@
                 <a:solidFill>
                   <a:srgbClr val="C0392B"/>
                 </a:solidFill>
-                <a:latin typeface="Microsoft YaHei"/>
-              </a:rPr>
-              <a:t>得分口径如实说明</a:t>
+                <a:latin typeface="SimHei"/>
+                <a:ea typeface="SimHei"/>
+                <a:cs typeface="SimHei"/>
+              </a:rPr>
+              <a:t>得分口径说明</a:t>
             </a:r>
           </a:p>
           <a:p>
@@ -5034,9 +5170,11 @@
                 <a:solidFill>
                   <a:srgbClr val="5A6373"/>
                 </a:solidFill>
-                <a:latin typeface="Microsoft YaHei"/>
-              </a:rPr>
-              <a:t>官方图片套件（生成器 / 公开图 / 答案）不在本机，「public 4/4」属平台运行项；自建 4 探针与合同同构同格式但非官方公开集，因此不声称任何多模态得分。能力关闭时按合同 fail closed：HTTP 400 + error.type=unsupported_capability（并修复了此前该路径返回 404 的不合规行为）。</a:t>
+                <a:latin typeface="SimHei"/>
+                <a:ea typeface="SimHei"/>
+                <a:cs typeface="SimHei"/>
+              </a:rPr>
+              <a:t>官方图片套件不在本机，「public 4/4」属平台运行项；自建探针与合同同构同格式但非官方公开集，因此不声称多模态得分。能力关闭时按合同 fail closed（HTTP 400 + unsupported_capability，并修复了此前返回 404 的不合规行为）。</a:t>
             </a:r>
           </a:p>
         </p:txBody>
@@ -5073,7 +5211,9 @@
                 <a:solidFill>
                   <a:srgbClr val="5A6373"/>
                 </a:solidFill>
-                <a:latin typeface="Microsoft YaHei"/>
+                <a:latin typeface="SimHei"/>
+                <a:ea typeface="SimHei"/>
+                <a:cs typeface="SimHei"/>
               </a:rPr>
               <a:t>回滚 = 取消 APXINF_ENABLE_MULTIMODAL 单开关；文本 layer-1/layer-2 全部性能数字均在无该开关的配置下测得，不受影响</a:t>
             </a:r>
@@ -5130,7 +5270,9 @@
                 <a:solidFill>
                   <a:srgbClr val="0066CC"/>
                 </a:solidFill>
-                <a:latin typeface="Microsoft YaHei"/>
+                <a:latin typeface="SimHei"/>
+                <a:ea typeface="SimHei"/>
+                <a:cs typeface="SimHei"/>
               </a:rPr>
               <a:t>BONUS</a:t>
             </a:r>
@@ -5169,7 +5311,9 @@
                 <a:solidFill>
                   <a:srgbClr val="1A1D24"/>
                 </a:solidFill>
-                <a:latin typeface="Microsoft YaHei"/>
+                <a:latin typeface="SimHei"/>
+                <a:ea typeface="SimHei"/>
+                <a:cs typeface="SimHei"/>
               </a:rPr>
               <a:t>多请求 bonus：C4 四路并发交付</a:t>
             </a:r>
@@ -5252,7 +5396,9 @@
                 <a:solidFill>
                   <a:srgbClr val="1A1D24"/>
                 </a:solidFill>
-                <a:latin typeface="Microsoft YaHei"/>
+                <a:latin typeface="SimHei"/>
+                <a:ea typeface="SimHei"/>
+                <a:cs typeface="SimHei"/>
               </a:rPr>
               <a:t>批式 protocol runtime 仅在 APXINF_Q35_MAX_CONCURRENCY&gt;1 时启用，默认单请求路径零改动；官方 evaluator 校准 run 全部效度门通过。</a:t>
             </a:r>
@@ -5291,7 +5437,9 @@
                 <a:solidFill>
                   <a:srgbClr val="0E8A4F"/>
                 </a:solidFill>
-                <a:latin typeface="Microsoft YaHei"/>
+                <a:latin typeface="SimHei"/>
+                <a:ea typeface="SimHei"/>
+                <a:cs typeface="SimHei"/>
               </a:rPr>
               <a:t>实现要点</a:t>
             </a:r>
@@ -5325,7 +5473,7 @@
                 <a:spcPct val="125000"/>
               </a:lnSpc>
               <a:spcAft>
-                <a:spcPts val="900"/>
+                <a:spcPts val="1000"/>
               </a:spcAft>
             </a:pPr>
             <a:r>
@@ -5333,7 +5481,9 @@
                 <a:solidFill>
                   <a:srgbClr val="1A1D24"/>
                 </a:solidFill>
-                <a:latin typeface="Microsoft YaHei"/>
+                <a:latin typeface="SimHei"/>
+                <a:ea typeface="SimHei"/>
+                <a:cs typeface="SimHei"/>
               </a:rPr>
               <a:t>— 批式调度 </a:t>
             </a:r>
@@ -5342,9 +5492,11 @@
                 <a:solidFill>
                   <a:srgbClr val="5A6373"/>
                 </a:solidFill>
-                <a:latin typeface="Microsoft YaHei"/>
-              </a:rPr>
-              <a:t>admission 4 permits + 单 batch worker，每轮一步批式 decode；两阶段交付修复 17 µs 窗口内 permit 未释放导致的 503 竞态</a:t>
+                <a:latin typeface="SimHei"/>
+                <a:ea typeface="SimHei"/>
+                <a:cs typeface="SimHei"/>
+              </a:rPr>
+              <a:t>admission 4 permits + 单 batch worker，每轮一步批式 decode；两阶段交付消除 permit 释放竞态</a:t>
             </a:r>
           </a:p>
           <a:p>
@@ -5353,7 +5505,7 @@
                 <a:spcPct val="125000"/>
               </a:lnSpc>
               <a:spcAft>
-                <a:spcPts val="900"/>
+                <a:spcPts val="1000"/>
               </a:spcAft>
             </a:pPr>
             <a:r>
@@ -5361,7 +5513,9 @@
                 <a:solidFill>
                   <a:srgbClr val="1A1D24"/>
                 </a:solidFill>
-                <a:latin typeface="Microsoft YaHei"/>
+                <a:latin typeface="SimHei"/>
+                <a:ea typeface="SimHei"/>
+                <a:cs typeface="SimHei"/>
               </a:rPr>
               <a:t>— 批式 kernel 位相等 </a:t>
             </a:r>
@@ -5370,9 +5524,11 @@
                 <a:solidFill>
                   <a:srgbClr val="5A6373"/>
                 </a:solidFill>
-                <a:latin typeface="Microsoft YaHei"/>
-              </a:rPr>
-              <a:t>GDN conv/recurrent、partial RoPE 的批式版与串行路径逐字节一致（真实权重多步回归断言）</a:t>
+                <a:latin typeface="SimHei"/>
+                <a:ea typeface="SimHei"/>
+                <a:cs typeface="SimHei"/>
+              </a:rPr>
+              <a:t>GDN conv/recurrent、partial RoPE 批式版与串行路径逐字节一致（真实权重回归断言）</a:t>
             </a:r>
           </a:p>
           <a:p>
@@ -5381,7 +5537,7 @@
                 <a:spcPct val="125000"/>
               </a:lnSpc>
               <a:spcAft>
-                <a:spcPts val="900"/>
+                <a:spcPts val="1000"/>
               </a:spcAft>
             </a:pPr>
             <a:r>
@@ -5389,7 +5545,9 @@
                 <a:solidFill>
                   <a:srgbClr val="1A1D24"/>
                 </a:solidFill>
-                <a:latin typeface="Microsoft YaHei"/>
+                <a:latin typeface="SimHei"/>
+                <a:ea typeface="SimHei"/>
+                <a:cs typeface="SimHei"/>
               </a:rPr>
               <a:t>— prefix cache + 会话回收池 </a:t>
             </a:r>
@@ -5398,9 +5556,11 @@
                 <a:solidFill>
                   <a:srgbClr val="5A6373"/>
                 </a:solidFill>
-                <a:latin typeface="Microsoft YaHei"/>
-              </a:rPr>
-              <a:t>相同 prompt 从模板 fork 约 2 ms；cudaMallocAsync 流序分配把冷 fork 从 330 ms 降到个位数 ms</a:t>
+                <a:latin typeface="SimHei"/>
+                <a:ea typeface="SimHei"/>
+                <a:cs typeface="SimHei"/>
+              </a:rPr>
+              <a:t>相同 prompt 从模板 fork 约 2 ms；流序分配把冷 fork 从 330 ms 降到个位数 ms</a:t>
             </a:r>
           </a:p>
           <a:p>
@@ -5409,7 +5569,7 @@
                 <a:spcPct val="125000"/>
               </a:lnSpc>
               <a:spcAft>
-                <a:spcPts val="900"/>
+                <a:spcPts val="1000"/>
               </a:spcAft>
             </a:pPr>
             <a:r>
@@ -5417,7 +5577,9 @@
                 <a:solidFill>
                   <a:srgbClr val="1A1D24"/>
                 </a:solidFill>
-                <a:latin typeface="Microsoft YaHei"/>
+                <a:latin typeface="SimHei"/>
+                <a:ea typeface="SimHei"/>
+                <a:cs typeface="SimHei"/>
               </a:rPr>
               <a:t>— 单请求零回归 </a:t>
             </a:r>
@@ -5426,9 +5588,11 @@
                 <a:solidFill>
                   <a:srgbClr val="5A6373"/>
                 </a:solidFill>
-                <a:latin typeface="Microsoft YaHei"/>
-              </a:rPr>
-              <a:t>TPOT 62-68 ms 在冻结基线带内，冻结输出字节不变；batch=1 自动走原串行路径</a:t>
+                <a:latin typeface="SimHei"/>
+                <a:ea typeface="SimHei"/>
+                <a:cs typeface="SimHei"/>
+              </a:rPr>
+              <a:t>TPOT 在冻结基线带内，输出字节不变；batch=1 自动回退串行路径</a:t>
             </a:r>
           </a:p>
         </p:txBody>
@@ -5465,7 +5629,9 @@
                 <a:solidFill>
                   <a:srgbClr val="0066CC"/>
                 </a:solidFill>
-                <a:latin typeface="Microsoft YaHei"/>
+                <a:latin typeface="SimHei"/>
+                <a:ea typeface="SimHei"/>
+                <a:cs typeface="SimHei"/>
               </a:rPr>
               <a:t>官方校准结果（multi-c4-text-perf-1024）</a:t>
             </a:r>
@@ -5548,7 +5714,9 @@
                 <a:solidFill>
                   <a:srgbClr val="1A1D24"/>
                 </a:solidFill>
-                <a:latin typeface="Microsoft YaHei"/>
+                <a:latin typeface="SimHei"/>
+                <a:ea typeface="SimHei"/>
+                <a:cs typeface="SimHei"/>
               </a:rPr>
               <a:t>指标</a:t>
             </a:r>
@@ -5587,7 +5755,9 @@
                 <a:solidFill>
                   <a:srgbClr val="1A1D24"/>
                 </a:solidFill>
-                <a:latin typeface="Microsoft YaHei"/>
+                <a:latin typeface="SimHei"/>
+                <a:ea typeface="SimHei"/>
+                <a:cs typeface="SimHei"/>
               </a:rPr>
               <a:t>实测</a:t>
             </a:r>
@@ -5626,7 +5796,9 @@
                 <a:solidFill>
                   <a:srgbClr val="1A1D24"/>
                 </a:solidFill>
-                <a:latin typeface="Microsoft YaHei"/>
+                <a:latin typeface="SimHei"/>
+                <a:ea typeface="SimHei"/>
+                <a:cs typeface="SimHei"/>
               </a:rPr>
               <a:t>门槛</a:t>
             </a:r>
@@ -5665,7 +5837,9 @@
                 <a:solidFill>
                   <a:srgbClr val="1A1D24"/>
                 </a:solidFill>
-                <a:latin typeface="Microsoft YaHei"/>
+                <a:latin typeface="SimHei"/>
+                <a:ea typeface="SimHei"/>
+                <a:cs typeface="SimHei"/>
               </a:rPr>
               <a:t>success / correctness</a:t>
             </a:r>
@@ -5704,7 +5878,9 @@
                 <a:solidFill>
                   <a:srgbClr val="1A1D24"/>
                 </a:solidFill>
-                <a:latin typeface="Consolas"/>
+                <a:latin typeface="SimHei"/>
+                <a:ea typeface="SimHei"/>
+                <a:cs typeface="SimHei"/>
               </a:rPr>
               <a:t>1.0 / 1.0</a:t>
             </a:r>
@@ -5743,7 +5919,9 @@
                 <a:solidFill>
                   <a:srgbClr val="1A1D24"/>
                 </a:solidFill>
-                <a:latin typeface="Consolas"/>
+                <a:latin typeface="SimHei"/>
+                <a:ea typeface="SimHei"/>
+                <a:cs typeface="SimHei"/>
               </a:rPr>
               <a:t>= 1.0</a:t>
             </a:r>
@@ -5826,7 +6004,9 @@
                 <a:solidFill>
                   <a:srgbClr val="1A1D24"/>
                 </a:solidFill>
-                <a:latin typeface="Microsoft YaHei"/>
+                <a:latin typeface="SimHei"/>
+                <a:ea typeface="SimHei"/>
+                <a:cs typeface="SimHei"/>
               </a:rPr>
               <a:t>Jain 公平性</a:t>
             </a:r>
@@ -5865,7 +6045,9 @@
                 <a:solidFill>
                   <a:srgbClr val="1A1D24"/>
                 </a:solidFill>
-                <a:latin typeface="Consolas"/>
+                <a:latin typeface="SimHei"/>
+                <a:ea typeface="SimHei"/>
+                <a:cs typeface="SimHei"/>
               </a:rPr>
               <a:t>0.9993</a:t>
             </a:r>
@@ -5904,7 +6086,9 @@
                 <a:solidFill>
                   <a:srgbClr val="1A1D24"/>
                 </a:solidFill>
-                <a:latin typeface="Consolas"/>
+                <a:latin typeface="SimHei"/>
+                <a:ea typeface="SimHei"/>
+                <a:cs typeface="SimHei"/>
               </a:rPr>
               <a:t>&gt;= 0.95</a:t>
             </a:r>
@@ -5943,7 +6127,9 @@
                 <a:solidFill>
                   <a:srgbClr val="1A1D24"/>
                 </a:solidFill>
-                <a:latin typeface="Microsoft YaHei"/>
+                <a:latin typeface="SimHei"/>
+                <a:ea typeface="SimHei"/>
+                <a:cs typeface="SimHei"/>
               </a:rPr>
               <a:t>p95 TTFT</a:t>
             </a:r>
@@ -5982,7 +6168,9 @@
                 <a:solidFill>
                   <a:srgbClr val="1A1D24"/>
                 </a:solidFill>
-                <a:latin typeface="Consolas"/>
+                <a:latin typeface="SimHei"/>
+                <a:ea typeface="SimHei"/>
+                <a:cs typeface="SimHei"/>
               </a:rPr>
               <a:t>1.789 s</a:t>
             </a:r>
@@ -6021,7 +6209,9 @@
                 <a:solidFill>
                   <a:srgbClr val="1A1D24"/>
                 </a:solidFill>
-                <a:latin typeface="Consolas"/>
+                <a:latin typeface="SimHei"/>
+                <a:ea typeface="SimHei"/>
+                <a:cs typeface="SimHei"/>
               </a:rPr>
               <a:t>&lt;= 2.496 s</a:t>
             </a:r>
@@ -6104,7 +6294,9 @@
                 <a:solidFill>
                   <a:srgbClr val="1A1D24"/>
                 </a:solidFill>
-                <a:latin typeface="Microsoft YaHei"/>
+                <a:latin typeface="SimHei"/>
+                <a:ea typeface="SimHei"/>
+                <a:cs typeface="SimHei"/>
               </a:rPr>
               <a:t>p95 TPOT</a:t>
             </a:r>
@@ -6143,7 +6335,9 @@
                 <a:solidFill>
                   <a:srgbClr val="1A1D24"/>
                 </a:solidFill>
-                <a:latin typeface="Consolas"/>
+                <a:latin typeface="SimHei"/>
+                <a:ea typeface="SimHei"/>
+                <a:cs typeface="SimHei"/>
               </a:rPr>
               <a:t>173.9 ms</a:t>
             </a:r>
@@ -6182,7 +6376,9 @@
                 <a:solidFill>
                   <a:srgbClr val="1A1D24"/>
                 </a:solidFill>
-                <a:latin typeface="Consolas"/>
+                <a:latin typeface="SimHei"/>
+                <a:ea typeface="SimHei"/>
+                <a:cs typeface="SimHei"/>
               </a:rPr>
               <a:t>&lt;= 186.9 ms</a:t>
             </a:r>
@@ -6221,7 +6417,9 @@
                 <a:solidFill>
                   <a:srgbClr val="1A1D24"/>
                 </a:solidFill>
-                <a:latin typeface="Microsoft YaHei"/>
+                <a:latin typeface="SimHei"/>
+                <a:ea typeface="SimHei"/>
+                <a:cs typeface="SimHei"/>
               </a:rPr>
               <a:t>goodput</a:t>
             </a:r>
@@ -6260,7 +6458,9 @@
                 <a:solidFill>
                   <a:srgbClr val="1A1D24"/>
                 </a:solidFill>
-                <a:latin typeface="Consolas"/>
+                <a:latin typeface="SimHei"/>
+                <a:ea typeface="SimHei"/>
+                <a:cs typeface="SimHei"/>
               </a:rPr>
               <a:t>23.53 tok/s</a:t>
             </a:r>
@@ -6299,7 +6499,9 @@
                 <a:solidFill>
                   <a:srgbClr val="1A1D24"/>
                 </a:solidFill>
-                <a:latin typeface="Consolas"/>
+                <a:latin typeface="SimHei"/>
+                <a:ea typeface="SimHei"/>
+                <a:cs typeface="SimHei"/>
               </a:rPr>
               <a:t>计分指标</a:t>
             </a:r>
@@ -6382,7 +6584,9 @@
                 <a:solidFill>
                   <a:srgbClr val="1A1D24"/>
                 </a:solidFill>
-                <a:latin typeface="Microsoft YaHei"/>
+                <a:latin typeface="SimHei"/>
+                <a:ea typeface="SimHei"/>
+                <a:cs typeface="SimHei"/>
               </a:rPr>
               <a:t>no_fallback / 健康</a:t>
             </a:r>
@@ -6421,7 +6625,9 @@
                 <a:solidFill>
                   <a:srgbClr val="1A1D24"/>
                 </a:solidFill>
-                <a:latin typeface="Consolas"/>
+                <a:latin typeface="SimHei"/>
+                <a:ea typeface="SimHei"/>
+                <a:cs typeface="SimHei"/>
               </a:rPr>
               <a:t>true</a:t>
             </a:r>
@@ -6460,7 +6666,9 @@
                 <a:solidFill>
                   <a:srgbClr val="1A1D24"/>
                 </a:solidFill>
-                <a:latin typeface="Consolas"/>
+                <a:latin typeface="SimHei"/>
+                <a:ea typeface="SimHei"/>
+                <a:cs typeface="SimHei"/>
               </a:rPr>
               <a:t>必须为真</a:t>
             </a:r>
@@ -6543,9 +6751,11 @@
                 <a:solidFill>
                   <a:srgbClr val="C0392B"/>
                 </a:solidFill>
-                <a:latin typeface="Microsoft YaHei"/>
-              </a:rPr>
-              <a:t>C8 边界如实说明</a:t>
+                <a:latin typeface="SimHei"/>
+                <a:ea typeface="SimHei"/>
+                <a:cs typeface="SimHei"/>
+              </a:rPr>
+              <a:t>C8 未交付原因</a:t>
             </a:r>
           </a:p>
           <a:p>
@@ -6562,9 +6772,11 @@
                 <a:solidFill>
                   <a:srgbClr val="5A6373"/>
                 </a:solidFill>
-                <a:latin typeface="Microsoft YaHei"/>
-              </a:rPr>
-              <a:t>C8 卡在显存而非调度：8 份完整请求态（每份 KV 72 MiB + GDN 443 MiB）需 4.1 GiB，超出 2.36 GiB 的 admission 预算。共享 GDN scratch 后每份可降至约 295 MiB、算术上可入场，但该改造未实现，因此不声称 C8。调度器、admission 与批式 kernel 均已按并发数参数化。</a:t>
+                <a:latin typeface="SimHei"/>
+                <a:ea typeface="SimHei"/>
+                <a:cs typeface="SimHei"/>
+              </a:rPr>
+              <a:t>受限于显存而非调度：8 份完整请求态需 4.1 GiB，超出 2.36 GiB 的 admission 预算；共享 GDN scratch 后每份可降至约 295 MiB、可满足入场条件，但该改造未实现，因此不声称 C8。调度器、admission 与批式 kernel 均已按并发数参数化。</a:t>
             </a:r>
           </a:p>
         </p:txBody>
@@ -6601,7 +6813,9 @@
                 <a:solidFill>
                   <a:srgbClr val="5A6373"/>
                 </a:solidFill>
-                <a:latin typeface="Microsoft YaHei"/>
+                <a:latin typeface="SimHei"/>
+                <a:ea typeface="SimHei"/>
+                <a:cs typeface="SimHei"/>
               </a:rPr>
               <a:t>回滚 = 不设 APXINF_Q35_MAX_CONCURRENCY（或 =1）即恢复精确的冻结单请求 runtime；并发同批 32 请求全部 200，无 503</a:t>
             </a:r>
@@ -6658,7 +6872,9 @@
                 <a:solidFill>
                   <a:srgbClr val="0066CC"/>
                 </a:solidFill>
-                <a:latin typeface="Microsoft YaHei"/>
+                <a:latin typeface="SimHei"/>
+                <a:ea typeface="SimHei"/>
+                <a:cs typeface="SimHei"/>
               </a:rPr>
               <a:t>REPRODUCIBILITY</a:t>
             </a:r>
@@ -6697,7 +6913,9 @@
                 <a:solidFill>
                   <a:srgbClr val="1A1D24"/>
                 </a:solidFill>
-                <a:latin typeface="Microsoft YaHei"/>
+                <a:latin typeface="SimHei"/>
+                <a:ea typeface="SimHei"/>
+                <a:cs typeface="SimHei"/>
               </a:rPr>
               <a:t>可复现性与提交材料</a:t>
             </a:r>
@@ -6824,7 +7042,9 @@
                 <a:solidFill>
                   <a:srgbClr val="7EC8FF"/>
                 </a:solidFill>
-                <a:latin typeface="Consolas"/>
+                <a:latin typeface="SimHei"/>
+                <a:ea typeface="SimHei"/>
+                <a:cs typeface="SimHei"/>
               </a:rPr>
               <a:t># 提交 commit（验收以此为准）</a:t>
             </a:r>
@@ -6840,7 +7060,9 @@
                 <a:solidFill>
                   <a:srgbClr val="E6EAF0"/>
                 </a:solidFill>
-                <a:latin typeface="Consolas"/>
+                <a:latin typeface="SimHei"/>
+                <a:ea typeface="SimHei"/>
+                <a:cs typeface="SimHei"/>
               </a:rPr>
               <a:t>06993a2d2642c6f7177b57493b797d5d537e4d64    branch: integrate/member2</a:t>
             </a:r>
@@ -6856,7 +7078,9 @@
                 <a:solidFill>
                   <a:srgbClr val="E6EAF0"/>
                 </a:solidFill>
-                <a:latin typeface="Consolas"/>
+                <a:latin typeface="SimHei"/>
+                <a:ea typeface="SimHei"/>
+                <a:cs typeface="SimHei"/>
               </a:rPr>
               <a:t/>
             </a:r>
@@ -6872,7 +7096,9 @@
                 <a:solidFill>
                   <a:srgbClr val="E6EAF0"/>
                 </a:solidFill>
-                <a:latin typeface="Consolas"/>
+                <a:latin typeface="SimHei"/>
+                <a:ea typeface="SimHei"/>
+                <a:cs typeface="SimHei"/>
               </a:rPr>
               <a:t>python3 benchmarks/qwen38_4090/evaluation/test.py check      # → assignment checks passed</a:t>
             </a:r>
@@ -6888,7 +7114,9 @@
                 <a:solidFill>
                   <a:srgbClr val="E6EAF0"/>
                 </a:solidFill>
-                <a:latin typeface="Consolas"/>
+                <a:latin typeface="SimHei"/>
+                <a:ea typeface="SimHei"/>
+                <a:cs typeface="SimHei"/>
               </a:rPr>
               <a:t>cargo build --release --features cuda-no-nvtx --locked --bin apxinf</a:t>
             </a:r>
@@ -6904,7 +7132,9 @@
                 <a:solidFill>
                   <a:srgbClr val="E6EAF0"/>
                 </a:solidFill>
-                <a:latin typeface="Consolas"/>
+                <a:latin typeface="SimHei"/>
+                <a:ea typeface="SimHei"/>
+                <a:cs typeface="SimHei"/>
               </a:rPr>
               <a:t>target/release/apxinf serve --model &lt;ckpt&gt; --revision 63768c10... --gpu-uuid GPU-343bc895...</a:t>
             </a:r>
@@ -6920,7 +7150,9 @@
                 <a:solidFill>
                   <a:srgbClr val="E6EAF0"/>
                 </a:solidFill>
-                <a:latin typeface="Consolas"/>
+                <a:latin typeface="SimHei"/>
+                <a:ea typeface="SimHei"/>
+                <a:cs typeface="SimHei"/>
               </a:rPr>
               <a:t>APXINF_ENABLE_MULTIMODAL=1 target/release/apxinf serve ...   # 多模态配置（可选，单开关）</a:t>
             </a:r>
@@ -6936,7 +7168,9 @@
                 <a:solidFill>
                   <a:srgbClr val="E6EAF0"/>
                 </a:solidFill>
-                <a:latin typeface="Consolas"/>
+                <a:latin typeface="SimHei"/>
+                <a:ea typeface="SimHei"/>
+                <a:cs typeface="SimHei"/>
               </a:rPr>
               <a:t>APXINF_Q35_MAX_CONCURRENCY=4 ... serve ... --queue-capacity 4  # C4 并发配置（可选，单开关）</a:t>
             </a:r>
@@ -6975,7 +7209,9 @@
                 <a:solidFill>
                   <a:srgbClr val="0066CC"/>
                 </a:solidFill>
-                <a:latin typeface="Microsoft YaHei"/>
+                <a:latin typeface="SimHei"/>
+                <a:ea typeface="SimHei"/>
+                <a:cs typeface="SimHei"/>
               </a:rPr>
               <a:t>提交材料对应关系</a:t>
             </a:r>
@@ -7017,7 +7253,9 @@
                 <a:solidFill>
                   <a:srgbClr val="1A1D24"/>
                 </a:solidFill>
-                <a:latin typeface="Microsoft YaHei"/>
+                <a:latin typeface="SimHei"/>
+                <a:ea typeface="SimHei"/>
+                <a:cs typeface="SimHei"/>
               </a:rPr>
               <a:t>— 设计变化与执行阶段 </a:t>
             </a:r>
@@ -7026,7 +7264,9 @@
                 <a:solidFill>
                   <a:srgbClr val="5A6373"/>
                 </a:solidFill>
-                <a:latin typeface="Microsoft YaHei"/>
+                <a:latin typeface="SimHei"/>
+                <a:ea typeface="SimHei"/>
+                <a:cs typeface="SimHei"/>
               </a:rPr>
               <a:t>REPORT.md 按第一层/第二层分节，逐项记录</a:t>
             </a:r>
@@ -7045,7 +7285,9 @@
                 <a:solidFill>
                   <a:srgbClr val="1A1D24"/>
                 </a:solidFill>
-                <a:latin typeface="Microsoft YaHei"/>
+                <a:latin typeface="SimHei"/>
+                <a:ea typeface="SimHei"/>
+                <a:cs typeface="SimHei"/>
               </a:rPr>
               <a:t>— test.py check / run </a:t>
             </a:r>
@@ -7054,9 +7296,11 @@
                 <a:solidFill>
                   <a:srgbClr val="5A6373"/>
                 </a:solidFill>
-                <a:latin typeface="Microsoft YaHei"/>
-              </a:rPr>
-              <a:t>check 已通过并留存日志；run 因缺批准 reference 无法产出评分件，已如实说明</a:t>
+                <a:latin typeface="SimHei"/>
+                <a:ea typeface="SimHei"/>
+                <a:cs typeface="SimHei"/>
+              </a:rPr>
+              <a:t>check 已通过并留存日志；run 因缺平台参照件无法产出评分件，等价负载已直测</a:t>
             </a:r>
           </a:p>
           <a:p>
@@ -7073,7 +7317,9 @@
                 <a:solidFill>
                   <a:srgbClr val="1A1D24"/>
                 </a:solidFill>
-                <a:latin typeface="Microsoft YaHei"/>
+                <a:latin typeface="SimHei"/>
+                <a:ea typeface="SimHei"/>
+                <a:cs typeface="SimHei"/>
               </a:rPr>
               <a:t>— 负控制与回归测试 </a:t>
             </a:r>
@@ -7082,7 +7328,9 @@
                 <a:solidFill>
                   <a:srgbClr val="5A6373"/>
                 </a:solidFill>
-                <a:latin typeface="Microsoft YaHei"/>
+                <a:latin typeface="SimHei"/>
+                <a:ea typeface="SimHei"/>
+                <a:cs typeface="SimHei"/>
               </a:rPr>
               <a:t>7 个协议负控、3 个断连故障注入、9 组数值回归</a:t>
             </a:r>
@@ -7101,7 +7349,9 @@
                 <a:solidFill>
                   <a:srgbClr val="1A1D24"/>
                 </a:solidFill>
-                <a:latin typeface="Microsoft YaHei"/>
+                <a:latin typeface="SimHei"/>
+                <a:ea typeface="SimHei"/>
+                <a:cs typeface="SimHei"/>
               </a:rPr>
               <a:t>— 取舍与限制 </a:t>
             </a:r>
@@ -7110,7 +7360,9 @@
                 <a:solidFill>
                   <a:srgbClr val="5A6373"/>
                 </a:solidFill>
-                <a:latin typeface="Microsoft YaHei"/>
+                <a:latin typeface="SimHei"/>
+                <a:ea typeface="SimHei"/>
+                <a:cs typeface="SimHei"/>
               </a:rPr>
               <a:t>REPORT.md 专设 Trade-offs 与 Limits 两节</a:t>
             </a:r>
@@ -7149,7 +7401,9 @@
                 <a:solidFill>
                   <a:srgbClr val="0066CC"/>
                 </a:solidFill>
-                <a:latin typeface="Microsoft YaHei"/>
+                <a:latin typeface="SimHei"/>
+                <a:ea typeface="SimHei"/>
+                <a:cs typeface="SimHei"/>
               </a:rPr>
               <a:t>回滚能力</a:t>
             </a:r>
@@ -7191,7 +7445,9 @@
                 <a:solidFill>
                   <a:srgbClr val="1A1D24"/>
                 </a:solidFill>
-                <a:latin typeface="Microsoft YaHei"/>
+                <a:latin typeface="SimHei"/>
+                <a:ea typeface="SimHei"/>
+                <a:cs typeface="SimHei"/>
               </a:rPr>
               <a:t>— 每项优化独立可关 </a:t>
             </a:r>
@@ -7200,7 +7456,9 @@
                 <a:solidFill>
                   <a:srgbClr val="5A6373"/>
                 </a:solidFill>
-                <a:latin typeface="Microsoft YaHei"/>
+                <a:latin typeface="SimHei"/>
+                <a:ea typeface="SimHei"/>
+                <a:cs typeface="SimHei"/>
               </a:rPr>
               <a:t>APXINF_Q35_W4_PREFILL_GEMM / W4_PACKED_GEMV / BATCHED_SDPA / SCRATCH_POOL / PREFILL_CHUNK / ROWWISE_SOFTMAX</a:t>
             </a:r>
@@ -7219,7 +7477,9 @@
                 <a:solidFill>
                   <a:srgbClr val="1A1D24"/>
                 </a:solidFill>
-                <a:latin typeface="Microsoft YaHei"/>
+                <a:latin typeface="SimHei"/>
+                <a:ea typeface="SimHei"/>
+                <a:cs typeface="SimHei"/>
               </a:rPr>
               <a:t>— bonus 均单开关 </a:t>
             </a:r>
@@ -7228,7 +7488,9 @@
                 <a:solidFill>
                   <a:srgbClr val="5A6373"/>
                 </a:solidFill>
-                <a:latin typeface="Microsoft YaHei"/>
+                <a:latin typeface="SimHei"/>
+                <a:ea typeface="SimHei"/>
+                <a:cs typeface="SimHei"/>
               </a:rPr>
               <a:t>APXINF_ENABLE_MULTIMODAL 与 APXINF_Q35_MAX_CONCURRENCY 都不设时，行为即纯文本单请求提交件</a:t>
             </a:r>
@@ -7247,7 +7509,9 @@
                 <a:solidFill>
                   <a:srgbClr val="1A1D24"/>
                 </a:solidFill>
-                <a:latin typeface="Microsoft YaHei"/>
+                <a:latin typeface="SimHei"/>
+                <a:ea typeface="SimHei"/>
+                <a:cs typeface="SimHei"/>
               </a:rPr>
               <a:t>— 被拒候选保留在树中 </a:t>
             </a:r>
@@ -7256,7 +7520,9 @@
                 <a:solidFill>
                   <a:srgbClr val="5A6373"/>
                 </a:solidFill>
-                <a:latin typeface="Microsoft YaHei"/>
+                <a:latin typeface="SimHei"/>
+                <a:ea typeface="SimHei"/>
+                <a:cs typeface="SimHei"/>
               </a:rPr>
               <a:t>默认关闭并附回归测试，作为负结果证据</a:t>
             </a:r>
@@ -7275,7 +7541,9 @@
                 <a:solidFill>
                   <a:srgbClr val="1A1D24"/>
                 </a:solidFill>
-                <a:latin typeface="Microsoft YaHei"/>
+                <a:latin typeface="SimHei"/>
+                <a:ea typeface="SimHei"/>
+                <a:cs typeface="SimHei"/>
               </a:rPr>
               <a:t>— 回滚点 </a:t>
             </a:r>
@@ -7284,7 +7552,9 @@
                 <a:solidFill>
                   <a:srgbClr val="5A6373"/>
                 </a:solidFill>
-                <a:latin typeface="Microsoft YaHei"/>
+                <a:latin typeface="SimHei"/>
+                <a:ea typeface="SimHei"/>
+                <a:cs typeface="SimHei"/>
               </a:rPr>
               <a:t>47ec280d2f88e8daf87750c0957e596e3a5390c1（集成前 HEAD）</a:t>
             </a:r>
@@ -7303,7 +7573,9 @@
                 <a:solidFill>
                   <a:srgbClr val="1A1D24"/>
                 </a:solidFill>
-                <a:latin typeface="Microsoft YaHei"/>
+                <a:latin typeface="SimHei"/>
+                <a:ea typeface="SimHei"/>
+                <a:cs typeface="SimHei"/>
               </a:rPr>
               <a:t>— 清洁性 </a:t>
             </a:r>
@@ -7312,7 +7584,9 @@
                 <a:solidFill>
                   <a:srgbClr val="5A6373"/>
                 </a:solidFill>
-                <a:latin typeface="Microsoft YaHei"/>
+                <a:latin typeface="SimHei"/>
+                <a:ea typeface="SimHei"/>
+                <a:cs typeface="SimHei"/>
               </a:rPr>
               <a:t>cargo fmt --check、cargo check --workspace --locked、git diff --check 全绿</a:t>
             </a:r>
@@ -7351,7 +7625,9 @@
                 <a:solidFill>
                   <a:srgbClr val="5A6373"/>
                 </a:solidFill>
-                <a:latin typeface="Microsoft YaHei"/>
+                <a:latin typeface="SimHei"/>
+                <a:ea typeface="SimHei"/>
+                <a:cs typeface="SimHei"/>
               </a:rPr>
               <a:t>未提交模型权重、凭据、机器地址或未公开评测数据；submission.json 的图片字段未手工填写</a:t>
             </a:r>
@@ -7408,7 +7684,9 @@
                 <a:solidFill>
                   <a:srgbClr val="0066CC"/>
                 </a:solidFill>
-                <a:latin typeface="Microsoft YaHei"/>
+                <a:latin typeface="SimHei"/>
+                <a:ea typeface="SimHei"/>
+                <a:cs typeface="SimHei"/>
               </a:rPr>
               <a:t>TEAM</a:t>
             </a:r>
@@ -7447,7 +7725,9 @@
                 <a:solidFill>
                   <a:srgbClr val="1A1D24"/>
                 </a:solidFill>
-                <a:latin typeface="Microsoft YaHei"/>
+                <a:latin typeface="SimHei"/>
+                <a:ea typeface="SimHei"/>
+                <a:cs typeface="SimHei"/>
               </a:rPr>
               <a:t>分工说明</a:t>
             </a:r>
@@ -7530,57 +7810,54 @@
                 <a:solidFill>
                   <a:srgbClr val="1A1D24"/>
                 </a:solidFill>
-                <a:latin typeface="Microsoft YaHei"/>
-              </a:rPr>
-              <a:t>两人团队。主线实现由本人完成，另一位成员交付离线 benchmark 脚手架。</a:t>
-            </a:r>
-          </a:p>
-        </p:txBody>
-      </p:sp>
-      <p:sp>
-        <p:nvSpPr>
-          <p:cNvPr id="6" name="Rounded Rectangle 5"/>
-          <p:cNvSpPr/>
-          <p:nvPr/>
-        </p:nvSpPr>
-        <p:spPr>
-          <a:xfrm>
-            <a:off x="640080" y="2121408"/>
-            <a:ext cx="3108960" cy="1371600"/>
-          </a:xfrm>
-          <a:prstGeom prst="roundRect">
-            <a:avLst>
-              <a:gd name="adj" fmla="val 4000"/>
-            </a:avLst>
-          </a:prstGeom>
-          <a:solidFill>
-            <a:srgbClr val="FFFFFF"/>
-          </a:solidFill>
-          <a:ln w="12700">
-            <a:solidFill>
-              <a:srgbClr val="DDE1E8"/>
-            </a:solidFill>
-          </a:ln>
-          <a:effectLst/>
-        </p:spPr>
-        <p:style>
-          <a:lnRef idx="1">
-            <a:schemeClr val="accent1"/>
-          </a:lnRef>
-          <a:fillRef idx="3">
-            <a:schemeClr val="accent1"/>
-          </a:fillRef>
-          <a:effectRef idx="2">
-            <a:schemeClr val="accent1"/>
-          </a:effectRef>
-          <a:fontRef idx="minor">
-            <a:schemeClr val="lt1"/>
-          </a:fontRef>
-        </p:style>
-        <p:txBody>
-          <a:bodyPr rtlCol="0" anchor="ctr"/>
-          <a:lstStyle/>
-          <a:p/>
+                <a:latin typeface="SimHei"/>
+                <a:ea typeface="SimHei"/>
+                <a:cs typeface="SimHei"/>
+              </a:rPr>
+              <a:t>两人团队，分工依据 git 提交记录。</a:t>
+            </a:r>
+          </a:p>
+        </p:txBody>
+      </p:sp>
+      <p:sp>
+        <p:nvSpPr>
+          <p:cNvPr id="6" name="TextBox 5"/>
+          <p:cNvSpPr txBox="1"/>
+          <p:nvPr/>
+        </p:nvSpPr>
+        <p:spPr>
+          <a:xfrm>
+            <a:off x="640080" y="2029968"/>
+            <a:ext cx="6766560" cy="310896"/>
+          </a:xfrm>
+          <a:prstGeom prst="rect">
+            <a:avLst/>
+          </a:prstGeom>
+          <a:noFill/>
+        </p:spPr>
+        <p:txBody>
+          <a:bodyPr wrap="square" anchor="t" lIns="0" rIns="0" tIns="0" bIns="0">
+            <a:spAutoFit/>
+          </a:bodyPr>
+          <a:lstStyle/>
+          <a:p>
+            <a:pPr algn="l">
+              <a:spcAft>
+                <a:spcPts val="400"/>
+              </a:spcAft>
+            </a:pPr>
+            <a:r>
+              <a:rPr sz="1450" b="1">
+                <a:solidFill>
+                  <a:srgbClr val="0066CC"/>
+                </a:solidFill>
+                <a:latin typeface="SimHei"/>
+                <a:ea typeface="SimHei"/>
+                <a:cs typeface="SimHei"/>
+              </a:rPr>
+              <a:t>程仁龙（负责人）</a:t>
+            </a:r>
+          </a:p>
         </p:txBody>
       </p:sp>
       <p:sp>
@@ -7591,8 +7868,8 @@
         </p:nvSpPr>
         <p:spPr>
           <a:xfrm>
-            <a:off x="786384" y="2249424"/>
-            <a:ext cx="2816352" cy="566928"/>
+            <a:off x="640080" y="2450592"/>
+            <a:ext cx="6675120" cy="3840480"/>
           </a:xfrm>
           <a:prstGeom prst="rect">
             <a:avLst/>
@@ -7605,624 +7882,177 @@
           </a:bodyPr>
           <a:lstStyle/>
           <a:p>
-            <a:pPr algn="ctr">
-              <a:spcAft>
-                <a:spcPts val="400"/>
-              </a:spcAft>
-            </a:pPr>
-            <a:r>
-              <a:rPr sz="3400" b="1">
-                <a:solidFill>
-                  <a:srgbClr val="0066CC"/>
-                </a:solidFill>
-                <a:latin typeface="Microsoft YaHei"/>
-              </a:rPr>
-              <a:t>95%</a:t>
-            </a:r>
-          </a:p>
-        </p:txBody>
-      </p:sp>
-      <p:sp>
-        <p:nvSpPr>
-          <p:cNvPr id="8" name="TextBox 7"/>
-          <p:cNvSpPr txBox="1"/>
-          <p:nvPr/>
-        </p:nvSpPr>
-        <p:spPr>
-          <a:xfrm>
-            <a:off x="786384" y="2834640"/>
-            <a:ext cx="2816352" cy="256032"/>
-          </a:xfrm>
-          <a:prstGeom prst="rect">
-            <a:avLst/>
-          </a:prstGeom>
-          <a:noFill/>
-        </p:spPr>
-        <p:txBody>
-          <a:bodyPr wrap="square" anchor="t" lIns="0" rIns="0" tIns="0" bIns="0">
-            <a:spAutoFit/>
-          </a:bodyPr>
-          <a:lstStyle/>
-          <a:p>
-            <a:pPr algn="ctr">
-              <a:spcAft>
-                <a:spcPts val="400"/>
-              </a:spcAft>
-            </a:pPr>
-            <a:r>
-              <a:rPr sz="1200" b="1">
-                <a:solidFill>
-                  <a:srgbClr val="1A1D24"/>
-                </a:solidFill>
-                <a:latin typeface="Microsoft YaHei"/>
-              </a:rPr>
-              <a:t>程仁龙（本人）</a:t>
-            </a:r>
-          </a:p>
-        </p:txBody>
-      </p:sp>
-      <p:sp>
-        <p:nvSpPr>
-          <p:cNvPr id="9" name="TextBox 8"/>
-          <p:cNvSpPr txBox="1"/>
-          <p:nvPr/>
-        </p:nvSpPr>
-        <p:spPr>
-          <a:xfrm>
-            <a:off x="786384" y="3090672"/>
-            <a:ext cx="2816352" cy="310896"/>
-          </a:xfrm>
-          <a:prstGeom prst="rect">
-            <a:avLst/>
-          </a:prstGeom>
-          <a:noFill/>
-        </p:spPr>
-        <p:txBody>
-          <a:bodyPr wrap="square" anchor="t" lIns="0" rIns="0" tIns="0" bIns="0">
-            <a:spAutoFit/>
-          </a:bodyPr>
-          <a:lstStyle/>
-          <a:p>
-            <a:pPr algn="ctr">
-              <a:spcAft>
-                <a:spcPts val="400"/>
-              </a:spcAft>
-            </a:pPr>
-            <a:r>
-              <a:rPr sz="1000" b="0">
-                <a:solidFill>
-                  <a:srgbClr val="5A6373"/>
-                </a:solidFill>
-                <a:latin typeface="Microsoft YaHei"/>
-              </a:rPr>
-              <a:t>模型 / kernel / 服务 / 性能 / 双 bonus</a:t>
-            </a:r>
-          </a:p>
-        </p:txBody>
-      </p:sp>
-      <p:sp>
-        <p:nvSpPr>
-          <p:cNvPr id="10" name="Rounded Rectangle 9"/>
-          <p:cNvSpPr/>
-          <p:nvPr/>
-        </p:nvSpPr>
-        <p:spPr>
-          <a:xfrm>
-            <a:off x="3977639" y="2121408"/>
-            <a:ext cx="3108960" cy="1371600"/>
-          </a:xfrm>
-          <a:prstGeom prst="roundRect">
-            <a:avLst>
-              <a:gd name="adj" fmla="val 4000"/>
-            </a:avLst>
-          </a:prstGeom>
-          <a:solidFill>
-            <a:srgbClr val="FFFFFF"/>
-          </a:solidFill>
-          <a:ln w="12700">
-            <a:solidFill>
-              <a:srgbClr val="DDE1E8"/>
-            </a:solidFill>
-          </a:ln>
-          <a:effectLst/>
-        </p:spPr>
-        <p:style>
-          <a:lnRef idx="1">
-            <a:schemeClr val="accent1"/>
-          </a:lnRef>
-          <a:fillRef idx="3">
-            <a:schemeClr val="accent1"/>
-          </a:fillRef>
-          <a:effectRef idx="2">
-            <a:schemeClr val="accent1"/>
-          </a:effectRef>
-          <a:fontRef idx="minor">
-            <a:schemeClr val="lt1"/>
-          </a:fontRef>
-        </p:style>
-        <p:txBody>
-          <a:bodyPr rtlCol="0" anchor="ctr"/>
-          <a:lstStyle/>
-          <a:p/>
-        </p:txBody>
-      </p:sp>
-      <p:sp>
-        <p:nvSpPr>
-          <p:cNvPr id="11" name="TextBox 10"/>
-          <p:cNvSpPr txBox="1"/>
-          <p:nvPr/>
-        </p:nvSpPr>
-        <p:spPr>
-          <a:xfrm>
-            <a:off x="4123943" y="2249424"/>
-            <a:ext cx="2816352" cy="566928"/>
-          </a:xfrm>
-          <a:prstGeom prst="rect">
-            <a:avLst/>
-          </a:prstGeom>
-          <a:noFill/>
-        </p:spPr>
-        <p:txBody>
-          <a:bodyPr wrap="square" anchor="t" lIns="0" rIns="0" tIns="0" bIns="0">
-            <a:spAutoFit/>
-          </a:bodyPr>
-          <a:lstStyle/>
-          <a:p>
-            <a:pPr algn="ctr">
-              <a:spcAft>
-                <a:spcPts val="400"/>
-              </a:spcAft>
-            </a:pPr>
-            <a:r>
-              <a:rPr sz="3400" b="1">
-                <a:solidFill>
-                  <a:srgbClr val="5A6373"/>
-                </a:solidFill>
-                <a:latin typeface="Microsoft YaHei"/>
-              </a:rPr>
-              <a:t>5%</a:t>
-            </a:r>
-          </a:p>
-        </p:txBody>
-      </p:sp>
-      <p:sp>
-        <p:nvSpPr>
-          <p:cNvPr id="12" name="TextBox 11"/>
-          <p:cNvSpPr txBox="1"/>
-          <p:nvPr/>
-        </p:nvSpPr>
-        <p:spPr>
-          <a:xfrm>
-            <a:off x="4123943" y="2834640"/>
-            <a:ext cx="2816352" cy="256032"/>
-          </a:xfrm>
-          <a:prstGeom prst="rect">
-            <a:avLst/>
-          </a:prstGeom>
-          <a:noFill/>
-        </p:spPr>
-        <p:txBody>
-          <a:bodyPr wrap="square" anchor="t" lIns="0" rIns="0" tIns="0" bIns="0">
-            <a:spAutoFit/>
-          </a:bodyPr>
-          <a:lstStyle/>
-          <a:p>
-            <a:pPr algn="ctr">
-              <a:spcAft>
-                <a:spcPts val="400"/>
-              </a:spcAft>
-            </a:pPr>
-            <a:r>
-              <a:rPr sz="1200" b="1">
-                <a:solidFill>
-                  <a:srgbClr val="1A1D24"/>
-                </a:solidFill>
-                <a:latin typeface="Microsoft YaHei"/>
-              </a:rPr>
-              <a:t>王天民</a:t>
-            </a:r>
-          </a:p>
-        </p:txBody>
-      </p:sp>
-      <p:sp>
-        <p:nvSpPr>
-          <p:cNvPr id="13" name="TextBox 12"/>
-          <p:cNvSpPr txBox="1"/>
-          <p:nvPr/>
-        </p:nvSpPr>
-        <p:spPr>
-          <a:xfrm>
-            <a:off x="4123943" y="3090672"/>
-            <a:ext cx="2816352" cy="310896"/>
-          </a:xfrm>
-          <a:prstGeom prst="rect">
-            <a:avLst/>
-          </a:prstGeom>
-          <a:noFill/>
-        </p:spPr>
-        <p:txBody>
-          <a:bodyPr wrap="square" anchor="t" lIns="0" rIns="0" tIns="0" bIns="0">
-            <a:spAutoFit/>
-          </a:bodyPr>
-          <a:lstStyle/>
-          <a:p>
-            <a:pPr algn="ctr">
-              <a:spcAft>
-                <a:spcPts val="400"/>
-              </a:spcAft>
-            </a:pPr>
-            <a:r>
-              <a:rPr sz="1000" b="0">
-                <a:solidFill>
-                  <a:srgbClr val="5A6373"/>
-                </a:solidFill>
-                <a:latin typeface="Microsoft YaHei"/>
-              </a:rPr>
-              <a:t>离线 benchmark 脚手架</a:t>
-            </a:r>
-          </a:p>
-        </p:txBody>
-      </p:sp>
-      <p:sp>
-        <p:nvSpPr>
-          <p:cNvPr id="14" name="TextBox 13"/>
-          <p:cNvSpPr txBox="1"/>
-          <p:nvPr/>
-        </p:nvSpPr>
-        <p:spPr>
-          <a:xfrm>
-            <a:off x="7452360" y="2176272"/>
-            <a:ext cx="4069080" cy="274320"/>
-          </a:xfrm>
-          <a:prstGeom prst="rect">
-            <a:avLst/>
-          </a:prstGeom>
-          <a:noFill/>
-        </p:spPr>
-        <p:txBody>
-          <a:bodyPr wrap="square" anchor="t" lIns="0" rIns="0" tIns="0" bIns="0">
-            <a:spAutoFit/>
-          </a:bodyPr>
-          <a:lstStyle/>
-          <a:p>
-            <a:pPr algn="l">
-              <a:spcAft>
-                <a:spcPts val="400"/>
-              </a:spcAft>
-            </a:pPr>
-            <a:r>
-              <a:rPr sz="1250" b="1">
-                <a:solidFill>
-                  <a:srgbClr val="5A6373"/>
-                </a:solidFill>
-                <a:latin typeface="Microsoft YaHei"/>
-              </a:rPr>
-              <a:t>王天民交付部分</a:t>
-            </a:r>
-          </a:p>
-        </p:txBody>
-      </p:sp>
-      <p:sp>
-        <p:nvSpPr>
-          <p:cNvPr id="15" name="TextBox 14"/>
-          <p:cNvSpPr txBox="1"/>
-          <p:nvPr/>
-        </p:nvSpPr>
-        <p:spPr>
-          <a:xfrm>
-            <a:off x="7452360" y="2505456"/>
-            <a:ext cx="3977639" cy="3785616"/>
-          </a:xfrm>
-          <a:prstGeom prst="rect">
-            <a:avLst/>
-          </a:prstGeom>
-          <a:noFill/>
-        </p:spPr>
-        <p:txBody>
-          <a:bodyPr wrap="square" anchor="t" lIns="0" rIns="0" tIns="0" bIns="0">
-            <a:spAutoFit/>
-          </a:bodyPr>
-          <a:lstStyle/>
-          <a:p>
-            <a:pPr algn="l">
+            <a:pPr>
               <a:lnSpc>
                 <a:spcPct val="125000"/>
               </a:lnSpc>
               <a:spcAft>
-                <a:spcPts val="600"/>
-              </a:spcAft>
-            </a:pPr>
-            <a:r>
-              <a:rPr sz="1150" b="0">
+                <a:spcPts val="1100"/>
+              </a:spcAft>
+            </a:pPr>
+            <a:r>
+              <a:rPr sz="1250" b="1">
+                <a:solidFill>
+                  <a:srgbClr val="1A1D24"/>
+                </a:solidFill>
+                <a:latin typeface="SimHei"/>
+                <a:ea typeface="SimHei"/>
+                <a:cs typeface="SimHei"/>
+              </a:rPr>
+              <a:t>— 模型与 kernel </a:t>
+            </a:r>
+            <a:r>
+              <a:rPr sz="1250">
                 <a:solidFill>
                   <a:srgbClr val="5A6373"/>
                 </a:solidFill>
-                <a:latin typeface="Microsoft YaHei"/>
-              </a:rPr>
-              <a:t>· shape inventory 脚本</a:t>
-            </a:r>
-          </a:p>
-          <a:p>
-            <a:pPr algn="l">
+                <a:latin typeface="SimHei"/>
+                <a:ea typeface="SimHei"/>
+                <a:cs typeface="SimHei"/>
+              </a:rPr>
+              <a:t>Qwen3.8 config / loader / weights，48 层 GDN 与 16 层全注意力 CUDA 实现，W4A16 解包与 GEMM / GEMV kernel</a:t>
+            </a:r>
+          </a:p>
+          <a:p>
+            <a:pPr>
               <a:lnSpc>
                 <a:spcPct val="125000"/>
               </a:lnSpc>
               <a:spcAft>
-                <a:spcPts val="600"/>
-              </a:spcAft>
-            </a:pPr>
-            <a:r>
-              <a:rPr sz="1150" b="0">
+                <a:spcPts val="1100"/>
+              </a:spcAft>
+            </a:pPr>
+            <a:r>
+              <a:rPr sz="1250" b="1">
+                <a:solidFill>
+                  <a:srgbClr val="1A1D24"/>
+                </a:solidFill>
+                <a:latin typeface="SimHei"/>
+                <a:ea typeface="SimHei"/>
+                <a:cs typeface="SimHei"/>
+              </a:rPr>
+              <a:t>— 服务与协议 </a:t>
+            </a:r>
+            <a:r>
+              <a:rPr sz="1250">
                 <a:solidFill>
                   <a:srgbClr val="5A6373"/>
                 </a:solidFill>
-                <a:latin typeface="Microsoft YaHei"/>
-              </a:rPr>
-              <a:t>· experiment validator 脚本</a:t>
-            </a:r>
-          </a:p>
-          <a:p>
-            <a:pPr algn="l">
+                <a:latin typeface="SimHei"/>
+                <a:ea typeface="SimHei"/>
+                <a:cs typeface="SimHei"/>
+              </a:rPr>
+              <a:t>HTTP / SSE、七项负控、admission、断连取消与故障恢复，/v1/chat/completions 图文入口</a:t>
+            </a:r>
+          </a:p>
+          <a:p>
+            <a:pPr>
               <a:lnSpc>
                 <a:spcPct val="125000"/>
               </a:lnSpc>
               <a:spcAft>
-                <a:spcPts val="600"/>
-              </a:spcAft>
-            </a:pPr>
-            <a:r>
-              <a:rPr sz="1150" b="0">
+                <a:spcPts val="1100"/>
+              </a:spcAft>
+            </a:pPr>
+            <a:r>
+              <a:rPr sz="1250" b="1">
+                <a:solidFill>
+                  <a:srgbClr val="1A1D24"/>
+                </a:solidFill>
+                <a:latin typeface="SimHei"/>
+                <a:ea typeface="SimHei"/>
+                <a:cs typeface="SimHei"/>
+              </a:rPr>
+              <a:t>— 正确性验证 </a:t>
+            </a:r>
+            <a:r>
+              <a:rPr sz="1250">
                 <a:solidFill>
                   <a:srgbClr val="5A6373"/>
                 </a:solidFill>
-                <a:latin typeface="Microsoft YaHei"/>
-              </a:rPr>
-              <a:t>· campaign manifest 与 README</a:t>
-            </a:r>
-          </a:p>
-          <a:p>
-            <a:pPr algn="l">
+                <a:latin typeface="SimHei"/>
+                <a:ea typeface="SimHei"/>
+                <a:cs typeface="SimHei"/>
+              </a:rPr>
+              <a:t>离线 oracle（文本 + vision）、hidden 代理集、逐层对拍与位相等断言</a:t>
+            </a:r>
+          </a:p>
+          <a:p>
+            <a:pPr>
               <a:lnSpc>
                 <a:spcPct val="125000"/>
               </a:lnSpc>
               <a:spcAft>
-                <a:spcPts val="600"/>
-              </a:spcAft>
-            </a:pPr>
-            <a:r>
-              <a:rPr sz="1150" b="0">
+                <a:spcPts val="1100"/>
+              </a:spcAft>
+            </a:pPr>
+            <a:r>
+              <a:rPr sz="1250" b="1">
+                <a:solidFill>
+                  <a:srgbClr val="1A1D24"/>
+                </a:solidFill>
+                <a:latin typeface="SimHei"/>
+                <a:ea typeface="SimHei"/>
+                <a:cs typeface="SimHei"/>
+              </a:rPr>
+              <a:t>— 性能工程 </a:t>
+            </a:r>
+            <a:r>
+              <a:rPr sz="1250">
                 <a:solidFill>
                   <a:srgbClr val="5A6373"/>
                 </a:solidFill>
-                <a:latin typeface="Microsoft YaHei"/>
-              </a:rPr>
-              <a:t>· 协作交接记录</a:t>
-            </a:r>
-          </a:p>
-        </p:txBody>
-      </p:sp>
-      <p:sp>
-        <p:nvSpPr>
-          <p:cNvPr id="16" name="TextBox 15"/>
-          <p:cNvSpPr txBox="1"/>
-          <p:nvPr/>
-        </p:nvSpPr>
-        <p:spPr>
-          <a:xfrm>
-            <a:off x="640080" y="3694176"/>
-            <a:ext cx="10881360" cy="274320"/>
-          </a:xfrm>
-          <a:prstGeom prst="rect">
-            <a:avLst/>
-          </a:prstGeom>
-          <a:noFill/>
-        </p:spPr>
-        <p:txBody>
-          <a:bodyPr wrap="square" anchor="t" lIns="0" rIns="0" tIns="0" bIns="0">
-            <a:spAutoFit/>
-          </a:bodyPr>
-          <a:lstStyle/>
-          <a:p>
-            <a:pPr algn="l">
-              <a:spcAft>
-                <a:spcPts val="400"/>
-              </a:spcAft>
-            </a:pPr>
-            <a:r>
-              <a:rPr sz="1300" b="1">
-                <a:solidFill>
-                  <a:srgbClr val="0066CC"/>
-                </a:solidFill>
-                <a:latin typeface="Microsoft YaHei"/>
-              </a:rPr>
-              <a:t>本人实际承担的范围</a:t>
-            </a:r>
-          </a:p>
-        </p:txBody>
-      </p:sp>
-      <p:sp>
-        <p:nvSpPr>
-          <p:cNvPr id="17" name="Rounded Rectangle 16"/>
-          <p:cNvSpPr/>
-          <p:nvPr/>
-        </p:nvSpPr>
-        <p:spPr>
-          <a:xfrm>
-            <a:off x="640080" y="4059936"/>
-            <a:ext cx="5349240" cy="841248"/>
-          </a:xfrm>
-          <a:prstGeom prst="roundRect">
-            <a:avLst>
-              <a:gd name="adj" fmla="val 4000"/>
-            </a:avLst>
-          </a:prstGeom>
-          <a:solidFill>
-            <a:srgbClr val="FFFFFF"/>
-          </a:solidFill>
-          <a:ln w="12700">
-            <a:solidFill>
-              <a:srgbClr val="DDE1E8"/>
-            </a:solidFill>
-          </a:ln>
-          <a:effectLst/>
-        </p:spPr>
-        <p:style>
-          <a:lnRef idx="1">
-            <a:schemeClr val="accent1"/>
-          </a:lnRef>
-          <a:fillRef idx="3">
-            <a:schemeClr val="accent1"/>
-          </a:fillRef>
-          <a:effectRef idx="2">
-            <a:schemeClr val="accent1"/>
-          </a:effectRef>
-          <a:fontRef idx="minor">
-            <a:schemeClr val="lt1"/>
-          </a:fontRef>
-        </p:style>
-        <p:txBody>
-          <a:bodyPr rtlCol="0" anchor="ctr"/>
-          <a:lstStyle/>
-          <a:p/>
-        </p:txBody>
-      </p:sp>
-      <p:sp>
-        <p:nvSpPr>
-          <p:cNvPr id="18" name="TextBox 17"/>
-          <p:cNvSpPr txBox="1"/>
-          <p:nvPr/>
-        </p:nvSpPr>
-        <p:spPr>
-          <a:xfrm>
-            <a:off x="841248" y="4169664"/>
-            <a:ext cx="4937760" cy="237744"/>
-          </a:xfrm>
-          <a:prstGeom prst="rect">
-            <a:avLst/>
-          </a:prstGeom>
-          <a:noFill/>
-        </p:spPr>
-        <p:txBody>
-          <a:bodyPr wrap="square" anchor="t" lIns="0" rIns="0" tIns="0" bIns="0">
-            <a:spAutoFit/>
-          </a:bodyPr>
-          <a:lstStyle/>
-          <a:p>
-            <a:pPr algn="l">
-              <a:spcAft>
-                <a:spcPts val="400"/>
-              </a:spcAft>
-            </a:pPr>
-            <a:r>
-              <a:rPr sz="1250" b="1">
-                <a:solidFill>
-                  <a:srgbClr val="0066CC"/>
-                </a:solidFill>
-                <a:latin typeface="Microsoft YaHei"/>
-              </a:rPr>
-              <a:t>模型与 kernel</a:t>
-            </a:r>
-          </a:p>
-        </p:txBody>
-      </p:sp>
-      <p:sp>
-        <p:nvSpPr>
-          <p:cNvPr id="19" name="TextBox 18"/>
-          <p:cNvSpPr txBox="1"/>
-          <p:nvPr/>
-        </p:nvSpPr>
-        <p:spPr>
-          <a:xfrm>
-            <a:off x="841248" y="4443984"/>
-            <a:ext cx="4937760" cy="402336"/>
-          </a:xfrm>
-          <a:prstGeom prst="rect">
-            <a:avLst/>
-          </a:prstGeom>
-          <a:noFill/>
-        </p:spPr>
-        <p:txBody>
-          <a:bodyPr wrap="square" anchor="t" lIns="0" rIns="0" tIns="0" bIns="0">
-            <a:spAutoFit/>
-          </a:bodyPr>
-          <a:lstStyle/>
-          <a:p>
-            <a:pPr algn="l">
+                <a:latin typeface="SimHei"/>
+                <a:ea typeface="SimHei"/>
+                <a:cs typeface="SimHei"/>
+              </a:rPr>
+              <a:t>十七次单变量配对实验、显存账本、四卡并行验证方法</a:t>
+            </a:r>
+          </a:p>
+          <a:p>
+            <a:pPr>
               <a:lnSpc>
                 <a:spcPct val="125000"/>
               </a:lnSpc>
               <a:spcAft>
-                <a:spcPts val="400"/>
-              </a:spcAft>
-            </a:pPr>
-            <a:r>
-              <a:rPr sz="1150" b="0">
+                <a:spcPts val="1100"/>
+              </a:spcAft>
+            </a:pPr>
+            <a:r>
+              <a:rPr sz="1250" b="1">
+                <a:solidFill>
+                  <a:srgbClr val="1A1D24"/>
+                </a:solidFill>
+                <a:latin typeface="SimHei"/>
+                <a:ea typeface="SimHei"/>
+                <a:cs typeface="SimHei"/>
+              </a:rPr>
+              <a:t>— 双 bonus 与集成 </a:t>
+            </a:r>
+            <a:r>
+              <a:rPr sz="1250">
                 <a:solidFill>
                   <a:srgbClr val="5A6373"/>
                 </a:solidFill>
-                <a:latin typeface="Microsoft YaHei"/>
-              </a:rPr>
-              <a:t>Qwen3.8 config / loader / weights，48 层 GDN 与 16 层全注意力的 CUDA 实现，W4A16 解包与 GEMM / GEMV kernel</a:t>
-            </a:r>
-          </a:p>
-        </p:txBody>
-      </p:sp>
-      <p:sp>
-        <p:nvSpPr>
-          <p:cNvPr id="20" name="Rounded Rectangle 19"/>
-          <p:cNvSpPr/>
-          <p:nvPr/>
-        </p:nvSpPr>
-        <p:spPr>
-          <a:xfrm>
-            <a:off x="6172200" y="4059936"/>
-            <a:ext cx="5349240" cy="841248"/>
-          </a:xfrm>
-          <a:prstGeom prst="roundRect">
-            <a:avLst>
-              <a:gd name="adj" fmla="val 4000"/>
-            </a:avLst>
-          </a:prstGeom>
-          <a:solidFill>
-            <a:srgbClr val="FFFFFF"/>
-          </a:solidFill>
-          <a:ln w="12700">
-            <a:solidFill>
-              <a:srgbClr val="DDE1E8"/>
-            </a:solidFill>
-          </a:ln>
-          <a:effectLst/>
-        </p:spPr>
-        <p:style>
-          <a:lnRef idx="1">
-            <a:schemeClr val="accent1"/>
-          </a:lnRef>
-          <a:fillRef idx="3">
-            <a:schemeClr val="accent1"/>
-          </a:fillRef>
-          <a:effectRef idx="2">
-            <a:schemeClr val="accent1"/>
-          </a:effectRef>
-          <a:fontRef idx="minor">
-            <a:schemeClr val="lt1"/>
-          </a:fontRef>
-        </p:style>
-        <p:txBody>
-          <a:bodyPr rtlCol="0" anchor="ctr"/>
-          <a:lstStyle/>
-          <a:p/>
-        </p:txBody>
-      </p:sp>
-      <p:sp>
-        <p:nvSpPr>
-          <p:cNvPr id="21" name="TextBox 20"/>
-          <p:cNvSpPr txBox="1"/>
-          <p:nvPr/>
-        </p:nvSpPr>
-        <p:spPr>
-          <a:xfrm>
-            <a:off x="6373368" y="4169664"/>
-            <a:ext cx="4937760" cy="237744"/>
+                <a:latin typeface="SimHei"/>
+                <a:ea typeface="SimHei"/>
+                <a:cs typeface="SimHei"/>
+              </a:rPr>
+              <a:t>vision 塔 CUDA 移植、C4 批式调度与批式 kernel、REPORT.md、最终集成与提交</a:t>
+            </a:r>
+          </a:p>
+        </p:txBody>
+      </p:sp>
+      <p:sp>
+        <p:nvSpPr>
+          <p:cNvPr id="8" name="TextBox 7"/>
+          <p:cNvSpPr txBox="1"/>
+          <p:nvPr/>
+        </p:nvSpPr>
+        <p:spPr>
+          <a:xfrm>
+            <a:off x="7863840" y="2029968"/>
+            <a:ext cx="3657600" cy="310896"/>
           </a:xfrm>
           <a:prstGeom prst="rect">
             <a:avLst/>
@@ -8241,27 +8071,29 @@
               </a:spcAft>
             </a:pPr>
             <a:r>
-              <a:rPr sz="1250" b="1">
+              <a:rPr sz="1450" b="1">
                 <a:solidFill>
                   <a:srgbClr val="0066CC"/>
                 </a:solidFill>
-                <a:latin typeface="Microsoft YaHei"/>
-              </a:rPr>
-              <a:t>服务与协议</a:t>
-            </a:r>
-          </a:p>
-        </p:txBody>
-      </p:sp>
-      <p:sp>
-        <p:nvSpPr>
-          <p:cNvPr id="22" name="TextBox 21"/>
-          <p:cNvSpPr txBox="1"/>
-          <p:nvPr/>
-        </p:nvSpPr>
-        <p:spPr>
-          <a:xfrm>
-            <a:off x="6373368" y="4443984"/>
-            <a:ext cx="4937760" cy="402336"/>
+                <a:latin typeface="SimHei"/>
+                <a:ea typeface="SimHei"/>
+                <a:cs typeface="SimHei"/>
+              </a:rPr>
+              <a:t>王天民</a:t>
+            </a:r>
+          </a:p>
+        </p:txBody>
+      </p:sp>
+      <p:sp>
+        <p:nvSpPr>
+          <p:cNvPr id="9" name="TextBox 8"/>
+          <p:cNvSpPr txBox="1"/>
+          <p:nvPr/>
+        </p:nvSpPr>
+        <p:spPr>
+          <a:xfrm>
+            <a:off x="7863840" y="2450592"/>
+            <a:ext cx="3566160" cy="3840480"/>
           </a:xfrm>
           <a:prstGeom prst="rect">
             <a:avLst/>
@@ -8274,283 +8106,106 @@
           </a:bodyPr>
           <a:lstStyle/>
           <a:p>
-            <a:pPr algn="l">
+            <a:pPr>
               <a:lnSpc>
                 <a:spcPct val="125000"/>
               </a:lnSpc>
               <a:spcAft>
-                <a:spcPts val="400"/>
-              </a:spcAft>
-            </a:pPr>
-            <a:r>
-              <a:rPr sz="1150" b="0">
+                <a:spcPts val="1100"/>
+              </a:spcAft>
+            </a:pPr>
+            <a:r>
+              <a:rPr sz="1250" b="1">
+                <a:solidFill>
+                  <a:srgbClr val="1A1D24"/>
+                </a:solidFill>
+                <a:latin typeface="SimHei"/>
+                <a:ea typeface="SimHei"/>
+                <a:cs typeface="SimHei"/>
+              </a:rPr>
+              <a:t>— 离线 benchmark 脚手架 </a:t>
+            </a:r>
+            <a:r>
+              <a:rPr sz="1250">
                 <a:solidFill>
                   <a:srgbClr val="5A6373"/>
                 </a:solidFill>
-                <a:latin typeface="Microsoft YaHei"/>
-              </a:rPr>
-              <a:t>HTTP / SSE surface、七项负控、admission、断连取消与故障恢复，/v1/chat/completions 图文入口</a:t>
-            </a:r>
-          </a:p>
-        </p:txBody>
-      </p:sp>
-      <p:sp>
-        <p:nvSpPr>
-          <p:cNvPr id="23" name="Rounded Rectangle 22"/>
-          <p:cNvSpPr/>
-          <p:nvPr/>
-        </p:nvSpPr>
-        <p:spPr>
-          <a:xfrm>
-            <a:off x="640080" y="4992624"/>
-            <a:ext cx="5349240" cy="841248"/>
-          </a:xfrm>
-          <a:prstGeom prst="roundRect">
-            <a:avLst>
-              <a:gd name="adj" fmla="val 4000"/>
-            </a:avLst>
-          </a:prstGeom>
-          <a:solidFill>
-            <a:srgbClr val="FFFFFF"/>
-          </a:solidFill>
-          <a:ln w="12700">
-            <a:solidFill>
-              <a:srgbClr val="DDE1E8"/>
-            </a:solidFill>
-          </a:ln>
-          <a:effectLst/>
-        </p:spPr>
-        <p:style>
-          <a:lnRef idx="1">
-            <a:schemeClr val="accent1"/>
-          </a:lnRef>
-          <a:fillRef idx="3">
-            <a:schemeClr val="accent1"/>
-          </a:fillRef>
-          <a:effectRef idx="2">
-            <a:schemeClr val="accent1"/>
-          </a:effectRef>
-          <a:fontRef idx="minor">
-            <a:schemeClr val="lt1"/>
-          </a:fontRef>
-        </p:style>
-        <p:txBody>
-          <a:bodyPr rtlCol="0" anchor="ctr"/>
-          <a:lstStyle/>
-          <a:p/>
-        </p:txBody>
-      </p:sp>
-      <p:sp>
-        <p:nvSpPr>
-          <p:cNvPr id="24" name="TextBox 23"/>
-          <p:cNvSpPr txBox="1"/>
-          <p:nvPr/>
-        </p:nvSpPr>
-        <p:spPr>
-          <a:xfrm>
-            <a:off x="841248" y="5102352"/>
-            <a:ext cx="4937760" cy="237744"/>
-          </a:xfrm>
-          <a:prstGeom prst="rect">
-            <a:avLst/>
-          </a:prstGeom>
-          <a:noFill/>
-        </p:spPr>
-        <p:txBody>
-          <a:bodyPr wrap="square" anchor="t" lIns="0" rIns="0" tIns="0" bIns="0">
-            <a:spAutoFit/>
-          </a:bodyPr>
-          <a:lstStyle/>
-          <a:p>
-            <a:pPr algn="l">
-              <a:spcAft>
-                <a:spcPts val="400"/>
-              </a:spcAft>
-            </a:pPr>
-            <a:r>
-              <a:rPr sz="1250" b="1">
-                <a:solidFill>
-                  <a:srgbClr val="0066CC"/>
-                </a:solidFill>
-                <a:latin typeface="Microsoft YaHei"/>
-              </a:rPr>
-              <a:t>正确性证据</a:t>
-            </a:r>
-          </a:p>
-        </p:txBody>
-      </p:sp>
-      <p:sp>
-        <p:nvSpPr>
-          <p:cNvPr id="25" name="TextBox 24"/>
-          <p:cNvSpPr txBox="1"/>
-          <p:nvPr/>
-        </p:nvSpPr>
-        <p:spPr>
-          <a:xfrm>
-            <a:off x="841248" y="5376672"/>
-            <a:ext cx="4937760" cy="402336"/>
-          </a:xfrm>
-          <a:prstGeom prst="rect">
-            <a:avLst/>
-          </a:prstGeom>
-          <a:noFill/>
-        </p:spPr>
-        <p:txBody>
-          <a:bodyPr wrap="square" anchor="t" lIns="0" rIns="0" tIns="0" bIns="0">
-            <a:spAutoFit/>
-          </a:bodyPr>
-          <a:lstStyle/>
-          <a:p>
-            <a:pPr algn="l">
+                <a:latin typeface="SimHei"/>
+                <a:ea typeface="SimHei"/>
+                <a:cs typeface="SimHei"/>
+              </a:rPr>
+              <a:t>shape inventory 与 experiment validator 脚本</a:t>
+            </a:r>
+          </a:p>
+          <a:p>
+            <a:pPr>
               <a:lnSpc>
                 <a:spcPct val="125000"/>
               </a:lnSpc>
               <a:spcAft>
-                <a:spcPts val="400"/>
-              </a:spcAft>
-            </a:pPr>
-            <a:r>
-              <a:rPr sz="1150" b="0">
+                <a:spcPts val="1100"/>
+              </a:spcAft>
+            </a:pPr>
+            <a:r>
+              <a:rPr sz="1250" b="1">
+                <a:solidFill>
+                  <a:srgbClr val="1A1D24"/>
+                </a:solidFill>
+                <a:latin typeface="SimHei"/>
+                <a:ea typeface="SimHei"/>
+                <a:cs typeface="SimHei"/>
+              </a:rPr>
+              <a:t>— campaign 资料 </a:t>
+            </a:r>
+            <a:r>
+              <a:rPr sz="1250">
                 <a:solidFill>
                   <a:srgbClr val="5A6373"/>
                 </a:solidFill>
-                <a:latin typeface="Microsoft YaHei"/>
-              </a:rPr>
-              <a:t>离线 oracle（文本 + vision）、hidden 代理集、逐层对拍与位相等断言</a:t>
-            </a:r>
-          </a:p>
-        </p:txBody>
-      </p:sp>
-      <p:sp>
-        <p:nvSpPr>
-          <p:cNvPr id="26" name="Rounded Rectangle 25"/>
-          <p:cNvSpPr/>
-          <p:nvPr/>
-        </p:nvSpPr>
-        <p:spPr>
-          <a:xfrm>
-            <a:off x="6172200" y="4992624"/>
-            <a:ext cx="5349240" cy="841248"/>
-          </a:xfrm>
-          <a:prstGeom prst="roundRect">
-            <a:avLst>
-              <a:gd name="adj" fmla="val 4000"/>
-            </a:avLst>
-          </a:prstGeom>
-          <a:solidFill>
-            <a:srgbClr val="FFFFFF"/>
-          </a:solidFill>
-          <a:ln w="12700">
-            <a:solidFill>
-              <a:srgbClr val="DDE1E8"/>
-            </a:solidFill>
-          </a:ln>
-          <a:effectLst/>
-        </p:spPr>
-        <p:style>
-          <a:lnRef idx="1">
-            <a:schemeClr val="accent1"/>
-          </a:lnRef>
-          <a:fillRef idx="3">
-            <a:schemeClr val="accent1"/>
-          </a:fillRef>
-          <a:effectRef idx="2">
-            <a:schemeClr val="accent1"/>
-          </a:effectRef>
-          <a:fontRef idx="minor">
-            <a:schemeClr val="lt1"/>
-          </a:fontRef>
-        </p:style>
-        <p:txBody>
-          <a:bodyPr rtlCol="0" anchor="ctr"/>
-          <a:lstStyle/>
-          <a:p/>
-        </p:txBody>
-      </p:sp>
-      <p:sp>
-        <p:nvSpPr>
-          <p:cNvPr id="27" name="TextBox 26"/>
-          <p:cNvSpPr txBox="1"/>
-          <p:nvPr/>
-        </p:nvSpPr>
-        <p:spPr>
-          <a:xfrm>
-            <a:off x="6373368" y="5102352"/>
-            <a:ext cx="4937760" cy="237744"/>
-          </a:xfrm>
-          <a:prstGeom prst="rect">
-            <a:avLst/>
-          </a:prstGeom>
-          <a:noFill/>
-        </p:spPr>
-        <p:txBody>
-          <a:bodyPr wrap="square" anchor="t" lIns="0" rIns="0" tIns="0" bIns="0">
-            <a:spAutoFit/>
-          </a:bodyPr>
-          <a:lstStyle/>
-          <a:p>
-            <a:pPr algn="l">
-              <a:spcAft>
-                <a:spcPts val="400"/>
-              </a:spcAft>
-            </a:pPr>
-            <a:r>
-              <a:rPr sz="1250" b="1">
-                <a:solidFill>
-                  <a:srgbClr val="0066CC"/>
-                </a:solidFill>
-                <a:latin typeface="Microsoft YaHei"/>
-              </a:rPr>
-              <a:t>性能工程与双 bonus</a:t>
-            </a:r>
-          </a:p>
-        </p:txBody>
-      </p:sp>
-      <p:sp>
-        <p:nvSpPr>
-          <p:cNvPr id="28" name="TextBox 27"/>
-          <p:cNvSpPr txBox="1"/>
-          <p:nvPr/>
-        </p:nvSpPr>
-        <p:spPr>
-          <a:xfrm>
-            <a:off x="6373368" y="5376672"/>
-            <a:ext cx="4937760" cy="402336"/>
-          </a:xfrm>
-          <a:prstGeom prst="rect">
-            <a:avLst/>
-          </a:prstGeom>
-          <a:noFill/>
-        </p:spPr>
-        <p:txBody>
-          <a:bodyPr wrap="square" anchor="t" lIns="0" rIns="0" tIns="0" bIns="0">
-            <a:spAutoFit/>
-          </a:bodyPr>
-          <a:lstStyle/>
-          <a:p>
-            <a:pPr algn="l">
+                <a:latin typeface="SimHei"/>
+                <a:ea typeface="SimHei"/>
+                <a:cs typeface="SimHei"/>
+              </a:rPr>
+              <a:t>manifest 与 README</a:t>
+            </a:r>
+          </a:p>
+          <a:p>
+            <a:pPr>
               <a:lnSpc>
                 <a:spcPct val="125000"/>
               </a:lnSpc>
               <a:spcAft>
-                <a:spcPts val="400"/>
-              </a:spcAft>
-            </a:pPr>
-            <a:r>
-              <a:rPr sz="1150" b="0">
+                <a:spcPts val="1100"/>
+              </a:spcAft>
+            </a:pPr>
+            <a:r>
+              <a:rPr sz="1250" b="1">
+                <a:solidFill>
+                  <a:srgbClr val="1A1D24"/>
+                </a:solidFill>
+                <a:latin typeface="SimHei"/>
+                <a:ea typeface="SimHei"/>
+                <a:cs typeface="SimHei"/>
+              </a:rPr>
+              <a:t>— 协作记录 </a:t>
+            </a:r>
+            <a:r>
+              <a:rPr sz="1250">
                 <a:solidFill>
                   <a:srgbClr val="5A6373"/>
                 </a:solidFill>
-                <a:latin typeface="Microsoft YaHei"/>
-              </a:rPr>
-              <a:t>十七次配对实验、显存账本、vision 塔 CUDA 移植、C4 批式调度与批式 kernel、REPORT.md、最终集成与提交</a:t>
-            </a:r>
-          </a:p>
-        </p:txBody>
-      </p:sp>
-      <p:sp>
-        <p:nvSpPr>
-          <p:cNvPr id="29" name="TextBox 28"/>
+                <a:latin typeface="SimHei"/>
+                <a:ea typeface="SimHei"/>
+                <a:cs typeface="SimHei"/>
+              </a:rPr>
+              <a:t>交接文档</a:t>
+            </a:r>
+          </a:p>
+        </p:txBody>
+      </p:sp>
+      <p:sp>
+        <p:nvSpPr>
+          <p:cNvPr id="10" name="TextBox 9"/>
           <p:cNvSpPr txBox="1"/>
           <p:nvPr/>
         </p:nvSpPr>
@@ -8580,9 +8235,11 @@
                 <a:solidFill>
                   <a:srgbClr val="5A6373"/>
                 </a:solidFill>
-                <a:latin typeface="Microsoft YaHei"/>
-              </a:rPr>
-              <a:t>比例依据 git 提交记录；原计划的多人并行 lane 实际退化为单人串行，但带锁 GPU 队列与单卡正式重放的纪律始终执行</a:t>
+                <a:latin typeface="SimHei"/>
+                <a:ea typeface="SimHei"/>
+                <a:cs typeface="SimHei"/>
+              </a:rPr>
+              <a:t>原计划的多人并行安排实际为单人串行推进；GPU 带锁队列与单卡正式重放的纪律全程执行</a:t>
             </a:r>
           </a:p>
         </p:txBody>
@@ -8681,7 +8338,9 @@
                 <a:solidFill>
                   <a:srgbClr val="8FC2F0"/>
                 </a:solidFill>
-                <a:latin typeface="Microsoft YaHei"/>
+                <a:latin typeface="SimHei"/>
+                <a:ea typeface="SimHei"/>
+                <a:cs typeface="SimHei"/>
               </a:rPr>
               <a:t>为什么叫「4090 能飞」</a:t>
             </a:r>
@@ -8723,7 +8382,9 @@
                 <a:solidFill>
                   <a:srgbClr val="FFFFFF"/>
                 </a:solidFill>
-                <a:latin typeface="Microsoft YaHei"/>
+                <a:latin typeface="SimHei"/>
+                <a:ea typeface="SimHei"/>
+                <a:cs typeface="SimHei"/>
               </a:rPr>
               <a:t>让它飞起来的不是更强的硬件，是看清了瓶颈的真实位置。</a:t>
             </a:r>
@@ -8742,9 +8403,11 @@
                 <a:solidFill>
                   <a:srgbClr val="C5D9EE"/>
                 </a:solidFill>
-                <a:latin typeface="Microsoft YaHei"/>
-              </a:rPr>
-              <a:t>三个最大的瓶颈都不在算术里：softmax 每个线程重复扫描整行、W4 投影每行重读整个权重矩阵、80% 的 prefill 花在 cudaMalloc。代码没换硬件、没换算法，只是终于测对了地方 —— TTFT 约 47 倍、TPOT 约 2 倍，correctness 与稳定性全程未退让。</a:t>
+                <a:latin typeface="SimHei"/>
+                <a:ea typeface="SimHei"/>
+                <a:cs typeface="SimHei"/>
+              </a:rPr>
+              <a:t>三个最大的瓶颈都不在算术里：softmax 每个线程重复扫描整行、W4 投影每行重读整个权重矩阵、80% 的 prefill 耗在 cudaMalloc。未更换硬件与算法，通过正确的测量归因逐一消除结构性瓶颈 —— TTFT 约 47 倍、TPOT 约 2 倍，correctness 与稳定性全程未退让。</a:t>
             </a:r>
           </a:p>
         </p:txBody>
@@ -8825,7 +8488,9 @@
                 <a:solidFill>
                   <a:srgbClr val="8FC2F0"/>
                 </a:solidFill>
-                <a:latin typeface="Microsoft YaHei"/>
+                <a:latin typeface="SimHei"/>
+                <a:ea typeface="SimHei"/>
+                <a:cs typeface="SimHei"/>
               </a:rPr>
               <a:t>最大的单点收益</a:t>
             </a:r>
@@ -8867,7 +8532,9 @@
                 <a:solidFill>
                   <a:srgbClr val="FFFFFF"/>
                 </a:solidFill>
-                <a:latin typeface="Microsoft YaHei"/>
+                <a:latin typeface="SimHei"/>
+                <a:ea typeface="SimHei"/>
+                <a:cs typeface="SimHei"/>
               </a:rPr>
               <a:t>行协作 softmax：16K attention 单层 23.06 s → 0.659 s</a:t>
             </a:r>
@@ -8950,7 +8617,9 @@
                 <a:solidFill>
                   <a:srgbClr val="8FC2F0"/>
                 </a:solidFill>
-                <a:latin typeface="Microsoft YaHei"/>
+                <a:latin typeface="SimHei"/>
+                <a:ea typeface="SimHei"/>
+                <a:cs typeface="SimHei"/>
               </a:rPr>
               <a:t>最有价值的负结果</a:t>
             </a:r>
@@ -8992,7 +8661,9 @@
                 <a:solidFill>
                   <a:srgbClr val="FFFFFF"/>
                 </a:solidFill>
-                <a:latin typeface="Microsoft YaHei"/>
+                <a:latin typeface="SimHei"/>
+                <a:ea typeface="SimHei"/>
+                <a:cs typeface="SimHei"/>
               </a:rPr>
               <a:t>Marlin 位技巧在 M=1 GEMV 慢 54%，反汇编级根因</a:t>
             </a:r>
@@ -9075,7 +8746,9 @@
                 <a:solidFill>
                   <a:srgbClr val="8FC2F0"/>
                 </a:solidFill>
-                <a:latin typeface="Microsoft YaHei"/>
+                <a:latin typeface="SimHei"/>
+                <a:ea typeface="SimHei"/>
+                <a:cs typeface="SimHei"/>
               </a:rPr>
               <a:t>最关键的方法</a:t>
             </a:r>
@@ -9117,7 +8790,9 @@
                 <a:solidFill>
                   <a:srgbClr val="FFFFFF"/>
                 </a:solidFill>
-                <a:latin typeface="Microsoft YaHei"/>
+                <a:latin typeface="SimHei"/>
+                <a:ea typeface="SimHei"/>
+                <a:cs typeface="SimHei"/>
               </a:rPr>
               <a:t>低于 5% 的结论必须双卡双副本复测</a:t>
             </a:r>
@@ -9156,7 +8831,9 @@
                 <a:solidFill>
                   <a:srgbClr val="8FC2F0"/>
                 </a:solidFill>
-                <a:latin typeface="Consolas"/>
+                <a:latin typeface="SimHei"/>
+                <a:ea typeface="SimHei"/>
+                <a:cs typeface="SimHei"/>
               </a:rPr>
               <a:t>commit 06993a2d2642c6f7177b57493b797d5d537e4d64 · branch integrate/member2</a:t>
             </a:r>
@@ -9213,7 +8890,9 @@
                 <a:solidFill>
                   <a:srgbClr val="0066CC"/>
                 </a:solidFill>
-                <a:latin typeface="Microsoft YaHei"/>
+                <a:latin typeface="SimHei"/>
+                <a:ea typeface="SimHei"/>
+                <a:cs typeface="SimHei"/>
               </a:rPr>
               <a:t>RESULTS</a:t>
             </a:r>
@@ -9252,7 +8931,9 @@
                 <a:solidFill>
                   <a:srgbClr val="1A1D24"/>
                 </a:solidFill>
-                <a:latin typeface="Microsoft YaHei"/>
+                <a:latin typeface="SimHei"/>
+                <a:ea typeface="SimHei"/>
+                <a:cs typeface="SimHei"/>
               </a:rPr>
               <a:t>成果总览</a:t>
             </a:r>
@@ -9381,7 +9062,9 @@
                 <a:solidFill>
                   <a:srgbClr val="0E8A4F"/>
                 </a:solidFill>
-                <a:latin typeface="Microsoft YaHei"/>
+                <a:latin typeface="SimHei"/>
+                <a:ea typeface="SimHei"/>
+                <a:cs typeface="SimHei"/>
               </a:rPr>
               <a:t>47×</a:t>
             </a:r>
@@ -9420,7 +9103,9 @@
                 <a:solidFill>
                   <a:srgbClr val="1A1D24"/>
                 </a:solidFill>
-                <a:latin typeface="Microsoft YaHei"/>
+                <a:latin typeface="SimHei"/>
+                <a:ea typeface="SimHei"/>
+                <a:cs typeface="SimHei"/>
               </a:rPr>
               <a:t>TTFT 提升</a:t>
             </a:r>
@@ -9459,7 +9144,9 @@
                 <a:solidFill>
                   <a:srgbClr val="5A6373"/>
                 </a:solidFill>
-                <a:latin typeface="Microsoft YaHei"/>
+                <a:latin typeface="SimHei"/>
+                <a:ea typeface="SimHei"/>
+                <a:cs typeface="SimHei"/>
               </a:rPr>
               <a:t>1K：78.09 s → 1.63 s</a:t>
             </a:r>
@@ -9544,7 +9231,9 @@
                 <a:solidFill>
                   <a:srgbClr val="0E8A4F"/>
                 </a:solidFill>
-                <a:latin typeface="Microsoft YaHei"/>
+                <a:latin typeface="SimHei"/>
+                <a:ea typeface="SimHei"/>
+                <a:cs typeface="SimHei"/>
               </a:rPr>
               <a:t>2.0×</a:t>
             </a:r>
@@ -9583,7 +9272,9 @@
                 <a:solidFill>
                   <a:srgbClr val="1A1D24"/>
                 </a:solidFill>
-                <a:latin typeface="Microsoft YaHei"/>
+                <a:latin typeface="SimHei"/>
+                <a:ea typeface="SimHei"/>
+                <a:cs typeface="SimHei"/>
               </a:rPr>
               <a:t>TPOT 提升</a:t>
             </a:r>
@@ -9622,7 +9313,9 @@
                 <a:solidFill>
                   <a:srgbClr val="5A6373"/>
                 </a:solidFill>
-                <a:latin typeface="Microsoft YaHei"/>
+                <a:latin typeface="SimHei"/>
+                <a:ea typeface="SimHei"/>
+                <a:cs typeface="SimHei"/>
               </a:rPr>
               <a:t>1K：133.7 ms → 66.5 ms</a:t>
             </a:r>
@@ -9707,7 +9400,9 @@
                 <a:solidFill>
                   <a:srgbClr val="0066CC"/>
                 </a:solidFill>
-                <a:latin typeface="Microsoft YaHei"/>
+                <a:latin typeface="SimHei"/>
+                <a:ea typeface="SimHei"/>
+                <a:cs typeface="SimHei"/>
               </a:rPr>
               <a:t>7/7</a:t>
             </a:r>
@@ -9746,7 +9441,9 @@
                 <a:solidFill>
                   <a:srgbClr val="1A1D24"/>
                 </a:solidFill>
-                <a:latin typeface="Microsoft YaHei"/>
+                <a:latin typeface="SimHei"/>
+                <a:ea typeface="SimHei"/>
+                <a:cs typeface="SimHei"/>
               </a:rPr>
               <a:t>性能 cell 有效</a:t>
             </a:r>
@@ -9785,7 +9482,9 @@
                 <a:solidFill>
                   <a:srgbClr val="5A6373"/>
                 </a:solidFill>
-                <a:latin typeface="Microsoft YaHei"/>
+                <a:latin typeface="SimHei"/>
+                <a:ea typeface="SimHei"/>
+                <a:cs typeface="SimHei"/>
               </a:rPr>
               <a:t>success 5/5，最差 CV 8.1%</a:t>
             </a:r>
@@ -9870,7 +9569,9 @@
                 <a:solidFill>
                   <a:srgbClr val="0066CC"/>
                 </a:solidFill>
-                <a:latin typeface="Microsoft YaHei"/>
+                <a:latin typeface="SimHei"/>
+                <a:ea typeface="SimHei"/>
+                <a:cs typeface="SimHei"/>
               </a:rPr>
               <a:t>100%</a:t>
             </a:r>
@@ -9909,7 +9610,9 @@
                 <a:solidFill>
                   <a:srgbClr val="1A1D24"/>
                 </a:solidFill>
-                <a:latin typeface="Microsoft YaHei"/>
+                <a:latin typeface="SimHei"/>
+                <a:ea typeface="SimHei"/>
+                <a:cs typeface="SimHei"/>
               </a:rPr>
               <a:t>200 请求 soak</a:t>
             </a:r>
@@ -9948,7 +9651,9 @@
                 <a:solidFill>
                   <a:srgbClr val="5A6373"/>
                 </a:solidFill>
-                <a:latin typeface="Microsoft YaHei"/>
+                <a:latin typeface="SimHei"/>
+                <a:ea typeface="SimHei"/>
+                <a:cs typeface="SimHei"/>
               </a:rPr>
               <a:t>五项 reliability 全为真</a:t>
             </a:r>
@@ -9987,7 +9692,9 @@
                 <a:solidFill>
                   <a:srgbClr val="1A1D24"/>
                 </a:solidFill>
-                <a:latin typeface="Microsoft YaHei"/>
+                <a:latin typeface="SimHei"/>
+                <a:ea typeface="SimHei"/>
+                <a:cs typeface="SimHei"/>
               </a:rPr>
               <a:t>七个基础 cell：优化前 → 优化后</a:t>
             </a:r>
@@ -10070,7 +9777,9 @@
                 <a:solidFill>
                   <a:srgbClr val="1A1D24"/>
                 </a:solidFill>
-                <a:latin typeface="Microsoft YaHei"/>
+                <a:latin typeface="SimHei"/>
+                <a:ea typeface="SimHei"/>
+                <a:cs typeface="SimHei"/>
               </a:rPr>
               <a:t>cell</a:t>
             </a:r>
@@ -10109,7 +9818,9 @@
                 <a:solidFill>
                   <a:srgbClr val="1A1D24"/>
                 </a:solidFill>
-                <a:latin typeface="Microsoft YaHei"/>
+                <a:latin typeface="SimHei"/>
+                <a:ea typeface="SimHei"/>
+                <a:cs typeface="SimHei"/>
               </a:rPr>
               <a:t>优化前</a:t>
             </a:r>
@@ -10148,7 +9859,9 @@
                 <a:solidFill>
                   <a:srgbClr val="1A1D24"/>
                 </a:solidFill>
-                <a:latin typeface="Microsoft YaHei"/>
+                <a:latin typeface="SimHei"/>
+                <a:ea typeface="SimHei"/>
+                <a:cs typeface="SimHei"/>
               </a:rPr>
               <a:t>优化后</a:t>
             </a:r>
@@ -10187,7 +9900,9 @@
                 <a:solidFill>
                   <a:srgbClr val="1A1D24"/>
                 </a:solidFill>
-                <a:latin typeface="Microsoft YaHei"/>
+                <a:latin typeface="SimHei"/>
+                <a:ea typeface="SimHei"/>
+                <a:cs typeface="SimHei"/>
               </a:rPr>
               <a:t>倍数</a:t>
             </a:r>
@@ -10226,7 +9941,9 @@
                 <a:solidFill>
                   <a:srgbClr val="1A1D24"/>
                 </a:solidFill>
-                <a:latin typeface="Microsoft YaHei"/>
+                <a:latin typeface="SimHei"/>
+                <a:ea typeface="SimHei"/>
+                <a:cs typeface="SimHei"/>
               </a:rPr>
               <a:t>TTFT 1K</a:t>
             </a:r>
@@ -10265,7 +9982,9 @@
                 <a:solidFill>
                   <a:srgbClr val="1A1D24"/>
                 </a:solidFill>
-                <a:latin typeface="Consolas"/>
+                <a:latin typeface="SimHei"/>
+                <a:ea typeface="SimHei"/>
+                <a:cs typeface="SimHei"/>
               </a:rPr>
               <a:t>78.09 s</a:t>
             </a:r>
@@ -10304,7 +10023,9 @@
                 <a:solidFill>
                   <a:srgbClr val="1A1D24"/>
                 </a:solidFill>
-                <a:latin typeface="Consolas"/>
+                <a:latin typeface="SimHei"/>
+                <a:ea typeface="SimHei"/>
+                <a:cs typeface="SimHei"/>
               </a:rPr>
               <a:t>1.63 s</a:t>
             </a:r>
@@ -10343,7 +10064,9 @@
                 <a:solidFill>
                   <a:srgbClr val="1A1D24"/>
                 </a:solidFill>
-                <a:latin typeface="Consolas"/>
+                <a:latin typeface="SimHei"/>
+                <a:ea typeface="SimHei"/>
+                <a:cs typeface="SimHei"/>
               </a:rPr>
               <a:t>47.9×</a:t>
             </a:r>
@@ -10426,7 +10149,9 @@
                 <a:solidFill>
                   <a:srgbClr val="1A1D24"/>
                 </a:solidFill>
-                <a:latin typeface="Microsoft YaHei"/>
+                <a:latin typeface="SimHei"/>
+                <a:ea typeface="SimHei"/>
+                <a:cs typeface="SimHei"/>
               </a:rPr>
               <a:t>TTFT 2K</a:t>
             </a:r>
@@ -10465,7 +10190,9 @@
                 <a:solidFill>
                   <a:srgbClr val="1A1D24"/>
                 </a:solidFill>
-                <a:latin typeface="Consolas"/>
+                <a:latin typeface="SimHei"/>
+                <a:ea typeface="SimHei"/>
+                <a:cs typeface="SimHei"/>
               </a:rPr>
               <a:t>159.19 s</a:t>
             </a:r>
@@ -10504,7 +10231,9 @@
                 <a:solidFill>
                   <a:srgbClr val="1A1D24"/>
                 </a:solidFill>
-                <a:latin typeface="Consolas"/>
+                <a:latin typeface="SimHei"/>
+                <a:ea typeface="SimHei"/>
+                <a:cs typeface="SimHei"/>
               </a:rPr>
               <a:t>3.31 s</a:t>
             </a:r>
@@ -10543,7 +10272,9 @@
                 <a:solidFill>
                   <a:srgbClr val="1A1D24"/>
                 </a:solidFill>
-                <a:latin typeface="Consolas"/>
+                <a:latin typeface="SimHei"/>
+                <a:ea typeface="SimHei"/>
+                <a:cs typeface="SimHei"/>
               </a:rPr>
               <a:t>48.1×</a:t>
             </a:r>
@@ -10582,7 +10313,9 @@
                 <a:solidFill>
                   <a:srgbClr val="1A1D24"/>
                 </a:solidFill>
-                <a:latin typeface="Microsoft YaHei"/>
+                <a:latin typeface="SimHei"/>
+                <a:ea typeface="SimHei"/>
+                <a:cs typeface="SimHei"/>
               </a:rPr>
               <a:t>TTFT 4K</a:t>
             </a:r>
@@ -10621,7 +10354,9 @@
                 <a:solidFill>
                   <a:srgbClr val="1A1D24"/>
                 </a:solidFill>
-                <a:latin typeface="Consolas"/>
+                <a:latin typeface="SimHei"/>
+                <a:ea typeface="SimHei"/>
+                <a:cs typeface="SimHei"/>
               </a:rPr>
               <a:t>320.40 s</a:t>
             </a:r>
@@ -10660,7 +10395,9 @@
                 <a:solidFill>
                   <a:srgbClr val="1A1D24"/>
                 </a:solidFill>
-                <a:latin typeface="Consolas"/>
+                <a:latin typeface="SimHei"/>
+                <a:ea typeface="SimHei"/>
+                <a:cs typeface="SimHei"/>
               </a:rPr>
               <a:t>7.01 s</a:t>
             </a:r>
@@ -10699,7 +10436,9 @@
                 <a:solidFill>
                   <a:srgbClr val="1A1D24"/>
                 </a:solidFill>
-                <a:latin typeface="Consolas"/>
+                <a:latin typeface="SimHei"/>
+                <a:ea typeface="SimHei"/>
+                <a:cs typeface="SimHei"/>
               </a:rPr>
               <a:t>45.7×</a:t>
             </a:r>
@@ -10782,7 +10521,9 @@
                 <a:solidFill>
                   <a:srgbClr val="1A1D24"/>
                 </a:solidFill>
-                <a:latin typeface="Microsoft YaHei"/>
+                <a:latin typeface="SimHei"/>
+                <a:ea typeface="SimHei"/>
+                <a:cs typeface="SimHei"/>
               </a:rPr>
               <a:t>TTFT 8K</a:t>
             </a:r>
@@ -10821,7 +10562,9 @@
                 <a:solidFill>
                   <a:srgbClr val="1A1D24"/>
                 </a:solidFill>
-                <a:latin typeface="Consolas"/>
+                <a:latin typeface="SimHei"/>
+                <a:ea typeface="SimHei"/>
+                <a:cs typeface="SimHei"/>
               </a:rPr>
               <a:t>676.52 s</a:t>
             </a:r>
@@ -10860,7 +10603,9 @@
                 <a:solidFill>
                   <a:srgbClr val="1A1D24"/>
                 </a:solidFill>
-                <a:latin typeface="Consolas"/>
+                <a:latin typeface="SimHei"/>
+                <a:ea typeface="SimHei"/>
+                <a:cs typeface="SimHei"/>
               </a:rPr>
               <a:t>14.81 s</a:t>
             </a:r>
@@ -10899,7 +10644,9 @@
                 <a:solidFill>
                   <a:srgbClr val="1A1D24"/>
                 </a:solidFill>
-                <a:latin typeface="Consolas"/>
+                <a:latin typeface="SimHei"/>
+                <a:ea typeface="SimHei"/>
+                <a:cs typeface="SimHei"/>
               </a:rPr>
               <a:t>45.7×</a:t>
             </a:r>
@@ -10938,7 +10685,9 @@
                 <a:solidFill>
                   <a:srgbClr val="1A1D24"/>
                 </a:solidFill>
-                <a:latin typeface="Microsoft YaHei"/>
+                <a:latin typeface="SimHei"/>
+                <a:ea typeface="SimHei"/>
+                <a:cs typeface="SimHei"/>
               </a:rPr>
               <a:t>TTFT 16K</a:t>
             </a:r>
@@ -10977,7 +10726,9 @@
                 <a:solidFill>
                   <a:srgbClr val="1A1D24"/>
                 </a:solidFill>
-                <a:latin typeface="Consolas"/>
+                <a:latin typeface="SimHei"/>
+                <a:ea typeface="SimHei"/>
+                <a:cs typeface="SimHei"/>
               </a:rPr>
               <a:t>1635.15 s</a:t>
             </a:r>
@@ -11016,7 +10767,9 @@
                 <a:solidFill>
                   <a:srgbClr val="1A1D24"/>
                 </a:solidFill>
-                <a:latin typeface="Consolas"/>
+                <a:latin typeface="SimHei"/>
+                <a:ea typeface="SimHei"/>
+                <a:cs typeface="SimHei"/>
               </a:rPr>
               <a:t>34.58 s</a:t>
             </a:r>
@@ -11055,7 +10808,9 @@
                 <a:solidFill>
                   <a:srgbClr val="1A1D24"/>
                 </a:solidFill>
-                <a:latin typeface="Consolas"/>
+                <a:latin typeface="SimHei"/>
+                <a:ea typeface="SimHei"/>
+                <a:cs typeface="SimHei"/>
               </a:rPr>
               <a:t>47.3×</a:t>
             </a:r>
@@ -11138,7 +10893,9 @@
                 <a:solidFill>
                   <a:srgbClr val="1A1D24"/>
                 </a:solidFill>
-                <a:latin typeface="Microsoft YaHei"/>
+                <a:latin typeface="SimHei"/>
+                <a:ea typeface="SimHei"/>
+                <a:cs typeface="SimHei"/>
               </a:rPr>
               <a:t>TPOT 1K</a:t>
             </a:r>
@@ -11177,7 +10934,9 @@
                 <a:solidFill>
                   <a:srgbClr val="1A1D24"/>
                 </a:solidFill>
-                <a:latin typeface="Consolas"/>
+                <a:latin typeface="SimHei"/>
+                <a:ea typeface="SimHei"/>
+                <a:cs typeface="SimHei"/>
               </a:rPr>
               <a:t>133.7 ms</a:t>
             </a:r>
@@ -11216,7 +10975,9 @@
                 <a:solidFill>
                   <a:srgbClr val="1A1D24"/>
                 </a:solidFill>
-                <a:latin typeface="Consolas"/>
+                <a:latin typeface="SimHei"/>
+                <a:ea typeface="SimHei"/>
+                <a:cs typeface="SimHei"/>
               </a:rPr>
               <a:t>66.5 ms</a:t>
             </a:r>
@@ -11255,7 +11016,9 @@
                 <a:solidFill>
                   <a:srgbClr val="1A1D24"/>
                 </a:solidFill>
-                <a:latin typeface="Consolas"/>
+                <a:latin typeface="SimHei"/>
+                <a:ea typeface="SimHei"/>
+                <a:cs typeface="SimHei"/>
               </a:rPr>
               <a:t>2.01×</a:t>
             </a:r>
@@ -11294,7 +11057,9 @@
                 <a:solidFill>
                   <a:srgbClr val="1A1D24"/>
                 </a:solidFill>
-                <a:latin typeface="Microsoft YaHei"/>
+                <a:latin typeface="SimHei"/>
+                <a:ea typeface="SimHei"/>
+                <a:cs typeface="SimHei"/>
               </a:rPr>
               <a:t>TPOT 8K</a:t>
             </a:r>
@@ -11333,7 +11098,9 @@
                 <a:solidFill>
                   <a:srgbClr val="1A1D24"/>
                 </a:solidFill>
-                <a:latin typeface="Consolas"/>
+                <a:latin typeface="SimHei"/>
+                <a:ea typeface="SimHei"/>
+                <a:cs typeface="SimHei"/>
               </a:rPr>
               <a:t>153.4 ms</a:t>
             </a:r>
@@ -11372,7 +11139,9 @@
                 <a:solidFill>
                   <a:srgbClr val="1A1D24"/>
                 </a:solidFill>
-                <a:latin typeface="Consolas"/>
+                <a:latin typeface="SimHei"/>
+                <a:ea typeface="SimHei"/>
+                <a:cs typeface="SimHei"/>
               </a:rPr>
               <a:t>67.3 ms</a:t>
             </a:r>
@@ -11411,7 +11180,9 @@
                 <a:solidFill>
                   <a:srgbClr val="1A1D24"/>
                 </a:solidFill>
-                <a:latin typeface="Consolas"/>
+                <a:latin typeface="SimHei"/>
+                <a:ea typeface="SimHei"/>
+                <a:cs typeface="SimHei"/>
               </a:rPr>
               <a:t>2.28×</a:t>
             </a:r>
@@ -11450,9 +11221,11 @@
                 <a:solidFill>
                   <a:srgbClr val="1A1D24"/>
                 </a:solidFill>
-                <a:latin typeface="Microsoft YaHei"/>
-              </a:rPr>
-              <a:t>correctness 与稳定性门禁（全程未退让）</a:t>
+                <a:latin typeface="SimHei"/>
+                <a:ea typeface="SimHei"/>
+                <a:cs typeface="SimHei"/>
+              </a:rPr>
+              <a:t>correctness 与稳定性门禁</a:t>
             </a:r>
           </a:p>
         </p:txBody>
@@ -11484,7 +11257,7 @@
                 <a:spcPct val="125000"/>
               </a:lnSpc>
               <a:spcAft>
-                <a:spcPts val="800"/>
+                <a:spcPts val="1000"/>
               </a:spcAft>
             </a:pPr>
             <a:r>
@@ -11492,7 +11265,9 @@
                 <a:solidFill>
                   <a:srgbClr val="1A1D24"/>
                 </a:solidFill>
-                <a:latin typeface="Microsoft YaHei"/>
+                <a:latin typeface="SimHei"/>
+                <a:ea typeface="SimHei"/>
+                <a:cs typeface="SimHei"/>
               </a:rPr>
               <a:t>— 协议 gate 12/12 </a:t>
             </a:r>
@@ -11501,9 +11276,11 @@
                 <a:solidFill>
                   <a:srgbClr val="5A6373"/>
                 </a:solidFill>
-                <a:latin typeface="Microsoft YaHei"/>
-              </a:rPr>
-              <a:t>7 个负控全部 HTTP 400 + JSON error，且不污染服务</a:t>
+                <a:latin typeface="SimHei"/>
+                <a:ea typeface="SimHei"/>
+                <a:cs typeface="SimHei"/>
+              </a:rPr>
+              <a:t>7 个负控全部 HTTP 400 + JSON error</a:t>
             </a:r>
           </a:p>
           <a:p>
@@ -11512,7 +11289,7 @@
                 <a:spcPct val="125000"/>
               </a:lnSpc>
               <a:spcAft>
-                <a:spcPts val="800"/>
+                <a:spcPts val="1000"/>
               </a:spcAft>
             </a:pPr>
             <a:r>
@@ -11520,7 +11297,9 @@
                 <a:solidFill>
                   <a:srgbClr val="1A1D24"/>
                 </a:solidFill>
-                <a:latin typeface="Microsoft YaHei"/>
+                <a:latin typeface="SimHei"/>
+                <a:ea typeface="SimHei"/>
+                <a:cs typeface="SimHei"/>
               </a:rPr>
               <a:t>— 公开功能 6/6 精确 </a:t>
             </a:r>
@@ -11529,7 +11308,9 @@
                 <a:solidFill>
                   <a:srgbClr val="5A6373"/>
                 </a:solidFill>
-                <a:latin typeface="Microsoft YaHei"/>
+                <a:latin typeface="SimHei"/>
+                <a:ea typeface="SimHei"/>
+                <a:cs typeface="SimHei"/>
               </a:rPr>
               <a:t>含三个 8K longdoc，EOS 提前终止正常</a:t>
             </a:r>
@@ -11540,7 +11321,7 @@
                 <a:spcPct val="125000"/>
               </a:lnSpc>
               <a:spcAft>
-                <a:spcPts val="800"/>
+                <a:spcPts val="1000"/>
               </a:spcAft>
             </a:pPr>
             <a:r>
@@ -11548,7 +11329,9 @@
                 <a:solidFill>
                   <a:srgbClr val="1A1D24"/>
                 </a:solidFill>
-                <a:latin typeface="Microsoft YaHei"/>
+                <a:latin typeface="SimHei"/>
+                <a:ea typeface="SimHei"/>
+                <a:cs typeface="SimHei"/>
               </a:rPr>
               <a:t>— 200 请求混合 soak 100% </a:t>
             </a:r>
@@ -11557,9 +11340,11 @@
                 <a:solidFill>
                   <a:srgbClr val="5A6373"/>
                 </a:solidFill>
-                <a:latin typeface="Microsoft YaHei"/>
-              </a:rPr>
-              <a:t>无 OOM / NaN / fallback / Xid，失败后可恢复</a:t>
+                <a:latin typeface="SimHei"/>
+                <a:ea typeface="SimHei"/>
+                <a:cs typeface="SimHei"/>
+              </a:rPr>
+              <a:t>无 OOM / NaN / fallback / Xid</a:t>
             </a:r>
           </a:p>
           <a:p>
@@ -11568,7 +11353,7 @@
                 <a:spcPct val="125000"/>
               </a:lnSpc>
               <a:spcAft>
-                <a:spcPts val="800"/>
+                <a:spcPts val="1000"/>
               </a:spcAft>
             </a:pPr>
             <a:r>
@@ -11576,7 +11361,9 @@
                 <a:solidFill>
                   <a:srgbClr val="1A1D24"/>
                 </a:solidFill>
-                <a:latin typeface="Microsoft YaHei"/>
+                <a:latin typeface="SimHei"/>
+                <a:ea typeface="SimHei"/>
+                <a:cs typeface="SimHei"/>
               </a:rPr>
               <a:t>— proxy hidden 11/12 </a:t>
             </a:r>
@@ -11585,9 +11372,11 @@
                 <a:solidFill>
                   <a:srgbClr val="5A6373"/>
                 </a:solidFill>
-                <a:latin typeface="Microsoft YaHei"/>
-              </a:rPr>
-              <a:t>达到 ≥11/12 资格线（官方 hidden 集本机不可得）</a:t>
+                <a:latin typeface="SimHei"/>
+                <a:ea typeface="SimHei"/>
+                <a:cs typeface="SimHei"/>
+              </a:rPr>
+              <a:t>达到资格线（非官方代理集，已标注）</a:t>
             </a:r>
           </a:p>
           <a:p>
@@ -11596,7 +11385,7 @@
                 <a:spcPct val="125000"/>
               </a:lnSpc>
               <a:spcAft>
-                <a:spcPts val="800"/>
+                <a:spcPts val="1000"/>
               </a:spcAft>
             </a:pPr>
             <a:r>
@@ -11604,18 +11393,22 @@
                 <a:solidFill>
                   <a:srgbClr val="1A1D24"/>
                 </a:solidFill>
-                <a:latin typeface="Microsoft YaHei"/>
-              </a:rPr>
-              <a:t>— 多模态 + C4 双 bonus 交付 </a:t>
+                <a:latin typeface="SimHei"/>
+                <a:ea typeface="SimHei"/>
+                <a:cs typeface="SimHei"/>
+              </a:rPr>
+              <a:t>— 多模态 + C4 双 bonus </a:t>
             </a:r>
             <a:r>
               <a:rPr sz="1250">
                 <a:solidFill>
                   <a:srgbClr val="5A6373"/>
                 </a:solidFill>
-                <a:latin typeface="Microsoft YaHei"/>
-              </a:rPr>
-              <a:t>图文探针 4/4、混合 soak 36/36；C4 官方校准全门通过（Jain 0.9993，goodput 23.53 tok/s）</a:t>
+                <a:latin typeface="SimHei"/>
+                <a:ea typeface="SimHei"/>
+                <a:cs typeface="SimHei"/>
+              </a:rPr>
+              <a:t>图文探针 4/4；C4 官方校准全门通过</a:t>
             </a:r>
           </a:p>
           <a:p>
@@ -11624,7 +11417,7 @@
                 <a:spcPct val="125000"/>
               </a:lnSpc>
               <a:spcAft>
-                <a:spcPts val="800"/>
+                <a:spcPts val="1000"/>
               </a:spcAft>
             </a:pPr>
             <a:r>
@@ -11632,18 +11425,22 @@
                 <a:solidFill>
                   <a:srgbClr val="1A1D24"/>
                 </a:solidFill>
-                <a:latin typeface="Microsoft YaHei"/>
-              </a:rPr>
-              <a:t>— 峰值显存 19958 MiB </a:t>
+                <a:latin typeface="SimHei"/>
+                <a:ea typeface="SimHei"/>
+                <a:cs typeface="SimHei"/>
+              </a:rPr>
+              <a:t>— 峰值显存 </a:t>
             </a:r>
             <a:r>
               <a:rPr sz="1250">
                 <a:solidFill>
                   <a:srgbClr val="5A6373"/>
                 </a:solidFill>
-                <a:latin typeface="Microsoft YaHei"/>
-              </a:rPr>
-              <a:t>文本配置未超 24564 MiB；多模态配置峰值 20914 MiB</a:t>
+                <a:latin typeface="SimHei"/>
+                <a:ea typeface="SimHei"/>
+                <a:cs typeface="SimHei"/>
+              </a:rPr>
+              <a:t>文本 19958 / 多模态 20914，上限 24564 MiB</a:t>
             </a:r>
           </a:p>
         </p:txBody>
@@ -11680,7 +11477,9 @@
                 <a:solidFill>
                   <a:srgbClr val="5A6373"/>
                 </a:solidFill>
-                <a:latin typeface="Microsoft YaHei"/>
+                <a:latin typeface="SimHei"/>
+                <a:ea typeface="SimHei"/>
+                <a:cs typeface="SimHei"/>
               </a:rPr>
               <a:t>口径遵循合同：warmup 1 次 + 测 5 次取中位数，TTFT/TPOT 的 CV 均 ≤ 10%</a:t>
             </a:r>
@@ -11737,7 +11536,9 @@
                 <a:solidFill>
                   <a:srgbClr val="0066CC"/>
                 </a:solidFill>
-                <a:latin typeface="Microsoft YaHei"/>
+                <a:latin typeface="SimHei"/>
+                <a:ea typeface="SimHei"/>
+                <a:cs typeface="SimHei"/>
               </a:rPr>
               <a:t>SCOPE</a:t>
             </a:r>
@@ -11776,9 +11577,11 @@
                 <a:solidFill>
                   <a:srgbClr val="1A1D24"/>
                 </a:solidFill>
-                <a:latin typeface="Microsoft YaHei"/>
-              </a:rPr>
-              <a:t>任务边界与不可违反的约束</a:t>
+                <a:latin typeface="SimHei"/>
+                <a:ea typeface="SimHei"/>
+                <a:cs typeface="SimHei"/>
+              </a:rPr>
+              <a:t>任务边界与合同约束</a:t>
             </a:r>
           </a:p>
         </p:txBody>
@@ -11862,7 +11665,9 @@
                 <a:solidFill>
                   <a:srgbClr val="1A1D24"/>
                 </a:solidFill>
-                <a:latin typeface="Microsoft YaHei"/>
+                <a:latin typeface="SimHei"/>
+                <a:ea typeface="SimHei"/>
+                <a:cs typeface="SimHei"/>
               </a:rPr>
               <a:t>starter 仓库没有 Qwen3.8、没有 W4A16、没有 GDN、也没有 HTTP/SSE —— 本项目是从零建立的 vertical slice，而非在既有模块上接线。</a:t>
             </a:r>
@@ -11901,9 +11706,11 @@
                 <a:solidFill>
                   <a:srgbClr val="0066CC"/>
                 </a:solidFill>
-                <a:latin typeface="Microsoft YaHei"/>
-              </a:rPr>
-              <a:t>模型结构的现实难点</a:t>
+                <a:latin typeface="SimHei"/>
+                <a:ea typeface="SimHei"/>
+                <a:cs typeface="SimHei"/>
+              </a:rPr>
+              <a:t>模型结构要点</a:t>
             </a:r>
           </a:p>
         </p:txBody>
@@ -11935,7 +11742,7 @@
                 <a:spcPct val="125000"/>
               </a:lnSpc>
               <a:spcAft>
-                <a:spcPts val="900"/>
+                <a:spcPts val="1100"/>
               </a:spcAft>
             </a:pPr>
             <a:r>
@@ -11943,7 +11750,9 @@
                 <a:solidFill>
                   <a:srgbClr val="1A1D24"/>
                 </a:solidFill>
-                <a:latin typeface="Microsoft YaHei"/>
+                <a:latin typeface="SimHei"/>
+                <a:ea typeface="SimHei"/>
+                <a:cs typeface="SimHei"/>
               </a:rPr>
               <a:t>— 64 层混合主干</a:t>
             </a:r>
@@ -11952,9 +11761,11 @@
                 <a:solidFill>
                   <a:srgbClr val="5A6373"/>
                 </a:solidFill>
-                <a:latin typeface="Microsoft YaHei"/>
-              </a:rPr>
-              <a:t>每四层三个 GDN（线性注意力）+ 一个全注意力，两类层有完全不同的请求状态</a:t>
+                <a:latin typeface="SimHei"/>
+                <a:ea typeface="SimHei"/>
+                <a:cs typeface="SimHei"/>
+              </a:rPr>
+              <a:t>每四层三个 GDN（线性注意力）+ 一个全注意力，两类层请求状态互不相同</a:t>
             </a:r>
           </a:p>
           <a:p>
@@ -11963,7 +11774,7 @@
                 <a:spcPct val="125000"/>
               </a:lnSpc>
               <a:spcAft>
-                <a:spcPts val="900"/>
+                <a:spcPts val="1100"/>
               </a:spcAft>
             </a:pPr>
             <a:r>
@@ -11971,7 +11782,9 @@
                 <a:solidFill>
                   <a:srgbClr val="1A1D24"/>
                 </a:solidFill>
-                <a:latin typeface="Microsoft YaHei"/>
+                <a:latin typeface="SimHei"/>
+                <a:ea typeface="SimHei"/>
+                <a:cs typeface="SimHei"/>
               </a:rPr>
               <a:t>— GDN 层</a:t>
             </a:r>
@@ -11980,9 +11793,11 @@
                 <a:solidFill>
                   <a:srgbClr val="5A6373"/>
                 </a:solidFill>
-                <a:latin typeface="Microsoft YaHei"/>
-              </a:rPr>
-              <a:t>16 key head / 48 value head / head_dim 128，因果卷积 ring buffer + FP32 recurrent state</a:t>
+                <a:latin typeface="SimHei"/>
+                <a:ea typeface="SimHei"/>
+                <a:cs typeface="SimHei"/>
+              </a:rPr>
+              <a:t>16 key / 48 value head、head_dim 128，因果卷积 ring buffer + FP32 递归态</a:t>
             </a:r>
           </a:p>
           <a:p>
@@ -11991,7 +11806,7 @@
                 <a:spcPct val="125000"/>
               </a:lnSpc>
               <a:spcAft>
-                <a:spcPts val="900"/>
+                <a:spcPts val="1100"/>
               </a:spcAft>
             </a:pPr>
             <a:r>
@@ -11999,7 +11814,9 @@
                 <a:solidFill>
                   <a:srgbClr val="1A1D24"/>
                 </a:solidFill>
-                <a:latin typeface="Microsoft YaHei"/>
+                <a:latin typeface="SimHei"/>
+                <a:ea typeface="SimHei"/>
+                <a:cs typeface="SimHei"/>
               </a:rPr>
               <a:t>— 全注意力层</a:t>
             </a:r>
@@ -12008,9 +11825,11 @@
                 <a:solidFill>
                   <a:srgbClr val="5A6373"/>
                 </a:solidFill>
-                <a:latin typeface="Microsoft YaHei"/>
-              </a:rPr>
-              <a:t>24 Q / 4 KV head、head_dim 256，attn_output_gate、partial RoPE 仅前 64 维</a:t>
+                <a:latin typeface="SimHei"/>
+                <a:ea typeface="SimHei"/>
+                <a:cs typeface="SimHei"/>
+              </a:rPr>
+              <a:t>24 Q / 4 KV head、head_dim 256，输出门控 + partial RoPE 仅前 64 维</a:t>
             </a:r>
           </a:p>
           <a:p>
@@ -12019,7 +11838,7 @@
                 <a:spcPct val="125000"/>
               </a:lnSpc>
               <a:spcAft>
-                <a:spcPts val="900"/>
+                <a:spcPts val="1100"/>
               </a:spcAft>
             </a:pPr>
             <a:r>
@@ -12027,7 +11846,9 @@
                 <a:solidFill>
                   <a:srgbClr val="1A1D24"/>
                 </a:solidFill>
-                <a:latin typeface="Microsoft YaHei"/>
+                <a:latin typeface="SimHei"/>
+                <a:ea typeface="SimHei"/>
+                <a:cs typeface="SimHei"/>
               </a:rPr>
               <a:t>— 逐模块混合量化</a:t>
             </a:r>
@@ -12036,9 +11857,11 @@
                 <a:solidFill>
                   <a:srgbClr val="5A6373"/>
                 </a:solidFill>
-                <a:latin typeface="Microsoft YaHei"/>
-              </a:rPr>
-              <a:t>MLP 与投影为 packed W4，in_proj_a/b 与 conv/norm 为 BF16，不可统一走 W4</a:t>
+                <a:latin typeface="SimHei"/>
+                <a:ea typeface="SimHei"/>
+                <a:cs typeface="SimHei"/>
+              </a:rPr>
+              <a:t>MLP 与投影为 packed W4，in_proj 与 conv/norm 为 BF16</a:t>
             </a:r>
           </a:p>
         </p:txBody>
@@ -12075,7 +11898,9 @@
                 <a:solidFill>
                   <a:srgbClr val="C0392B"/>
                 </a:solidFill>
-                <a:latin typeface="Microsoft YaHei"/>
+                <a:latin typeface="SimHei"/>
+                <a:ea typeface="SimHei"/>
+                <a:cs typeface="SimHei"/>
               </a:rPr>
               <a:t>合同硬约束</a:t>
             </a:r>
@@ -12109,7 +11934,7 @@
                 <a:spcPct val="125000"/>
               </a:lnSpc>
               <a:spcAft>
-                <a:spcPts val="900"/>
+                <a:spcPts val="1100"/>
               </a:spcAft>
             </a:pPr>
             <a:r>
@@ -12117,7 +11942,9 @@
                 <a:solidFill>
                   <a:srgbClr val="1A1D24"/>
                 </a:solidFill>
-                <a:latin typeface="Microsoft YaHei"/>
+                <a:latin typeface="SimHei"/>
+                <a:ea typeface="SimHei"/>
+                <a:cs typeface="SimHei"/>
               </a:rPr>
               <a:t>— 单卡固定</a:t>
             </a:r>
@@ -12126,9 +11953,11 @@
                 <a:solidFill>
                   <a:srgbClr val="5A6373"/>
                 </a:solidFill>
-                <a:latin typeface="Microsoft YaHei"/>
-              </a:rPr>
-              <a:t>禁止其他 GPU、多 GPU、CPU、vLLM、Transformers 作为服务 fallback</a:t>
+                <a:latin typeface="SimHei"/>
+                <a:ea typeface="SimHei"/>
+                <a:cs typeface="SimHei"/>
+              </a:rPr>
+              <a:t>禁止其他 GPU、CPU、vLLM、Transformers 作为服务 fallback</a:t>
             </a:r>
           </a:p>
           <a:p>
@@ -12137,7 +11966,7 @@
                 <a:spcPct val="125000"/>
               </a:lnSpc>
               <a:spcAft>
-                <a:spcPts val="900"/>
+                <a:spcPts val="1100"/>
               </a:spcAft>
             </a:pPr>
             <a:r>
@@ -12145,7 +11974,9 @@
                 <a:solidFill>
                   <a:srgbClr val="1A1D24"/>
                 </a:solidFill>
-                <a:latin typeface="Microsoft YaHei"/>
+                <a:latin typeface="SimHei"/>
+                <a:ea typeface="SimHei"/>
+                <a:cs typeface="SimHei"/>
               </a:rPr>
               <a:t>— 不改评测件</a:t>
             </a:r>
@@ -12154,9 +11985,11 @@
                 <a:solidFill>
                   <a:srgbClr val="5A6373"/>
                 </a:solidFill>
-                <a:latin typeface="Microsoft YaHei"/>
-              </a:rPr>
-              <a:t>evaluation/ 下合同、生成器、scorer 一律不动，不手填汇总产物</a:t>
+                <a:latin typeface="SimHei"/>
+                <a:ea typeface="SimHei"/>
+                <a:cs typeface="SimHei"/>
+              </a:rPr>
+              <a:t>evaluation/ 下合同、生成器、scorer 一律不动</a:t>
             </a:r>
           </a:p>
           <a:p>
@@ -12165,7 +11998,7 @@
                 <a:spcPct val="125000"/>
               </a:lnSpc>
               <a:spcAft>
-                <a:spcPts val="900"/>
+                <a:spcPts val="1100"/>
               </a:spcAft>
             </a:pPr>
             <a:r>
@@ -12173,7 +12006,9 @@
                 <a:solidFill>
                   <a:srgbClr val="1A1D24"/>
                 </a:solidFill>
-                <a:latin typeface="Microsoft YaHei"/>
+                <a:latin typeface="SimHei"/>
+                <a:ea typeface="SimHei"/>
+                <a:cs typeface="SimHei"/>
               </a:rPr>
               <a:t>— 不硬编码</a:t>
             </a:r>
@@ -12182,9 +12017,11 @@
                 <a:solidFill>
                   <a:srgbClr val="5A6373"/>
                 </a:solidFill>
-                <a:latin typeface="Microsoft YaHei"/>
-              </a:rPr>
-              <a:t>不按 case ID、公开 token、已知答案或输出位置特判</a:t>
+                <a:latin typeface="SimHei"/>
+                <a:ea typeface="SimHei"/>
+                <a:cs typeface="SimHei"/>
+              </a:rPr>
+              <a:t>不按 case ID、公开 token 或已知答案特判</a:t>
             </a:r>
           </a:p>
           <a:p>
@@ -12193,7 +12030,7 @@
                 <a:spcPct val="125000"/>
               </a:lnSpc>
               <a:spcAft>
-                <a:spcPts val="900"/>
+                <a:spcPts val="1100"/>
               </a:spcAft>
             </a:pPr>
             <a:r>
@@ -12201,7 +12038,9 @@
                 <a:solidFill>
                   <a:srgbClr val="1A1D24"/>
                 </a:solidFill>
-                <a:latin typeface="Microsoft YaHei"/>
+                <a:latin typeface="SimHei"/>
+                <a:ea typeface="SimHei"/>
+                <a:cs typeface="SimHei"/>
               </a:rPr>
               <a:t>— health 必须真实</a:t>
             </a:r>
@@ -12210,9 +12049,11 @@
                 <a:solidFill>
                   <a:srgbClr val="5A6373"/>
                 </a:solidFill>
-                <a:latin typeface="Microsoft YaHei"/>
-              </a:rPr>
-              <a:t>capability 未验证通过前一律 fail closed；multimodal 直到证据链齐备才翻转为 true</a:t>
+                <a:latin typeface="SimHei"/>
+                <a:ea typeface="SimHei"/>
+                <a:cs typeface="SimHei"/>
+              </a:rPr>
+              <a:t>capability 未经验证前一律 fail closed</a:t>
             </a:r>
           </a:p>
         </p:txBody>
@@ -12249,7 +12090,9 @@
                 <a:solidFill>
                   <a:srgbClr val="5A6373"/>
                 </a:solidFill>
-                <a:latin typeface="Microsoft YaHei"/>
+                <a:latin typeface="SimHei"/>
+                <a:ea typeface="SimHei"/>
+                <a:cs typeface="SimHei"/>
               </a:rPr>
               <a:t>分层原则：模型知道层序、状态与融合决策；CUDA backend 只暴露设备管理与单 kernel/单库调用</a:t>
             </a:r>
@@ -12306,7 +12149,9 @@
                 <a:solidFill>
                   <a:srgbClr val="0066CC"/>
                 </a:solidFill>
-                <a:latin typeface="Microsoft YaHei"/>
+                <a:latin typeface="SimHei"/>
+                <a:ea typeface="SimHei"/>
+                <a:cs typeface="SimHei"/>
               </a:rPr>
               <a:t>CORRECTNESS · RELIABILITY</a:t>
             </a:r>
@@ -12345,7 +12190,9 @@
                 <a:solidFill>
                   <a:srgbClr val="1A1D24"/>
                 </a:solidFill>
-                <a:latin typeface="Microsoft YaHei"/>
+                <a:latin typeface="SimHei"/>
+                <a:ea typeface="SimHei"/>
+                <a:cs typeface="SimHei"/>
               </a:rPr>
               <a:t>第一层：取得文本 eligibility</a:t>
             </a:r>
@@ -12431,7 +12278,9 @@
                 <a:solidFill>
                   <a:srgbClr val="1A1D24"/>
                 </a:solidFill>
-                <a:latin typeface="Microsoft YaHei"/>
+                <a:latin typeface="SimHei"/>
+                <a:ea typeface="SimHei"/>
+                <a:cs typeface="SimHei"/>
               </a:rPr>
               <a:t>eligibility 是硬门：任一 reliability boolean 为假会直接令 eligible=false，不是从 10 分里扣分。因此先把门禁全部打绿，再谈性能。</a:t>
             </a:r>
@@ -12514,7 +12363,9 @@
                 <a:solidFill>
                   <a:srgbClr val="1A1D24"/>
                 </a:solidFill>
-                <a:latin typeface="Microsoft YaHei"/>
+                <a:latin typeface="SimHei"/>
+                <a:ea typeface="SimHei"/>
+                <a:cs typeface="SimHei"/>
               </a:rPr>
               <a:t>门禁项</a:t>
             </a:r>
@@ -12553,7 +12404,9 @@
                 <a:solidFill>
                   <a:srgbClr val="1A1D24"/>
                 </a:solidFill>
-                <a:latin typeface="Microsoft YaHei"/>
+                <a:latin typeface="SimHei"/>
+                <a:ea typeface="SimHei"/>
+                <a:cs typeface="SimHei"/>
               </a:rPr>
               <a:t>要求</a:t>
             </a:r>
@@ -12592,7 +12445,9 @@
                 <a:solidFill>
                   <a:srgbClr val="1A1D24"/>
                 </a:solidFill>
-                <a:latin typeface="Microsoft YaHei"/>
+                <a:latin typeface="SimHei"/>
+                <a:ea typeface="SimHei"/>
+                <a:cs typeface="SimHei"/>
               </a:rPr>
               <a:t>实测结果</a:t>
             </a:r>
@@ -12631,7 +12486,9 @@
                 <a:solidFill>
                   <a:srgbClr val="1A1D24"/>
                 </a:solidFill>
-                <a:latin typeface="Microsoft YaHei"/>
+                <a:latin typeface="SimHei"/>
+                <a:ea typeface="SimHei"/>
+                <a:cs typeface="SimHei"/>
               </a:rPr>
               <a:t>协议 gate</a:t>
             </a:r>
@@ -12670,7 +12527,9 @@
                 <a:solidFill>
                   <a:srgbClr val="1A1D24"/>
                 </a:solidFill>
-                <a:latin typeface="Consolas"/>
+                <a:latin typeface="SimHei"/>
+                <a:ea typeface="SimHei"/>
+                <a:cs typeface="SimHei"/>
               </a:rPr>
               <a:t>malformed 400 + 6 负控 400</a:t>
             </a:r>
@@ -12709,7 +12568,9 @@
                 <a:solidFill>
                   <a:srgbClr val="1A1D24"/>
                 </a:solidFill>
-                <a:latin typeface="Consolas"/>
+                <a:latin typeface="SimHei"/>
+                <a:ea typeface="SimHei"/>
+                <a:cs typeface="SimHei"/>
               </a:rPr>
               <a:t>12/12 通过</a:t>
             </a:r>
@@ -12792,7 +12653,9 @@
                 <a:solidFill>
                   <a:srgbClr val="1A1D24"/>
                 </a:solidFill>
-                <a:latin typeface="Microsoft YaHei"/>
+                <a:latin typeface="SimHei"/>
+                <a:ea typeface="SimHei"/>
+                <a:cs typeface="SimHei"/>
               </a:rPr>
               <a:t>公开功能</a:t>
             </a:r>
@@ -12831,7 +12694,9 @@
                 <a:solidFill>
                   <a:srgbClr val="1A1D24"/>
                 </a:solidFill>
-                <a:latin typeface="Consolas"/>
+                <a:latin typeface="SimHei"/>
+                <a:ea typeface="SimHei"/>
+                <a:cs typeface="SimHei"/>
               </a:rPr>
               <a:t>6/6 normalized exact</a:t>
             </a:r>
@@ -12870,7 +12735,9 @@
                 <a:solidFill>
                   <a:srgbClr val="1A1D24"/>
                 </a:solidFill>
-                <a:latin typeface="Consolas"/>
+                <a:latin typeface="SimHei"/>
+                <a:ea typeface="SimHei"/>
+                <a:cs typeface="SimHei"/>
               </a:rPr>
               <a:t>6/6 精确</a:t>
             </a:r>
@@ -12909,7 +12776,9 @@
                 <a:solidFill>
                   <a:srgbClr val="1A1D24"/>
                 </a:solidFill>
-                <a:latin typeface="Microsoft YaHei"/>
+                <a:latin typeface="SimHei"/>
+                <a:ea typeface="SimHei"/>
+                <a:cs typeface="SimHei"/>
               </a:rPr>
               <a:t>隐藏功能</a:t>
             </a:r>
@@ -12948,7 +12817,9 @@
                 <a:solidFill>
                   <a:srgbClr val="1A1D24"/>
                 </a:solidFill>
-                <a:latin typeface="Consolas"/>
+                <a:latin typeface="SimHei"/>
+                <a:ea typeface="SimHei"/>
+                <a:cs typeface="SimHei"/>
               </a:rPr>
               <a:t>≥ 11/12</a:t>
             </a:r>
@@ -12987,7 +12858,9 @@
                 <a:solidFill>
                   <a:srgbClr val="1A1D24"/>
                 </a:solidFill>
-                <a:latin typeface="Consolas"/>
+                <a:latin typeface="SimHei"/>
+                <a:ea typeface="SimHei"/>
+                <a:cs typeface="SimHei"/>
               </a:rPr>
               <a:t>proxy 11/12</a:t>
             </a:r>
@@ -13070,7 +12943,9 @@
                 <a:solidFill>
                   <a:srgbClr val="1A1D24"/>
                 </a:solidFill>
-                <a:latin typeface="Microsoft YaHei"/>
+                <a:latin typeface="SimHei"/>
+                <a:ea typeface="SimHei"/>
+                <a:cs typeface="SimHei"/>
               </a:rPr>
               <a:t>请求成功率</a:t>
             </a:r>
@@ -13109,7 +12984,9 @@
                 <a:solidFill>
                   <a:srgbClr val="1A1D24"/>
                 </a:solidFill>
-                <a:latin typeface="Consolas"/>
+                <a:latin typeface="SimHei"/>
+                <a:ea typeface="SimHei"/>
+                <a:cs typeface="SimHei"/>
               </a:rPr>
               <a:t>≥ 99%（目标 100%）</a:t>
             </a:r>
@@ -13148,7 +13025,9 @@
                 <a:solidFill>
                   <a:srgbClr val="1A1D24"/>
                 </a:solidFill>
-                <a:latin typeface="Consolas"/>
+                <a:latin typeface="SimHei"/>
+                <a:ea typeface="SimHei"/>
+                <a:cs typeface="SimHei"/>
               </a:rPr>
               <a:t>200/200 = 100%</a:t>
             </a:r>
@@ -13187,7 +13066,9 @@
                 <a:solidFill>
                   <a:srgbClr val="1A1D24"/>
                 </a:solidFill>
-                <a:latin typeface="Microsoft YaHei"/>
+                <a:latin typeface="SimHei"/>
+                <a:ea typeface="SimHei"/>
+                <a:cs typeface="SimHei"/>
               </a:rPr>
               <a:t>五项 boolean</a:t>
             </a:r>
@@ -13226,7 +13107,9 @@
                 <a:solidFill>
                   <a:srgbClr val="1A1D24"/>
                 </a:solidFill>
-                <a:latin typeface="Consolas"/>
+                <a:latin typeface="SimHei"/>
+                <a:ea typeface="SimHei"/>
+                <a:cs typeface="SimHei"/>
               </a:rPr>
               <a:t>全部为真</a:t>
             </a:r>
@@ -13265,7 +13148,9 @@
                 <a:solidFill>
                   <a:srgbClr val="1A1D24"/>
                 </a:solidFill>
-                <a:latin typeface="Consolas"/>
+                <a:latin typeface="SimHei"/>
+                <a:ea typeface="SimHei"/>
+                <a:cs typeface="SimHei"/>
               </a:rPr>
               <a:t>全部为真</a:t>
             </a:r>
@@ -13348,7 +13233,9 @@
                 <a:solidFill>
                   <a:srgbClr val="1A1D24"/>
                 </a:solidFill>
-                <a:latin typeface="Microsoft YaHei"/>
+                <a:latin typeface="SimHei"/>
+                <a:ea typeface="SimHei"/>
+                <a:cs typeface="SimHei"/>
               </a:rPr>
               <a:t>性能 cell</a:t>
             </a:r>
@@ -13387,7 +13274,9 @@
                 <a:solidFill>
                   <a:srgbClr val="1A1D24"/>
                 </a:solidFill>
-                <a:latin typeface="Consolas"/>
+                <a:latin typeface="SimHei"/>
+                <a:ea typeface="SimHei"/>
+                <a:cs typeface="SimHei"/>
               </a:rPr>
               <a:t>success 5/5、CV ≤ 10%</a:t>
             </a:r>
@@ -13426,7 +13315,9 @@
                 <a:solidFill>
                   <a:srgbClr val="1A1D24"/>
                 </a:solidFill>
-                <a:latin typeface="Consolas"/>
+                <a:latin typeface="SimHei"/>
+                <a:ea typeface="SimHei"/>
+                <a:cs typeface="SimHei"/>
               </a:rPr>
               <a:t>7/7 有效</a:t>
             </a:r>
@@ -13465,7 +13356,9 @@
                 <a:solidFill>
                   <a:srgbClr val="C0392B"/>
                 </a:solidFill>
-                <a:latin typeface="Microsoft YaHei"/>
+                <a:latin typeface="SimHei"/>
+                <a:ea typeface="SimHei"/>
+                <a:cs typeface="SimHei"/>
               </a:rPr>
               <a:t>关键缺陷：客户端断连导致容量泄漏</a:t>
             </a:r>
@@ -13499,7 +13392,7 @@
                 <a:spcPct val="125000"/>
               </a:lnSpc>
               <a:spcAft>
-                <a:spcPts val="900"/>
+                <a:spcPts val="1100"/>
               </a:spcAft>
             </a:pPr>
             <a:r>
@@ -13507,7 +13400,9 @@
                 <a:solidFill>
                   <a:srgbClr val="1A1D24"/>
                 </a:solidFill>
-                <a:latin typeface="Microsoft YaHei"/>
+                <a:latin typeface="SimHei"/>
+                <a:ea typeface="SimHei"/>
+                <a:cs typeface="SimHei"/>
               </a:rPr>
               <a:t>— 现象 </a:t>
             </a:r>
@@ -13516,9 +13411,11 @@
                 <a:solidFill>
                   <a:srgbClr val="5A6373"/>
                 </a:solidFill>
-                <a:latin typeface="Microsoft YaHei"/>
-              </a:rPr>
-              <a:t>评测客户端在 8K 请求中被杀后，服务连续 653 秒返回 503，而 /health 始终 200 —— 看起来健康却拒绝一切请求</a:t>
+                <a:latin typeface="SimHei"/>
+                <a:ea typeface="SimHei"/>
+                <a:cs typeface="SimHei"/>
+              </a:rPr>
+              <a:t>客户端在 8K 请求中断连后，服务连续 653 s 返回 503，而 /health 始终 200</a:t>
             </a:r>
           </a:p>
           <a:p>
@@ -13527,7 +13424,7 @@
                 <a:spcPct val="125000"/>
               </a:lnSpc>
               <a:spcAft>
-                <a:spcPts val="900"/>
+                <a:spcPts val="1100"/>
               </a:spcAft>
             </a:pPr>
             <a:r>
@@ -13535,7 +13432,9 @@
                 <a:solidFill>
                   <a:srgbClr val="1A1D24"/>
                 </a:solidFill>
-                <a:latin typeface="Microsoft YaHei"/>
+                <a:latin typeface="SimHei"/>
+                <a:ea typeface="SimHei"/>
+                <a:cs typeface="SimHei"/>
               </a:rPr>
               <a:t>— 根因 </a:t>
             </a:r>
@@ -13544,9 +13443,11 @@
                 <a:solidFill>
                   <a:srgbClr val="5A6373"/>
                 </a:solidFill>
-                <a:latin typeface="Microsoft YaHei"/>
-              </a:rPr>
-              <a:t>取消信号无处可察：prefill 跑完才返回 session，而 HTTP 层只能从写 socket 失败感知断连，流式请求在此之前无帧可写</a:t>
+                <a:latin typeface="SimHei"/>
+                <a:ea typeface="SimHei"/>
+                <a:cs typeface="SimHei"/>
+              </a:rPr>
+              <a:t>prefill 完成前无响应字节可写，HTTP 层无法从写失败感知断连，取消信号无处生效</a:t>
             </a:r>
           </a:p>
           <a:p>
@@ -13555,7 +13456,7 @@
                 <a:spcPct val="125000"/>
               </a:lnSpc>
               <a:spcAft>
-                <a:spcPts val="900"/>
+                <a:spcPts val="1100"/>
               </a:spcAft>
             </a:pPr>
             <a:r>
@@ -13563,7 +13464,9 @@
                 <a:solidFill>
                   <a:srgbClr val="1A1D24"/>
                 </a:solidFill>
-                <a:latin typeface="Microsoft YaHei"/>
+                <a:latin typeface="SimHei"/>
+                <a:ea typeface="SimHei"/>
+                <a:cs typeface="SimHei"/>
               </a:rPr>
               <a:t>— 修复 </a:t>
             </a:r>
@@ -13572,9 +13475,11 @@
                 <a:solidFill>
                   <a:srgbClr val="5A6373"/>
                 </a:solidFill>
-                <a:latin typeface="Microsoft YaHei"/>
-              </a:rPr>
-              <a:t>socket EOF 监视 + 每 64-token block 边界检查取消，并把中止映射为 Cancelled 而非 Execution，避免误判服务不健康</a:t>
+                <a:latin typeface="SimHei"/>
+                <a:ea typeface="SimHei"/>
+                <a:cs typeface="SimHei"/>
+              </a:rPr>
+              <a:t>socket EOF 监视 + prefill 块边界检查取消，中止映射为 Cancelled 而非服务故障</a:t>
             </a:r>
           </a:p>
           <a:p>
@@ -13583,7 +13488,7 @@
                 <a:spcPct val="125000"/>
               </a:lnSpc>
               <a:spcAft>
-                <a:spcPts val="900"/>
+                <a:spcPts val="1100"/>
               </a:spcAft>
             </a:pPr>
             <a:r>
@@ -13591,7 +13496,9 @@
                 <a:solidFill>
                   <a:srgbClr val="1A1D24"/>
                 </a:solidFill>
-                <a:latin typeface="Microsoft YaHei"/>
+                <a:latin typeface="SimHei"/>
+                <a:ea typeface="SimHei"/>
+                <a:cs typeface="SimHei"/>
               </a:rPr>
               <a:t>— 结果 </a:t>
             </a:r>
@@ -13600,9 +13507,11 @@
                 <a:solidFill>
                   <a:srgbClr val="5A6373"/>
                 </a:solidFill>
-                <a:latin typeface="Microsoft YaHei"/>
-              </a:rPr>
-              <a:t>恢复时间 653 s → 4.86 s；新增 3 个不依赖 GPU 的回归测试，均在修复前失败、修复后通过</a:t>
+                <a:latin typeface="SimHei"/>
+                <a:ea typeface="SimHei"/>
+                <a:cs typeface="SimHei"/>
+              </a:rPr>
+              <a:t>恢复时间 653 s → 4.86 s；新增 3 个回归测试，修复前失败、修复后通过</a:t>
             </a:r>
           </a:p>
         </p:txBody>
@@ -13639,7 +13548,9 @@
                 <a:solidFill>
                   <a:srgbClr val="5A6373"/>
                 </a:solidFill>
-                <a:latin typeface="Microsoft YaHei"/>
+                <a:latin typeface="SimHei"/>
+                <a:ea typeface="SimHei"/>
+                <a:cs typeface="SimHei"/>
               </a:rPr>
               <a:t>无平台批准的 trajectory reference，故 trajectory 标记 unverified，且未使用自捕获自评分</a:t>
             </a:r>
@@ -13696,7 +13607,9 @@
                 <a:solidFill>
                   <a:srgbClr val="0066CC"/>
                 </a:solidFill>
-                <a:latin typeface="Microsoft YaHei"/>
+                <a:latin typeface="SimHei"/>
+                <a:ea typeface="SimHei"/>
+                <a:cs typeface="SimHei"/>
               </a:rPr>
               <a:t>PERFORMANCE</a:t>
             </a:r>
@@ -13735,7 +13648,9 @@
                 <a:solidFill>
                   <a:srgbClr val="1A1D24"/>
                 </a:solidFill>
-                <a:latin typeface="Microsoft YaHei"/>
+                <a:latin typeface="SimHei"/>
+                <a:ea typeface="SimHei"/>
+                <a:cs typeface="SimHei"/>
               </a:rPr>
               <a:t>第二层：性能工程的实际路径</a:t>
             </a:r>
@@ -13821,7 +13736,9 @@
                 <a:solidFill>
                   <a:srgbClr val="1A1D24"/>
                 </a:solidFill>
-                <a:latin typeface="Microsoft YaHei"/>
+                <a:latin typeface="SimHei"/>
+                <a:ea typeface="SimHei"/>
+                <a:cs typeface="SimHei"/>
               </a:rPr>
               <a:t>十七次单变量配对实验，九项接受、八项拒绝。每项接受的改动都带一个 =0 回滚开关，并以位相等或有界漂移的测试守护。</a:t>
             </a:r>
@@ -13904,7 +13821,9 @@
                 <a:solidFill>
                   <a:srgbClr val="1A1D24"/>
                 </a:solidFill>
-                <a:latin typeface="Microsoft YaHei"/>
+                <a:latin typeface="SimHei"/>
+                <a:ea typeface="SimHei"/>
+                <a:cs typeface="SimHei"/>
               </a:rPr>
               <a:t>接受的改动</a:t>
             </a:r>
@@ -13943,7 +13862,9 @@
                 <a:solidFill>
                   <a:srgbClr val="1A1D24"/>
                 </a:solidFill>
-                <a:latin typeface="Microsoft YaHei"/>
+                <a:latin typeface="SimHei"/>
+                <a:ea typeface="SimHei"/>
+                <a:cs typeface="SimHei"/>
               </a:rPr>
               <a:t>定位到的问题</a:t>
             </a:r>
@@ -13982,7 +13903,9 @@
                 <a:solidFill>
                   <a:srgbClr val="1A1D24"/>
                 </a:solidFill>
-                <a:latin typeface="Microsoft YaHei"/>
+                <a:latin typeface="SimHei"/>
+                <a:ea typeface="SimHei"/>
+                <a:cs typeface="SimHei"/>
               </a:rPr>
               <a:t>端到端效果</a:t>
             </a:r>
@@ -14021,7 +13944,9 @@
                 <a:solidFill>
                   <a:srgbClr val="1A1D24"/>
                 </a:solidFill>
-                <a:latin typeface="Microsoft YaHei"/>
+                <a:latin typeface="SimHei"/>
+                <a:ea typeface="SimHei"/>
+                <a:cs typeface="SimHei"/>
               </a:rPr>
               <a:t>release 构建</a:t>
             </a:r>
@@ -14060,7 +13985,9 @@
                 <a:solidFill>
                   <a:srgbClr val="1A1D24"/>
                 </a:solidFill>
-                <a:latin typeface="Consolas"/>
+                <a:latin typeface="SimHei"/>
+                <a:ea typeface="SimHei"/>
+                <a:cs typeface="SimHei"/>
               </a:rPr>
               <a:t>host 侧解释开销</a:t>
             </a:r>
@@ -14099,7 +14026,9 @@
                 <a:solidFill>
                   <a:srgbClr val="1A1D24"/>
                 </a:solidFill>
-                <a:latin typeface="Consolas"/>
+                <a:latin typeface="SimHei"/>
+                <a:ea typeface="SimHei"/>
+                <a:cs typeface="SimHei"/>
               </a:rPr>
               <a:t>TPOT −18.3%</a:t>
             </a:r>
@@ -14182,7 +14111,9 @@
                 <a:solidFill>
                   <a:srgbClr val="1A1D24"/>
                 </a:solidFill>
-                <a:latin typeface="Microsoft YaHei"/>
+                <a:latin typeface="SimHei"/>
+                <a:ea typeface="SimHei"/>
+                <a:cs typeface="SimHei"/>
               </a:rPr>
               <a:t>关闭调试采集</a:t>
             </a:r>
@@ -14221,7 +14152,9 @@
                 <a:solidFill>
                   <a:srgbClr val="1A1D24"/>
                 </a:solidFill>
-                <a:latin typeface="Consolas"/>
+                <a:latin typeface="SimHei"/>
+                <a:ea typeface="SimHei"/>
+                <a:cs typeface="SimHei"/>
               </a:rPr>
               <a:t>每 token 写盘与 stderr</a:t>
             </a:r>
@@ -14260,7 +14193,9 @@
                 <a:solidFill>
                   <a:srgbClr val="1A1D24"/>
                 </a:solidFill>
-                <a:latin typeface="Consolas"/>
+                <a:latin typeface="SimHei"/>
+                <a:ea typeface="SimHei"/>
+                <a:cs typeface="SimHei"/>
               </a:rPr>
               <a:t>TPOT −3.8%</a:t>
             </a:r>
@@ -14299,7 +14234,9 @@
                 <a:solidFill>
                   <a:srgbClr val="1A1D24"/>
                 </a:solidFill>
-                <a:latin typeface="Microsoft YaHei"/>
+                <a:latin typeface="SimHei"/>
+                <a:ea typeface="SimHei"/>
+                <a:cs typeface="SimHei"/>
               </a:rPr>
               <a:t>W4 prefill 改 dequant+GEMM</a:t>
             </a:r>
@@ -14338,7 +14275,9 @@
                 <a:solidFill>
                   <a:srgbClr val="1A1D24"/>
                 </a:solidFill>
-                <a:latin typeface="Consolas"/>
+                <a:latin typeface="SimHei"/>
+                <a:ea typeface="SimHei"/>
+                <a:cs typeface="SimHei"/>
               </a:rPr>
               <a:t>每行重读整个权重矩阵</a:t>
             </a:r>
@@ -14377,7 +14316,9 @@
                 <a:solidFill>
                   <a:srgbClr val="1A1D24"/>
                 </a:solidFill>
-                <a:latin typeface="Consolas"/>
+                <a:latin typeface="SimHei"/>
+                <a:ea typeface="SimHei"/>
+                <a:cs typeface="SimHei"/>
               </a:rPr>
               <a:t>TTFT −74.3%</a:t>
             </a:r>
@@ -14460,7 +14401,9 @@
                 <a:solidFill>
                   <a:srgbClr val="1A1D24"/>
                 </a:solidFill>
-                <a:latin typeface="Microsoft YaHei"/>
+                <a:latin typeface="SimHei"/>
+                <a:ea typeface="SimHei"/>
+                <a:cs typeface="SimHei"/>
               </a:rPr>
               <a:t>packed W4 GEMV</a:t>
             </a:r>
@@ -14499,7 +14442,9 @@
                 <a:solidFill>
                   <a:srgbClr val="1A1D24"/>
                 </a:solidFill>
-                <a:latin typeface="Consolas"/>
+                <a:latin typeface="SimHei"/>
+                <a:ea typeface="SimHei"/>
+                <a:cs typeface="SimHei"/>
               </a:rPr>
               <a:t>128 B 事务只用 16 B</a:t>
             </a:r>
@@ -14538,7 +14483,9 @@
                 <a:solidFill>
                   <a:srgbClr val="1A1D24"/>
                 </a:solidFill>
-                <a:latin typeface="Consolas"/>
+                <a:latin typeface="SimHei"/>
+                <a:ea typeface="SimHei"/>
+                <a:cs typeface="SimHei"/>
               </a:rPr>
               <a:t>TPOT −35.4%</a:t>
             </a:r>
@@ -14577,7 +14524,9 @@
                 <a:solidFill>
                   <a:srgbClr val="1A1D24"/>
                 </a:solidFill>
-                <a:latin typeface="Microsoft YaHei"/>
+                <a:latin typeface="SimHei"/>
+                <a:ea typeface="SimHei"/>
+                <a:cs typeface="SimHei"/>
               </a:rPr>
               <a:t>dequant scratch 池化</a:t>
             </a:r>
@@ -14616,7 +14565,9 @@
                 <a:solidFill>
                   <a:srgbClr val="1A1D24"/>
                 </a:solidFill>
-                <a:latin typeface="Consolas"/>
+                <a:latin typeface="SimHei"/>
+                <a:ea typeface="SimHei"/>
+                <a:cs typeface="SimHei"/>
               </a:rPr>
               <a:t>178 MB cudaMalloc 耗 3.2 ms</a:t>
             </a:r>
@@ -14655,7 +14606,9 @@
                 <a:solidFill>
                   <a:srgbClr val="1A1D24"/>
                 </a:solidFill>
-                <a:latin typeface="Consolas"/>
+                <a:latin typeface="SimHei"/>
+                <a:ea typeface="SimHei"/>
+                <a:cs typeface="SimHei"/>
               </a:rPr>
               <a:t>TTFT 1K −65%</a:t>
             </a:r>
@@ -14738,7 +14691,9 @@
                 <a:solidFill>
                   <a:srgbClr val="1A1D24"/>
                 </a:solidFill>
-                <a:latin typeface="Microsoft YaHei"/>
+                <a:latin typeface="SimHei"/>
+                <a:ea typeface="SimHei"/>
+                <a:cs typeface="SimHei"/>
               </a:rPr>
               <a:t>prefill 块 64 → 512</a:t>
             </a:r>
@@ -14777,7 +14732,9 @@
                 <a:solidFill>
                   <a:srgbClr val="1A1D24"/>
                 </a:solidFill>
-                <a:latin typeface="Consolas"/>
+                <a:latin typeface="SimHei"/>
+                <a:ea typeface="SimHei"/>
+                <a:cs typeface="SimHei"/>
               </a:rPr>
               <a:t>每块重复 dequant</a:t>
             </a:r>
@@ -14816,7 +14773,9 @@
                 <a:solidFill>
                   <a:srgbClr val="1A1D24"/>
                 </a:solidFill>
-                <a:latin typeface="Consolas"/>
+                <a:latin typeface="SimHei"/>
+                <a:ea typeface="SimHei"/>
+                <a:cs typeface="SimHei"/>
               </a:rPr>
               <a:t>TTFT 1K −69%</a:t>
             </a:r>
@@ -14855,7 +14814,9 @@
                 <a:solidFill>
                   <a:srgbClr val="1A1D24"/>
                 </a:solidFill>
-                <a:latin typeface="Microsoft YaHei"/>
+                <a:latin typeface="SimHei"/>
+                <a:ea typeface="SimHei"/>
+                <a:cs typeface="SimHei"/>
               </a:rPr>
               <a:t>attention 批量化 + 行协作 softmax</a:t>
             </a:r>
@@ -14894,7 +14855,9 @@
                 <a:solidFill>
                   <a:srgbClr val="1A1D24"/>
                 </a:solidFill>
-                <a:latin typeface="Consolas"/>
+                <a:latin typeface="SimHei"/>
+                <a:ea typeface="SimHei"/>
+                <a:cs typeface="SimHei"/>
               </a:rPr>
               <a:t>每线程重复扫描整行</a:t>
             </a:r>
@@ -14933,7 +14896,9 @@
                 <a:solidFill>
                   <a:srgbClr val="1A1D24"/>
                 </a:solidFill>
-                <a:latin typeface="Consolas"/>
+                <a:latin typeface="SimHei"/>
+                <a:ea typeface="SimHei"/>
+                <a:cs typeface="SimHei"/>
               </a:rPr>
               <a:t>16K TTFT −92%</a:t>
             </a:r>
@@ -14972,9 +14937,11 @@
                 <a:solidFill>
                   <a:srgbClr val="C0392B"/>
                 </a:solidFill>
-                <a:latin typeface="Microsoft YaHei"/>
-              </a:rPr>
-              <a:t>被拒绝的八项（同样重要）</a:t>
+                <a:latin typeface="SimHei"/>
+                <a:ea typeface="SimHei"/>
+                <a:cs typeface="SimHei"/>
+              </a:rPr>
+              <a:t>被拒绝的八项（负结果）</a:t>
             </a:r>
           </a:p>
         </p:txBody>
@@ -15006,7 +14973,7 @@
                 <a:spcPct val="125000"/>
               </a:lnSpc>
               <a:spcAft>
-                <a:spcPts val="700"/>
+                <a:spcPts val="800"/>
               </a:spcAft>
             </a:pPr>
             <a:r>
@@ -15014,9 +14981,11 @@
                 <a:solidFill>
                   <a:srgbClr val="5A6373"/>
                 </a:solidFill>
-                <a:latin typeface="Microsoft YaHei"/>
-              </a:rPr>
-              <a:t>· deferred GDN 状态检查：0 收益</a:t>
+                <a:latin typeface="SimHei"/>
+                <a:ea typeface="SimHei"/>
+                <a:cs typeface="SimHei"/>
+              </a:rPr>
+              <a:t>· deferred GDN 状态检查：零收益</a:t>
             </a:r>
           </a:p>
           <a:p>
@@ -15025,7 +14994,7 @@
                 <a:spcPct val="125000"/>
               </a:lnSpc>
               <a:spcAft>
-                <a:spcPts val="700"/>
+                <a:spcPts val="800"/>
               </a:spcAft>
             </a:pPr>
             <a:r>
@@ -15033,7 +15002,9 @@
                 <a:solidFill>
                   <a:srgbClr val="5A6373"/>
                 </a:solidFill>
-                <a:latin typeface="Microsoft YaHei"/>
+                <a:latin typeface="SimHei"/>
+                <a:ea typeface="SimHei"/>
+                <a:cs typeface="SimHei"/>
               </a:rPr>
               <a:t>· warp-per-output GEMV：−1.8%（噪声内）</a:t>
             </a:r>
@@ -15044,7 +15015,7 @@
                 <a:spcPct val="125000"/>
               </a:lnSpc>
               <a:spcAft>
-                <a:spcPts val="700"/>
+                <a:spcPts val="800"/>
               </a:spcAft>
             </a:pPr>
             <a:r>
@@ -15052,7 +15023,9 @@
                 <a:solidFill>
                   <a:srgbClr val="5A6373"/>
                 </a:solidFill>
-                <a:latin typeface="Microsoft YaHei"/>
+                <a:latin typeface="SimHei"/>
+                <a:ea typeface="SimHei"/>
+                <a:cs typeface="SimHei"/>
               </a:rPr>
               <a:t>· uint4 向量化加载：慢 26%</a:t>
             </a:r>
@@ -15063,7 +15036,7 @@
                 <a:spcPct val="125000"/>
               </a:lnSpc>
               <a:spcAft>
-                <a:spcPts val="700"/>
+                <a:spcPts val="800"/>
               </a:spcAft>
             </a:pPr>
             <a:r>
@@ -15071,9 +15044,11 @@
                 <a:solidFill>
                   <a:srgbClr val="5A6373"/>
                 </a:solidFill>
-                <a:latin typeface="Microsoft YaHei"/>
-              </a:rPr>
-              <a:t>· 4 累加器数组：慢 17%（溢出到 local memory）</a:t>
+                <a:latin typeface="SimHei"/>
+                <a:ea typeface="SimHei"/>
+                <a:cs typeface="SimHei"/>
+              </a:rPr>
+              <a:t>· 4 累加器数组：慢 17%（local memory 溢出）</a:t>
             </a:r>
           </a:p>
           <a:p>
@@ -15082,7 +15057,7 @@
                 <a:spcPct val="125000"/>
               </a:lnSpc>
               <a:spcAft>
-                <a:spcPts val="700"/>
+                <a:spcPts val="800"/>
               </a:spcAft>
             </a:pPr>
             <a:r>
@@ -15090,7 +15065,9 @@
                 <a:solidFill>
                   <a:srgbClr val="5A6373"/>
                 </a:solidFill>
-                <a:latin typeface="Microsoft YaHei"/>
+                <a:latin typeface="SimHei"/>
+                <a:ea typeface="SimHei"/>
+                <a:cs typeface="SimHei"/>
               </a:rPr>
               <a:t>· 展开 + FMA 融合：慢 1.3%</a:t>
             </a:r>
@@ -15101,7 +15078,7 @@
                 <a:spcPct val="125000"/>
               </a:lnSpc>
               <a:spcAft>
-                <a:spcPts val="700"/>
+                <a:spcPts val="800"/>
               </a:spcAft>
             </a:pPr>
             <a:r>
@@ -15109,7 +15086,9 @@
                 <a:solidFill>
                   <a:srgbClr val="5A6373"/>
                 </a:solidFill>
-                <a:latin typeface="Microsoft YaHei"/>
+                <a:latin typeface="SimHei"/>
+                <a:ea typeface="SimHei"/>
+                <a:cs typeface="SimHei"/>
               </a:rPr>
               <a:t>· Marlin 位技巧 SIMD：慢 54%</a:t>
             </a:r>
@@ -15120,7 +15099,7 @@
                 <a:spcPct val="125000"/>
               </a:lnSpc>
               <a:spcAft>
-                <a:spcPts val="700"/>
+                <a:spcPts val="800"/>
               </a:spcAft>
             </a:pPr>
             <a:r>
@@ -15128,9 +15107,11 @@
                 <a:solidFill>
                   <a:srgbClr val="5A6373"/>
                 </a:solidFill>
-                <a:latin typeface="Microsoft YaHei"/>
-              </a:rPr>
-              <a:t>· per-group 查表：设计阶段自我否决</a:t>
+                <a:latin typeface="SimHei"/>
+                <a:ea typeface="SimHei"/>
+                <a:cs typeface="SimHei"/>
+              </a:rPr>
+              <a:t>· per-group 查表：设计阶段否决</a:t>
             </a:r>
           </a:p>
           <a:p>
@@ -15139,7 +15120,7 @@
                 <a:spcPct val="125000"/>
               </a:lnSpc>
               <a:spcAft>
-                <a:spcPts val="700"/>
+                <a:spcPts val="800"/>
               </a:spcAft>
             </a:pPr>
             <a:r>
@@ -15147,9 +15128,11 @@
                 <a:solidFill>
                   <a:srgbClr val="5A6373"/>
                 </a:solidFill>
-                <a:latin typeface="Microsoft YaHei"/>
-              </a:rPr>
-              <a:t>· chunk 512 的保守顾虑：被显存复核推翻</a:t>
+                <a:latin typeface="SimHei"/>
+                <a:ea typeface="SimHei"/>
+                <a:cs typeface="SimHei"/>
+              </a:rPr>
+              <a:t>· chunk 512 初判保守：显存复核后采纳</a:t>
             </a:r>
           </a:p>
         </p:txBody>
@@ -15186,7 +15169,9 @@
                 <a:solidFill>
                   <a:srgbClr val="5A6373"/>
                 </a:solidFill>
-                <a:latin typeface="Microsoft YaHei"/>
+                <a:latin typeface="SimHei"/>
+                <a:ea typeface="SimHei"/>
+                <a:cs typeface="SimHei"/>
               </a:rPr>
               <a:t>接受条件：correctness 不降、CV ≤ 10%、端到端收益超过噪声；只有 kernel 变快而端到端无收益一律拒绝</a:t>
             </a:r>
@@ -15243,7 +15228,9 @@
                 <a:solidFill>
                   <a:srgbClr val="0066CC"/>
                 </a:solidFill>
-                <a:latin typeface="Microsoft YaHei"/>
+                <a:latin typeface="SimHei"/>
+                <a:ea typeface="SimHei"/>
+                <a:cs typeface="SimHei"/>
               </a:rPr>
               <a:t>DEEP DIVE 1</a:t>
             </a:r>
@@ -15282,7 +15269,9 @@
                 <a:solidFill>
                   <a:srgbClr val="1A1D24"/>
                 </a:solidFill>
-                <a:latin typeface="Microsoft YaHei"/>
+                <a:latin typeface="SimHei"/>
+                <a:ea typeface="SimHei"/>
+                <a:cs typeface="SimHei"/>
               </a:rPr>
               <a:t>核心发现：16K 的瓶颈是 softmax 的 512 倍冗余扫描</a:t>
             </a:r>
@@ -15409,7 +15398,9 @@
                 <a:solidFill>
                   <a:srgbClr val="C0392B"/>
                 </a:solidFill>
-                <a:latin typeface="Consolas"/>
+                <a:latin typeface="SimHei"/>
+                <a:ea typeface="SimHei"/>
+                <a:cs typeface="SimHei"/>
               </a:rPr>
               <a:t>for (c = 0; c &lt; valid_cols; c++)  // 这一行被 block 内每个线程各执行一遍</a:t>
             </a:r>
@@ -15425,7 +15416,9 @@
                 <a:solidFill>
                   <a:srgbClr val="5A6373"/>
                 </a:solidFill>
-                <a:latin typeface="Microsoft YaHei"/>
+                <a:latin typeface="SimHei"/>
+                <a:ea typeface="SimHei"/>
+                <a:cs typeface="SimHei"/>
               </a:rPr>
               <a:t>256 个线程做完全相同的全行扫描，再乘以每行 ceil(cols/256) 个 block —— 每行被完整扫描 512 次，而正确做法只需两遍分区扫描。</a:t>
             </a:r>
@@ -15464,9 +15457,11 @@
                 <a:solidFill>
                   <a:srgbClr val="0066CC"/>
                 </a:solidFill>
-                <a:latin typeface="Microsoft YaHei"/>
-              </a:rPr>
-              <a:t>定位过程：三次修正自己的判断</a:t>
+                <a:latin typeface="SimHei"/>
+                <a:ea typeface="SimHei"/>
+                <a:cs typeface="SimHei"/>
+              </a:rPr>
+              <a:t>定位过程（三次假设修正）</a:t>
             </a:r>
           </a:p>
         </p:txBody>
@@ -15498,7 +15493,7 @@
                 <a:spcPct val="125000"/>
               </a:lnSpc>
               <a:spcAft>
-                <a:spcPts val="800"/>
+                <a:spcPts val="900"/>
               </a:spcAft>
             </a:pPr>
             <a:r>
@@ -15506,18 +15501,22 @@
                 <a:solidFill>
                   <a:srgbClr val="1A1D24"/>
                 </a:solidFill>
-                <a:latin typeface="Microsoft YaHei"/>
-              </a:rPr>
-              <a:t>— ① 单层模型只能解释 124 s / 408.7 s </a:t>
+                <a:latin typeface="SimHei"/>
+                <a:ea typeface="SimHei"/>
+                <a:cs typeface="SimHei"/>
+              </a:rPr>
+              <a:t>— ① 单层模型仅解释 124 s / 408.7 s </a:t>
             </a:r>
             <a:r>
               <a:rPr sz="1200">
                 <a:solidFill>
                   <a:srgbClr val="5A6373"/>
                 </a:solidFill>
-                <a:latin typeface="Microsoft YaHei"/>
-              </a:rPr>
-              <a:t>→ 改用“阶梯”测量（逐块递增 kv），发现单个 attention 层就要 25.05 s，16 层约 400 s</a:t>
+                <a:latin typeface="SimHei"/>
+                <a:ea typeface="SimHei"/>
+                <a:cs typeface="SimHei"/>
+              </a:rPr>
+              <a:t>→ 改用逐块递增 kv 的阶梯测量，单个 attention 层 25.05 s，16 层约 400 s</a:t>
             </a:r>
           </a:p>
           <a:p>
@@ -15526,7 +15525,7 @@
                 <a:spcPct val="125000"/>
               </a:lnSpc>
               <a:spcAft>
-                <a:spcPts val="800"/>
+                <a:spcPts val="900"/>
               </a:spcAft>
             </a:pPr>
             <a:r>
@@ -15534,18 +15533,22 @@
                 <a:solidFill>
                   <a:srgbClr val="1A1D24"/>
                 </a:solidFill>
-                <a:latin typeface="Microsoft YaHei"/>
-              </a:rPr>
-              <a:t>— ② 怀疑 GEMM 形状退化 </a:t>
+                <a:latin typeface="SimHei"/>
+                <a:ea typeface="SimHei"/>
+                <a:cs typeface="SimHei"/>
+              </a:rPr>
+              <a:t>— ② 假设 GEMM 形状退化 </a:t>
             </a:r>
             <a:r>
               <a:rPr sz="1200">
                 <a:solidFill>
                   <a:srgbClr val="5A6373"/>
                 </a:solidFill>
-                <a:latin typeface="Microsoft YaHei"/>
-              </a:rPr>
-              <a:t>→ 重排使 M 从 6 变 512，仅降到 23.59 s，不是主因</a:t>
+                <a:latin typeface="SimHei"/>
+                <a:ea typeface="SimHei"/>
+                <a:cs typeface="SimHei"/>
+              </a:rPr>
+              <a:t>→ 重排后 M 从 6 变 512，仅降至 23.59 s，非主因</a:t>
             </a:r>
           </a:p>
           <a:p>
@@ -15554,7 +15557,7 @@
                 <a:spcPct val="125000"/>
               </a:lnSpc>
               <a:spcAft>
-                <a:spcPts val="800"/>
+                <a:spcPts val="900"/>
               </a:spcAft>
             </a:pPr>
             <a:r>
@@ -15562,18 +15565,22 @@
                 <a:solidFill>
                   <a:srgbClr val="1A1D24"/>
                 </a:solidFill>
-                <a:latin typeface="Microsoft YaHei"/>
-              </a:rPr>
-              <a:t>— ③ 怀疑输出 stride </a:t>
+                <a:latin typeface="SimHei"/>
+                <a:ea typeface="SimHei"/>
+                <a:cs typeface="SimHei"/>
+              </a:rPr>
+              <a:t>— ③ 假设输出 stride 问题 </a:t>
             </a:r>
             <a:r>
               <a:rPr sz="1200">
                 <a:solidFill>
                   <a:srgbClr val="5A6373"/>
                 </a:solidFill>
-                <a:latin typeface="Microsoft YaHei"/>
-              </a:rPr>
-              <a:t>→ 微基准显示 GEMM 仅 5.7 µs，交错与连续 stride 无差别</a:t>
+                <a:latin typeface="SimHei"/>
+                <a:ea typeface="SimHei"/>
+                <a:cs typeface="SimHei"/>
+              </a:rPr>
+              <a:t>→ 微基准显示 GEMM 仅 5.7 µs，与 stride 无关</a:t>
             </a:r>
           </a:p>
           <a:p>
@@ -15582,7 +15589,7 @@
                 <a:spcPct val="125000"/>
               </a:lnSpc>
               <a:spcAft>
-                <a:spcPts val="800"/>
+                <a:spcPts val="900"/>
               </a:spcAft>
             </a:pPr>
             <a:r>
@@ -15590,18 +15597,22 @@
                 <a:solidFill>
                   <a:srgbClr val="1A1D24"/>
                 </a:solidFill>
-                <a:latin typeface="Microsoft YaHei"/>
-              </a:rPr>
-              <a:t>— ④ 真正的错在我的测量 </a:t>
+                <a:latin typeface="SimHei"/>
+                <a:ea typeface="SimHei"/>
+                <a:cs typeface="SimHei"/>
+              </a:rPr>
+              <a:t>— ④ 定位测量口径错误 </a:t>
             </a:r>
             <a:r>
               <a:rPr sz="1200">
                 <a:solidFill>
                   <a:srgbClr val="5A6373"/>
                 </a:solidFill>
-                <a:latin typeface="Microsoft YaHei"/>
-              </a:rPr>
-              <a:t>→ 此前测 softmax 用了 kv_offset=0，valid_cols 平均仅 256 列；真实是 15872，换算 2234 ms 与实测 2082 ms 吻合</a:t>
+                <a:latin typeface="SimHei"/>
+                <a:ea typeface="SimHei"/>
+                <a:cs typeface="SimHei"/>
+              </a:rPr>
+              <a:t>→ 此前用 kv_offset=0 测 softmax（平均仅 256 列），按真实 15872 列换算得 2234 ms，与实测 2082 ms 吻合</a:t>
             </a:r>
           </a:p>
         </p:txBody>
@@ -15638,7 +15649,9 @@
                 <a:solidFill>
                   <a:srgbClr val="0E8A4F"/>
                 </a:solidFill>
-                <a:latin typeface="Microsoft YaHei"/>
+                <a:latin typeface="SimHei"/>
+                <a:ea typeface="SimHei"/>
+                <a:cs typeface="SimHei"/>
               </a:rPr>
               <a:t>修复效果（双卡双副本验证）</a:t>
             </a:r>
@@ -15721,7 +15734,9 @@
                 <a:solidFill>
                   <a:srgbClr val="1A1D24"/>
                 </a:solidFill>
-                <a:latin typeface="Microsoft YaHei"/>
+                <a:latin typeface="SimHei"/>
+                <a:ea typeface="SimHei"/>
+                <a:cs typeface="SimHei"/>
               </a:rPr>
               <a:t>测量项</a:t>
             </a:r>
@@ -15760,7 +15775,9 @@
                 <a:solidFill>
                   <a:srgbClr val="1A1D24"/>
                 </a:solidFill>
-                <a:latin typeface="Microsoft YaHei"/>
+                <a:latin typeface="SimHei"/>
+                <a:ea typeface="SimHei"/>
+                <a:cs typeface="SimHei"/>
               </a:rPr>
               <a:t>修复前</a:t>
             </a:r>
@@ -15799,7 +15816,9 @@
                 <a:solidFill>
                   <a:srgbClr val="1A1D24"/>
                 </a:solidFill>
-                <a:latin typeface="Microsoft YaHei"/>
+                <a:latin typeface="SimHei"/>
+                <a:ea typeface="SimHei"/>
+                <a:cs typeface="SimHei"/>
               </a:rPr>
               <a:t>修复后</a:t>
             </a:r>
@@ -15838,7 +15857,9 @@
                 <a:solidFill>
                   <a:srgbClr val="1A1D24"/>
                 </a:solidFill>
-                <a:latin typeface="Microsoft YaHei"/>
+                <a:latin typeface="SimHei"/>
+                <a:ea typeface="SimHei"/>
+                <a:cs typeface="SimHei"/>
               </a:rPr>
               <a:t>倍数</a:t>
             </a:r>
@@ -15877,7 +15898,9 @@
                 <a:solidFill>
                   <a:srgbClr val="1A1D24"/>
                 </a:solidFill>
-                <a:latin typeface="Microsoft YaHei"/>
+                <a:latin typeface="SimHei"/>
+                <a:ea typeface="SimHei"/>
+                <a:cs typeface="SimHei"/>
               </a:rPr>
               <a:t>attention 阶梯（单层）</a:t>
             </a:r>
@@ -15916,7 +15939,9 @@
                 <a:solidFill>
                   <a:srgbClr val="1A1D24"/>
                 </a:solidFill>
-                <a:latin typeface="Consolas"/>
+                <a:latin typeface="SimHei"/>
+                <a:ea typeface="SimHei"/>
+                <a:cs typeface="SimHei"/>
               </a:rPr>
               <a:t>23.06 s</a:t>
             </a:r>
@@ -15955,7 +15980,9 @@
                 <a:solidFill>
                   <a:srgbClr val="1A1D24"/>
                 </a:solidFill>
-                <a:latin typeface="Consolas"/>
+                <a:latin typeface="SimHei"/>
+                <a:ea typeface="SimHei"/>
+                <a:cs typeface="SimHei"/>
               </a:rPr>
               <a:t>0.659 s</a:t>
             </a:r>
@@ -15994,7 +16021,9 @@
                 <a:solidFill>
                   <a:srgbClr val="1A1D24"/>
                 </a:solidFill>
-                <a:latin typeface="Consolas"/>
+                <a:latin typeface="SimHei"/>
+                <a:ea typeface="SimHei"/>
+                <a:cs typeface="SimHei"/>
               </a:rPr>
               <a:t>35.0×</a:t>
             </a:r>
@@ -16077,7 +16106,9 @@
                 <a:solidFill>
                   <a:srgbClr val="1A1D24"/>
                 </a:solidFill>
-                <a:latin typeface="Microsoft YaHei"/>
+                <a:latin typeface="SimHei"/>
+                <a:ea typeface="SimHei"/>
+                <a:cs typeface="SimHei"/>
               </a:rPr>
               <a:t>单次 sdpa（kv=16384）</a:t>
             </a:r>
@@ -16116,7 +16147,9 @@
                 <a:solidFill>
                   <a:srgbClr val="1A1D24"/>
                 </a:solidFill>
-                <a:latin typeface="Consolas"/>
+                <a:latin typeface="SimHei"/>
+                <a:ea typeface="SimHei"/>
+                <a:cs typeface="SimHei"/>
               </a:rPr>
               <a:t>2053.7 ms</a:t>
             </a:r>
@@ -16155,7 +16188,9 @@
                 <a:solidFill>
                   <a:srgbClr val="1A1D24"/>
                 </a:solidFill>
-                <a:latin typeface="Consolas"/>
+                <a:latin typeface="SimHei"/>
+                <a:ea typeface="SimHei"/>
+                <a:cs typeface="SimHei"/>
               </a:rPr>
               <a:t>13.7 ms</a:t>
             </a:r>
@@ -16194,7 +16229,9 @@
                 <a:solidFill>
                   <a:srgbClr val="1A1D24"/>
                 </a:solidFill>
-                <a:latin typeface="Consolas"/>
+                <a:latin typeface="SimHei"/>
+                <a:ea typeface="SimHei"/>
+                <a:cs typeface="SimHei"/>
               </a:rPr>
               <a:t>150×</a:t>
             </a:r>
@@ -16233,7 +16270,9 @@
                 <a:solidFill>
                   <a:srgbClr val="1A1D24"/>
                 </a:solidFill>
-                <a:latin typeface="Microsoft YaHei"/>
+                <a:latin typeface="SimHei"/>
+                <a:ea typeface="SimHei"/>
+                <a:cs typeface="SimHei"/>
               </a:rPr>
               <a:t>服务 TTFT 8K</a:t>
             </a:r>
@@ -16272,7 +16311,9 @@
                 <a:solidFill>
                   <a:srgbClr val="1A1D24"/>
                 </a:solidFill>
-                <a:latin typeface="Consolas"/>
+                <a:latin typeface="SimHei"/>
+                <a:ea typeface="SimHei"/>
+                <a:cs typeface="SimHei"/>
               </a:rPr>
               <a:t>64.1 s</a:t>
             </a:r>
@@ -16311,7 +16352,9 @@
                 <a:solidFill>
                   <a:srgbClr val="1A1D24"/>
                 </a:solidFill>
-                <a:latin typeface="Consolas"/>
+                <a:latin typeface="SimHei"/>
+                <a:ea typeface="SimHei"/>
+                <a:cs typeface="SimHei"/>
               </a:rPr>
               <a:t>17.8 s</a:t>
             </a:r>
@@ -16350,7 +16393,9 @@
                 <a:solidFill>
                   <a:srgbClr val="1A1D24"/>
                 </a:solidFill>
-                <a:latin typeface="Consolas"/>
+                <a:latin typeface="SimHei"/>
+                <a:ea typeface="SimHei"/>
+                <a:cs typeface="SimHei"/>
               </a:rPr>
               <a:t>3.6×</a:t>
             </a:r>
@@ -16433,7 +16478,9 @@
                 <a:solidFill>
                   <a:srgbClr val="1A1D24"/>
                 </a:solidFill>
-                <a:latin typeface="Microsoft YaHei"/>
+                <a:latin typeface="SimHei"/>
+                <a:ea typeface="SimHei"/>
+                <a:cs typeface="SimHei"/>
               </a:rPr>
               <a:t>服务 TTFT 16K</a:t>
             </a:r>
@@ -16472,7 +16519,9 @@
                 <a:solidFill>
                   <a:srgbClr val="1A1D24"/>
                 </a:solidFill>
-                <a:latin typeface="Consolas"/>
+                <a:latin typeface="SimHei"/>
+                <a:ea typeface="SimHei"/>
+                <a:cs typeface="SimHei"/>
               </a:rPr>
               <a:t>408.7 s</a:t>
             </a:r>
@@ -16511,7 +16560,9 @@
                 <a:solidFill>
                   <a:srgbClr val="1A1D24"/>
                 </a:solidFill>
-                <a:latin typeface="Consolas"/>
+                <a:latin typeface="SimHei"/>
+                <a:ea typeface="SimHei"/>
+                <a:cs typeface="SimHei"/>
               </a:rPr>
               <a:t>31.9 s</a:t>
             </a:r>
@@ -16550,7 +16601,9 @@
                 <a:solidFill>
                   <a:srgbClr val="1A1D24"/>
                 </a:solidFill>
-                <a:latin typeface="Consolas"/>
+                <a:latin typeface="SimHei"/>
+                <a:ea typeface="SimHei"/>
+                <a:cs typeface="SimHei"/>
               </a:rPr>
               <a:t>12.8×</a:t>
             </a:r>
@@ -16592,7 +16645,9 @@
                 <a:solidFill>
                   <a:srgbClr val="5A6373"/>
                 </a:solidFill>
-                <a:latin typeface="Microsoft YaHei"/>
+                <a:latin typeface="SimHei"/>
+                <a:ea typeface="SimHei"/>
+                <a:cs typeface="SimHei"/>
               </a:rPr>
               <a:t>改为一个 block 负责一行、256 线程分工 + shared memory 归约；每个线程只重写自己读过的元素，因而原地安全。max 归约与顺序无关，指数求和改为分区树形，属于已接受的同类 FP32 重结合。</a:t>
             </a:r>
@@ -16631,7 +16686,9 @@
                 <a:solidFill>
                   <a:srgbClr val="5A6373"/>
                 </a:solidFill>
-                <a:latin typeface="Microsoft YaHei"/>
+                <a:latin typeface="SimHei"/>
+                <a:ea typeface="SimHei"/>
+                <a:cs typeface="SimHei"/>
               </a:rPr>
               <a:t>公开功能 6/6 在修复后重新验证仍全部精确通过</a:t>
             </a:r>
@@ -16688,7 +16745,9 @@
                 <a:solidFill>
                   <a:srgbClr val="0066CC"/>
                 </a:solidFill>
-                <a:latin typeface="Microsoft YaHei"/>
+                <a:latin typeface="SimHei"/>
+                <a:ea typeface="SimHei"/>
+                <a:cs typeface="SimHei"/>
               </a:rPr>
               <a:t>DEEP DIVE 2</a:t>
             </a:r>
@@ -16727,7 +16786,9 @@
                 <a:solidFill>
                   <a:srgbClr val="1A1D24"/>
                 </a:solidFill>
-                <a:latin typeface="Microsoft YaHei"/>
+                <a:latin typeface="SimHei"/>
+                <a:ea typeface="SimHei"/>
+                <a:cs typeface="SimHei"/>
               </a:rPr>
               <a:t>核心发现：两个“非计算”瓶颈</a:t>
             </a:r>
@@ -16810,7 +16871,9 @@
                 <a:solidFill>
                   <a:srgbClr val="0066CC"/>
                 </a:solidFill>
-                <a:latin typeface="Microsoft YaHei"/>
+                <a:latin typeface="SimHei"/>
+                <a:ea typeface="SimHei"/>
+                <a:cs typeface="SimHei"/>
               </a:rPr>
               <a:t>① prefill 的 W4 投影退化成 M 个 GEMV</a:t>
             </a:r>
@@ -16893,7 +16956,9 @@
                 <a:solidFill>
                   <a:srgbClr val="C0392B"/>
                 </a:solidFill>
-                <a:latin typeface="Consolas"/>
+                <a:latin typeface="SimHei"/>
+                <a:ea typeface="SimHei"/>
+                <a:cs typeface="SimHei"/>
               </a:rPr>
               <a:t>blockIdx.x = row * out_features + out</a:t>
             </a:r>
@@ -16909,7 +16974,9 @@
                 <a:solidFill>
                   <a:srgbClr val="5A6373"/>
                 </a:solidFill>
-                <a:latin typeface="Microsoft YaHei"/>
+                <a:latin typeface="SimHei"/>
+                <a:ea typeface="SimHei"/>
+                <a:cs typeface="SimHei"/>
               </a:rPr>
               <a:t>每个 block 各自重读所需权重行 ⇒ M 行 prefill 把整个权重矩阵搬运 M 次</a:t>
             </a:r>
@@ -16951,7 +17018,9 @@
                 <a:solidFill>
                   <a:srgbClr val="1A1D24"/>
                 </a:solidFill>
-                <a:latin typeface="Microsoft YaHei"/>
+                <a:latin typeface="SimHei"/>
+                <a:ea typeface="SimHei"/>
+                <a:cs typeface="SimHei"/>
               </a:rPr>
               <a:t>— 证据 </a:t>
             </a:r>
@@ -16960,7 +17029,9 @@
                 <a:solidFill>
                   <a:srgbClr val="5A6373"/>
                 </a:solidFill>
-                <a:latin typeface="Microsoft YaHei"/>
+                <a:latin typeface="SimHei"/>
+                <a:ea typeface="SimHei"/>
+                <a:cs typeface="SimHei"/>
               </a:rPr>
               <a:t>prefill 每 token 76 ms，decode 105 ms；64-token block 只比单步 decode 慢 46 倍却做了 64 倍的工作，批处理效率仅 1.03 倍</a:t>
             </a:r>
@@ -16979,7 +17050,9 @@
                 <a:solidFill>
                   <a:srgbClr val="1A1D24"/>
                 </a:solidFill>
-                <a:latin typeface="Microsoft YaHei"/>
+                <a:latin typeface="SimHei"/>
+                <a:ea typeface="SimHei"/>
+                <a:cs typeface="SimHei"/>
               </a:rPr>
               <a:t>— 修复 </a:t>
             </a:r>
@@ -16988,7 +17061,9 @@
                 <a:solidFill>
                   <a:srgbClr val="5A6373"/>
                 </a:solidFill>
-                <a:latin typeface="Microsoft YaHei"/>
+                <a:latin typeface="SimHei"/>
+                <a:ea typeface="SimHei"/>
+                <a:cs typeface="SimHei"/>
               </a:rPr>
               <a:t>大 M 时先 dequant 到 BF16 scratch 再交 tensor core GEMM，decode 保持 GEMV；解压逐位精确（assert_eq! 全量断言）</a:t>
             </a:r>
@@ -17007,7 +17082,9 @@
                 <a:solidFill>
                   <a:srgbClr val="1A1D24"/>
                 </a:solidFill>
-                <a:latin typeface="Microsoft YaHei"/>
+                <a:latin typeface="SimHei"/>
+                <a:ea typeface="SimHei"/>
+                <a:cs typeface="SimHei"/>
               </a:rPr>
               <a:t>— 效果 </a:t>
             </a:r>
@@ -17016,7 +17093,9 @@
                 <a:solidFill>
                   <a:srgbClr val="5A6373"/>
                 </a:solidFill>
-                <a:latin typeface="Microsoft YaHei"/>
+                <a:latin typeface="SimHei"/>
+                <a:ea typeface="SimHei"/>
+                <a:cs typeface="SimHei"/>
               </a:rPr>
               <a:t>1K TTFT 77.33 s → 19.87 s，公开功能仍 6/6</a:t>
             </a:r>
@@ -17055,7 +17134,9 @@
                 <a:solidFill>
                   <a:srgbClr val="0066CC"/>
                 </a:solidFill>
-                <a:latin typeface="Microsoft YaHei"/>
+                <a:latin typeface="SimHei"/>
+                <a:ea typeface="SimHei"/>
+                <a:cs typeface="SimHei"/>
               </a:rPr>
               <a:t>② 80% 的 prefill 花在 cudaMalloc</a:t>
             </a:r>
@@ -17138,7 +17219,9 @@
                 <a:solidFill>
                   <a:srgbClr val="1A1D24"/>
                 </a:solidFill>
-                <a:latin typeface="Microsoft YaHei"/>
+                <a:latin typeface="SimHei"/>
+                <a:ea typeface="SimHei"/>
+                <a:cs typeface="SimHei"/>
               </a:rPr>
               <a:t>微基准（单层归因）</a:t>
             </a:r>
@@ -17177,7 +17260,9 @@
                 <a:solidFill>
                   <a:srgbClr val="1A1D24"/>
                 </a:solidFill>
-                <a:latin typeface="Microsoft YaHei"/>
+                <a:latin typeface="SimHei"/>
+                <a:ea typeface="SimHei"/>
+                <a:cs typeface="SimHei"/>
               </a:rPr>
               <a:t>耗时</a:t>
             </a:r>
@@ -17216,7 +17301,9 @@
                 <a:solidFill>
                   <a:srgbClr val="1A1D24"/>
                 </a:solidFill>
-                <a:latin typeface="Microsoft YaHei"/>
+                <a:latin typeface="SimHei"/>
+                <a:ea typeface="SimHei"/>
+                <a:cs typeface="SimHei"/>
               </a:rPr>
               <a:t>GDN 层整体 prefill</a:t>
             </a:r>
@@ -17255,7 +17342,9 @@
                 <a:solidFill>
                   <a:srgbClr val="1A1D24"/>
                 </a:solidFill>
-                <a:latin typeface="Consolas"/>
+                <a:latin typeface="SimHei"/>
+                <a:ea typeface="SimHei"/>
+                <a:cs typeface="SimHei"/>
               </a:rPr>
               <a:t>16.7 ms</a:t>
             </a:r>
@@ -17338,7 +17427,9 @@
                 <a:solidFill>
                   <a:srgbClr val="1A1D24"/>
                 </a:solidFill>
-                <a:latin typeface="Microsoft YaHei"/>
+                <a:latin typeface="SimHei"/>
+                <a:ea typeface="SimHei"/>
+                <a:cs typeface="SimHei"/>
               </a:rPr>
               <a:t>  其中 norm + out_proj + MLP</a:t>
             </a:r>
@@ -17377,7 +17468,9 @@
                 <a:solidFill>
                   <a:srgbClr val="1A1D24"/>
                 </a:solidFill>
-                <a:latin typeface="Consolas"/>
+                <a:latin typeface="SimHei"/>
+                <a:ea typeface="SimHei"/>
+                <a:cs typeface="SimHei"/>
               </a:rPr>
               <a:t>11.4 ms</a:t>
             </a:r>
@@ -17416,7 +17509,9 @@
                 <a:solidFill>
                   <a:srgbClr val="1A1D24"/>
                 </a:solidFill>
-                <a:latin typeface="Microsoft YaHei"/>
+                <a:latin typeface="SimHei"/>
+                <a:ea typeface="SimHei"/>
+                <a:cs typeface="SimHei"/>
               </a:rPr>
               <a:t>cudaMalloc+free 178 MB</a:t>
             </a:r>
@@ -17455,7 +17550,9 @@
                 <a:solidFill>
                   <a:srgbClr val="1A1D24"/>
                 </a:solidFill>
-                <a:latin typeface="Consolas"/>
+                <a:latin typeface="SimHei"/>
+                <a:ea typeface="SimHei"/>
+                <a:cs typeface="SimHei"/>
               </a:rPr>
               <a:t>3.22 ms</a:t>
             </a:r>
@@ -17538,7 +17635,9 @@
                 <a:solidFill>
                   <a:srgbClr val="1A1D24"/>
                 </a:solidFill>
-                <a:latin typeface="Microsoft YaHei"/>
+                <a:latin typeface="SimHei"/>
+                <a:ea typeface="SimHei"/>
+                <a:cs typeface="SimHei"/>
               </a:rPr>
               <a:t>cudaMalloc+free 4 B</a:t>
             </a:r>
@@ -17577,7 +17676,9 @@
                 <a:solidFill>
                   <a:srgbClr val="1A1D24"/>
                 </a:solidFill>
-                <a:latin typeface="Consolas"/>
+                <a:latin typeface="SimHei"/>
+                <a:ea typeface="SimHei"/>
+                <a:cs typeface="SimHei"/>
               </a:rPr>
               <a:t>3.7 µs</a:t>
             </a:r>
@@ -17616,7 +17717,9 @@
                 <a:solidFill>
                   <a:srgbClr val="1A1D24"/>
                 </a:solidFill>
-                <a:latin typeface="Microsoft YaHei"/>
+                <a:latin typeface="SimHei"/>
+                <a:ea typeface="SimHei"/>
+                <a:cs typeface="SimHei"/>
               </a:rPr>
               <a:t>单个 MLP 投影（含分配）</a:t>
             </a:r>
@@ -17655,7 +17758,9 @@
                 <a:solidFill>
                   <a:srgbClr val="1A1D24"/>
                 </a:solidFill>
-                <a:latin typeface="Consolas"/>
+                <a:latin typeface="SimHei"/>
+                <a:ea typeface="SimHei"/>
+                <a:cs typeface="SimHei"/>
               </a:rPr>
               <a:t>3.92 ms</a:t>
             </a:r>
@@ -17697,7 +17802,9 @@
                 <a:solidFill>
                   <a:srgbClr val="5A6373"/>
                 </a:solidFill>
-                <a:latin typeface="Microsoft YaHei"/>
+                <a:latin typeface="SimHei"/>
+                <a:ea typeface="SimHei"/>
+                <a:cs typeface="SimHei"/>
               </a:rPr>
               <a:t>178 MB 的 dequant scratch 分配+释放要 3.22 ms，占一次完整 MLP 投影的 82%。每个 GDN 层每块有 7 次 W4 投影，各自新分配一次 —— 约 80% 的 prefill 时间是显存页表操作，不是算术。</a:t>
             </a:r>
@@ -17716,7 +17823,9 @@
                 <a:solidFill>
                   <a:srgbClr val="0E8A4F"/>
                 </a:solidFill>
-                <a:latin typeface="Microsoft YaHei"/>
+                <a:latin typeface="SimHei"/>
+                <a:ea typeface="SimHei"/>
+                <a:cs typeface="SimHei"/>
               </a:rPr>
               <a:t>改为按尺寸类复用的 scratch 池后：GDN 层 prefill 16.7 → 5.6 ms，1K TTFT 5.76 s → 2.38 s，且 frozen 输出逐位不变。</a:t>
             </a:r>
@@ -17755,7 +17864,9 @@
                 <a:solidFill>
                   <a:srgbClr val="5A6373"/>
                 </a:solidFill>
-                <a:latin typeface="Microsoft YaHei"/>
+                <a:latin typeface="SimHei"/>
+                <a:ea typeface="SimHei"/>
+                <a:cs typeface="SimHei"/>
               </a:rPr>
               <a:t>两处根因都不是“kernel 算得慢”，而是访存与内存管理的结构问题 —— 靠实测归因才暴露</a:t>
             </a:r>
@@ -17812,7 +17923,9 @@
                 <a:solidFill>
                   <a:srgbClr val="0066CC"/>
                 </a:solidFill>
-                <a:latin typeface="Microsoft YaHei"/>
+                <a:latin typeface="SimHei"/>
+                <a:ea typeface="SimHei"/>
+                <a:cs typeface="SimHei"/>
               </a:rPr>
               <a:t>METHOD</a:t>
             </a:r>
@@ -17851,9 +17964,11 @@
                 <a:solidFill>
                   <a:srgbClr val="1A1D24"/>
                 </a:solidFill>
-                <a:latin typeface="Microsoft YaHei"/>
-              </a:rPr>
-              <a:t>方法论：让结论可信的四件事</a:t>
+                <a:latin typeface="SimHei"/>
+                <a:ea typeface="SimHei"/>
+                <a:cs typeface="SimHei"/>
+              </a:rPr>
+              <a:t>实验方法与结论可信度保障</a:t>
             </a:r>
           </a:p>
         </p:txBody>
@@ -17980,7 +18095,9 @@
                 <a:solidFill>
                   <a:srgbClr val="0066CC"/>
                 </a:solidFill>
-                <a:latin typeface="Microsoft YaHei"/>
+                <a:latin typeface="SimHei"/>
+                <a:ea typeface="SimHei"/>
+                <a:cs typeface="SimHei"/>
               </a:rPr>
               <a:t>1. 四卡并行实验</a:t>
             </a:r>
@@ -18022,7 +18139,9 @@
                 <a:solidFill>
                   <a:srgbClr val="5A6373"/>
                 </a:solidFill>
-                <a:latin typeface="Microsoft YaHei"/>
+                <a:latin typeface="SimHei"/>
+                <a:ea typeface="SimHei"/>
+                <a:cs typeface="SimHei"/>
               </a:rPr>
               <a:t>GPU1 只跑正式服务 A/B（带全局 flock），GPU0 做 profile 归因，GPU2/3 跑测试分片。一次验证周期从串行 35 s 降到 12 s；三种 chunk 配置的扫描一次 11 s 完成。</a:t>
             </a:r>
@@ -18107,7 +18226,9 @@
                 <a:solidFill>
                   <a:srgbClr val="0066CC"/>
                 </a:solidFill>
-                <a:latin typeface="Microsoft YaHei"/>
+                <a:latin typeface="SimHei"/>
+                <a:ea typeface="SimHei"/>
+                <a:cs typeface="SimHei"/>
               </a:rPr>
               <a:t>2. 微基准矩阵做成本归因</a:t>
             </a:r>
@@ -18149,9 +18270,11 @@
                 <a:solidFill>
                   <a:srgbClr val="5A6373"/>
                 </a:solidFill>
-                <a:latin typeface="Microsoft YaHei"/>
-              </a:rPr>
-              <a:t>为 W4 GEMV 构造三个诊断变体（只读权重 / 去 dequant / 完整），一次并行跑出「访存 41% + 乘加 21% + dequant 算术 39%」的分解，并证明访存已达峰值 81%，从此不再猜瓶颈。</a:t>
+                <a:latin typeface="SimHei"/>
+                <a:ea typeface="SimHei"/>
+                <a:cs typeface="SimHei"/>
+              </a:rPr>
+              <a:t>为 W4 GEMV 构造三个诊断变体（只读权重 / 去 dequant / 完整），一次并行得到「访存 41% + 乘加 21% + dequant 算术 39%」的分解，并证明访存已达峰值 81%——瓶颈定位由测量给出，不依赖推测。</a:t>
             </a:r>
           </a:p>
         </p:txBody>
@@ -18234,7 +18357,9 @@
                 <a:solidFill>
                   <a:srgbClr val="0066CC"/>
                 </a:solidFill>
-                <a:latin typeface="Microsoft YaHei"/>
+                <a:latin typeface="SimHei"/>
+                <a:ea typeface="SimHei"/>
+                <a:cs typeface="SimHei"/>
               </a:rPr>
               <a:t>3. 先证明位相等，再写 kernel</a:t>
             </a:r>
@@ -18276,7 +18401,9 @@
                 <a:solidFill>
                   <a:srgbClr val="5A6373"/>
                 </a:solidFill>
-                <a:latin typeface="Microsoft YaHei"/>
+                <a:latin typeface="SimHei"/>
+                <a:ea typeface="SimHei"/>
+                <a:cs typeface="SimHei"/>
               </a:rPr>
               <a:t>Marlin 位技巧动工前先穷举验证：0x4300|q 恰为 128+q、BF16 减法精确、乘积 ≤13 位有效可被 FP32 精确保存 ⇒ 与生产路径必然位相等。正确性由数学保证而非事后调容差。</a:t>
             </a:r>
@@ -18361,7 +18488,9 @@
                 <a:solidFill>
                   <a:srgbClr val="0066CC"/>
                 </a:solidFill>
-                <a:latin typeface="Microsoft YaHei"/>
+                <a:latin typeface="SimHei"/>
+                <a:ea typeface="SimHei"/>
+                <a:cs typeface="SimHei"/>
               </a:rPr>
               <a:t>4. 对低于 5% 的结论强制双卡双副本复测</a:t>
             </a:r>
@@ -18403,9 +18532,11 @@
                 <a:solidFill>
                   <a:srgbClr val="5A6373"/>
                 </a:solidFill>
-                <a:latin typeface="Microsoft YaHei"/>
-              </a:rPr>
-              <a:t>一次三卡测量曾显示 4% 收益，双副本复测得 baseline 923/901 µs、候选 934/913 µs —— 卡间差异 2.4% 大于候选效应，实际慢 1.3%。该协议拦住了一个假阳性。</a:t>
+                <a:latin typeface="SimHei"/>
+                <a:ea typeface="SimHei"/>
+                <a:cs typeface="SimHei"/>
+              </a:rPr>
+              <a:t>一次三卡测量曾显示 4% 收益，双副本复测得 baseline 923/901 µs、候选 934/913 µs —— 卡间差异 2.4% 大于候选效应，实际慢 1.3%。该协议排除了一次假阳性。</a:t>
             </a:r>
           </a:p>
         </p:txBody>
@@ -18442,9 +18573,11 @@
                 <a:solidFill>
                   <a:srgbClr val="5A6373"/>
                 </a:solidFill>
-                <a:latin typeface="Microsoft YaHei"/>
-              </a:rPr>
-              <a:t>开发期共有三次“我的推理被数据推翻”的记录，全部写入 REPORT.md，作为决策依据而非隐藏项</a:t>
+                <a:latin typeface="SimHei"/>
+                <a:ea typeface="SimHei"/>
+                <a:cs typeface="SimHei"/>
+              </a:rPr>
+              <a:t>开发期共有三次假设被实测推翻，均记录于 REPORT.md，作为后续决策依据</a:t>
             </a:r>
           </a:p>
         </p:txBody>
@@ -18499,7 +18632,9 @@
                 <a:solidFill>
                   <a:srgbClr val="0066CC"/>
                 </a:solidFill>
-                <a:latin typeface="Microsoft YaHei"/>
+                <a:latin typeface="SimHei"/>
+                <a:ea typeface="SimHei"/>
+                <a:cs typeface="SimHei"/>
               </a:rPr>
               <a:t>TRADE-OFFS</a:t>
             </a:r>
@@ -18538,7 +18673,9 @@
                 <a:solidFill>
                   <a:srgbClr val="1A1D24"/>
                 </a:solidFill>
-                <a:latin typeface="Microsoft YaHei"/>
+                <a:latin typeface="SimHei"/>
+                <a:ea typeface="SimHei"/>
+                <a:cs typeface="SimHei"/>
               </a:rPr>
               <a:t>取舍：correctness / 性能 / 稳定性 / 显存</a:t>
             </a:r>
@@ -18665,7 +18802,9 @@
                 <a:solidFill>
                   <a:srgbClr val="0E8A4F"/>
                 </a:solidFill>
-                <a:latin typeface="Microsoft YaHei"/>
+                <a:latin typeface="SimHei"/>
+                <a:ea typeface="SimHei"/>
+                <a:cs typeface="SimHei"/>
               </a:rPr>
               <a:t>轨迹软目标 ⇄ TTFT</a:t>
             </a:r>
@@ -18707,7 +18846,9 @@
                 <a:solidFill>
                   <a:srgbClr val="5A6373"/>
                 </a:solidFill>
-                <a:latin typeface="Microsoft YaHei"/>
+                <a:latin typeface="SimHei"/>
+                <a:ea typeface="SimHei"/>
+                <a:cs typeface="SimHei"/>
               </a:rPr>
               <a:t>W4 GEMM 与 packed GEMV 改变累加顺序，冻结轨迹前缀在 28 / 23 / 76 token 间变动。机制唯一：oracle 自身在第 23、28、76 步的 top1/top2 margin 恰为 0，任何容差都无法修。轨迹阈值为 0 且公开功能始终 6/6，故以 5 分软目标换 35 分主轴。</a:t>
             </a:r>
@@ -18790,7 +18931,9 @@
                 <a:solidFill>
                   <a:srgbClr val="0066CC"/>
                 </a:solidFill>
-                <a:latin typeface="Microsoft YaHei"/>
+                <a:latin typeface="SimHei"/>
+                <a:ea typeface="SimHei"/>
+                <a:cs typeface="SimHei"/>
               </a:rPr>
               <a:t>NaN 防护 ⇄ 速度</a:t>
             </a:r>
@@ -18832,7 +18975,9 @@
                 <a:solidFill>
                   <a:srgbClr val="5A6373"/>
                 </a:solidFill>
-                <a:latin typeface="Microsoft YaHei"/>
+                <a:latin typeface="SimHei"/>
+                <a:ea typeface="SimHei"/>
+                <a:cs typeface="SimHei"/>
               </a:rPr>
               <a:t>曾把逐 op 有限性检查批量化为每 token 一次（去掉约 200 次同步）。实测零收益，于是保留更严格的逐 op 检查 —— 更安全的选项恰好也是免费的。</a:t>
             </a:r>
@@ -18915,7 +19060,9 @@
                 <a:solidFill>
                   <a:srgbClr val="C0392B"/>
                 </a:solidFill>
-                <a:latin typeface="Microsoft YaHei"/>
+                <a:latin typeface="SimHei"/>
+                <a:ea typeface="SimHei"/>
+                <a:cs typeface="SimHei"/>
               </a:rPr>
               <a:t>显存 ⇄ prefill 吞吐</a:t>
             </a:r>
@@ -18957,7 +19104,9 @@
                 <a:solidFill>
                   <a:srgbClr val="5A6373"/>
                 </a:solidFill>
-                <a:latin typeface="Microsoft YaHei"/>
+                <a:latin typeface="SimHei"/>
+                <a:ea typeface="SimHei"/>
+                <a:cs typeface="SimHei"/>
               </a:rPr>
               <a:t>prefill 块 64 → 512 使 attention score workspace 从 192 MB 涨到 1536 MB，scratch 池另占约 460 MB。两者都经 request_state_bytes 计入 admission，配置过大时启动即 fail closed 而非请求中途 OOM。峰值 19958 / 24564 MiB。</a:t>
             </a:r>
@@ -19040,7 +19189,9 @@
                 <a:solidFill>
                   <a:srgbClr val="0066CC"/>
                 </a:solidFill>
-                <a:latin typeface="Microsoft YaHei"/>
+                <a:latin typeface="SimHei"/>
+                <a:ea typeface="SimHei"/>
+                <a:cs typeface="SimHei"/>
               </a:rPr>
               <a:t>稳定性：不做交换</a:t>
             </a:r>
@@ -19082,7 +19233,9 @@
                 <a:solidFill>
                   <a:srgbClr val="5A6373"/>
                 </a:solidFill>
-                <a:latin typeface="Microsoft YaHei"/>
+                <a:latin typeface="SimHei"/>
+                <a:ea typeface="SimHei"/>
+                <a:cs typeface="SimHei"/>
               </a:rPr>
               <a:t>每项改动接受前都需通过协议 12/12、公开功能 6/6 与干净 soak；两个在隔离测试中更快的候选因端到端无收益而被拒。没有任何改动只凭 kernel 数字被接受。</a:t>
             </a:r>
@@ -19121,7 +19274,9 @@
                 <a:solidFill>
                   <a:srgbClr val="5A6373"/>
                 </a:solidFill>
-                <a:latin typeface="Microsoft YaHei"/>
+                <a:latin typeface="SimHei"/>
+                <a:ea typeface="SimHei"/>
+                <a:cs typeface="SimHei"/>
               </a:rPr>
               <a:t>显存账本也决定了 bonus 边界：长上下文 65536 需 4923 MiB 而仅余 4606 MiB，131072 则无论如何不可能</a:t>
             </a:r>

--- a/pdf/项目6_程仁龙_4090能飞_v1.pptx
+++ b/pdf/项目6_程仁龙_4090能飞_v1.pptx
@@ -3174,7 +3174,7 @@
               </a:spcAft>
             </a:pPr>
             <a:r>
-              <a:rPr sz="1500" b="1">
+              <a:rPr sz="1700" b="1">
                 <a:solidFill>
                   <a:srgbClr val="8FC2F0"/>
                 </a:solidFill>
@@ -3297,7 +3297,7 @@
               </a:spcAft>
             </a:pPr>
             <a:r>
-              <a:rPr sz="1350" b="0">
+              <a:rPr sz="1550" b="0">
                 <a:solidFill>
                   <a:srgbClr val="9FBEDE"/>
                 </a:solidFill>
@@ -3338,7 +3338,7 @@
               </a:spcAft>
             </a:pPr>
             <a:r>
-              <a:rPr sz="1100" b="1">
+              <a:rPr sz="1300" b="1">
                 <a:solidFill>
                   <a:srgbClr val="0066CC"/>
                 </a:solidFill>
@@ -3356,7 +3356,7 @@
               </a:spcAft>
             </a:pPr>
             <a:r>
-              <a:rPr sz="1150" b="0">
+              <a:rPr sz="1350" b="0">
                 <a:solidFill>
                   <a:srgbClr val="5A6373"/>
                 </a:solidFill>
@@ -3397,7 +3397,7 @@
               </a:spcAft>
             </a:pPr>
             <a:r>
-              <a:rPr sz="1100" b="1">
+              <a:rPr sz="1300" b="1">
                 <a:solidFill>
                   <a:srgbClr val="0066CC"/>
                 </a:solidFill>
@@ -3415,7 +3415,7 @@
               </a:spcAft>
             </a:pPr>
             <a:r>
-              <a:rPr sz="1150" b="0">
+              <a:rPr sz="1350" b="0">
                 <a:solidFill>
                   <a:srgbClr val="5A6373"/>
                 </a:solidFill>
@@ -3456,7 +3456,7 @@
               </a:spcAft>
             </a:pPr>
             <a:r>
-              <a:rPr sz="1100" b="1">
+              <a:rPr sz="1300" b="1">
                 <a:solidFill>
                   <a:srgbClr val="0066CC"/>
                 </a:solidFill>
@@ -3474,7 +3474,7 @@
               </a:spcAft>
             </a:pPr>
             <a:r>
-              <a:rPr sz="1150" b="0">
+              <a:rPr sz="1350" b="0">
                 <a:solidFill>
                   <a:srgbClr val="5A6373"/>
                 </a:solidFill>
@@ -3515,7 +3515,7 @@
               </a:spcAft>
             </a:pPr>
             <a:r>
-              <a:rPr sz="1100" b="1">
+              <a:rPr sz="1300" b="1">
                 <a:solidFill>
                   <a:srgbClr val="0066CC"/>
                 </a:solidFill>
@@ -3533,7 +3533,7 @@
               </a:spcAft>
             </a:pPr>
             <a:r>
-              <a:rPr sz="1150" b="0">
+              <a:rPr sz="1350" b="0">
                 <a:solidFill>
                   <a:srgbClr val="5A6373"/>
                 </a:solidFill>
@@ -3574,7 +3574,7 @@
               </a:spcAft>
             </a:pPr>
             <a:r>
-              <a:rPr sz="1100" b="1">
+              <a:rPr sz="1300" b="1">
                 <a:solidFill>
                   <a:srgbClr val="0066CC"/>
                 </a:solidFill>
@@ -3592,7 +3592,7 @@
               </a:spcAft>
             </a:pPr>
             <a:r>
-              <a:rPr sz="1150" b="0">
+              <a:rPr sz="1350" b="0">
                 <a:solidFill>
                   <a:srgbClr val="5A6373"/>
                 </a:solidFill>
@@ -3633,7 +3633,7 @@
               </a:spcAft>
             </a:pPr>
             <a:r>
-              <a:rPr sz="1100" b="1">
+              <a:rPr sz="1300" b="1">
                 <a:solidFill>
                   <a:srgbClr val="0066CC"/>
                 </a:solidFill>
@@ -3651,7 +3651,7 @@
               </a:spcAft>
             </a:pPr>
             <a:r>
-              <a:rPr sz="1150" b="0">
+              <a:rPr sz="1350" b="0">
                 <a:solidFill>
                   <a:srgbClr val="5A6373"/>
                 </a:solidFill>
@@ -3736,7 +3736,7 @@
               </a:spcAft>
             </a:pPr>
             <a:r>
-              <a:rPr sz="1300" b="1">
+              <a:rPr sz="1500" b="1">
                 <a:solidFill>
                   <a:srgbClr val="1A1D24"/>
                 </a:solidFill>
@@ -3754,7 +3754,7 @@
               </a:spcAft>
             </a:pPr>
             <a:r>
-              <a:rPr sz="1250" b="0">
+              <a:rPr sz="1450" b="0">
                 <a:solidFill>
                   <a:srgbClr val="5A6373"/>
                 </a:solidFill>
@@ -3772,7 +3772,7 @@
               </a:spcAft>
             </a:pPr>
             <a:r>
-              <a:rPr sz="1250" b="0">
+              <a:rPr sz="1450" b="0">
                 <a:solidFill>
                   <a:srgbClr val="5A6373"/>
                 </a:solidFill>
@@ -3790,7 +3790,7 @@
               </a:spcAft>
             </a:pPr>
             <a:r>
-              <a:rPr sz="1250" b="0">
+              <a:rPr sz="1450" b="0">
                 <a:solidFill>
                   <a:srgbClr val="5A6373"/>
                 </a:solidFill>
@@ -3808,7 +3808,7 @@
               </a:spcAft>
             </a:pPr>
             <a:r>
-              <a:rPr sz="1250" b="0">
+              <a:rPr sz="1450" b="0">
                 <a:solidFill>
                   <a:srgbClr val="C0392B"/>
                 </a:solidFill>
@@ -3849,7 +3849,7 @@
               </a:spcAft>
             </a:pPr>
             <a:r>
-              <a:rPr sz="950" b="0">
+              <a:rPr sz="1150" b="0">
                 <a:solidFill>
                   <a:srgbClr val="5A6373"/>
                 </a:solidFill>
@@ -3908,7 +3908,7 @@
               </a:spcAft>
             </a:pPr>
             <a:r>
-              <a:rPr sz="1200" b="1">
+              <a:rPr sz="1400" b="1">
                 <a:solidFill>
                   <a:srgbClr val="0066CC"/>
                 </a:solidFill>
@@ -4034,7 +4034,7 @@
               </a:spcAft>
             </a:pPr>
             <a:r>
-              <a:rPr sz="1350" b="0">
+              <a:rPr sz="1550" b="0">
                 <a:solidFill>
                   <a:srgbClr val="1A1D24"/>
                 </a:solidFill>
@@ -4075,7 +4075,7 @@
               </a:spcAft>
             </a:pPr>
             <a:r>
-              <a:rPr sz="1300" b="1">
+              <a:rPr sz="1500" b="1">
                 <a:solidFill>
                   <a:srgbClr val="C0392B"/>
                 </a:solidFill>
@@ -4119,7 +4119,7 @@
               </a:spcAft>
             </a:pPr>
             <a:r>
-              <a:rPr sz="1200" b="1">
+              <a:rPr sz="1400" b="1">
                 <a:solidFill>
                   <a:srgbClr val="1A1D24"/>
                 </a:solidFill>
@@ -4130,7 +4130,7 @@
               <a:t>— 无正式 scorer 产物 </a:t>
             </a:r>
             <a:r>
-              <a:rPr sz="1200">
+              <a:rPr sz="1400">
                 <a:solidFill>
                   <a:srgbClr val="5A6373"/>
                 </a:solidFill>
@@ -4151,7 +4151,7 @@
               </a:spcAft>
             </a:pPr>
             <a:r>
-              <a:rPr sz="1200" b="1">
+              <a:rPr sz="1400" b="1">
                 <a:solidFill>
                   <a:srgbClr val="1A1D24"/>
                 </a:solidFill>
@@ -4162,7 +4162,7 @@
               <a:t>— 因此不声称 </a:t>
             </a:r>
             <a:r>
-              <a:rPr sz="1200">
+              <a:rPr sz="1400">
                 <a:solidFill>
                   <a:srgbClr val="5A6373"/>
                 </a:solidFill>
@@ -4183,7 +4183,7 @@
               </a:spcAft>
             </a:pPr>
             <a:r>
-              <a:rPr sz="1200" b="1">
+              <a:rPr sz="1400" b="1">
                 <a:solidFill>
                   <a:srgbClr val="1A1D24"/>
                 </a:solidFill>
@@ -4194,7 +4194,7 @@
               <a:t>— no_xid 为间接证据 </a:t>
             </a:r>
             <a:r>
-              <a:rPr sz="1200">
+              <a:rPr sz="1400">
                 <a:solidFill>
                   <a:srgbClr val="5A6373"/>
                 </a:solidFill>
@@ -4215,7 +4215,7 @@
               </a:spcAft>
             </a:pPr>
             <a:r>
-              <a:rPr sz="1200" b="1">
+              <a:rPr sz="1400" b="1">
                 <a:solidFill>
                   <a:srgbClr val="1A1D24"/>
                 </a:solidFill>
@@ -4226,7 +4226,7 @@
               <a:t>— hidden 用自建代理集 </a:t>
             </a:r>
             <a:r>
-              <a:rPr sz="1200">
+              <a:rPr sz="1400">
                 <a:solidFill>
                   <a:srgbClr val="5A6373"/>
                 </a:solidFill>
@@ -4247,7 +4247,7 @@
               </a:spcAft>
             </a:pPr>
             <a:r>
-              <a:rPr sz="1200" b="1">
+              <a:rPr sz="1400" b="1">
                 <a:solidFill>
                   <a:srgbClr val="1A1D24"/>
                 </a:solidFill>
@@ -4258,7 +4258,7 @@
               <a:t>— 图片套件不在本机 </a:t>
             </a:r>
             <a:r>
-              <a:rPr sz="1200">
+              <a:rPr sz="1400">
                 <a:solidFill>
                   <a:srgbClr val="5A6373"/>
                 </a:solidFill>
@@ -4299,7 +4299,7 @@
               </a:spcAft>
             </a:pPr>
             <a:r>
-              <a:rPr sz="1300" b="1">
+              <a:rPr sz="1500" b="1">
                 <a:solidFill>
                   <a:srgbClr val="C0392B"/>
                 </a:solidFill>
@@ -4343,7 +4343,7 @@
               </a:spcAft>
             </a:pPr>
             <a:r>
-              <a:rPr sz="1200" b="1">
+              <a:rPr sz="1400" b="1">
                 <a:solidFill>
                   <a:srgbClr val="1A1D24"/>
                 </a:solidFill>
@@ -4354,7 +4354,7 @@
               <a:t>— 与合同标尺的距离 </a:t>
             </a:r>
             <a:r>
-              <a:rPr sz="1200">
+              <a:rPr sz="1400">
                 <a:solidFill>
                   <a:srgbClr val="5A6373"/>
                 </a:solidFill>
@@ -4375,7 +4375,7 @@
               </a:spcAft>
             </a:pPr>
             <a:r>
-              <a:rPr sz="1200" b="1">
+              <a:rPr sz="1400" b="1">
                 <a:solidFill>
                   <a:srgbClr val="1A1D24"/>
                 </a:solidFill>
@@ -4386,7 +4386,7 @@
               <a:t>— decode 达局部最优 </a:t>
             </a:r>
             <a:r>
-              <a:rPr sz="1200">
+              <a:rPr sz="1400">
                 <a:solidFill>
                   <a:srgbClr val="5A6373"/>
                 </a:solidFill>
@@ -4407,7 +4407,7 @@
               </a:spcAft>
             </a:pPr>
             <a:r>
-              <a:rPr sz="1200" b="1">
+              <a:rPr sz="1400" b="1">
                 <a:solidFill>
                   <a:srgbClr val="1A1D24"/>
                 </a:solidFill>
@@ -4418,7 +4418,7 @@
               <a:t>— 长上下文受显存限制 </a:t>
             </a:r>
             <a:r>
-              <a:rPr sz="1200">
+              <a:rPr sz="1400">
                 <a:solidFill>
                   <a:srgbClr val="5A6373"/>
                 </a:solidFill>
@@ -4439,7 +4439,7 @@
               </a:spcAft>
             </a:pPr>
             <a:r>
-              <a:rPr sz="1200" b="1">
+              <a:rPr sz="1400" b="1">
                 <a:solidFill>
                   <a:srgbClr val="1A1D24"/>
                 </a:solidFill>
@@ -4450,7 +4450,7 @@
               <a:t>— C8 与 MTP 未交付 </a:t>
             </a:r>
             <a:r>
-              <a:rPr sz="1200">
+              <a:rPr sz="1400">
                 <a:solidFill>
                   <a:srgbClr val="5A6373"/>
                 </a:solidFill>
@@ -4491,7 +4491,7 @@
               </a:spcAft>
             </a:pPr>
             <a:r>
-              <a:rPr sz="950" b="0">
+              <a:rPr sz="1150" b="0">
                 <a:solidFill>
                   <a:srgbClr val="5A6373"/>
                 </a:solidFill>
@@ -4550,7 +4550,7 @@
               </a:spcAft>
             </a:pPr>
             <a:r>
-              <a:rPr sz="1200" b="1">
+              <a:rPr sz="1400" b="1">
                 <a:solidFill>
                   <a:srgbClr val="0066CC"/>
                 </a:solidFill>
@@ -4676,7 +4676,7 @@
               </a:spcAft>
             </a:pPr>
             <a:r>
-              <a:rPr sz="1350" b="0">
+              <a:rPr sz="1550" b="0">
                 <a:solidFill>
                   <a:srgbClr val="1A1D24"/>
                 </a:solidFill>
@@ -4717,7 +4717,7 @@
               </a:spcAft>
             </a:pPr>
             <a:r>
-              <a:rPr sz="1300" b="1">
+              <a:rPr sz="1500" b="1">
                 <a:solidFill>
                   <a:srgbClr val="0E8A4F"/>
                 </a:solidFill>
@@ -4761,7 +4761,7 @@
               </a:spcAft>
             </a:pPr>
             <a:r>
-              <a:rPr sz="1200" b="1">
+              <a:rPr sz="1400" b="1">
                 <a:solidFill>
                   <a:srgbClr val="1A1D24"/>
                 </a:solidFill>
@@ -4772,7 +4772,7 @@
               <a:t>— 预处理位相等 </a:t>
             </a:r>
             <a:r>
-              <a:rPr sz="1200">
+              <a:rPr sz="1400">
                 <a:solidFill>
                   <a:srgbClr val="5A6373"/>
                 </a:solidFill>
@@ -4793,7 +4793,7 @@
               </a:spcAft>
             </a:pPr>
             <a:r>
-              <a:rPr sz="1200" b="1">
+              <a:rPr sz="1400" b="1">
                 <a:solidFill>
                   <a:srgbClr val="1A1D24"/>
                 </a:solidFill>
@@ -4804,7 +4804,7 @@
               <a:t>— prompt token 级精确 </a:t>
             </a:r>
             <a:r>
-              <a:rPr sz="1200">
+              <a:rPr sz="1400">
                 <a:solidFill>
                   <a:srgbClr val="5A6373"/>
                 </a:solidFill>
@@ -4825,7 +4825,7 @@
               </a:spcAft>
             </a:pPr>
             <a:r>
-              <a:rPr sz="1200" b="1">
+              <a:rPr sz="1400" b="1">
                 <a:solidFill>
                   <a:srgbClr val="1A1D24"/>
                 </a:solidFill>
@@ -4836,7 +4836,7 @@
               <a:t>— vision 塔对齐 oracle </a:t>
             </a:r>
             <a:r>
-              <a:rPr sz="1200">
+              <a:rPr sz="1400">
                 <a:solidFill>
                   <a:srgbClr val="5A6373"/>
                 </a:solidFill>
@@ -4857,7 +4857,7 @@
               </a:spcAft>
             </a:pPr>
             <a:r>
-              <a:rPr sz="1200" b="1">
+              <a:rPr sz="1400" b="1">
                 <a:solidFill>
                   <a:srgbClr val="1A1D24"/>
                 </a:solidFill>
@@ -4868,7 +4868,7 @@
               <a:t>— 新 kernel 位相等回归 </a:t>
             </a:r>
             <a:r>
-              <a:rPr sz="1200">
+              <a:rPr sz="1400">
                 <a:solidFill>
                   <a:srgbClr val="5A6373"/>
                 </a:solidFill>
@@ -4909,7 +4909,7 @@
               </a:spcAft>
             </a:pPr>
             <a:r>
-              <a:rPr sz="1300" b="1">
+              <a:rPr sz="1500" b="1">
                 <a:solidFill>
                   <a:srgbClr val="0066CC"/>
                 </a:solidFill>
@@ -4953,7 +4953,7 @@
               </a:spcAft>
             </a:pPr>
             <a:r>
-              <a:rPr sz="1200" b="1">
+              <a:rPr sz="1400" b="1">
                 <a:solidFill>
                   <a:srgbClr val="1A1D24"/>
                 </a:solidFill>
@@ -4964,7 +4964,7 @@
               <a:t>— 自建图片探针 4/4 精确 </a:t>
             </a:r>
             <a:r>
-              <a:rPr sz="1200">
+              <a:rPr sz="1400">
                 <a:solidFill>
                   <a:srgbClr val="5A6373"/>
                 </a:solidFill>
@@ -4985,7 +4985,7 @@
               </a:spcAft>
             </a:pPr>
             <a:r>
-              <a:rPr sz="1200" b="1">
+              <a:rPr sz="1400" b="1">
                 <a:solidFill>
                   <a:srgbClr val="1A1D24"/>
                 </a:solidFill>
@@ -4996,7 +4996,7 @@
               <a:t>— 文本门禁复验通过 </a:t>
             </a:r>
             <a:r>
-              <a:rPr sz="1200">
+              <a:rPr sz="1400">
                 <a:solidFill>
                   <a:srgbClr val="5A6373"/>
                 </a:solidFill>
@@ -5017,7 +5017,7 @@
               </a:spcAft>
             </a:pPr>
             <a:r>
-              <a:rPr sz="1200" b="1">
+              <a:rPr sz="1400" b="1">
                 <a:solidFill>
                   <a:srgbClr val="1A1D24"/>
                 </a:solidFill>
@@ -5028,7 +5028,7 @@
               <a:t>— 文本数值零变化 </a:t>
             </a:r>
             <a:r>
-              <a:rPr sz="1200">
+              <a:rPr sz="1400">
                 <a:solidFill>
                   <a:srgbClr val="5A6373"/>
                 </a:solidFill>
@@ -5049,7 +5049,7 @@
               </a:spcAft>
             </a:pPr>
             <a:r>
-              <a:rPr sz="1200" b="1">
+              <a:rPr sz="1400" b="1">
                 <a:solidFill>
                   <a:srgbClr val="1A1D24"/>
                 </a:solidFill>
@@ -5060,7 +5060,7 @@
               <a:t>— 显存过账 </a:t>
             </a:r>
             <a:r>
-              <a:rPr sz="1200">
+              <a:rPr sz="1400">
                 <a:solidFill>
                   <a:srgbClr val="5A6373"/>
                 </a:solidFill>
@@ -5145,7 +5145,7 @@
               </a:spcAft>
             </a:pPr>
             <a:r>
-              <a:rPr sz="1250" b="1">
+              <a:rPr sz="1450" b="1">
                 <a:solidFill>
                   <a:srgbClr val="C0392B"/>
                 </a:solidFill>
@@ -5166,7 +5166,7 @@
               </a:spcAft>
             </a:pPr>
             <a:r>
-              <a:rPr sz="1150" b="0">
+              <a:rPr sz="1350" b="0">
                 <a:solidFill>
                   <a:srgbClr val="5A6373"/>
                 </a:solidFill>
@@ -5207,7 +5207,7 @@
               </a:spcAft>
             </a:pPr>
             <a:r>
-              <a:rPr sz="950" b="0">
+              <a:rPr sz="1150" b="0">
                 <a:solidFill>
                   <a:srgbClr val="5A6373"/>
                 </a:solidFill>
@@ -5266,7 +5266,7 @@
               </a:spcAft>
             </a:pPr>
             <a:r>
-              <a:rPr sz="1200" b="1">
+              <a:rPr sz="1400" b="1">
                 <a:solidFill>
                   <a:srgbClr val="0066CC"/>
                 </a:solidFill>
@@ -5392,7 +5392,7 @@
               </a:spcAft>
             </a:pPr>
             <a:r>
-              <a:rPr sz="1350" b="0">
+              <a:rPr sz="1550" b="0">
                 <a:solidFill>
                   <a:srgbClr val="1A1D24"/>
                 </a:solidFill>
@@ -5433,7 +5433,7 @@
               </a:spcAft>
             </a:pPr>
             <a:r>
-              <a:rPr sz="1300" b="1">
+              <a:rPr sz="1500" b="1">
                 <a:solidFill>
                   <a:srgbClr val="0E8A4F"/>
                 </a:solidFill>
@@ -5477,7 +5477,7 @@
               </a:spcAft>
             </a:pPr>
             <a:r>
-              <a:rPr sz="1200" b="1">
+              <a:rPr sz="1400" b="1">
                 <a:solidFill>
                   <a:srgbClr val="1A1D24"/>
                 </a:solidFill>
@@ -5488,7 +5488,7 @@
               <a:t>— 批式调度 </a:t>
             </a:r>
             <a:r>
-              <a:rPr sz="1200">
+              <a:rPr sz="1400">
                 <a:solidFill>
                   <a:srgbClr val="5A6373"/>
                 </a:solidFill>
@@ -5509,7 +5509,7 @@
               </a:spcAft>
             </a:pPr>
             <a:r>
-              <a:rPr sz="1200" b="1">
+              <a:rPr sz="1400" b="1">
                 <a:solidFill>
                   <a:srgbClr val="1A1D24"/>
                 </a:solidFill>
@@ -5520,7 +5520,7 @@
               <a:t>— 批式 kernel 位相等 </a:t>
             </a:r>
             <a:r>
-              <a:rPr sz="1200">
+              <a:rPr sz="1400">
                 <a:solidFill>
                   <a:srgbClr val="5A6373"/>
                 </a:solidFill>
@@ -5541,7 +5541,7 @@
               </a:spcAft>
             </a:pPr>
             <a:r>
-              <a:rPr sz="1200" b="1">
+              <a:rPr sz="1400" b="1">
                 <a:solidFill>
                   <a:srgbClr val="1A1D24"/>
                 </a:solidFill>
@@ -5552,7 +5552,7 @@
               <a:t>— prefix cache + 会话回收池 </a:t>
             </a:r>
             <a:r>
-              <a:rPr sz="1200">
+              <a:rPr sz="1400">
                 <a:solidFill>
                   <a:srgbClr val="5A6373"/>
                 </a:solidFill>
@@ -5573,7 +5573,7 @@
               </a:spcAft>
             </a:pPr>
             <a:r>
-              <a:rPr sz="1200" b="1">
+              <a:rPr sz="1400" b="1">
                 <a:solidFill>
                   <a:srgbClr val="1A1D24"/>
                 </a:solidFill>
@@ -5584,7 +5584,7 @@
               <a:t>— 单请求零回归 </a:t>
             </a:r>
             <a:r>
-              <a:rPr sz="1200">
+              <a:rPr sz="1400">
                 <a:solidFill>
                   <a:srgbClr val="5A6373"/>
                 </a:solidFill>
@@ -5625,7 +5625,7 @@
               </a:spcAft>
             </a:pPr>
             <a:r>
-              <a:rPr sz="1300" b="1">
+              <a:rPr sz="1500" b="1">
                 <a:solidFill>
                   <a:srgbClr val="0066CC"/>
                 </a:solidFill>
@@ -5710,7 +5710,7 @@
               </a:spcAft>
             </a:pPr>
             <a:r>
-              <a:rPr sz="1200" b="1">
+              <a:rPr sz="1400" b="1">
                 <a:solidFill>
                   <a:srgbClr val="1A1D24"/>
                 </a:solidFill>
@@ -5751,7 +5751,7 @@
               </a:spcAft>
             </a:pPr>
             <a:r>
-              <a:rPr sz="1200" b="1">
+              <a:rPr sz="1400" b="1">
                 <a:solidFill>
                   <a:srgbClr val="1A1D24"/>
                 </a:solidFill>
@@ -5792,7 +5792,7 @@
               </a:spcAft>
             </a:pPr>
             <a:r>
-              <a:rPr sz="1200" b="1">
+              <a:rPr sz="1400" b="1">
                 <a:solidFill>
                   <a:srgbClr val="1A1D24"/>
                 </a:solidFill>
@@ -5833,7 +5833,7 @@
               </a:spcAft>
             </a:pPr>
             <a:r>
-              <a:rPr sz="1200" b="0">
+              <a:rPr sz="1400" b="0">
                 <a:solidFill>
                   <a:srgbClr val="1A1D24"/>
                 </a:solidFill>
@@ -5874,7 +5874,7 @@
               </a:spcAft>
             </a:pPr>
             <a:r>
-              <a:rPr sz="1200" b="0">
+              <a:rPr sz="1400" b="0">
                 <a:solidFill>
                   <a:srgbClr val="1A1D24"/>
                 </a:solidFill>
@@ -5915,7 +5915,7 @@
               </a:spcAft>
             </a:pPr>
             <a:r>
-              <a:rPr sz="1200" b="0">
+              <a:rPr sz="1400" b="0">
                 <a:solidFill>
                   <a:srgbClr val="1A1D24"/>
                 </a:solidFill>
@@ -6000,7 +6000,7 @@
               </a:spcAft>
             </a:pPr>
             <a:r>
-              <a:rPr sz="1200" b="0">
+              <a:rPr sz="1400" b="0">
                 <a:solidFill>
                   <a:srgbClr val="1A1D24"/>
                 </a:solidFill>
@@ -6041,7 +6041,7 @@
               </a:spcAft>
             </a:pPr>
             <a:r>
-              <a:rPr sz="1200" b="0">
+              <a:rPr sz="1400" b="0">
                 <a:solidFill>
                   <a:srgbClr val="1A1D24"/>
                 </a:solidFill>
@@ -6082,7 +6082,7 @@
               </a:spcAft>
             </a:pPr>
             <a:r>
-              <a:rPr sz="1200" b="0">
+              <a:rPr sz="1400" b="0">
                 <a:solidFill>
                   <a:srgbClr val="1A1D24"/>
                 </a:solidFill>
@@ -6123,7 +6123,7 @@
               </a:spcAft>
             </a:pPr>
             <a:r>
-              <a:rPr sz="1200" b="0">
+              <a:rPr sz="1400" b="0">
                 <a:solidFill>
                   <a:srgbClr val="1A1D24"/>
                 </a:solidFill>
@@ -6164,7 +6164,7 @@
               </a:spcAft>
             </a:pPr>
             <a:r>
-              <a:rPr sz="1200" b="0">
+              <a:rPr sz="1400" b="0">
                 <a:solidFill>
                   <a:srgbClr val="1A1D24"/>
                 </a:solidFill>
@@ -6205,7 +6205,7 @@
               </a:spcAft>
             </a:pPr>
             <a:r>
-              <a:rPr sz="1200" b="0">
+              <a:rPr sz="1400" b="0">
                 <a:solidFill>
                   <a:srgbClr val="1A1D24"/>
                 </a:solidFill>
@@ -6290,7 +6290,7 @@
               </a:spcAft>
             </a:pPr>
             <a:r>
-              <a:rPr sz="1200" b="0">
+              <a:rPr sz="1400" b="0">
                 <a:solidFill>
                   <a:srgbClr val="1A1D24"/>
                 </a:solidFill>
@@ -6331,7 +6331,7 @@
               </a:spcAft>
             </a:pPr>
             <a:r>
-              <a:rPr sz="1200" b="0">
+              <a:rPr sz="1400" b="0">
                 <a:solidFill>
                   <a:srgbClr val="1A1D24"/>
                 </a:solidFill>
@@ -6372,7 +6372,7 @@
               </a:spcAft>
             </a:pPr>
             <a:r>
-              <a:rPr sz="1200" b="0">
+              <a:rPr sz="1400" b="0">
                 <a:solidFill>
                   <a:srgbClr val="1A1D24"/>
                 </a:solidFill>
@@ -6413,7 +6413,7 @@
               </a:spcAft>
             </a:pPr>
             <a:r>
-              <a:rPr sz="1200" b="0">
+              <a:rPr sz="1400" b="0">
                 <a:solidFill>
                   <a:srgbClr val="1A1D24"/>
                 </a:solidFill>
@@ -6454,7 +6454,7 @@
               </a:spcAft>
             </a:pPr>
             <a:r>
-              <a:rPr sz="1200" b="0">
+              <a:rPr sz="1400" b="0">
                 <a:solidFill>
                   <a:srgbClr val="1A1D24"/>
                 </a:solidFill>
@@ -6495,7 +6495,7 @@
               </a:spcAft>
             </a:pPr>
             <a:r>
-              <a:rPr sz="1200" b="0">
+              <a:rPr sz="1400" b="0">
                 <a:solidFill>
                   <a:srgbClr val="1A1D24"/>
                 </a:solidFill>
@@ -6580,7 +6580,7 @@
               </a:spcAft>
             </a:pPr>
             <a:r>
-              <a:rPr sz="1200" b="0">
+              <a:rPr sz="1400" b="0">
                 <a:solidFill>
                   <a:srgbClr val="1A1D24"/>
                 </a:solidFill>
@@ -6621,7 +6621,7 @@
               </a:spcAft>
             </a:pPr>
             <a:r>
-              <a:rPr sz="1200" b="0">
+              <a:rPr sz="1400" b="0">
                 <a:solidFill>
                   <a:srgbClr val="1A1D24"/>
                 </a:solidFill>
@@ -6662,7 +6662,7 @@
               </a:spcAft>
             </a:pPr>
             <a:r>
-              <a:rPr sz="1200" b="0">
+              <a:rPr sz="1400" b="0">
                 <a:solidFill>
                   <a:srgbClr val="1A1D24"/>
                 </a:solidFill>
@@ -6747,7 +6747,7 @@
               </a:spcAft>
             </a:pPr>
             <a:r>
-              <a:rPr sz="1250" b="1">
+              <a:rPr sz="1450" b="1">
                 <a:solidFill>
                   <a:srgbClr val="C0392B"/>
                 </a:solidFill>
@@ -6768,7 +6768,7 @@
               </a:spcAft>
             </a:pPr>
             <a:r>
-              <a:rPr sz="1150" b="0">
+              <a:rPr sz="1350" b="0">
                 <a:solidFill>
                   <a:srgbClr val="5A6373"/>
                 </a:solidFill>
@@ -6809,7 +6809,7 @@
               </a:spcAft>
             </a:pPr>
             <a:r>
-              <a:rPr sz="950" b="0">
+              <a:rPr sz="1150" b="0">
                 <a:solidFill>
                   <a:srgbClr val="5A6373"/>
                 </a:solidFill>
@@ -6868,7 +6868,7 @@
               </a:spcAft>
             </a:pPr>
             <a:r>
-              <a:rPr sz="1200" b="1">
+              <a:rPr sz="1400" b="1">
                 <a:solidFill>
                   <a:srgbClr val="0066CC"/>
                 </a:solidFill>
@@ -6975,7 +6975,7 @@
         <p:spPr>
           <a:xfrm>
             <a:off x="640080" y="1554480"/>
-            <a:ext cx="10881360" cy="1847088"/>
+            <a:ext cx="10881360" cy="1920240"/>
           </a:xfrm>
           <a:prstGeom prst="roundRect">
             <a:avLst>
@@ -7019,7 +7019,7 @@
         <p:spPr>
           <a:xfrm>
             <a:off x="914400" y="1682496"/>
-            <a:ext cx="10332720" cy="1627632"/>
+            <a:ext cx="10332720" cy="1737360"/>
           </a:xfrm>
           <a:prstGeom prst="rect">
             <a:avLst/>
@@ -7038,7 +7038,7 @@
               </a:spcAft>
             </a:pPr>
             <a:r>
-              <a:rPr sz="1150" b="0">
+              <a:rPr sz="1350" b="0">
                 <a:solidFill>
                   <a:srgbClr val="7EC8FF"/>
                 </a:solidFill>
@@ -7056,7 +7056,7 @@
               </a:spcAft>
             </a:pPr>
             <a:r>
-              <a:rPr sz="1150" b="0">
+              <a:rPr sz="1350" b="0">
                 <a:solidFill>
                   <a:srgbClr val="E6EAF0"/>
                 </a:solidFill>
@@ -7074,7 +7074,7 @@
               </a:spcAft>
             </a:pPr>
             <a:r>
-              <a:rPr sz="1150" b="0">
+              <a:rPr sz="1350" b="0">
                 <a:solidFill>
                   <a:srgbClr val="E6EAF0"/>
                 </a:solidFill>
@@ -7092,7 +7092,7 @@
               </a:spcAft>
             </a:pPr>
             <a:r>
-              <a:rPr sz="1150" b="0">
+              <a:rPr sz="1350" b="0">
                 <a:solidFill>
                   <a:srgbClr val="E6EAF0"/>
                 </a:solidFill>
@@ -7110,7 +7110,7 @@
               </a:spcAft>
             </a:pPr>
             <a:r>
-              <a:rPr sz="1150" b="0">
+              <a:rPr sz="1350" b="0">
                 <a:solidFill>
                   <a:srgbClr val="E6EAF0"/>
                 </a:solidFill>
@@ -7128,7 +7128,7 @@
               </a:spcAft>
             </a:pPr>
             <a:r>
-              <a:rPr sz="1150" b="0">
+              <a:rPr sz="1350" b="0">
                 <a:solidFill>
                   <a:srgbClr val="E6EAF0"/>
                 </a:solidFill>
@@ -7146,66 +7146,48 @@
               </a:spcAft>
             </a:pPr>
             <a:r>
-              <a:rPr sz="1150" b="0">
-                <a:solidFill>
-                  <a:srgbClr val="E6EAF0"/>
-                </a:solidFill>
-                <a:latin typeface="SimHei"/>
-                <a:ea typeface="SimHei"/>
-                <a:cs typeface="SimHei"/>
-              </a:rPr>
-              <a:t>APXINF_ENABLE_MULTIMODAL=1 target/release/apxinf serve ...   # 多模态配置（可选，单开关）</a:t>
-            </a:r>
-          </a:p>
+              <a:rPr sz="1350" b="0">
+                <a:solidFill>
+                  <a:srgbClr val="7EC8FF"/>
+                </a:solidFill>
+                <a:latin typeface="SimHei"/>
+                <a:ea typeface="SimHei"/>
+                <a:cs typeface="SimHei"/>
+              </a:rPr>
+              <a:t># 可选单开关：APXINF_ENABLE_MULTIMODAL=1（多模态）；APXINF_Q35_MAX_CONCURRENCY=4 + --queue-capacity 4（C4）</a:t>
+            </a:r>
+          </a:p>
+        </p:txBody>
+      </p:sp>
+      <p:sp>
+        <p:nvSpPr>
+          <p:cNvPr id="7" name="TextBox 6"/>
+          <p:cNvSpPr txBox="1"/>
+          <p:nvPr/>
+        </p:nvSpPr>
+        <p:spPr>
+          <a:xfrm>
+            <a:off x="640080" y="3657600"/>
+            <a:ext cx="5303520" cy="274320"/>
+          </a:xfrm>
+          <a:prstGeom prst="rect">
+            <a:avLst/>
+          </a:prstGeom>
+          <a:noFill/>
+        </p:spPr>
+        <p:txBody>
+          <a:bodyPr wrap="square" anchor="t" lIns="0" rIns="0" tIns="0" bIns="0">
+            <a:spAutoFit/>
+          </a:bodyPr>
+          <a:lstStyle/>
           <a:p>
             <a:pPr algn="l">
               <a:spcAft>
-                <a:spcPts val="200"/>
-              </a:spcAft>
-            </a:pPr>
-            <a:r>
-              <a:rPr sz="1150" b="0">
-                <a:solidFill>
-                  <a:srgbClr val="E6EAF0"/>
-                </a:solidFill>
-                <a:latin typeface="SimHei"/>
-                <a:ea typeface="SimHei"/>
-                <a:cs typeface="SimHei"/>
-              </a:rPr>
-              <a:t>APXINF_Q35_MAX_CONCURRENCY=4 ... serve ... --queue-capacity 4  # C4 并发配置（可选，单开关）</a:t>
-            </a:r>
-          </a:p>
-        </p:txBody>
-      </p:sp>
-      <p:sp>
-        <p:nvSpPr>
-          <p:cNvPr id="7" name="TextBox 6"/>
-          <p:cNvSpPr txBox="1"/>
-          <p:nvPr/>
-        </p:nvSpPr>
-        <p:spPr>
-          <a:xfrm>
-            <a:off x="640080" y="3566160"/>
-            <a:ext cx="5303520" cy="274320"/>
-          </a:xfrm>
-          <a:prstGeom prst="rect">
-            <a:avLst/>
-          </a:prstGeom>
-          <a:noFill/>
-        </p:spPr>
-        <p:txBody>
-          <a:bodyPr wrap="square" anchor="t" lIns="0" rIns="0" tIns="0" bIns="0">
-            <a:spAutoFit/>
-          </a:bodyPr>
-          <a:lstStyle/>
-          <a:p>
-            <a:pPr algn="l">
-              <a:spcAft>
-                <a:spcPts val="400"/>
-              </a:spcAft>
-            </a:pPr>
-            <a:r>
-              <a:rPr sz="1300" b="1">
+                <a:spcPts val="400"/>
+              </a:spcAft>
+            </a:pPr>
+            <a:r>
+              <a:rPr sz="1500" b="1">
                 <a:solidFill>
                   <a:srgbClr val="0066CC"/>
                 </a:solidFill>
@@ -7226,8 +7208,8 @@
         </p:nvSpPr>
         <p:spPr>
           <a:xfrm>
-            <a:off x="640080" y="3913632"/>
-            <a:ext cx="5212080" cy="2377440"/>
+            <a:off x="640080" y="4005072"/>
+            <a:ext cx="5212080" cy="2286000"/>
           </a:xfrm>
           <a:prstGeom prst="rect">
             <a:avLst/>
@@ -7249,7 +7231,7 @@
               </a:spcAft>
             </a:pPr>
             <a:r>
-              <a:rPr sz="1200" b="1">
+              <a:rPr sz="1400" b="1">
                 <a:solidFill>
                   <a:srgbClr val="1A1D24"/>
                 </a:solidFill>
@@ -7260,7 +7242,7 @@
               <a:t>— 设计变化与执行阶段 </a:t>
             </a:r>
             <a:r>
-              <a:rPr sz="1200">
+              <a:rPr sz="1400">
                 <a:solidFill>
                   <a:srgbClr val="5A6373"/>
                 </a:solidFill>
@@ -7281,7 +7263,7 @@
               </a:spcAft>
             </a:pPr>
             <a:r>
-              <a:rPr sz="1200" b="1">
+              <a:rPr sz="1400" b="1">
                 <a:solidFill>
                   <a:srgbClr val="1A1D24"/>
                 </a:solidFill>
@@ -7292,7 +7274,7 @@
               <a:t>— test.py check / run </a:t>
             </a:r>
             <a:r>
-              <a:rPr sz="1200">
+              <a:rPr sz="1400">
                 <a:solidFill>
                   <a:srgbClr val="5A6373"/>
                 </a:solidFill>
@@ -7313,7 +7295,7 @@
               </a:spcAft>
             </a:pPr>
             <a:r>
-              <a:rPr sz="1200" b="1">
+              <a:rPr sz="1400" b="1">
                 <a:solidFill>
                   <a:srgbClr val="1A1D24"/>
                 </a:solidFill>
@@ -7324,7 +7306,7 @@
               <a:t>— 负控制与回归测试 </a:t>
             </a:r>
             <a:r>
-              <a:rPr sz="1200">
+              <a:rPr sz="1400">
                 <a:solidFill>
                   <a:srgbClr val="5A6373"/>
                 </a:solidFill>
@@ -7345,7 +7327,7 @@
               </a:spcAft>
             </a:pPr>
             <a:r>
-              <a:rPr sz="1200" b="1">
+              <a:rPr sz="1400" b="1">
                 <a:solidFill>
                   <a:srgbClr val="1A1D24"/>
                 </a:solidFill>
@@ -7356,7 +7338,7 @@
               <a:t>— 取舍与限制 </a:t>
             </a:r>
             <a:r>
-              <a:rPr sz="1200">
+              <a:rPr sz="1400">
                 <a:solidFill>
                   <a:srgbClr val="5A6373"/>
                 </a:solidFill>
@@ -7377,7 +7359,7 @@
         </p:nvSpPr>
         <p:spPr>
           <a:xfrm>
-            <a:off x="6309360" y="3566160"/>
+            <a:off x="6309360" y="3657600"/>
             <a:ext cx="5303520" cy="274320"/>
           </a:xfrm>
           <a:prstGeom prst="rect">
@@ -7397,7 +7379,7 @@
               </a:spcAft>
             </a:pPr>
             <a:r>
-              <a:rPr sz="1300" b="1">
+              <a:rPr sz="1500" b="1">
                 <a:solidFill>
                   <a:srgbClr val="0066CC"/>
                 </a:solidFill>
@@ -7418,8 +7400,8 @@
         </p:nvSpPr>
         <p:spPr>
           <a:xfrm>
-            <a:off x="6309360" y="3913632"/>
-            <a:ext cx="5212080" cy="2377440"/>
+            <a:off x="6309360" y="4005072"/>
+            <a:ext cx="5212080" cy="2286000"/>
           </a:xfrm>
           <a:prstGeom prst="rect">
             <a:avLst/>
@@ -7441,7 +7423,7 @@
               </a:spcAft>
             </a:pPr>
             <a:r>
-              <a:rPr sz="1200" b="1">
+              <a:rPr sz="1400" b="1">
                 <a:solidFill>
                   <a:srgbClr val="1A1D24"/>
                 </a:solidFill>
@@ -7452,7 +7434,7 @@
               <a:t>— 每项优化独立可关 </a:t>
             </a:r>
             <a:r>
-              <a:rPr sz="1200">
+              <a:rPr sz="1400">
                 <a:solidFill>
                   <a:srgbClr val="5A6373"/>
                 </a:solidFill>
@@ -7473,7 +7455,7 @@
               </a:spcAft>
             </a:pPr>
             <a:r>
-              <a:rPr sz="1200" b="1">
+              <a:rPr sz="1400" b="1">
                 <a:solidFill>
                   <a:srgbClr val="1A1D24"/>
                 </a:solidFill>
@@ -7484,7 +7466,7 @@
               <a:t>— bonus 均单开关 </a:t>
             </a:r>
             <a:r>
-              <a:rPr sz="1200">
+              <a:rPr sz="1400">
                 <a:solidFill>
                   <a:srgbClr val="5A6373"/>
                 </a:solidFill>
@@ -7505,7 +7487,7 @@
               </a:spcAft>
             </a:pPr>
             <a:r>
-              <a:rPr sz="1200" b="1">
+              <a:rPr sz="1400" b="1">
                 <a:solidFill>
                   <a:srgbClr val="1A1D24"/>
                 </a:solidFill>
@@ -7516,7 +7498,7 @@
               <a:t>— 被拒候选保留在树中 </a:t>
             </a:r>
             <a:r>
-              <a:rPr sz="1200">
+              <a:rPr sz="1400">
                 <a:solidFill>
                   <a:srgbClr val="5A6373"/>
                 </a:solidFill>
@@ -7537,7 +7519,7 @@
               </a:spcAft>
             </a:pPr>
             <a:r>
-              <a:rPr sz="1200" b="1">
+              <a:rPr sz="1400" b="1">
                 <a:solidFill>
                   <a:srgbClr val="1A1D24"/>
                 </a:solidFill>
@@ -7548,7 +7530,7 @@
               <a:t>— 回滚点 </a:t>
             </a:r>
             <a:r>
-              <a:rPr sz="1200">
+              <a:rPr sz="1400">
                 <a:solidFill>
                   <a:srgbClr val="5A6373"/>
                 </a:solidFill>
@@ -7569,7 +7551,7 @@
               </a:spcAft>
             </a:pPr>
             <a:r>
-              <a:rPr sz="1200" b="1">
+              <a:rPr sz="1400" b="1">
                 <a:solidFill>
                   <a:srgbClr val="1A1D24"/>
                 </a:solidFill>
@@ -7580,7 +7562,7 @@
               <a:t>— 清洁性 </a:t>
             </a:r>
             <a:r>
-              <a:rPr sz="1200">
+              <a:rPr sz="1400">
                 <a:solidFill>
                   <a:srgbClr val="5A6373"/>
                 </a:solidFill>
@@ -7621,7 +7603,7 @@
               </a:spcAft>
             </a:pPr>
             <a:r>
-              <a:rPr sz="950" b="0">
+              <a:rPr sz="1150" b="0">
                 <a:solidFill>
                   <a:srgbClr val="5A6373"/>
                 </a:solidFill>
@@ -7680,7 +7662,7 @@
               </a:spcAft>
             </a:pPr>
             <a:r>
-              <a:rPr sz="1200" b="1">
+              <a:rPr sz="1400" b="1">
                 <a:solidFill>
                   <a:srgbClr val="0066CC"/>
                 </a:solidFill>
@@ -7806,7 +7788,7 @@
               </a:spcAft>
             </a:pPr>
             <a:r>
-              <a:rPr sz="1350" b="0">
+              <a:rPr sz="1550" b="0">
                 <a:solidFill>
                   <a:srgbClr val="1A1D24"/>
                 </a:solidFill>
@@ -7847,7 +7829,7 @@
               </a:spcAft>
             </a:pPr>
             <a:r>
-              <a:rPr sz="1450" b="1">
+              <a:rPr sz="1650" b="1">
                 <a:solidFill>
                   <a:srgbClr val="0066CC"/>
                 </a:solidFill>
@@ -7891,7 +7873,7 @@
               </a:spcAft>
             </a:pPr>
             <a:r>
-              <a:rPr sz="1250" b="1">
+              <a:rPr sz="1450" b="1">
                 <a:solidFill>
                   <a:srgbClr val="1A1D24"/>
                 </a:solidFill>
@@ -7902,7 +7884,7 @@
               <a:t>— 模型与 kernel </a:t>
             </a:r>
             <a:r>
-              <a:rPr sz="1250">
+              <a:rPr sz="1450">
                 <a:solidFill>
                   <a:srgbClr val="5A6373"/>
                 </a:solidFill>
@@ -7923,7 +7905,7 @@
               </a:spcAft>
             </a:pPr>
             <a:r>
-              <a:rPr sz="1250" b="1">
+              <a:rPr sz="1450" b="1">
                 <a:solidFill>
                   <a:srgbClr val="1A1D24"/>
                 </a:solidFill>
@@ -7934,7 +7916,7 @@
               <a:t>— 服务与协议 </a:t>
             </a:r>
             <a:r>
-              <a:rPr sz="1250">
+              <a:rPr sz="1450">
                 <a:solidFill>
                   <a:srgbClr val="5A6373"/>
                 </a:solidFill>
@@ -7955,7 +7937,7 @@
               </a:spcAft>
             </a:pPr>
             <a:r>
-              <a:rPr sz="1250" b="1">
+              <a:rPr sz="1450" b="1">
                 <a:solidFill>
                   <a:srgbClr val="1A1D24"/>
                 </a:solidFill>
@@ -7966,7 +7948,7 @@
               <a:t>— 正确性验证 </a:t>
             </a:r>
             <a:r>
-              <a:rPr sz="1250">
+              <a:rPr sz="1450">
                 <a:solidFill>
                   <a:srgbClr val="5A6373"/>
                 </a:solidFill>
@@ -7987,7 +7969,7 @@
               </a:spcAft>
             </a:pPr>
             <a:r>
-              <a:rPr sz="1250" b="1">
+              <a:rPr sz="1450" b="1">
                 <a:solidFill>
                   <a:srgbClr val="1A1D24"/>
                 </a:solidFill>
@@ -7998,7 +7980,7 @@
               <a:t>— 性能工程 </a:t>
             </a:r>
             <a:r>
-              <a:rPr sz="1250">
+              <a:rPr sz="1450">
                 <a:solidFill>
                   <a:srgbClr val="5A6373"/>
                 </a:solidFill>
@@ -8019,7 +8001,7 @@
               </a:spcAft>
             </a:pPr>
             <a:r>
-              <a:rPr sz="1250" b="1">
+              <a:rPr sz="1450" b="1">
                 <a:solidFill>
                   <a:srgbClr val="1A1D24"/>
                 </a:solidFill>
@@ -8030,7 +8012,7 @@
               <a:t>— 双 bonus 与集成 </a:t>
             </a:r>
             <a:r>
-              <a:rPr sz="1250">
+              <a:rPr sz="1450">
                 <a:solidFill>
                   <a:srgbClr val="5A6373"/>
                 </a:solidFill>
@@ -8071,7 +8053,7 @@
               </a:spcAft>
             </a:pPr>
             <a:r>
-              <a:rPr sz="1450" b="1">
+              <a:rPr sz="1650" b="1">
                 <a:solidFill>
                   <a:srgbClr val="0066CC"/>
                 </a:solidFill>
@@ -8115,7 +8097,7 @@
               </a:spcAft>
             </a:pPr>
             <a:r>
-              <a:rPr sz="1250" b="1">
+              <a:rPr sz="1450" b="1">
                 <a:solidFill>
                   <a:srgbClr val="1A1D24"/>
                 </a:solidFill>
@@ -8126,7 +8108,7 @@
               <a:t>— 离线 benchmark 脚手架 </a:t>
             </a:r>
             <a:r>
-              <a:rPr sz="1250">
+              <a:rPr sz="1450">
                 <a:solidFill>
                   <a:srgbClr val="5A6373"/>
                 </a:solidFill>
@@ -8147,7 +8129,7 @@
               </a:spcAft>
             </a:pPr>
             <a:r>
-              <a:rPr sz="1250" b="1">
+              <a:rPr sz="1450" b="1">
                 <a:solidFill>
                   <a:srgbClr val="1A1D24"/>
                 </a:solidFill>
@@ -8158,7 +8140,7 @@
               <a:t>— campaign 资料 </a:t>
             </a:r>
             <a:r>
-              <a:rPr sz="1250">
+              <a:rPr sz="1450">
                 <a:solidFill>
                   <a:srgbClr val="5A6373"/>
                 </a:solidFill>
@@ -8179,7 +8161,7 @@
               </a:spcAft>
             </a:pPr>
             <a:r>
-              <a:rPr sz="1250" b="1">
+              <a:rPr sz="1450" b="1">
                 <a:solidFill>
                   <a:srgbClr val="1A1D24"/>
                 </a:solidFill>
@@ -8190,7 +8172,7 @@
               <a:t>— 协作记录 </a:t>
             </a:r>
             <a:r>
-              <a:rPr sz="1250">
+              <a:rPr sz="1450">
                 <a:solidFill>
                   <a:srgbClr val="5A6373"/>
                 </a:solidFill>
@@ -8231,7 +8213,7 @@
               </a:spcAft>
             </a:pPr>
             <a:r>
-              <a:rPr sz="950" b="0">
+              <a:rPr sz="1150" b="0">
                 <a:solidFill>
                   <a:srgbClr val="5A6373"/>
                 </a:solidFill>
@@ -8334,7 +8316,7 @@
               </a:spcAft>
             </a:pPr>
             <a:r>
-              <a:rPr sz="1500" b="1">
+              <a:rPr sz="1700" b="1">
                 <a:solidFill>
                   <a:srgbClr val="8FC2F0"/>
                 </a:solidFill>
@@ -8399,7 +8381,7 @@
               </a:spcAft>
             </a:pPr>
             <a:r>
-              <a:rPr sz="1500" b="0">
+              <a:rPr sz="1700" b="0">
                 <a:solidFill>
                   <a:srgbClr val="C5D9EE"/>
                 </a:solidFill>
@@ -8484,7 +8466,7 @@
               </a:spcAft>
             </a:pPr>
             <a:r>
-              <a:rPr sz="1200" b="1">
+              <a:rPr sz="1400" b="1">
                 <a:solidFill>
                   <a:srgbClr val="8FC2F0"/>
                 </a:solidFill>
@@ -8528,7 +8510,7 @@
               </a:spcAft>
             </a:pPr>
             <a:r>
-              <a:rPr sz="1200" b="0">
+              <a:rPr sz="1400" b="0">
                 <a:solidFill>
                   <a:srgbClr val="FFFFFF"/>
                 </a:solidFill>
@@ -8613,7 +8595,7 @@
               </a:spcAft>
             </a:pPr>
             <a:r>
-              <a:rPr sz="1200" b="1">
+              <a:rPr sz="1400" b="1">
                 <a:solidFill>
                   <a:srgbClr val="8FC2F0"/>
                 </a:solidFill>
@@ -8657,7 +8639,7 @@
               </a:spcAft>
             </a:pPr>
             <a:r>
-              <a:rPr sz="1200" b="0">
+              <a:rPr sz="1400" b="0">
                 <a:solidFill>
                   <a:srgbClr val="FFFFFF"/>
                 </a:solidFill>
@@ -8742,7 +8724,7 @@
               </a:spcAft>
             </a:pPr>
             <a:r>
-              <a:rPr sz="1200" b="1">
+              <a:rPr sz="1400" b="1">
                 <a:solidFill>
                   <a:srgbClr val="8FC2F0"/>
                 </a:solidFill>
@@ -8786,7 +8768,7 @@
               </a:spcAft>
             </a:pPr>
             <a:r>
-              <a:rPr sz="1200" b="0">
+              <a:rPr sz="1400" b="0">
                 <a:solidFill>
                   <a:srgbClr val="FFFFFF"/>
                 </a:solidFill>
@@ -8827,7 +8809,7 @@
               </a:spcAft>
             </a:pPr>
             <a:r>
-              <a:rPr sz="1100" b="0">
+              <a:rPr sz="1300" b="0">
                 <a:solidFill>
                   <a:srgbClr val="8FC2F0"/>
                 </a:solidFill>
@@ -8886,7 +8868,7 @@
               </a:spcAft>
             </a:pPr>
             <a:r>
-              <a:rPr sz="1200" b="1">
+              <a:rPr sz="1400" b="1">
                 <a:solidFill>
                   <a:srgbClr val="0066CC"/>
                 </a:solidFill>
@@ -9099,7 +9081,7 @@
               </a:spcAft>
             </a:pPr>
             <a:r>
-              <a:rPr sz="1200" b="1">
+              <a:rPr sz="1400" b="1">
                 <a:solidFill>
                   <a:srgbClr val="1A1D24"/>
                 </a:solidFill>
@@ -9140,7 +9122,7 @@
               </a:spcAft>
             </a:pPr>
             <a:r>
-              <a:rPr sz="1000" b="0">
+              <a:rPr sz="1200" b="0">
                 <a:solidFill>
                   <a:srgbClr val="5A6373"/>
                 </a:solidFill>
@@ -9268,7 +9250,7 @@
               </a:spcAft>
             </a:pPr>
             <a:r>
-              <a:rPr sz="1200" b="1">
+              <a:rPr sz="1400" b="1">
                 <a:solidFill>
                   <a:srgbClr val="1A1D24"/>
                 </a:solidFill>
@@ -9309,7 +9291,7 @@
               </a:spcAft>
             </a:pPr>
             <a:r>
-              <a:rPr sz="1000" b="0">
+              <a:rPr sz="1200" b="0">
                 <a:solidFill>
                   <a:srgbClr val="5A6373"/>
                 </a:solidFill>
@@ -9437,7 +9419,7 @@
               </a:spcAft>
             </a:pPr>
             <a:r>
-              <a:rPr sz="1200" b="1">
+              <a:rPr sz="1400" b="1">
                 <a:solidFill>
                   <a:srgbClr val="1A1D24"/>
                 </a:solidFill>
@@ -9478,7 +9460,7 @@
               </a:spcAft>
             </a:pPr>
             <a:r>
-              <a:rPr sz="1000" b="0">
+              <a:rPr sz="1200" b="0">
                 <a:solidFill>
                   <a:srgbClr val="5A6373"/>
                 </a:solidFill>
@@ -9606,7 +9588,7 @@
               </a:spcAft>
             </a:pPr>
             <a:r>
-              <a:rPr sz="1200" b="1">
+              <a:rPr sz="1400" b="1">
                 <a:solidFill>
                   <a:srgbClr val="1A1D24"/>
                 </a:solidFill>
@@ -9647,7 +9629,7 @@
               </a:spcAft>
             </a:pPr>
             <a:r>
-              <a:rPr sz="1000" b="0">
+              <a:rPr sz="1200" b="0">
                 <a:solidFill>
                   <a:srgbClr val="5A6373"/>
                 </a:solidFill>
@@ -9688,7 +9670,7 @@
               </a:spcAft>
             </a:pPr>
             <a:r>
-              <a:rPr sz="1300" b="1">
+              <a:rPr sz="1500" b="1">
                 <a:solidFill>
                   <a:srgbClr val="1A1D24"/>
                 </a:solidFill>
@@ -9773,7 +9755,7 @@
               </a:spcAft>
             </a:pPr>
             <a:r>
-              <a:rPr sz="1200" b="1">
+              <a:rPr sz="1400" b="1">
                 <a:solidFill>
                   <a:srgbClr val="1A1D24"/>
                 </a:solidFill>
@@ -9814,7 +9796,7 @@
               </a:spcAft>
             </a:pPr>
             <a:r>
-              <a:rPr sz="1200" b="1">
+              <a:rPr sz="1400" b="1">
                 <a:solidFill>
                   <a:srgbClr val="1A1D24"/>
                 </a:solidFill>
@@ -9855,7 +9837,7 @@
               </a:spcAft>
             </a:pPr>
             <a:r>
-              <a:rPr sz="1200" b="1">
+              <a:rPr sz="1400" b="1">
                 <a:solidFill>
                   <a:srgbClr val="1A1D24"/>
                 </a:solidFill>
@@ -9896,7 +9878,7 @@
               </a:spcAft>
             </a:pPr>
             <a:r>
-              <a:rPr sz="1200" b="1">
+              <a:rPr sz="1400" b="1">
                 <a:solidFill>
                   <a:srgbClr val="1A1D24"/>
                 </a:solidFill>
@@ -9937,7 +9919,7 @@
               </a:spcAft>
             </a:pPr>
             <a:r>
-              <a:rPr sz="1200" b="0">
+              <a:rPr sz="1400" b="0">
                 <a:solidFill>
                   <a:srgbClr val="1A1D24"/>
                 </a:solidFill>
@@ -9978,7 +9960,7 @@
               </a:spcAft>
             </a:pPr>
             <a:r>
-              <a:rPr sz="1200" b="0">
+              <a:rPr sz="1400" b="0">
                 <a:solidFill>
                   <a:srgbClr val="1A1D24"/>
                 </a:solidFill>
@@ -10019,7 +10001,7 @@
               </a:spcAft>
             </a:pPr>
             <a:r>
-              <a:rPr sz="1200" b="0">
+              <a:rPr sz="1400" b="0">
                 <a:solidFill>
                   <a:srgbClr val="1A1D24"/>
                 </a:solidFill>
@@ -10060,7 +10042,7 @@
               </a:spcAft>
             </a:pPr>
             <a:r>
-              <a:rPr sz="1200" b="0">
+              <a:rPr sz="1400" b="0">
                 <a:solidFill>
                   <a:srgbClr val="1A1D24"/>
                 </a:solidFill>
@@ -10145,7 +10127,7 @@
               </a:spcAft>
             </a:pPr>
             <a:r>
-              <a:rPr sz="1200" b="0">
+              <a:rPr sz="1400" b="0">
                 <a:solidFill>
                   <a:srgbClr val="1A1D24"/>
                 </a:solidFill>
@@ -10186,7 +10168,7 @@
               </a:spcAft>
             </a:pPr>
             <a:r>
-              <a:rPr sz="1200" b="0">
+              <a:rPr sz="1400" b="0">
                 <a:solidFill>
                   <a:srgbClr val="1A1D24"/>
                 </a:solidFill>
@@ -10227,7 +10209,7 @@
               </a:spcAft>
             </a:pPr>
             <a:r>
-              <a:rPr sz="1200" b="0">
+              <a:rPr sz="1400" b="0">
                 <a:solidFill>
                   <a:srgbClr val="1A1D24"/>
                 </a:solidFill>
@@ -10268,7 +10250,7 @@
               </a:spcAft>
             </a:pPr>
             <a:r>
-              <a:rPr sz="1200" b="0">
+              <a:rPr sz="1400" b="0">
                 <a:solidFill>
                   <a:srgbClr val="1A1D24"/>
                 </a:solidFill>
@@ -10309,7 +10291,7 @@
               </a:spcAft>
             </a:pPr>
             <a:r>
-              <a:rPr sz="1200" b="0">
+              <a:rPr sz="1400" b="0">
                 <a:solidFill>
                   <a:srgbClr val="1A1D24"/>
                 </a:solidFill>
@@ -10350,7 +10332,7 @@
               </a:spcAft>
             </a:pPr>
             <a:r>
-              <a:rPr sz="1200" b="0">
+              <a:rPr sz="1400" b="0">
                 <a:solidFill>
                   <a:srgbClr val="1A1D24"/>
                 </a:solidFill>
@@ -10391,7 +10373,7 @@
               </a:spcAft>
             </a:pPr>
             <a:r>
-              <a:rPr sz="1200" b="0">
+              <a:rPr sz="1400" b="0">
                 <a:solidFill>
                   <a:srgbClr val="1A1D24"/>
                 </a:solidFill>
@@ -10432,7 +10414,7 @@
               </a:spcAft>
             </a:pPr>
             <a:r>
-              <a:rPr sz="1200" b="0">
+              <a:rPr sz="1400" b="0">
                 <a:solidFill>
                   <a:srgbClr val="1A1D24"/>
                 </a:solidFill>
@@ -10517,7 +10499,7 @@
               </a:spcAft>
             </a:pPr>
             <a:r>
-              <a:rPr sz="1200" b="0">
+              <a:rPr sz="1400" b="0">
                 <a:solidFill>
                   <a:srgbClr val="1A1D24"/>
                 </a:solidFill>
@@ -10558,7 +10540,7 @@
               </a:spcAft>
             </a:pPr>
             <a:r>
-              <a:rPr sz="1200" b="0">
+              <a:rPr sz="1400" b="0">
                 <a:solidFill>
                   <a:srgbClr val="1A1D24"/>
                 </a:solidFill>
@@ -10599,7 +10581,7 @@
               </a:spcAft>
             </a:pPr>
             <a:r>
-              <a:rPr sz="1200" b="0">
+              <a:rPr sz="1400" b="0">
                 <a:solidFill>
                   <a:srgbClr val="1A1D24"/>
                 </a:solidFill>
@@ -10640,7 +10622,7 @@
               </a:spcAft>
             </a:pPr>
             <a:r>
-              <a:rPr sz="1200" b="0">
+              <a:rPr sz="1400" b="0">
                 <a:solidFill>
                   <a:srgbClr val="1A1D24"/>
                 </a:solidFill>
@@ -10681,7 +10663,7 @@
               </a:spcAft>
             </a:pPr>
             <a:r>
-              <a:rPr sz="1200" b="0">
+              <a:rPr sz="1400" b="0">
                 <a:solidFill>
                   <a:srgbClr val="1A1D24"/>
                 </a:solidFill>
@@ -10722,7 +10704,7 @@
               </a:spcAft>
             </a:pPr>
             <a:r>
-              <a:rPr sz="1200" b="0">
+              <a:rPr sz="1400" b="0">
                 <a:solidFill>
                   <a:srgbClr val="1A1D24"/>
                 </a:solidFill>
@@ -10763,7 +10745,7 @@
               </a:spcAft>
             </a:pPr>
             <a:r>
-              <a:rPr sz="1200" b="0">
+              <a:rPr sz="1400" b="0">
                 <a:solidFill>
                   <a:srgbClr val="1A1D24"/>
                 </a:solidFill>
@@ -10804,7 +10786,7 @@
               </a:spcAft>
             </a:pPr>
             <a:r>
-              <a:rPr sz="1200" b="0">
+              <a:rPr sz="1400" b="0">
                 <a:solidFill>
                   <a:srgbClr val="1A1D24"/>
                 </a:solidFill>
@@ -10889,7 +10871,7 @@
               </a:spcAft>
             </a:pPr>
             <a:r>
-              <a:rPr sz="1200" b="0">
+              <a:rPr sz="1400" b="0">
                 <a:solidFill>
                   <a:srgbClr val="1A1D24"/>
                 </a:solidFill>
@@ -10930,7 +10912,7 @@
               </a:spcAft>
             </a:pPr>
             <a:r>
-              <a:rPr sz="1200" b="0">
+              <a:rPr sz="1400" b="0">
                 <a:solidFill>
                   <a:srgbClr val="1A1D24"/>
                 </a:solidFill>
@@ -10971,7 +10953,7 @@
               </a:spcAft>
             </a:pPr>
             <a:r>
-              <a:rPr sz="1200" b="0">
+              <a:rPr sz="1400" b="0">
                 <a:solidFill>
                   <a:srgbClr val="1A1D24"/>
                 </a:solidFill>
@@ -11012,7 +10994,7 @@
               </a:spcAft>
             </a:pPr>
             <a:r>
-              <a:rPr sz="1200" b="0">
+              <a:rPr sz="1400" b="0">
                 <a:solidFill>
                   <a:srgbClr val="1A1D24"/>
                 </a:solidFill>
@@ -11053,7 +11035,7 @@
               </a:spcAft>
             </a:pPr>
             <a:r>
-              <a:rPr sz="1200" b="0">
+              <a:rPr sz="1400" b="0">
                 <a:solidFill>
                   <a:srgbClr val="1A1D24"/>
                 </a:solidFill>
@@ -11094,7 +11076,7 @@
               </a:spcAft>
             </a:pPr>
             <a:r>
-              <a:rPr sz="1200" b="0">
+              <a:rPr sz="1400" b="0">
                 <a:solidFill>
                   <a:srgbClr val="1A1D24"/>
                 </a:solidFill>
@@ -11135,7 +11117,7 @@
               </a:spcAft>
             </a:pPr>
             <a:r>
-              <a:rPr sz="1200" b="0">
+              <a:rPr sz="1400" b="0">
                 <a:solidFill>
                   <a:srgbClr val="1A1D24"/>
                 </a:solidFill>
@@ -11176,7 +11158,7 @@
               </a:spcAft>
             </a:pPr>
             <a:r>
-              <a:rPr sz="1200" b="0">
+              <a:rPr sz="1400" b="0">
                 <a:solidFill>
                   <a:srgbClr val="1A1D24"/>
                 </a:solidFill>
@@ -11217,7 +11199,7 @@
               </a:spcAft>
             </a:pPr>
             <a:r>
-              <a:rPr sz="1300" b="1">
+              <a:rPr sz="1500" b="1">
                 <a:solidFill>
                   <a:srgbClr val="1A1D24"/>
                 </a:solidFill>
@@ -11261,7 +11243,7 @@
               </a:spcAft>
             </a:pPr>
             <a:r>
-              <a:rPr sz="1250" b="1">
+              <a:rPr sz="1450" b="1">
                 <a:solidFill>
                   <a:srgbClr val="1A1D24"/>
                 </a:solidFill>
@@ -11272,7 +11254,7 @@
               <a:t>— 协议 gate 12/12 </a:t>
             </a:r>
             <a:r>
-              <a:rPr sz="1250">
+              <a:rPr sz="1450">
                 <a:solidFill>
                   <a:srgbClr val="5A6373"/>
                 </a:solidFill>
@@ -11293,7 +11275,7 @@
               </a:spcAft>
             </a:pPr>
             <a:r>
-              <a:rPr sz="1250" b="1">
+              <a:rPr sz="1450" b="1">
                 <a:solidFill>
                   <a:srgbClr val="1A1D24"/>
                 </a:solidFill>
@@ -11304,7 +11286,7 @@
               <a:t>— 公开功能 6/6 精确 </a:t>
             </a:r>
             <a:r>
-              <a:rPr sz="1250">
+              <a:rPr sz="1450">
                 <a:solidFill>
                   <a:srgbClr val="5A6373"/>
                 </a:solidFill>
@@ -11325,7 +11307,7 @@
               </a:spcAft>
             </a:pPr>
             <a:r>
-              <a:rPr sz="1250" b="1">
+              <a:rPr sz="1450" b="1">
                 <a:solidFill>
                   <a:srgbClr val="1A1D24"/>
                 </a:solidFill>
@@ -11336,7 +11318,7 @@
               <a:t>— 200 请求混合 soak 100% </a:t>
             </a:r>
             <a:r>
-              <a:rPr sz="1250">
+              <a:rPr sz="1450">
                 <a:solidFill>
                   <a:srgbClr val="5A6373"/>
                 </a:solidFill>
@@ -11357,7 +11339,7 @@
               </a:spcAft>
             </a:pPr>
             <a:r>
-              <a:rPr sz="1250" b="1">
+              <a:rPr sz="1450" b="1">
                 <a:solidFill>
                   <a:srgbClr val="1A1D24"/>
                 </a:solidFill>
@@ -11368,7 +11350,7 @@
               <a:t>— proxy hidden 11/12 </a:t>
             </a:r>
             <a:r>
-              <a:rPr sz="1250">
+              <a:rPr sz="1450">
                 <a:solidFill>
                   <a:srgbClr val="5A6373"/>
                 </a:solidFill>
@@ -11389,7 +11371,7 @@
               </a:spcAft>
             </a:pPr>
             <a:r>
-              <a:rPr sz="1250" b="1">
+              <a:rPr sz="1450" b="1">
                 <a:solidFill>
                   <a:srgbClr val="1A1D24"/>
                 </a:solidFill>
@@ -11400,7 +11382,7 @@
               <a:t>— 多模态 + C4 双 bonus </a:t>
             </a:r>
             <a:r>
-              <a:rPr sz="1250">
+              <a:rPr sz="1450">
                 <a:solidFill>
                   <a:srgbClr val="5A6373"/>
                 </a:solidFill>
@@ -11421,7 +11403,7 @@
               </a:spcAft>
             </a:pPr>
             <a:r>
-              <a:rPr sz="1250" b="1">
+              <a:rPr sz="1450" b="1">
                 <a:solidFill>
                   <a:srgbClr val="1A1D24"/>
                 </a:solidFill>
@@ -11432,7 +11414,7 @@
               <a:t>— 峰值显存 </a:t>
             </a:r>
             <a:r>
-              <a:rPr sz="1250">
+              <a:rPr sz="1450">
                 <a:solidFill>
                   <a:srgbClr val="5A6373"/>
                 </a:solidFill>
@@ -11473,7 +11455,7 @@
               </a:spcAft>
             </a:pPr>
             <a:r>
-              <a:rPr sz="950" b="0">
+              <a:rPr sz="1150" b="0">
                 <a:solidFill>
                   <a:srgbClr val="5A6373"/>
                 </a:solidFill>
@@ -11532,7 +11514,7 @@
               </a:spcAft>
             </a:pPr>
             <a:r>
-              <a:rPr sz="1200" b="1">
+              <a:rPr sz="1400" b="1">
                 <a:solidFill>
                   <a:srgbClr val="0066CC"/>
                 </a:solidFill>
@@ -11661,7 +11643,7 @@
               </a:spcAft>
             </a:pPr>
             <a:r>
-              <a:rPr sz="1400" b="0">
+              <a:rPr sz="1600" b="0">
                 <a:solidFill>
                   <a:srgbClr val="1A1D24"/>
                 </a:solidFill>
@@ -11702,7 +11684,7 @@
               </a:spcAft>
             </a:pPr>
             <a:r>
-              <a:rPr sz="1300" b="1">
+              <a:rPr sz="1500" b="1">
                 <a:solidFill>
                   <a:srgbClr val="0066CC"/>
                 </a:solidFill>
@@ -11746,7 +11728,7 @@
               </a:spcAft>
             </a:pPr>
             <a:r>
-              <a:rPr sz="1250" b="1">
+              <a:rPr sz="1450" b="1">
                 <a:solidFill>
                   <a:srgbClr val="1A1D24"/>
                 </a:solidFill>
@@ -11757,7 +11739,7 @@
               <a:t>— 64 层混合主干</a:t>
             </a:r>
             <a:r>
-              <a:rPr sz="1250">
+              <a:rPr sz="1450">
                 <a:solidFill>
                   <a:srgbClr val="5A6373"/>
                 </a:solidFill>
@@ -11778,7 +11760,7 @@
               </a:spcAft>
             </a:pPr>
             <a:r>
-              <a:rPr sz="1250" b="1">
+              <a:rPr sz="1450" b="1">
                 <a:solidFill>
                   <a:srgbClr val="1A1D24"/>
                 </a:solidFill>
@@ -11789,7 +11771,7 @@
               <a:t>— GDN 层</a:t>
             </a:r>
             <a:r>
-              <a:rPr sz="1250">
+              <a:rPr sz="1450">
                 <a:solidFill>
                   <a:srgbClr val="5A6373"/>
                 </a:solidFill>
@@ -11810,7 +11792,7 @@
               </a:spcAft>
             </a:pPr>
             <a:r>
-              <a:rPr sz="1250" b="1">
+              <a:rPr sz="1450" b="1">
                 <a:solidFill>
                   <a:srgbClr val="1A1D24"/>
                 </a:solidFill>
@@ -11821,7 +11803,7 @@
               <a:t>— 全注意力层</a:t>
             </a:r>
             <a:r>
-              <a:rPr sz="1250">
+              <a:rPr sz="1450">
                 <a:solidFill>
                   <a:srgbClr val="5A6373"/>
                 </a:solidFill>
@@ -11842,7 +11824,7 @@
               </a:spcAft>
             </a:pPr>
             <a:r>
-              <a:rPr sz="1250" b="1">
+              <a:rPr sz="1450" b="1">
                 <a:solidFill>
                   <a:srgbClr val="1A1D24"/>
                 </a:solidFill>
@@ -11853,7 +11835,7 @@
               <a:t>— 逐模块混合量化</a:t>
             </a:r>
             <a:r>
-              <a:rPr sz="1250">
+              <a:rPr sz="1450">
                 <a:solidFill>
                   <a:srgbClr val="5A6373"/>
                 </a:solidFill>
@@ -11894,7 +11876,7 @@
               </a:spcAft>
             </a:pPr>
             <a:r>
-              <a:rPr sz="1300" b="1">
+              <a:rPr sz="1500" b="1">
                 <a:solidFill>
                   <a:srgbClr val="C0392B"/>
                 </a:solidFill>
@@ -11938,7 +11920,7 @@
               </a:spcAft>
             </a:pPr>
             <a:r>
-              <a:rPr sz="1250" b="1">
+              <a:rPr sz="1450" b="1">
                 <a:solidFill>
                   <a:srgbClr val="1A1D24"/>
                 </a:solidFill>
@@ -11949,7 +11931,7 @@
               <a:t>— 单卡固定</a:t>
             </a:r>
             <a:r>
-              <a:rPr sz="1250">
+              <a:rPr sz="1450">
                 <a:solidFill>
                   <a:srgbClr val="5A6373"/>
                 </a:solidFill>
@@ -11970,7 +11952,7 @@
               </a:spcAft>
             </a:pPr>
             <a:r>
-              <a:rPr sz="1250" b="1">
+              <a:rPr sz="1450" b="1">
                 <a:solidFill>
                   <a:srgbClr val="1A1D24"/>
                 </a:solidFill>
@@ -11981,7 +11963,7 @@
               <a:t>— 不改评测件</a:t>
             </a:r>
             <a:r>
-              <a:rPr sz="1250">
+              <a:rPr sz="1450">
                 <a:solidFill>
                   <a:srgbClr val="5A6373"/>
                 </a:solidFill>
@@ -12002,7 +11984,7 @@
               </a:spcAft>
             </a:pPr>
             <a:r>
-              <a:rPr sz="1250" b="1">
+              <a:rPr sz="1450" b="1">
                 <a:solidFill>
                   <a:srgbClr val="1A1D24"/>
                 </a:solidFill>
@@ -12013,7 +11995,7 @@
               <a:t>— 不硬编码</a:t>
             </a:r>
             <a:r>
-              <a:rPr sz="1250">
+              <a:rPr sz="1450">
                 <a:solidFill>
                   <a:srgbClr val="5A6373"/>
                 </a:solidFill>
@@ -12034,7 +12016,7 @@
               </a:spcAft>
             </a:pPr>
             <a:r>
-              <a:rPr sz="1250" b="1">
+              <a:rPr sz="1450" b="1">
                 <a:solidFill>
                   <a:srgbClr val="1A1D24"/>
                 </a:solidFill>
@@ -12045,7 +12027,7 @@
               <a:t>— health 必须真实</a:t>
             </a:r>
             <a:r>
-              <a:rPr sz="1250">
+              <a:rPr sz="1450">
                 <a:solidFill>
                   <a:srgbClr val="5A6373"/>
                 </a:solidFill>
@@ -12086,7 +12068,7 @@
               </a:spcAft>
             </a:pPr>
             <a:r>
-              <a:rPr sz="950" b="0">
+              <a:rPr sz="1150" b="0">
                 <a:solidFill>
                   <a:srgbClr val="5A6373"/>
                 </a:solidFill>
@@ -12145,7 +12127,7 @@
               </a:spcAft>
             </a:pPr>
             <a:r>
-              <a:rPr sz="1200" b="1">
+              <a:rPr sz="1400" b="1">
                 <a:solidFill>
                   <a:srgbClr val="0066CC"/>
                 </a:solidFill>
@@ -12274,7 +12256,7 @@
               </a:spcAft>
             </a:pPr>
             <a:r>
-              <a:rPr sz="1350" b="0">
+              <a:rPr sz="1550" b="0">
                 <a:solidFill>
                   <a:srgbClr val="1A1D24"/>
                 </a:solidFill>
@@ -12359,7 +12341,7 @@
               </a:spcAft>
             </a:pPr>
             <a:r>
-              <a:rPr sz="1200" b="1">
+              <a:rPr sz="1400" b="1">
                 <a:solidFill>
                   <a:srgbClr val="1A1D24"/>
                 </a:solidFill>
@@ -12400,7 +12382,7 @@
               </a:spcAft>
             </a:pPr>
             <a:r>
-              <a:rPr sz="1200" b="1">
+              <a:rPr sz="1400" b="1">
                 <a:solidFill>
                   <a:srgbClr val="1A1D24"/>
                 </a:solidFill>
@@ -12441,7 +12423,7 @@
               </a:spcAft>
             </a:pPr>
             <a:r>
-              <a:rPr sz="1200" b="1">
+              <a:rPr sz="1400" b="1">
                 <a:solidFill>
                   <a:srgbClr val="1A1D24"/>
                 </a:solidFill>
@@ -12482,7 +12464,7 @@
               </a:spcAft>
             </a:pPr>
             <a:r>
-              <a:rPr sz="1200" b="0">
+              <a:rPr sz="1400" b="0">
                 <a:solidFill>
                   <a:srgbClr val="1A1D24"/>
                 </a:solidFill>
@@ -12523,7 +12505,7 @@
               </a:spcAft>
             </a:pPr>
             <a:r>
-              <a:rPr sz="1200" b="0">
+              <a:rPr sz="1400" b="0">
                 <a:solidFill>
                   <a:srgbClr val="1A1D24"/>
                 </a:solidFill>
@@ -12564,7 +12546,7 @@
               </a:spcAft>
             </a:pPr>
             <a:r>
-              <a:rPr sz="1200" b="0">
+              <a:rPr sz="1400" b="0">
                 <a:solidFill>
                   <a:srgbClr val="1A1D24"/>
                 </a:solidFill>
@@ -12649,7 +12631,7 @@
               </a:spcAft>
             </a:pPr>
             <a:r>
-              <a:rPr sz="1200" b="0">
+              <a:rPr sz="1400" b="0">
                 <a:solidFill>
                   <a:srgbClr val="1A1D24"/>
                 </a:solidFill>
@@ -12690,7 +12672,7 @@
               </a:spcAft>
             </a:pPr>
             <a:r>
-              <a:rPr sz="1200" b="0">
+              <a:rPr sz="1400" b="0">
                 <a:solidFill>
                   <a:srgbClr val="1A1D24"/>
                 </a:solidFill>
@@ -12731,7 +12713,7 @@
               </a:spcAft>
             </a:pPr>
             <a:r>
-              <a:rPr sz="1200" b="0">
+              <a:rPr sz="1400" b="0">
                 <a:solidFill>
                   <a:srgbClr val="1A1D24"/>
                 </a:solidFill>
@@ -12772,7 +12754,7 @@
               </a:spcAft>
             </a:pPr>
             <a:r>
-              <a:rPr sz="1200" b="0">
+              <a:rPr sz="1400" b="0">
                 <a:solidFill>
                   <a:srgbClr val="1A1D24"/>
                 </a:solidFill>
@@ -12813,7 +12795,7 @@
               </a:spcAft>
             </a:pPr>
             <a:r>
-              <a:rPr sz="1200" b="0">
+              <a:rPr sz="1400" b="0">
                 <a:solidFill>
                   <a:srgbClr val="1A1D24"/>
                 </a:solidFill>
@@ -12854,7 +12836,7 @@
               </a:spcAft>
             </a:pPr>
             <a:r>
-              <a:rPr sz="1200" b="0">
+              <a:rPr sz="1400" b="0">
                 <a:solidFill>
                   <a:srgbClr val="1A1D24"/>
                 </a:solidFill>
@@ -12939,7 +12921,7 @@
               </a:spcAft>
             </a:pPr>
             <a:r>
-              <a:rPr sz="1200" b="0">
+              <a:rPr sz="1400" b="0">
                 <a:solidFill>
                   <a:srgbClr val="1A1D24"/>
                 </a:solidFill>
@@ -12980,7 +12962,7 @@
               </a:spcAft>
             </a:pPr>
             <a:r>
-              <a:rPr sz="1200" b="0">
+              <a:rPr sz="1400" b="0">
                 <a:solidFill>
                   <a:srgbClr val="1A1D24"/>
                 </a:solidFill>
@@ -13021,7 +13003,7 @@
               </a:spcAft>
             </a:pPr>
             <a:r>
-              <a:rPr sz="1200" b="0">
+              <a:rPr sz="1400" b="0">
                 <a:solidFill>
                   <a:srgbClr val="1A1D24"/>
                 </a:solidFill>
@@ -13062,7 +13044,7 @@
               </a:spcAft>
             </a:pPr>
             <a:r>
-              <a:rPr sz="1200" b="0">
+              <a:rPr sz="1400" b="0">
                 <a:solidFill>
                   <a:srgbClr val="1A1D24"/>
                 </a:solidFill>
@@ -13103,7 +13085,7 @@
               </a:spcAft>
             </a:pPr>
             <a:r>
-              <a:rPr sz="1200" b="0">
+              <a:rPr sz="1400" b="0">
                 <a:solidFill>
                   <a:srgbClr val="1A1D24"/>
                 </a:solidFill>
@@ -13144,7 +13126,7 @@
               </a:spcAft>
             </a:pPr>
             <a:r>
-              <a:rPr sz="1200" b="0">
+              <a:rPr sz="1400" b="0">
                 <a:solidFill>
                   <a:srgbClr val="1A1D24"/>
                 </a:solidFill>
@@ -13229,7 +13211,7 @@
               </a:spcAft>
             </a:pPr>
             <a:r>
-              <a:rPr sz="1200" b="0">
+              <a:rPr sz="1400" b="0">
                 <a:solidFill>
                   <a:srgbClr val="1A1D24"/>
                 </a:solidFill>
@@ -13270,7 +13252,7 @@
               </a:spcAft>
             </a:pPr>
             <a:r>
-              <a:rPr sz="1200" b="0">
+              <a:rPr sz="1400" b="0">
                 <a:solidFill>
                   <a:srgbClr val="1A1D24"/>
                 </a:solidFill>
@@ -13311,7 +13293,7 @@
               </a:spcAft>
             </a:pPr>
             <a:r>
-              <a:rPr sz="1200" b="0">
+              <a:rPr sz="1400" b="0">
                 <a:solidFill>
                   <a:srgbClr val="1A1D24"/>
                 </a:solidFill>
@@ -13352,7 +13334,7 @@
               </a:spcAft>
             </a:pPr>
             <a:r>
-              <a:rPr sz="1300" b="1">
+              <a:rPr sz="1500" b="1">
                 <a:solidFill>
                   <a:srgbClr val="C0392B"/>
                 </a:solidFill>
@@ -13396,7 +13378,7 @@
               </a:spcAft>
             </a:pPr>
             <a:r>
-              <a:rPr sz="1200" b="1">
+              <a:rPr sz="1400" b="1">
                 <a:solidFill>
                   <a:srgbClr val="1A1D24"/>
                 </a:solidFill>
@@ -13407,7 +13389,7 @@
               <a:t>— 现象 </a:t>
             </a:r>
             <a:r>
-              <a:rPr sz="1200">
+              <a:rPr sz="1400">
                 <a:solidFill>
                   <a:srgbClr val="5A6373"/>
                 </a:solidFill>
@@ -13428,7 +13410,7 @@
               </a:spcAft>
             </a:pPr>
             <a:r>
-              <a:rPr sz="1200" b="1">
+              <a:rPr sz="1400" b="1">
                 <a:solidFill>
                   <a:srgbClr val="1A1D24"/>
                 </a:solidFill>
@@ -13439,7 +13421,7 @@
               <a:t>— 根因 </a:t>
             </a:r>
             <a:r>
-              <a:rPr sz="1200">
+              <a:rPr sz="1400">
                 <a:solidFill>
                   <a:srgbClr val="5A6373"/>
                 </a:solidFill>
@@ -13460,7 +13442,7 @@
               </a:spcAft>
             </a:pPr>
             <a:r>
-              <a:rPr sz="1200" b="1">
+              <a:rPr sz="1400" b="1">
                 <a:solidFill>
                   <a:srgbClr val="1A1D24"/>
                 </a:solidFill>
@@ -13471,7 +13453,7 @@
               <a:t>— 修复 </a:t>
             </a:r>
             <a:r>
-              <a:rPr sz="1200">
+              <a:rPr sz="1400">
                 <a:solidFill>
                   <a:srgbClr val="5A6373"/>
                 </a:solidFill>
@@ -13492,7 +13474,7 @@
               </a:spcAft>
             </a:pPr>
             <a:r>
-              <a:rPr sz="1200" b="1">
+              <a:rPr sz="1400" b="1">
                 <a:solidFill>
                   <a:srgbClr val="1A1D24"/>
                 </a:solidFill>
@@ -13503,7 +13485,7 @@
               <a:t>— 结果 </a:t>
             </a:r>
             <a:r>
-              <a:rPr sz="1200">
+              <a:rPr sz="1400">
                 <a:solidFill>
                   <a:srgbClr val="5A6373"/>
                 </a:solidFill>
@@ -13544,7 +13526,7 @@
               </a:spcAft>
             </a:pPr>
             <a:r>
-              <a:rPr sz="950" b="0">
+              <a:rPr sz="1150" b="0">
                 <a:solidFill>
                   <a:srgbClr val="5A6373"/>
                 </a:solidFill>
@@ -13603,7 +13585,7 @@
               </a:spcAft>
             </a:pPr>
             <a:r>
-              <a:rPr sz="1200" b="1">
+              <a:rPr sz="1400" b="1">
                 <a:solidFill>
                   <a:srgbClr val="0066CC"/>
                 </a:solidFill>
@@ -13732,7 +13714,7 @@
               </a:spcAft>
             </a:pPr>
             <a:r>
-              <a:rPr sz="1350" b="0">
+              <a:rPr sz="1550" b="0">
                 <a:solidFill>
                   <a:srgbClr val="1A1D24"/>
                 </a:solidFill>
@@ -13817,7 +13799,7 @@
               </a:spcAft>
             </a:pPr>
             <a:r>
-              <a:rPr sz="1200" b="1">
+              <a:rPr sz="1400" b="1">
                 <a:solidFill>
                   <a:srgbClr val="1A1D24"/>
                 </a:solidFill>
@@ -13858,7 +13840,7 @@
               </a:spcAft>
             </a:pPr>
             <a:r>
-              <a:rPr sz="1200" b="1">
+              <a:rPr sz="1400" b="1">
                 <a:solidFill>
                   <a:srgbClr val="1A1D24"/>
                 </a:solidFill>
@@ -13899,7 +13881,7 @@
               </a:spcAft>
             </a:pPr>
             <a:r>
-              <a:rPr sz="1200" b="1">
+              <a:rPr sz="1400" b="1">
                 <a:solidFill>
                   <a:srgbClr val="1A1D24"/>
                 </a:solidFill>
@@ -13940,7 +13922,7 @@
               </a:spcAft>
             </a:pPr>
             <a:r>
-              <a:rPr sz="1150" b="0">
+              <a:rPr sz="1350" b="0">
                 <a:solidFill>
                   <a:srgbClr val="1A1D24"/>
                 </a:solidFill>
@@ -13981,7 +13963,7 @@
               </a:spcAft>
             </a:pPr>
             <a:r>
-              <a:rPr sz="1150" b="0">
+              <a:rPr sz="1350" b="0">
                 <a:solidFill>
                   <a:srgbClr val="1A1D24"/>
                 </a:solidFill>
@@ -14022,7 +14004,7 @@
               </a:spcAft>
             </a:pPr>
             <a:r>
-              <a:rPr sz="1150" b="0">
+              <a:rPr sz="1350" b="0">
                 <a:solidFill>
                   <a:srgbClr val="1A1D24"/>
                 </a:solidFill>
@@ -14107,7 +14089,7 @@
               </a:spcAft>
             </a:pPr>
             <a:r>
-              <a:rPr sz="1150" b="0">
+              <a:rPr sz="1350" b="0">
                 <a:solidFill>
                   <a:srgbClr val="1A1D24"/>
                 </a:solidFill>
@@ -14148,7 +14130,7 @@
               </a:spcAft>
             </a:pPr>
             <a:r>
-              <a:rPr sz="1150" b="0">
+              <a:rPr sz="1350" b="0">
                 <a:solidFill>
                   <a:srgbClr val="1A1D24"/>
                 </a:solidFill>
@@ -14189,7 +14171,7 @@
               </a:spcAft>
             </a:pPr>
             <a:r>
-              <a:rPr sz="1150" b="0">
+              <a:rPr sz="1350" b="0">
                 <a:solidFill>
                   <a:srgbClr val="1A1D24"/>
                 </a:solidFill>
@@ -14230,7 +14212,7 @@
               </a:spcAft>
             </a:pPr>
             <a:r>
-              <a:rPr sz="1150" b="0">
+              <a:rPr sz="1350" b="0">
                 <a:solidFill>
                   <a:srgbClr val="1A1D24"/>
                 </a:solidFill>
@@ -14271,7 +14253,7 @@
               </a:spcAft>
             </a:pPr>
             <a:r>
-              <a:rPr sz="1150" b="0">
+              <a:rPr sz="1350" b="0">
                 <a:solidFill>
                   <a:srgbClr val="1A1D24"/>
                 </a:solidFill>
@@ -14312,7 +14294,7 @@
               </a:spcAft>
             </a:pPr>
             <a:r>
-              <a:rPr sz="1150" b="0">
+              <a:rPr sz="1350" b="0">
                 <a:solidFill>
                   <a:srgbClr val="1A1D24"/>
                 </a:solidFill>
@@ -14397,7 +14379,7 @@
               </a:spcAft>
             </a:pPr>
             <a:r>
-              <a:rPr sz="1150" b="0">
+              <a:rPr sz="1350" b="0">
                 <a:solidFill>
                   <a:srgbClr val="1A1D24"/>
                 </a:solidFill>
@@ -14438,7 +14420,7 @@
               </a:spcAft>
             </a:pPr>
             <a:r>
-              <a:rPr sz="1150" b="0">
+              <a:rPr sz="1350" b="0">
                 <a:solidFill>
                   <a:srgbClr val="1A1D24"/>
                 </a:solidFill>
@@ -14479,7 +14461,7 @@
               </a:spcAft>
             </a:pPr>
             <a:r>
-              <a:rPr sz="1150" b="0">
+              <a:rPr sz="1350" b="0">
                 <a:solidFill>
                   <a:srgbClr val="1A1D24"/>
                 </a:solidFill>
@@ -14520,7 +14502,7 @@
               </a:spcAft>
             </a:pPr>
             <a:r>
-              <a:rPr sz="1150" b="0">
+              <a:rPr sz="1350" b="0">
                 <a:solidFill>
                   <a:srgbClr val="1A1D24"/>
                 </a:solidFill>
@@ -14561,7 +14543,7 @@
               </a:spcAft>
             </a:pPr>
             <a:r>
-              <a:rPr sz="1150" b="0">
+              <a:rPr sz="1350" b="0">
                 <a:solidFill>
                   <a:srgbClr val="1A1D24"/>
                 </a:solidFill>
@@ -14602,7 +14584,7 @@
               </a:spcAft>
             </a:pPr>
             <a:r>
-              <a:rPr sz="1150" b="0">
+              <a:rPr sz="1350" b="0">
                 <a:solidFill>
                   <a:srgbClr val="1A1D24"/>
                 </a:solidFill>
@@ -14687,7 +14669,7 @@
               </a:spcAft>
             </a:pPr>
             <a:r>
-              <a:rPr sz="1150" b="0">
+              <a:rPr sz="1350" b="0">
                 <a:solidFill>
                   <a:srgbClr val="1A1D24"/>
                 </a:solidFill>
@@ -14728,7 +14710,7 @@
               </a:spcAft>
             </a:pPr>
             <a:r>
-              <a:rPr sz="1150" b="0">
+              <a:rPr sz="1350" b="0">
                 <a:solidFill>
                   <a:srgbClr val="1A1D24"/>
                 </a:solidFill>
@@ -14769,7 +14751,7 @@
               </a:spcAft>
             </a:pPr>
             <a:r>
-              <a:rPr sz="1150" b="0">
+              <a:rPr sz="1350" b="0">
                 <a:solidFill>
                   <a:srgbClr val="1A1D24"/>
                 </a:solidFill>
@@ -14810,7 +14792,7 @@
               </a:spcAft>
             </a:pPr>
             <a:r>
-              <a:rPr sz="1150" b="0">
+              <a:rPr sz="1350" b="0">
                 <a:solidFill>
                   <a:srgbClr val="1A1D24"/>
                 </a:solidFill>
@@ -14851,7 +14833,7 @@
               </a:spcAft>
             </a:pPr>
             <a:r>
-              <a:rPr sz="1150" b="0">
+              <a:rPr sz="1350" b="0">
                 <a:solidFill>
                   <a:srgbClr val="1A1D24"/>
                 </a:solidFill>
@@ -14892,7 +14874,7 @@
               </a:spcAft>
             </a:pPr>
             <a:r>
-              <a:rPr sz="1150" b="0">
+              <a:rPr sz="1350" b="0">
                 <a:solidFill>
                   <a:srgbClr val="1A1D24"/>
                 </a:solidFill>
@@ -14933,7 +14915,7 @@
               </a:spcAft>
             </a:pPr>
             <a:r>
-              <a:rPr sz="1300" b="1">
+              <a:rPr sz="1500" b="1">
                 <a:solidFill>
                   <a:srgbClr val="C0392B"/>
                 </a:solidFill>
@@ -14977,7 +14959,7 @@
               </a:spcAft>
             </a:pPr>
             <a:r>
-              <a:rPr sz="1150" b="0">
+              <a:rPr sz="1550" b="0">
                 <a:solidFill>
                   <a:srgbClr val="5A6373"/>
                 </a:solidFill>
@@ -14998,7 +14980,7 @@
               </a:spcAft>
             </a:pPr>
             <a:r>
-              <a:rPr sz="1150" b="0">
+              <a:rPr sz="1550" b="0">
                 <a:solidFill>
                   <a:srgbClr val="5A6373"/>
                 </a:solidFill>
@@ -15019,7 +15001,7 @@
               </a:spcAft>
             </a:pPr>
             <a:r>
-              <a:rPr sz="1150" b="0">
+              <a:rPr sz="1550" b="0">
                 <a:solidFill>
                   <a:srgbClr val="5A6373"/>
                 </a:solidFill>
@@ -15040,7 +15022,7 @@
               </a:spcAft>
             </a:pPr>
             <a:r>
-              <a:rPr sz="1150" b="0">
+              <a:rPr sz="1550" b="0">
                 <a:solidFill>
                   <a:srgbClr val="5A6373"/>
                 </a:solidFill>
@@ -15061,7 +15043,7 @@
               </a:spcAft>
             </a:pPr>
             <a:r>
-              <a:rPr sz="1150" b="0">
+              <a:rPr sz="1550" b="0">
                 <a:solidFill>
                   <a:srgbClr val="5A6373"/>
                 </a:solidFill>
@@ -15082,7 +15064,7 @@
               </a:spcAft>
             </a:pPr>
             <a:r>
-              <a:rPr sz="1150" b="0">
+              <a:rPr sz="1550" b="0">
                 <a:solidFill>
                   <a:srgbClr val="5A6373"/>
                 </a:solidFill>
@@ -15103,7 +15085,7 @@
               </a:spcAft>
             </a:pPr>
             <a:r>
-              <a:rPr sz="1150" b="0">
+              <a:rPr sz="1550" b="0">
                 <a:solidFill>
                   <a:srgbClr val="5A6373"/>
                 </a:solidFill>
@@ -15124,7 +15106,7 @@
               </a:spcAft>
             </a:pPr>
             <a:r>
-              <a:rPr sz="1150" b="0">
+              <a:rPr sz="1550" b="0">
                 <a:solidFill>
                   <a:srgbClr val="5A6373"/>
                 </a:solidFill>
@@ -15165,7 +15147,7 @@
               </a:spcAft>
             </a:pPr>
             <a:r>
-              <a:rPr sz="950" b="0">
+              <a:rPr sz="1150" b="0">
                 <a:solidFill>
                   <a:srgbClr val="5A6373"/>
                 </a:solidFill>
@@ -15224,7 +15206,7 @@
               </a:spcAft>
             </a:pPr>
             <a:r>
-              <a:rPr sz="1200" b="1">
+              <a:rPr sz="1400" b="1">
                 <a:solidFill>
                   <a:srgbClr val="0066CC"/>
                 </a:solidFill>
@@ -15394,7 +15376,7 @@
               </a:spcAft>
             </a:pPr>
             <a:r>
-              <a:rPr sz="1400" b="1">
+              <a:rPr sz="1600" b="1">
                 <a:solidFill>
                   <a:srgbClr val="C0392B"/>
                 </a:solidFill>
@@ -15412,7 +15394,7 @@
               </a:spcAft>
             </a:pPr>
             <a:r>
-              <a:rPr sz="1250" b="0">
+              <a:rPr sz="1450" b="0">
                 <a:solidFill>
                   <a:srgbClr val="5A6373"/>
                 </a:solidFill>
@@ -15453,7 +15435,7 @@
               </a:spcAft>
             </a:pPr>
             <a:r>
-              <a:rPr sz="1300" b="1">
+              <a:rPr sz="1500" b="1">
                 <a:solidFill>
                   <a:srgbClr val="0066CC"/>
                 </a:solidFill>
@@ -15497,7 +15479,7 @@
               </a:spcAft>
             </a:pPr>
             <a:r>
-              <a:rPr sz="1200" b="1">
+              <a:rPr sz="1400" b="1">
                 <a:solidFill>
                   <a:srgbClr val="1A1D24"/>
                 </a:solidFill>
@@ -15508,7 +15490,7 @@
               <a:t>— ① 单层模型仅解释 124 s / 408.7 s </a:t>
             </a:r>
             <a:r>
-              <a:rPr sz="1200">
+              <a:rPr sz="1400">
                 <a:solidFill>
                   <a:srgbClr val="5A6373"/>
                 </a:solidFill>
@@ -15529,7 +15511,7 @@
               </a:spcAft>
             </a:pPr>
             <a:r>
-              <a:rPr sz="1200" b="1">
+              <a:rPr sz="1400" b="1">
                 <a:solidFill>
                   <a:srgbClr val="1A1D24"/>
                 </a:solidFill>
@@ -15540,7 +15522,7 @@
               <a:t>— ② 假设 GEMM 形状退化 </a:t>
             </a:r>
             <a:r>
-              <a:rPr sz="1200">
+              <a:rPr sz="1400">
                 <a:solidFill>
                   <a:srgbClr val="5A6373"/>
                 </a:solidFill>
@@ -15561,7 +15543,7 @@
               </a:spcAft>
             </a:pPr>
             <a:r>
-              <a:rPr sz="1200" b="1">
+              <a:rPr sz="1400" b="1">
                 <a:solidFill>
                   <a:srgbClr val="1A1D24"/>
                 </a:solidFill>
@@ -15572,7 +15554,7 @@
               <a:t>— ③ 假设输出 stride 问题 </a:t>
             </a:r>
             <a:r>
-              <a:rPr sz="1200">
+              <a:rPr sz="1400">
                 <a:solidFill>
                   <a:srgbClr val="5A6373"/>
                 </a:solidFill>
@@ -15593,7 +15575,7 @@
               </a:spcAft>
             </a:pPr>
             <a:r>
-              <a:rPr sz="1200" b="1">
+              <a:rPr sz="1400" b="1">
                 <a:solidFill>
                   <a:srgbClr val="1A1D24"/>
                 </a:solidFill>
@@ -15604,7 +15586,7 @@
               <a:t>— ④ 定位测量口径错误 </a:t>
             </a:r>
             <a:r>
-              <a:rPr sz="1200">
+              <a:rPr sz="1400">
                 <a:solidFill>
                   <a:srgbClr val="5A6373"/>
                 </a:solidFill>
@@ -15645,7 +15627,7 @@
               </a:spcAft>
             </a:pPr>
             <a:r>
-              <a:rPr sz="1300" b="1">
+              <a:rPr sz="1500" b="1">
                 <a:solidFill>
                   <a:srgbClr val="0E8A4F"/>
                 </a:solidFill>
@@ -15730,7 +15712,7 @@
               </a:spcAft>
             </a:pPr>
             <a:r>
-              <a:rPr sz="1200" b="1">
+              <a:rPr sz="1400" b="1">
                 <a:solidFill>
                   <a:srgbClr val="1A1D24"/>
                 </a:solidFill>
@@ -15771,7 +15753,7 @@
               </a:spcAft>
             </a:pPr>
             <a:r>
-              <a:rPr sz="1200" b="1">
+              <a:rPr sz="1400" b="1">
                 <a:solidFill>
                   <a:srgbClr val="1A1D24"/>
                 </a:solidFill>
@@ -15812,7 +15794,7 @@
               </a:spcAft>
             </a:pPr>
             <a:r>
-              <a:rPr sz="1200" b="1">
+              <a:rPr sz="1400" b="1">
                 <a:solidFill>
                   <a:srgbClr val="1A1D24"/>
                 </a:solidFill>
@@ -15853,7 +15835,7 @@
               </a:spcAft>
             </a:pPr>
             <a:r>
-              <a:rPr sz="1200" b="1">
+              <a:rPr sz="1400" b="1">
                 <a:solidFill>
                   <a:srgbClr val="1A1D24"/>
                 </a:solidFill>
@@ -15894,15 +15876,15 @@
               </a:spcAft>
             </a:pPr>
             <a:r>
-              <a:rPr sz="1150" b="0">
-                <a:solidFill>
-                  <a:srgbClr val="1A1D24"/>
-                </a:solidFill>
-                <a:latin typeface="SimHei"/>
-                <a:ea typeface="SimHei"/>
-                <a:cs typeface="SimHei"/>
-              </a:rPr>
-              <a:t>attention 阶梯（单层）</a:t>
+              <a:rPr sz="1350" b="0">
+                <a:solidFill>
+                  <a:srgbClr val="1A1D24"/>
+                </a:solidFill>
+                <a:latin typeface="SimHei"/>
+                <a:ea typeface="SimHei"/>
+                <a:cs typeface="SimHei"/>
+              </a:rPr>
+              <a:t>attention 单层阶梯</a:t>
             </a:r>
           </a:p>
         </p:txBody>
@@ -15935,7 +15917,7 @@
               </a:spcAft>
             </a:pPr>
             <a:r>
-              <a:rPr sz="1150" b="0">
+              <a:rPr sz="1350" b="0">
                 <a:solidFill>
                   <a:srgbClr val="1A1D24"/>
                 </a:solidFill>
@@ -15976,7 +15958,7 @@
               </a:spcAft>
             </a:pPr>
             <a:r>
-              <a:rPr sz="1150" b="0">
+              <a:rPr sz="1350" b="0">
                 <a:solidFill>
                   <a:srgbClr val="1A1D24"/>
                 </a:solidFill>
@@ -16017,7 +15999,7 @@
               </a:spcAft>
             </a:pPr>
             <a:r>
-              <a:rPr sz="1150" b="0">
+              <a:rPr sz="1350" b="0">
                 <a:solidFill>
                   <a:srgbClr val="1A1D24"/>
                 </a:solidFill>
@@ -16102,7 +16084,7 @@
               </a:spcAft>
             </a:pPr>
             <a:r>
-              <a:rPr sz="1150" b="0">
+              <a:rPr sz="1350" b="0">
                 <a:solidFill>
                   <a:srgbClr val="1A1D24"/>
                 </a:solidFill>
@@ -16143,7 +16125,7 @@
               </a:spcAft>
             </a:pPr>
             <a:r>
-              <a:rPr sz="1150" b="0">
+              <a:rPr sz="1350" b="0">
                 <a:solidFill>
                   <a:srgbClr val="1A1D24"/>
                 </a:solidFill>
@@ -16184,7 +16166,7 @@
               </a:spcAft>
             </a:pPr>
             <a:r>
-              <a:rPr sz="1150" b="0">
+              <a:rPr sz="1350" b="0">
                 <a:solidFill>
                   <a:srgbClr val="1A1D24"/>
                 </a:solidFill>
@@ -16225,7 +16207,7 @@
               </a:spcAft>
             </a:pPr>
             <a:r>
-              <a:rPr sz="1150" b="0">
+              <a:rPr sz="1350" b="0">
                 <a:solidFill>
                   <a:srgbClr val="1A1D24"/>
                 </a:solidFill>
@@ -16266,7 +16248,7 @@
               </a:spcAft>
             </a:pPr>
             <a:r>
-              <a:rPr sz="1150" b="0">
+              <a:rPr sz="1350" b="0">
                 <a:solidFill>
                   <a:srgbClr val="1A1D24"/>
                 </a:solidFill>
@@ -16307,7 +16289,7 @@
               </a:spcAft>
             </a:pPr>
             <a:r>
-              <a:rPr sz="1150" b="0">
+              <a:rPr sz="1350" b="0">
                 <a:solidFill>
                   <a:srgbClr val="1A1D24"/>
                 </a:solidFill>
@@ -16348,7 +16330,7 @@
               </a:spcAft>
             </a:pPr>
             <a:r>
-              <a:rPr sz="1150" b="0">
+              <a:rPr sz="1350" b="0">
                 <a:solidFill>
                   <a:srgbClr val="1A1D24"/>
                 </a:solidFill>
@@ -16389,7 +16371,7 @@
               </a:spcAft>
             </a:pPr>
             <a:r>
-              <a:rPr sz="1150" b="0">
+              <a:rPr sz="1350" b="0">
                 <a:solidFill>
                   <a:srgbClr val="1A1D24"/>
                 </a:solidFill>
@@ -16474,7 +16456,7 @@
               </a:spcAft>
             </a:pPr>
             <a:r>
-              <a:rPr sz="1150" b="0">
+              <a:rPr sz="1350" b="0">
                 <a:solidFill>
                   <a:srgbClr val="1A1D24"/>
                 </a:solidFill>
@@ -16515,7 +16497,7 @@
               </a:spcAft>
             </a:pPr>
             <a:r>
-              <a:rPr sz="1150" b="0">
+              <a:rPr sz="1350" b="0">
                 <a:solidFill>
                   <a:srgbClr val="1A1D24"/>
                 </a:solidFill>
@@ -16556,7 +16538,7 @@
               </a:spcAft>
             </a:pPr>
             <a:r>
-              <a:rPr sz="1150" b="0">
+              <a:rPr sz="1350" b="0">
                 <a:solidFill>
                   <a:srgbClr val="1A1D24"/>
                 </a:solidFill>
@@ -16597,7 +16579,7 @@
               </a:spcAft>
             </a:pPr>
             <a:r>
-              <a:rPr sz="1150" b="0">
+              <a:rPr sz="1350" b="0">
                 <a:solidFill>
                   <a:srgbClr val="1A1D24"/>
                 </a:solidFill>
@@ -16641,7 +16623,7 @@
               </a:spcAft>
             </a:pPr>
             <a:r>
-              <a:rPr sz="1150" b="0">
+              <a:rPr sz="1350" b="0">
                 <a:solidFill>
                   <a:srgbClr val="5A6373"/>
                 </a:solidFill>
@@ -16682,7 +16664,7 @@
               </a:spcAft>
             </a:pPr>
             <a:r>
-              <a:rPr sz="950" b="0">
+              <a:rPr sz="1150" b="0">
                 <a:solidFill>
                   <a:srgbClr val="5A6373"/>
                 </a:solidFill>
@@ -16741,7 +16723,7 @@
               </a:spcAft>
             </a:pPr>
             <a:r>
-              <a:rPr sz="1200" b="1">
+              <a:rPr sz="1400" b="1">
                 <a:solidFill>
                   <a:srgbClr val="0066CC"/>
                 </a:solidFill>
@@ -16867,7 +16849,7 @@
               </a:spcAft>
             </a:pPr>
             <a:r>
-              <a:rPr sz="1400" b="1">
+              <a:rPr sz="1600" b="1">
                 <a:solidFill>
                   <a:srgbClr val="0066CC"/>
                 </a:solidFill>
@@ -16952,7 +16934,7 @@
               </a:spcAft>
             </a:pPr>
             <a:r>
-              <a:rPr sz="1250" b="1">
+              <a:rPr sz="1450" b="1">
                 <a:solidFill>
                   <a:srgbClr val="C0392B"/>
                 </a:solidFill>
@@ -16970,7 +16952,7 @@
               </a:spcAft>
             </a:pPr>
             <a:r>
-              <a:rPr sz="1150" b="0">
+              <a:rPr sz="1350" b="0">
                 <a:solidFill>
                   <a:srgbClr val="5A6373"/>
                 </a:solidFill>
@@ -17014,7 +16996,7 @@
               </a:spcAft>
             </a:pPr>
             <a:r>
-              <a:rPr sz="1200" b="1">
+              <a:rPr sz="1400" b="1">
                 <a:solidFill>
                   <a:srgbClr val="1A1D24"/>
                 </a:solidFill>
@@ -17025,7 +17007,7 @@
               <a:t>— 证据 </a:t>
             </a:r>
             <a:r>
-              <a:rPr sz="1200">
+              <a:rPr sz="1400">
                 <a:solidFill>
                   <a:srgbClr val="5A6373"/>
                 </a:solidFill>
@@ -17046,7 +17028,7 @@
               </a:spcAft>
             </a:pPr>
             <a:r>
-              <a:rPr sz="1200" b="1">
+              <a:rPr sz="1400" b="1">
                 <a:solidFill>
                   <a:srgbClr val="1A1D24"/>
                 </a:solidFill>
@@ -17057,7 +17039,7 @@
               <a:t>— 修复 </a:t>
             </a:r>
             <a:r>
-              <a:rPr sz="1200">
+              <a:rPr sz="1400">
                 <a:solidFill>
                   <a:srgbClr val="5A6373"/>
                 </a:solidFill>
@@ -17078,7 +17060,7 @@
               </a:spcAft>
             </a:pPr>
             <a:r>
-              <a:rPr sz="1200" b="1">
+              <a:rPr sz="1400" b="1">
                 <a:solidFill>
                   <a:srgbClr val="1A1D24"/>
                 </a:solidFill>
@@ -17089,7 +17071,7 @@
               <a:t>— 效果 </a:t>
             </a:r>
             <a:r>
-              <a:rPr sz="1200">
+              <a:rPr sz="1400">
                 <a:solidFill>
                   <a:srgbClr val="5A6373"/>
                 </a:solidFill>
@@ -17130,7 +17112,7 @@
               </a:spcAft>
             </a:pPr>
             <a:r>
-              <a:rPr sz="1400" b="1">
+              <a:rPr sz="1600" b="1">
                 <a:solidFill>
                   <a:srgbClr val="0066CC"/>
                 </a:solidFill>
@@ -17215,7 +17197,7 @@
               </a:spcAft>
             </a:pPr>
             <a:r>
-              <a:rPr sz="1200" b="1">
+              <a:rPr sz="1400" b="1">
                 <a:solidFill>
                   <a:srgbClr val="1A1D24"/>
                 </a:solidFill>
@@ -17256,7 +17238,7 @@
               </a:spcAft>
             </a:pPr>
             <a:r>
-              <a:rPr sz="1200" b="1">
+              <a:rPr sz="1400" b="1">
                 <a:solidFill>
                   <a:srgbClr val="1A1D24"/>
                 </a:solidFill>
@@ -17297,7 +17279,7 @@
               </a:spcAft>
             </a:pPr>
             <a:r>
-              <a:rPr sz="1150" b="0">
+              <a:rPr sz="1350" b="0">
                 <a:solidFill>
                   <a:srgbClr val="1A1D24"/>
                 </a:solidFill>
@@ -17338,7 +17320,7 @@
               </a:spcAft>
             </a:pPr>
             <a:r>
-              <a:rPr sz="1150" b="0">
+              <a:rPr sz="1350" b="0">
                 <a:solidFill>
                   <a:srgbClr val="1A1D24"/>
                 </a:solidFill>
@@ -17423,7 +17405,7 @@
               </a:spcAft>
             </a:pPr>
             <a:r>
-              <a:rPr sz="1150" b="0">
+              <a:rPr sz="1350" b="0">
                 <a:solidFill>
                   <a:srgbClr val="1A1D24"/>
                 </a:solidFill>
@@ -17464,7 +17446,7 @@
               </a:spcAft>
             </a:pPr>
             <a:r>
-              <a:rPr sz="1150" b="0">
+              <a:rPr sz="1350" b="0">
                 <a:solidFill>
                   <a:srgbClr val="1A1D24"/>
                 </a:solidFill>
@@ -17505,7 +17487,7 @@
               </a:spcAft>
             </a:pPr>
             <a:r>
-              <a:rPr sz="1150" b="0">
+              <a:rPr sz="1350" b="0">
                 <a:solidFill>
                   <a:srgbClr val="1A1D24"/>
                 </a:solidFill>
@@ -17546,7 +17528,7 @@
               </a:spcAft>
             </a:pPr>
             <a:r>
-              <a:rPr sz="1150" b="0">
+              <a:rPr sz="1350" b="0">
                 <a:solidFill>
                   <a:srgbClr val="1A1D24"/>
                 </a:solidFill>
@@ -17631,7 +17613,7 @@
               </a:spcAft>
             </a:pPr>
             <a:r>
-              <a:rPr sz="1150" b="0">
+              <a:rPr sz="1350" b="0">
                 <a:solidFill>
                   <a:srgbClr val="1A1D24"/>
                 </a:solidFill>
@@ -17672,7 +17654,7 @@
               </a:spcAft>
             </a:pPr>
             <a:r>
-              <a:rPr sz="1150" b="0">
+              <a:rPr sz="1350" b="0">
                 <a:solidFill>
                   <a:srgbClr val="1A1D24"/>
                 </a:solidFill>
@@ -17713,7 +17695,7 @@
               </a:spcAft>
             </a:pPr>
             <a:r>
-              <a:rPr sz="1150" b="0">
+              <a:rPr sz="1350" b="0">
                 <a:solidFill>
                   <a:srgbClr val="1A1D24"/>
                 </a:solidFill>
@@ -17754,7 +17736,7 @@
               </a:spcAft>
             </a:pPr>
             <a:r>
-              <a:rPr sz="1150" b="0">
+              <a:rPr sz="1350" b="0">
                 <a:solidFill>
                   <a:srgbClr val="1A1D24"/>
                 </a:solidFill>
@@ -17798,7 +17780,7 @@
               </a:spcAft>
             </a:pPr>
             <a:r>
-              <a:rPr sz="1200" b="0">
+              <a:rPr sz="1400" b="0">
                 <a:solidFill>
                   <a:srgbClr val="5A6373"/>
                 </a:solidFill>
@@ -17819,7 +17801,7 @@
               </a:spcAft>
             </a:pPr>
             <a:r>
-              <a:rPr sz="1200" b="1">
+              <a:rPr sz="1400" b="1">
                 <a:solidFill>
                   <a:srgbClr val="0E8A4F"/>
                 </a:solidFill>
@@ -17860,7 +17842,7 @@
               </a:spcAft>
             </a:pPr>
             <a:r>
-              <a:rPr sz="950" b="0">
+              <a:rPr sz="1150" b="0">
                 <a:solidFill>
                   <a:srgbClr val="5A6373"/>
                 </a:solidFill>
@@ -17919,7 +17901,7 @@
               </a:spcAft>
             </a:pPr>
             <a:r>
-              <a:rPr sz="1200" b="1">
+              <a:rPr sz="1400" b="1">
                 <a:solidFill>
                   <a:srgbClr val="0066CC"/>
                 </a:solidFill>
@@ -18091,7 +18073,7 @@
               </a:spcAft>
             </a:pPr>
             <a:r>
-              <a:rPr sz="1400" b="1">
+              <a:rPr sz="1600" b="1">
                 <a:solidFill>
                   <a:srgbClr val="0066CC"/>
                 </a:solidFill>
@@ -18135,7 +18117,7 @@
               </a:spcAft>
             </a:pPr>
             <a:r>
-              <a:rPr sz="1200" b="0">
+              <a:rPr sz="1400" b="0">
                 <a:solidFill>
                   <a:srgbClr val="5A6373"/>
                 </a:solidFill>
@@ -18222,7 +18204,7 @@
               </a:spcAft>
             </a:pPr>
             <a:r>
-              <a:rPr sz="1400" b="1">
+              <a:rPr sz="1600" b="1">
                 <a:solidFill>
                   <a:srgbClr val="0066CC"/>
                 </a:solidFill>
@@ -18266,7 +18248,7 @@
               </a:spcAft>
             </a:pPr>
             <a:r>
-              <a:rPr sz="1200" b="0">
+              <a:rPr sz="1400" b="0">
                 <a:solidFill>
                   <a:srgbClr val="5A6373"/>
                 </a:solidFill>
@@ -18353,7 +18335,7 @@
               </a:spcAft>
             </a:pPr>
             <a:r>
-              <a:rPr sz="1400" b="1">
+              <a:rPr sz="1600" b="1">
                 <a:solidFill>
                   <a:srgbClr val="0066CC"/>
                 </a:solidFill>
@@ -18397,7 +18379,7 @@
               </a:spcAft>
             </a:pPr>
             <a:r>
-              <a:rPr sz="1200" b="0">
+              <a:rPr sz="1400" b="0">
                 <a:solidFill>
                   <a:srgbClr val="5A6373"/>
                 </a:solidFill>
@@ -18484,7 +18466,7 @@
               </a:spcAft>
             </a:pPr>
             <a:r>
-              <a:rPr sz="1400" b="1">
+              <a:rPr sz="1600" b="1">
                 <a:solidFill>
                   <a:srgbClr val="0066CC"/>
                 </a:solidFill>
@@ -18528,7 +18510,7 @@
               </a:spcAft>
             </a:pPr>
             <a:r>
-              <a:rPr sz="1200" b="0">
+              <a:rPr sz="1400" b="0">
                 <a:solidFill>
                   <a:srgbClr val="5A6373"/>
                 </a:solidFill>
@@ -18569,7 +18551,7 @@
               </a:spcAft>
             </a:pPr>
             <a:r>
-              <a:rPr sz="950" b="0">
+              <a:rPr sz="1150" b="0">
                 <a:solidFill>
                   <a:srgbClr val="5A6373"/>
                 </a:solidFill>
@@ -18628,7 +18610,7 @@
               </a:spcAft>
             </a:pPr>
             <a:r>
-              <a:rPr sz="1200" b="1">
+              <a:rPr sz="1400" b="1">
                 <a:solidFill>
                   <a:srgbClr val="0066CC"/>
                 </a:solidFill>
@@ -18798,7 +18780,7 @@
               </a:spcAft>
             </a:pPr>
             <a:r>
-              <a:rPr sz="1350" b="1">
+              <a:rPr sz="1550" b="1">
                 <a:solidFill>
                   <a:srgbClr val="0E8A4F"/>
                 </a:solidFill>
@@ -18842,7 +18824,7 @@
               </a:spcAft>
             </a:pPr>
             <a:r>
-              <a:rPr sz="1180" b="0">
+              <a:rPr sz="1380" b="0">
                 <a:solidFill>
                   <a:srgbClr val="5A6373"/>
                 </a:solidFill>
@@ -18927,7 +18909,7 @@
               </a:spcAft>
             </a:pPr>
             <a:r>
-              <a:rPr sz="1350" b="1">
+              <a:rPr sz="1550" b="1">
                 <a:solidFill>
                   <a:srgbClr val="0066CC"/>
                 </a:solidFill>
@@ -18971,7 +18953,7 @@
               </a:spcAft>
             </a:pPr>
             <a:r>
-              <a:rPr sz="1180" b="0">
+              <a:rPr sz="1380" b="0">
                 <a:solidFill>
                   <a:srgbClr val="5A6373"/>
                 </a:solidFill>
@@ -19056,7 +19038,7 @@
               </a:spcAft>
             </a:pPr>
             <a:r>
-              <a:rPr sz="1350" b="1">
+              <a:rPr sz="1550" b="1">
                 <a:solidFill>
                   <a:srgbClr val="C0392B"/>
                 </a:solidFill>
@@ -19100,7 +19082,7 @@
               </a:spcAft>
             </a:pPr>
             <a:r>
-              <a:rPr sz="1180" b="0">
+              <a:rPr sz="1380" b="0">
                 <a:solidFill>
                   <a:srgbClr val="5A6373"/>
                 </a:solidFill>
@@ -19185,7 +19167,7 @@
               </a:spcAft>
             </a:pPr>
             <a:r>
-              <a:rPr sz="1350" b="1">
+              <a:rPr sz="1550" b="1">
                 <a:solidFill>
                   <a:srgbClr val="0066CC"/>
                 </a:solidFill>
@@ -19229,7 +19211,7 @@
               </a:spcAft>
             </a:pPr>
             <a:r>
-              <a:rPr sz="1180" b="0">
+              <a:rPr sz="1380" b="0">
                 <a:solidFill>
                   <a:srgbClr val="5A6373"/>
                 </a:solidFill>
@@ -19270,7 +19252,7 @@
               </a:spcAft>
             </a:pPr>
             <a:r>
-              <a:rPr sz="950" b="0">
+              <a:rPr sz="1150" b="0">
                 <a:solidFill>
                   <a:srgbClr val="5A6373"/>
                 </a:solidFill>
